--- a/clase-derecho-informatico/DIAPOSITIVAS.pptx
+++ b/clase-derecho-informatico/DIAPOSITIVAS.pptx
@@ -130,14 +130,14 @@
   <p:extLst>
     <p:ext uri="{521415D9-36F7-43E2-AB2F-B90AF26B5E84}">
       <p14:sectionLst xmlns:p14="http://schemas.microsoft.com/office/powerpoint/2010/main">
-        <p14:section name="Apertura" id="{e798f34e-1cc3-b37e-9339-23129d4c00a9}">
+        <p14:section name="Apertura" id="{8ebf6190-fec8-587f-9c60-f0c53608afb0}">
           <p14:sldIdLst>
             <p14:sldId id="256"/>
             <p14:sldId id="257"/>
             <p14:sldId id="258"/>
           </p14:sldIdLst>
         </p14:section>
-        <p14:section name="Fundamentos" id="{e1f5e89c-232e-0b27-78fe-5addc0a56d85}">
+        <p14:section name="Fundamentos" id="{ee72d9fb-da6a-7002-7fb7-7f0b303a283b}">
           <p14:sldIdLst>
             <p14:sldId id="259"/>
             <p14:sldId id="260"/>
@@ -145,7 +145,7 @@
             <p14:sldId id="262"/>
           </p14:sldIdLst>
         </p14:section>
-        <p14:section name="Evolución, objeto y fuentes" id="{36aebf38-502f-956b-a4d4-67f66a9e2356}">
+        <p14:section name="Evolución, objeto y fuentes" id="{1326fe63-540e-0a7e-b8af-4acca1c21c7c}">
           <p14:sldIdLst>
             <p14:sldId id="263"/>
             <p14:sldId id="264"/>
@@ -154,14 +154,14 @@
             <p14:sldId id="267"/>
           </p14:sldIdLst>
         </p14:section>
-        <p14:section name="Principios y campos" id="{c00a6ae9-aef2-6da6-2d41-b59cd9709618}">
+        <p14:section name="Principios y campos" id="{c930bf3d-5770-d293-5e92-2e25a7575f10}">
           <p14:sldIdLst>
             <p14:sldId id="268"/>
             <p14:sldId id="269"/>
             <p14:sldId id="270"/>
           </p14:sldIdLst>
         </p14:section>
-        <p14:section name="Video y sentencia hito" id="{3711ed37-3713-717c-c0d0-c6be6334ae80}">
+        <p14:section name="Video y sentencia hito" id="{51db9366-6d14-0606-fdf2-934fc37f28b6}">
           <p14:sldIdLst>
             <p14:sldId id="271"/>
             <p14:sldId id="272"/>
@@ -170,7 +170,7 @@
             <p14:sldId id="275"/>
           </p14:sldIdLst>
         </p14:section>
-        <p14:section name="Aplicación y cierre" id="{e834ead2-ba0f-9168-7d21-bf124ca2ced3}">
+        <p14:section name="Aplicación y cierre" id="{65a2a38c-d5aa-3c36-cd99-12b0a336991b}">
           <p14:sldIdLst>
             <p14:sldId id="276"/>
             <p14:sldId id="277"/>
@@ -2684,7 +2684,7 @@
     <p:bg>
       <p:bgPr>
         <a:solidFill>
-          <a:srgbClr val="1B1F2E"/>
+          <a:srgbClr val="000000"/>
         </a:solidFill>
       </p:bgPr>
     </p:bg>
@@ -2750,7 +2750,7 @@
         <p:spPr>
           <a:xfrm>
             <a:off x="548640" y="6400800"/>
-            <a:ext cx="7315200" cy="274320"/>
+            <a:ext cx="9875520" cy="274320"/>
           </a:xfrm>
           <a:prstGeom prst="rect">
             <a:avLst/>
@@ -2771,7 +2771,7 @@
                   <a:schemeClr val="accent6"/>
                 </a:solidFill>
               </a:rPr>
-              <a:t>Tecnología y Derecho · Derecho Informático · UFPS</a:t>
+              <a:t>Mg. Carlos Arturo Ramos Mejía - Prof. Cátedra UFPS · Tecnología y Derecho · Derecho Informático</a:t>
             </a:r>
             <a:endParaRPr lang="en-US" sz="1000" dirty="0"/>
           </a:p>
@@ -2807,7 +2807,7 @@
             <a:lvl1pPr>
               <a:defRPr sz="1000">
                 <a:solidFill>
-                  <a:srgbClr val="9BA7B4"/>
+                  <a:srgbClr val="BFBFBF"/>
                 </a:solidFill>
               </a:defRPr>
             </a:lvl1pPr>
@@ -2902,7 +2902,7 @@
         <p:spPr>
           <a:xfrm>
             <a:off x="548640" y="6400800"/>
-            <a:ext cx="7315200" cy="274320"/>
+            <a:ext cx="9875520" cy="274320"/>
           </a:xfrm>
           <a:prstGeom prst="rect">
             <a:avLst/>
@@ -2923,7 +2923,7 @@
                   <a:schemeClr val="accent5"/>
                 </a:solidFill>
               </a:rPr>
-              <a:t>Tecnología y Derecho · Derecho Informático · UFPS</a:t>
+              <a:t>Mg. Carlos Arturo Ramos Mejía - Prof. Cátedra UFPS · Tecnología y Derecho · Derecho Informático</a:t>
             </a:r>
             <a:endParaRPr lang="en-US" sz="1000" dirty="0"/>
           </a:p>
@@ -2959,7 +2959,7 @@
             <a:lvl1pPr>
               <a:defRPr sz="1000">
                 <a:solidFill>
-                  <a:srgbClr val="4A6670"/>
+                  <a:srgbClr val="595959"/>
                 </a:solidFill>
               </a:defRPr>
             </a:lvl1pPr>
@@ -2988,7 +2988,7 @@
     <p:bg>
       <p:bgPr>
         <a:solidFill>
-          <a:srgbClr val="1B1F2E"/>
+          <a:srgbClr val="000000"/>
         </a:solidFill>
       </p:bgPr>
     </p:bg>
@@ -3081,6 +3081,42 @@
               <a:buNone/>
             </a:pPr>
             <a:endParaRPr lang="en-US" sz="2000" dirty="0"/>
+          </a:p>
+        </p:txBody>
+      </p:sp>
+      <p:sp>
+        <p:nvSpPr>
+          <p:cNvPr id="4" name="Text 0"/>
+          <p:cNvSpPr txBox="1"/>
+          <p:nvPr/>
+        </p:nvSpPr>
+        <p:spPr>
+          <a:xfrm>
+            <a:off x="548640" y="6400800"/>
+            <a:ext cx="9875520" cy="274320"/>
+          </a:xfrm>
+          <a:prstGeom prst="rect">
+            <a:avLst/>
+          </a:prstGeom>
+          <a:noFill/>
+          <a:ln/>
+        </p:spPr>
+        <p:txBody>
+          <a:bodyPr wrap="square" lIns="0" tIns="0" rIns="0" bIns="0" rtlCol="0" anchor="ctr"/>
+          <a:lstStyle/>
+          <a:p>
+            <a:pPr indent="0" marL="0">
+              <a:buNone/>
+            </a:pPr>
+            <a:r>
+              <a:rPr lang="en-US" sz="1000" dirty="0">
+                <a:solidFill>
+                  <a:schemeClr val="accent6"/>
+                </a:solidFill>
+              </a:rPr>
+              <a:t>Mg. Carlos Arturo Ramos Mejía - Prof. Cátedra UFPS · Tecnología y Derecho · Derecho Informático</a:t>
+            </a:r>
+            <a:endParaRPr lang="en-US" sz="1000" dirty="0"/>
           </a:p>
         </p:txBody>
       </p:sp>
@@ -3139,7 +3175,7 @@
             <a:lvl1pPr>
               <a:defRPr sz="1000">
                 <a:solidFill>
-                  <a:srgbClr val="9BA7B4"/>
+                  <a:srgbClr val="BFBFBF"/>
                 </a:solidFill>
               </a:defRPr>
             </a:lvl1pPr>
@@ -3532,7 +3568,7 @@
                   <a:schemeClr val="accent6"/>
                 </a:solidFill>
               </a:rPr>
-              <a:t>Docente: Carlos Arturo Ramos Mejía · 2026</a:t>
+              <a:t>Mg. Carlos Arturo Ramos Mejía - Prof. Cátedra UFPS · 2026</a:t>
             </a:r>
             <a:endParaRPr lang="en-US" sz="2000" dirty="0"/>
           </a:p>
@@ -3553,11 +3589,11 @@
             <a:avLst/>
           </a:prstGeom>
           <a:solidFill>
-            <a:srgbClr val="0E7C86"/>
+            <a:srgbClr val="404040"/>
           </a:solidFill>
           <a:ln w="12700">
             <a:solidFill>
-              <a:srgbClr val="0E7C86"/>
+              <a:srgbClr val="404040"/>
             </a:solidFill>
             <a:prstDash val="solid"/>
           </a:ln>
@@ -3703,11 +3739,11 @@
             </a:avLst>
           </a:prstGeom>
           <a:solidFill>
-            <a:srgbClr val="1F3A5F"/>
+            <a:srgbClr val="333333"/>
           </a:solidFill>
           <a:ln w="12700">
             <a:solidFill>
-              <a:srgbClr val="1F3A5F"/>
+              <a:srgbClr val="333333"/>
             </a:solidFill>
             <a:prstDash val="solid"/>
           </a:ln>
@@ -3728,11 +3764,11 @@
             <a:avLst/>
           </a:prstGeom>
           <a:solidFill>
-            <a:srgbClr val="D9931D"/>
+            <a:srgbClr val="A6A6A6"/>
           </a:solidFill>
           <a:ln w="12700">
             <a:solidFill>
-              <a:srgbClr val="D9931D"/>
+              <a:srgbClr val="A6A6A6"/>
             </a:solidFill>
             <a:prstDash val="solid"/>
           </a:ln>
@@ -3887,11 +3923,11 @@
             </a:avLst>
           </a:prstGeom>
           <a:solidFill>
-            <a:srgbClr val="1F3A5F"/>
+            <a:srgbClr val="333333"/>
           </a:solidFill>
           <a:ln w="12700">
             <a:solidFill>
-              <a:srgbClr val="1F3A5F"/>
+              <a:srgbClr val="333333"/>
             </a:solidFill>
             <a:prstDash val="solid"/>
           </a:ln>
@@ -3912,11 +3948,11 @@
             <a:avLst/>
           </a:prstGeom>
           <a:solidFill>
-            <a:srgbClr val="D9931D"/>
+            <a:srgbClr val="A6A6A6"/>
           </a:solidFill>
           <a:ln w="12700">
             <a:solidFill>
-              <a:srgbClr val="D9931D"/>
+              <a:srgbClr val="A6A6A6"/>
             </a:solidFill>
             <a:prstDash val="solid"/>
           </a:ln>
@@ -4071,11 +4107,11 @@
             </a:avLst>
           </a:prstGeom>
           <a:solidFill>
-            <a:srgbClr val="1F3A5F"/>
+            <a:srgbClr val="333333"/>
           </a:solidFill>
           <a:ln w="12700">
             <a:solidFill>
-              <a:srgbClr val="1F3A5F"/>
+              <a:srgbClr val="333333"/>
             </a:solidFill>
             <a:prstDash val="solid"/>
           </a:ln>
@@ -4096,11 +4132,11 @@
             <a:avLst/>
           </a:prstGeom>
           <a:solidFill>
-            <a:srgbClr val="D9931D"/>
+            <a:srgbClr val="A6A6A6"/>
           </a:solidFill>
           <a:ln w="12700">
             <a:solidFill>
-              <a:srgbClr val="D9931D"/>
+              <a:srgbClr val="A6A6A6"/>
             </a:solidFill>
             <a:prstDash val="solid"/>
           </a:ln>
@@ -4255,11 +4291,11 @@
             </a:avLst>
           </a:prstGeom>
           <a:solidFill>
-            <a:srgbClr val="0E7C86"/>
+            <a:srgbClr val="404040"/>
           </a:solidFill>
           <a:ln w="12700">
             <a:solidFill>
-              <a:srgbClr val="0E7C86"/>
+              <a:srgbClr val="404040"/>
             </a:solidFill>
             <a:prstDash val="solid"/>
           </a:ln>
@@ -4331,7 +4367,7 @@
             <a:lvl1pPr>
               <a:defRPr sz="1000">
                 <a:solidFill>
-                  <a:srgbClr val="9BA7B4"/>
+                  <a:srgbClr val="BFBFBF"/>
                 </a:solidFill>
               </a:defRPr>
             </a:lvl1pPr>
@@ -4424,7 +4460,7 @@
             <a:avLst/>
           </a:prstGeom>
           <a:solidFill>
-            <a:srgbClr val="1F3A5F"/>
+            <a:srgbClr val="333333"/>
           </a:solidFill>
           <a:ln w="12700">
             <a:solidFill>
@@ -4461,7 +4497,7 @@
             <a:r>
               <a:rPr lang="en-US" sz="1400" b="1" dirty="0">
                 <a:solidFill>
-                  <a:schemeClr val="bg1"/>
+                  <a:srgbClr val="FFFFFF"/>
                 </a:solidFill>
               </a:rPr>
               <a:t>Constitución  </a:t>
@@ -4472,7 +4508,7 @@
             <a:r>
               <a:rPr lang="en-US" sz="1150" dirty="0">
                 <a:solidFill>
-                  <a:schemeClr val="bg1"/>
+                  <a:srgbClr val="FFFFFF"/>
                 </a:solidFill>
               </a:rPr>
               <a:t>Arts. 15, 20, 61, 74</a:t>
@@ -4496,7 +4532,7 @@
             <a:avLst/>
           </a:prstGeom>
           <a:solidFill>
-            <a:srgbClr val="4A6670"/>
+            <a:srgbClr val="595959"/>
           </a:solidFill>
           <a:ln w="12700">
             <a:solidFill>
@@ -4533,7 +4569,7 @@
             <a:r>
               <a:rPr lang="en-US" sz="1400" b="1" dirty="0">
                 <a:solidFill>
-                  <a:schemeClr val="bg1"/>
+                  <a:srgbClr val="FFFFFF"/>
                 </a:solidFill>
               </a:rPr>
               <a:t>Tratados y soft law  </a:t>
@@ -4544,7 +4580,7 @@
             <a:r>
               <a:rPr lang="en-US" sz="1150" dirty="0">
                 <a:solidFill>
-                  <a:schemeClr val="bg1"/>
+                  <a:srgbClr val="FFFFFF"/>
                 </a:solidFill>
               </a:rPr>
               <a:t>Convenio de Budapest (Ley 1928 de 2018); Convenio 108; Recomendación UNESCO sobre IA (2021); principios OCDE (2019)</a:t>
@@ -4568,7 +4604,7 @@
             <a:avLst/>
           </a:prstGeom>
           <a:solidFill>
-            <a:srgbClr val="0E7C86"/>
+            <a:srgbClr val="404040"/>
           </a:solidFill>
           <a:ln w="12700">
             <a:solidFill>
@@ -4605,7 +4641,7 @@
             <a:r>
               <a:rPr lang="en-US" sz="1400" b="1" dirty="0">
                 <a:solidFill>
-                  <a:schemeClr val="bg1"/>
+                  <a:srgbClr val="FFFFFF"/>
                 </a:solidFill>
               </a:rPr>
               <a:t>Leyes estatutarias  </a:t>
@@ -4616,7 +4652,7 @@
             <a:r>
               <a:rPr lang="en-US" sz="1150" dirty="0">
                 <a:solidFill>
-                  <a:schemeClr val="bg1"/>
+                  <a:srgbClr val="FFFFFF"/>
                 </a:solidFill>
               </a:rPr>
               <a:t>Ley 1266 de 2008; Ley 1581 de 2012; Ley 1712 de 2014</a:t>
@@ -4640,7 +4676,7 @@
             <a:avLst/>
           </a:prstGeom>
           <a:solidFill>
-            <a:srgbClr val="5B7DB1"/>
+            <a:srgbClr val="737373"/>
           </a:solidFill>
           <a:ln w="12700">
             <a:solidFill>
@@ -4677,7 +4713,7 @@
             <a:r>
               <a:rPr lang="en-US" sz="1400" b="1" dirty="0">
                 <a:solidFill>
-                  <a:schemeClr val="bg1"/>
+                  <a:srgbClr val="FFFFFF"/>
                 </a:solidFill>
               </a:rPr>
               <a:t>Leyes ordinarias  </a:t>
@@ -4688,7 +4724,7 @@
             <a:r>
               <a:rPr lang="en-US" sz="1150" dirty="0">
                 <a:solidFill>
-                  <a:schemeClr val="bg1"/>
+                  <a:srgbClr val="FFFFFF"/>
                 </a:solidFill>
               </a:rPr>
               <a:t>Ley 527 de 1999; Ley 1273 de 2009; Ley 1341 de 2009; Ley 2213 de 2022</a:t>
@@ -4712,7 +4748,7 @@
             <a:avLst/>
           </a:prstGeom>
           <a:solidFill>
-            <a:srgbClr val="D9931D"/>
+            <a:srgbClr val="A6A6A6"/>
           </a:solidFill>
           <a:ln w="12700">
             <a:solidFill>
@@ -4749,7 +4785,7 @@
             <a:r>
               <a:rPr lang="en-US" sz="1400" b="1" dirty="0">
                 <a:solidFill>
-                  <a:schemeClr val="bg1"/>
+                  <a:srgbClr val="000000"/>
                 </a:solidFill>
               </a:rPr>
               <a:t>Reglamentos y regulación  </a:t>
@@ -4760,7 +4796,7 @@
             <a:r>
               <a:rPr lang="en-US" sz="1150" dirty="0">
                 <a:solidFill>
-                  <a:schemeClr val="bg1"/>
+                  <a:srgbClr val="000000"/>
                 </a:solidFill>
               </a:rPr>
               <a:t>Decretos 1377 de 2013 y 1074 de 2015; circulares de la SIC (002 de 2024); resoluciones CRC</a:t>
@@ -4784,7 +4820,7 @@
             <a:avLst/>
           </a:prstGeom>
           <a:solidFill>
-            <a:srgbClr val="B5413F"/>
+            <a:srgbClr val="4D4D4D"/>
           </a:solidFill>
           <a:ln w="12700">
             <a:solidFill>
@@ -4821,7 +4857,7 @@
             <a:r>
               <a:rPr lang="en-US" sz="1400" b="1" dirty="0">
                 <a:solidFill>
-                  <a:schemeClr val="bg1"/>
+                  <a:srgbClr val="FFFFFF"/>
                 </a:solidFill>
               </a:rPr>
               <a:t>Jurisprudencia  </a:t>
@@ -4832,7 +4868,7 @@
             <a:r>
               <a:rPr lang="en-US" sz="1150" dirty="0">
                 <a:solidFill>
-                  <a:schemeClr val="bg1"/>
+                  <a:srgbClr val="FFFFFF"/>
                 </a:solidFill>
               </a:rPr>
               <a:t>T-414 de 1992; SU-082 de 1995; C-748 de 2011; T-323 de 2024; STC17832-2025; AC739-2026</a:t>
@@ -4856,7 +4892,7 @@
             <a:avLst/>
           </a:prstGeom>
           <a:solidFill>
-            <a:srgbClr val="9BA7B4"/>
+            <a:srgbClr val="BFBFBF"/>
           </a:solidFill>
           <a:ln w="12700">
             <a:solidFill>
@@ -4893,7 +4929,7 @@
             <a:r>
               <a:rPr lang="en-US" sz="1400" b="1" dirty="0">
                 <a:solidFill>
-                  <a:schemeClr val="bg1"/>
+                  <a:srgbClr val="000000"/>
                 </a:solidFill>
               </a:rPr>
               <a:t>Autorregulación y código  </a:t>
@@ -4904,7 +4940,7 @@
             <a:r>
               <a:rPr lang="en-US" sz="1150" dirty="0">
                 <a:solidFill>
-                  <a:schemeClr val="bg1"/>
+                  <a:srgbClr val="000000"/>
                 </a:solidFill>
               </a:rPr>
               <a:t>Políticas de tratamiento, términos de servicio, estándares técnicos: la arquitectura también regula (Lessig)</a:t>
@@ -4943,7 +4979,7 @@
             <a:lvl1pPr>
               <a:defRPr sz="1000">
                 <a:solidFill>
-                  <a:srgbClr val="4A6670"/>
+                  <a:srgbClr val="595959"/>
                 </a:solidFill>
               </a:defRPr>
             </a:lvl1pPr>
@@ -5038,11 +5074,11 @@
             </a:avLst>
           </a:prstGeom>
           <a:solidFill>
-            <a:srgbClr val="EEF3F8"/>
+            <a:srgbClr val="EDEDED"/>
           </a:solidFill>
           <a:ln w="12700">
             <a:solidFill>
-              <a:srgbClr val="EEF3F8"/>
+              <a:srgbClr val="EDEDED"/>
             </a:solidFill>
             <a:prstDash val="solid"/>
           </a:ln>
@@ -5063,11 +5099,11 @@
             <a:avLst/>
           </a:prstGeom>
           <a:solidFill>
-            <a:srgbClr val="0E7C86"/>
+            <a:srgbClr val="404040"/>
           </a:solidFill>
           <a:ln w="12700">
             <a:solidFill>
-              <a:srgbClr val="0E7C86"/>
+              <a:srgbClr val="404040"/>
             </a:solidFill>
             <a:prstDash val="solid"/>
           </a:ln>
@@ -5254,11 +5290,11 @@
             <a:avLst/>
           </a:prstGeom>
           <a:solidFill>
-            <a:srgbClr val="D9931D"/>
+            <a:srgbClr val="A6A6A6"/>
           </a:solidFill>
           <a:ln w="12700">
             <a:solidFill>
-              <a:srgbClr val="D9931D"/>
+              <a:srgbClr val="A6A6A6"/>
             </a:solidFill>
             <a:prstDash val="solid"/>
           </a:ln>
@@ -5291,7 +5327,7 @@
             <a:r>
               <a:rPr lang="en-US" sz="1400" b="1" dirty="0">
                 <a:solidFill>
-                  <a:schemeClr val="bg1"/>
+                  <a:srgbClr val="000000"/>
                 </a:solidFill>
               </a:rPr>
               <a:t>1</a:t>
@@ -5351,11 +5387,11 @@
             <a:avLst/>
           </a:prstGeom>
           <a:solidFill>
-            <a:srgbClr val="D9931D"/>
+            <a:srgbClr val="A6A6A6"/>
           </a:solidFill>
           <a:ln w="12700">
             <a:solidFill>
-              <a:srgbClr val="D9931D"/>
+              <a:srgbClr val="A6A6A6"/>
             </a:solidFill>
             <a:prstDash val="solid"/>
           </a:ln>
@@ -5388,7 +5424,7 @@
             <a:r>
               <a:rPr lang="en-US" sz="1400" b="1" dirty="0">
                 <a:solidFill>
-                  <a:schemeClr val="bg1"/>
+                  <a:srgbClr val="000000"/>
                 </a:solidFill>
               </a:rPr>
               <a:t>2</a:t>
@@ -5448,11 +5484,11 @@
             <a:avLst/>
           </a:prstGeom>
           <a:solidFill>
-            <a:srgbClr val="D9931D"/>
+            <a:srgbClr val="A6A6A6"/>
           </a:solidFill>
           <a:ln w="12700">
             <a:solidFill>
-              <a:srgbClr val="D9931D"/>
+              <a:srgbClr val="A6A6A6"/>
             </a:solidFill>
             <a:prstDash val="solid"/>
           </a:ln>
@@ -5485,7 +5521,7 @@
             <a:r>
               <a:rPr lang="en-US" sz="1400" b="1" dirty="0">
                 <a:solidFill>
-                  <a:schemeClr val="bg1"/>
+                  <a:srgbClr val="000000"/>
                 </a:solidFill>
               </a:rPr>
               <a:t>3</a:t>
@@ -5547,11 +5583,11 @@
             </a:avLst>
           </a:prstGeom>
           <a:solidFill>
-            <a:srgbClr val="1F3A5F"/>
+            <a:srgbClr val="333333"/>
           </a:solidFill>
           <a:ln w="12700">
             <a:solidFill>
-              <a:srgbClr val="1F3A5F"/>
+              <a:srgbClr val="333333"/>
             </a:solidFill>
             <a:prstDash val="solid"/>
           </a:ln>
@@ -5634,7 +5670,7 @@
             <a:lvl1pPr>
               <a:defRPr sz="1000">
                 <a:solidFill>
-                  <a:srgbClr val="4A6670"/>
+                  <a:srgbClr val="595959"/>
                 </a:solidFill>
               </a:defRPr>
             </a:lvl1pPr>
@@ -5727,11 +5763,11 @@
             <a:avLst/>
           </a:prstGeom>
           <a:solidFill>
-            <a:srgbClr val="0E7C86"/>
+            <a:srgbClr val="404040"/>
           </a:solidFill>
           <a:ln w="12700">
             <a:solidFill>
-              <a:srgbClr val="0E7C86"/>
+              <a:srgbClr val="404040"/>
             </a:solidFill>
             <a:prstDash val="solid"/>
           </a:ln>
@@ -5826,11 +5862,11 @@
             <a:avLst/>
           </a:prstGeom>
           <a:solidFill>
-            <a:srgbClr val="0E7C86"/>
+            <a:srgbClr val="404040"/>
           </a:solidFill>
           <a:ln w="12700">
             <a:solidFill>
-              <a:srgbClr val="0E7C86"/>
+              <a:srgbClr val="404040"/>
             </a:solidFill>
             <a:prstDash val="solid"/>
           </a:ln>
@@ -5925,11 +5961,11 @@
             <a:avLst/>
           </a:prstGeom>
           <a:solidFill>
-            <a:srgbClr val="0E7C86"/>
+            <a:srgbClr val="404040"/>
           </a:solidFill>
           <a:ln w="12700">
             <a:solidFill>
-              <a:srgbClr val="0E7C86"/>
+              <a:srgbClr val="404040"/>
             </a:solidFill>
             <a:prstDash val="solid"/>
           </a:ln>
@@ -6024,11 +6060,11 @@
             <a:avLst/>
           </a:prstGeom>
           <a:solidFill>
-            <a:srgbClr val="0E7C86"/>
+            <a:srgbClr val="404040"/>
           </a:solidFill>
           <a:ln w="12700">
             <a:solidFill>
-              <a:srgbClr val="0E7C86"/>
+              <a:srgbClr val="404040"/>
             </a:solidFill>
             <a:prstDash val="solid"/>
           </a:ln>
@@ -6123,11 +6159,11 @@
             <a:avLst/>
           </a:prstGeom>
           <a:solidFill>
-            <a:srgbClr val="0E7C86"/>
+            <a:srgbClr val="404040"/>
           </a:solidFill>
           <a:ln w="12700">
             <a:solidFill>
-              <a:srgbClr val="0E7C86"/>
+              <a:srgbClr val="404040"/>
             </a:solidFill>
             <a:prstDash val="solid"/>
           </a:ln>
@@ -6222,11 +6258,11 @@
             <a:avLst/>
           </a:prstGeom>
           <a:solidFill>
-            <a:srgbClr val="0E7C86"/>
+            <a:srgbClr val="404040"/>
           </a:solidFill>
           <a:ln w="12700">
             <a:solidFill>
-              <a:srgbClr val="0E7C86"/>
+              <a:srgbClr val="404040"/>
             </a:solidFill>
             <a:prstDash val="solid"/>
           </a:ln>
@@ -6321,11 +6357,11 @@
             <a:avLst/>
           </a:prstGeom>
           <a:solidFill>
-            <a:srgbClr val="0E7C86"/>
+            <a:srgbClr val="404040"/>
           </a:solidFill>
           <a:ln w="12700">
             <a:solidFill>
-              <a:srgbClr val="0E7C86"/>
+              <a:srgbClr val="404040"/>
             </a:solidFill>
             <a:prstDash val="solid"/>
           </a:ln>
@@ -6435,7 +6471,7 @@
             <a:lvl1pPr>
               <a:defRPr sz="1000">
                 <a:solidFill>
-                  <a:srgbClr val="4A6670"/>
+                  <a:srgbClr val="595959"/>
                 </a:solidFill>
               </a:defRPr>
             </a:lvl1pPr>
@@ -6530,11 +6566,11 @@
             </a:avLst>
           </a:prstGeom>
           <a:solidFill>
-            <a:srgbClr val="1F3A5F"/>
+            <a:srgbClr val="333333"/>
           </a:solidFill>
           <a:ln w="12700">
             <a:solidFill>
-              <a:srgbClr val="1F3A5F"/>
+              <a:srgbClr val="333333"/>
             </a:solidFill>
             <a:prstDash val="solid"/>
           </a:ln>
@@ -6555,11 +6591,11 @@
             <a:avLst/>
           </a:prstGeom>
           <a:solidFill>
-            <a:srgbClr val="D9931D"/>
+            <a:srgbClr val="A6A6A6"/>
           </a:solidFill>
           <a:ln w="12700">
             <a:solidFill>
-              <a:srgbClr val="D9931D"/>
+              <a:srgbClr val="A6A6A6"/>
             </a:solidFill>
             <a:prstDash val="solid"/>
           </a:ln>
@@ -6678,11 +6714,11 @@
             </a:avLst>
           </a:prstGeom>
           <a:solidFill>
-            <a:srgbClr val="1F3A5F"/>
+            <a:srgbClr val="333333"/>
           </a:solidFill>
           <a:ln w="12700">
             <a:solidFill>
-              <a:srgbClr val="1F3A5F"/>
+              <a:srgbClr val="333333"/>
             </a:solidFill>
             <a:prstDash val="solid"/>
           </a:ln>
@@ -6703,11 +6739,11 @@
             <a:avLst/>
           </a:prstGeom>
           <a:solidFill>
-            <a:srgbClr val="D9931D"/>
+            <a:srgbClr val="A6A6A6"/>
           </a:solidFill>
           <a:ln w="12700">
             <a:solidFill>
-              <a:srgbClr val="D9931D"/>
+              <a:srgbClr val="A6A6A6"/>
             </a:solidFill>
             <a:prstDash val="solid"/>
           </a:ln>
@@ -6826,11 +6862,11 @@
             </a:avLst>
           </a:prstGeom>
           <a:solidFill>
-            <a:srgbClr val="1F3A5F"/>
+            <a:srgbClr val="333333"/>
           </a:solidFill>
           <a:ln w="12700">
             <a:solidFill>
-              <a:srgbClr val="1F3A5F"/>
+              <a:srgbClr val="333333"/>
             </a:solidFill>
             <a:prstDash val="solid"/>
           </a:ln>
@@ -6851,11 +6887,11 @@
             <a:avLst/>
           </a:prstGeom>
           <a:solidFill>
-            <a:srgbClr val="D9931D"/>
+            <a:srgbClr val="A6A6A6"/>
           </a:solidFill>
           <a:ln w="12700">
             <a:solidFill>
-              <a:srgbClr val="D9931D"/>
+              <a:srgbClr val="A6A6A6"/>
             </a:solidFill>
             <a:prstDash val="solid"/>
           </a:ln>
@@ -6974,11 +7010,11 @@
             </a:avLst>
           </a:prstGeom>
           <a:solidFill>
-            <a:srgbClr val="1F3A5F"/>
+            <a:srgbClr val="333333"/>
           </a:solidFill>
           <a:ln w="12700">
             <a:solidFill>
-              <a:srgbClr val="1F3A5F"/>
+              <a:srgbClr val="333333"/>
             </a:solidFill>
             <a:prstDash val="solid"/>
           </a:ln>
@@ -6999,11 +7035,11 @@
             <a:avLst/>
           </a:prstGeom>
           <a:solidFill>
-            <a:srgbClr val="D9931D"/>
+            <a:srgbClr val="A6A6A6"/>
           </a:solidFill>
           <a:ln w="12700">
             <a:solidFill>
-              <a:srgbClr val="D9931D"/>
+              <a:srgbClr val="A6A6A6"/>
             </a:solidFill>
             <a:prstDash val="solid"/>
           </a:ln>
@@ -7122,11 +7158,11 @@
             </a:avLst>
           </a:prstGeom>
           <a:solidFill>
-            <a:srgbClr val="1F3A5F"/>
+            <a:srgbClr val="333333"/>
           </a:solidFill>
           <a:ln w="12700">
             <a:solidFill>
-              <a:srgbClr val="1F3A5F"/>
+              <a:srgbClr val="333333"/>
             </a:solidFill>
             <a:prstDash val="solid"/>
           </a:ln>
@@ -7147,11 +7183,11 @@
             <a:avLst/>
           </a:prstGeom>
           <a:solidFill>
-            <a:srgbClr val="D9931D"/>
+            <a:srgbClr val="A6A6A6"/>
           </a:solidFill>
           <a:ln w="12700">
             <a:solidFill>
-              <a:srgbClr val="D9931D"/>
+              <a:srgbClr val="A6A6A6"/>
             </a:solidFill>
             <a:prstDash val="solid"/>
           </a:ln>
@@ -7270,11 +7306,11 @@
             </a:avLst>
           </a:prstGeom>
           <a:solidFill>
-            <a:srgbClr val="1F3A5F"/>
+            <a:srgbClr val="333333"/>
           </a:solidFill>
           <a:ln w="12700">
             <a:solidFill>
-              <a:srgbClr val="1F3A5F"/>
+              <a:srgbClr val="333333"/>
             </a:solidFill>
             <a:prstDash val="solid"/>
           </a:ln>
@@ -7295,11 +7331,11 @@
             <a:avLst/>
           </a:prstGeom>
           <a:solidFill>
-            <a:srgbClr val="D9931D"/>
+            <a:srgbClr val="A6A6A6"/>
           </a:solidFill>
           <a:ln w="12700">
             <a:solidFill>
-              <a:srgbClr val="D9931D"/>
+              <a:srgbClr val="A6A6A6"/>
             </a:solidFill>
             <a:prstDash val="solid"/>
           </a:ln>
@@ -7431,7 +7467,7 @@
             <a:lvl1pPr>
               <a:defRPr sz="1000">
                 <a:solidFill>
-                  <a:srgbClr val="9BA7B4"/>
+                  <a:srgbClr val="BFBFBF"/>
                 </a:solidFill>
               </a:defRPr>
             </a:lvl1pPr>
@@ -7567,7 +7603,7 @@
                   <a:tcPr marL="54864" marR="54864" marT="54864" marB="54864" anchor="ctr">
                     <a:lnL w="6350" cap="flat" cmpd="sng" algn="ctr">
                       <a:solidFill>
-                        <a:srgbClr val="9BA7B4"/>
+                        <a:srgbClr val="BFBFBF"/>
                       </a:solidFill>
                       <a:prstDash val="solid"/>
                       <a:round/>
@@ -7576,7 +7612,7 @@
                     </a:lnL>
                     <a:lnR w="6350" cap="flat" cmpd="sng" algn="ctr">
                       <a:solidFill>
-                        <a:srgbClr val="9BA7B4"/>
+                        <a:srgbClr val="BFBFBF"/>
                       </a:solidFill>
                       <a:prstDash val="solid"/>
                       <a:round/>
@@ -7585,7 +7621,7 @@
                     </a:lnR>
                     <a:lnT w="6350" cap="flat" cmpd="sng" algn="ctr">
                       <a:solidFill>
-                        <a:srgbClr val="9BA7B4"/>
+                        <a:srgbClr val="BFBFBF"/>
                       </a:solidFill>
                       <a:prstDash val="solid"/>
                       <a:round/>
@@ -7594,7 +7630,7 @@
                     </a:lnT>
                     <a:lnB w="6350" cap="flat" cmpd="sng" algn="ctr">
                       <a:solidFill>
-                        <a:srgbClr val="9BA7B4"/>
+                        <a:srgbClr val="BFBFBF"/>
                       </a:solidFill>
                       <a:prstDash val="solid"/>
                       <a:round/>
@@ -7602,7 +7638,7 @@
                       <a:tailEnd type="none" w="med" len="med"/>
                     </a:lnB>
                     <a:solidFill>
-                      <a:srgbClr val="1F3A5F"/>
+                      <a:srgbClr val="333333"/>
                     </a:solidFill>
                   </a:tcPr>
                 </a:tc>
@@ -7635,7 +7671,7 @@
                   <a:tcPr marL="54864" marR="54864" marT="54864" marB="54864" anchor="ctr">
                     <a:lnL w="6350" cap="flat" cmpd="sng" algn="ctr">
                       <a:solidFill>
-                        <a:srgbClr val="9BA7B4"/>
+                        <a:srgbClr val="BFBFBF"/>
                       </a:solidFill>
                       <a:prstDash val="solid"/>
                       <a:round/>
@@ -7644,7 +7680,7 @@
                     </a:lnL>
                     <a:lnR w="6350" cap="flat" cmpd="sng" algn="ctr">
                       <a:solidFill>
-                        <a:srgbClr val="9BA7B4"/>
+                        <a:srgbClr val="BFBFBF"/>
                       </a:solidFill>
                       <a:prstDash val="solid"/>
                       <a:round/>
@@ -7653,7 +7689,7 @@
                     </a:lnR>
                     <a:lnT w="6350" cap="flat" cmpd="sng" algn="ctr">
                       <a:solidFill>
-                        <a:srgbClr val="9BA7B4"/>
+                        <a:srgbClr val="BFBFBF"/>
                       </a:solidFill>
                       <a:prstDash val="solid"/>
                       <a:round/>
@@ -7662,7 +7698,7 @@
                     </a:lnT>
                     <a:lnB w="6350" cap="flat" cmpd="sng" algn="ctr">
                       <a:solidFill>
-                        <a:srgbClr val="9BA7B4"/>
+                        <a:srgbClr val="BFBFBF"/>
                       </a:solidFill>
                       <a:prstDash val="solid"/>
                       <a:round/>
@@ -7670,7 +7706,7 @@
                       <a:tailEnd type="none" w="med" len="med"/>
                     </a:lnB>
                     <a:solidFill>
-                      <a:srgbClr val="1F3A5F"/>
+                      <a:srgbClr val="333333"/>
                     </a:solidFill>
                   </a:tcPr>
                 </a:tc>
@@ -7703,7 +7739,7 @@
                   <a:tcPr marL="54864" marR="54864" marT="54864" marB="54864" anchor="ctr">
                     <a:lnL w="6350" cap="flat" cmpd="sng" algn="ctr">
                       <a:solidFill>
-                        <a:srgbClr val="9BA7B4"/>
+                        <a:srgbClr val="BFBFBF"/>
                       </a:solidFill>
                       <a:prstDash val="solid"/>
                       <a:round/>
@@ -7712,7 +7748,7 @@
                     </a:lnL>
                     <a:lnR w="6350" cap="flat" cmpd="sng" algn="ctr">
                       <a:solidFill>
-                        <a:srgbClr val="9BA7B4"/>
+                        <a:srgbClr val="BFBFBF"/>
                       </a:solidFill>
                       <a:prstDash val="solid"/>
                       <a:round/>
@@ -7721,7 +7757,7 @@
                     </a:lnR>
                     <a:lnT w="6350" cap="flat" cmpd="sng" algn="ctr">
                       <a:solidFill>
-                        <a:srgbClr val="9BA7B4"/>
+                        <a:srgbClr val="BFBFBF"/>
                       </a:solidFill>
                       <a:prstDash val="solid"/>
                       <a:round/>
@@ -7730,7 +7766,7 @@
                     </a:lnT>
                     <a:lnB w="6350" cap="flat" cmpd="sng" algn="ctr">
                       <a:solidFill>
-                        <a:srgbClr val="9BA7B4"/>
+                        <a:srgbClr val="BFBFBF"/>
                       </a:solidFill>
                       <a:prstDash val="solid"/>
                       <a:round/>
@@ -7738,7 +7774,7 @@
                       <a:tailEnd type="none" w="med" len="med"/>
                     </a:lnB>
                     <a:solidFill>
-                      <a:srgbClr val="1F3A5F"/>
+                      <a:srgbClr val="333333"/>
                     </a:solidFill>
                   </a:tcPr>
                 </a:tc>
@@ -7771,7 +7807,7 @@
                   <a:tcPr marL="54864" marR="54864" marT="54864" marB="54864" anchor="ctr">
                     <a:lnL w="6350" cap="flat" cmpd="sng" algn="ctr">
                       <a:solidFill>
-                        <a:srgbClr val="9BA7B4"/>
+                        <a:srgbClr val="BFBFBF"/>
                       </a:solidFill>
                       <a:prstDash val="solid"/>
                       <a:round/>
@@ -7780,7 +7816,7 @@
                     </a:lnL>
                     <a:lnR w="6350" cap="flat" cmpd="sng" algn="ctr">
                       <a:solidFill>
-                        <a:srgbClr val="9BA7B4"/>
+                        <a:srgbClr val="BFBFBF"/>
                       </a:solidFill>
                       <a:prstDash val="solid"/>
                       <a:round/>
@@ -7789,7 +7825,7 @@
                     </a:lnR>
                     <a:lnT w="6350" cap="flat" cmpd="sng" algn="ctr">
                       <a:solidFill>
-                        <a:srgbClr val="9BA7B4"/>
+                        <a:srgbClr val="BFBFBF"/>
                       </a:solidFill>
                       <a:prstDash val="solid"/>
                       <a:round/>
@@ -7798,7 +7834,7 @@
                     </a:lnT>
                     <a:lnB w="6350" cap="flat" cmpd="sng" algn="ctr">
                       <a:solidFill>
-                        <a:srgbClr val="9BA7B4"/>
+                        <a:srgbClr val="BFBFBF"/>
                       </a:solidFill>
                       <a:prstDash val="solid"/>
                       <a:round/>
@@ -7806,7 +7842,7 @@
                       <a:tailEnd type="none" w="med" len="med"/>
                     </a:lnB>
                     <a:solidFill>
-                      <a:srgbClr val="1F3A5F"/>
+                      <a:srgbClr val="333333"/>
                     </a:solidFill>
                   </a:tcPr>
                 </a:tc>
@@ -7823,7 +7859,7 @@
                       <a:r>
                         <a:rPr lang="en-US" sz="1150" b="1" dirty="0">
                           <a:solidFill>
-                            <a:srgbClr val="1B1F2E"/>
+                            <a:srgbClr val="000000"/>
                           </a:solidFill>
                           <a:latin typeface="Calibri" pitchFamily="34" charset="0"/>
                           <a:ea typeface="Calibri" pitchFamily="34" charset="-122"/>
@@ -7841,7 +7877,7 @@
                   <a:tcPr marL="54864" marR="54864" marT="54864" marB="54864" anchor="ctr">
                     <a:lnL w="6350" cap="flat" cmpd="sng" algn="ctr">
                       <a:solidFill>
-                        <a:srgbClr val="9BA7B4"/>
+                        <a:srgbClr val="BFBFBF"/>
                       </a:solidFill>
                       <a:prstDash val="solid"/>
                       <a:round/>
@@ -7850,7 +7886,7 @@
                     </a:lnL>
                     <a:lnR w="6350" cap="flat" cmpd="sng" algn="ctr">
                       <a:solidFill>
-                        <a:srgbClr val="9BA7B4"/>
+                        <a:srgbClr val="BFBFBF"/>
                       </a:solidFill>
                       <a:prstDash val="solid"/>
                       <a:round/>
@@ -7859,7 +7895,7 @@
                     </a:lnR>
                     <a:lnT w="6350" cap="flat" cmpd="sng" algn="ctr">
                       <a:solidFill>
-                        <a:srgbClr val="9BA7B4"/>
+                        <a:srgbClr val="BFBFBF"/>
                       </a:solidFill>
                       <a:prstDash val="solid"/>
                       <a:round/>
@@ -7868,7 +7904,7 @@
                     </a:lnT>
                     <a:lnB w="6350" cap="flat" cmpd="sng" algn="ctr">
                       <a:solidFill>
-                        <a:srgbClr val="9BA7B4"/>
+                        <a:srgbClr val="BFBFBF"/>
                       </a:solidFill>
                       <a:prstDash val="solid"/>
                       <a:round/>
@@ -7876,7 +7912,7 @@
                       <a:tailEnd type="none" w="med" len="med"/>
                     </a:lnB>
                     <a:solidFill>
-                      <a:srgbClr val="EEF3F8"/>
+                      <a:srgbClr val="EDEDED"/>
                     </a:solidFill>
                   </a:tcPr>
                 </a:tc>
@@ -7891,7 +7927,7 @@
                       <a:r>
                         <a:rPr lang="en-US" sz="1150" dirty="0">
                           <a:solidFill>
-                            <a:srgbClr val="1B1F2E"/>
+                            <a:srgbClr val="000000"/>
                           </a:solidFill>
                           <a:latin typeface="Calibri" pitchFamily="34" charset="0"/>
                           <a:ea typeface="Calibri" pitchFamily="34" charset="-122"/>
@@ -7909,7 +7945,7 @@
                   <a:tcPr marL="54864" marR="54864" marT="54864" marB="54864" anchor="ctr">
                     <a:lnL w="6350" cap="flat" cmpd="sng" algn="ctr">
                       <a:solidFill>
-                        <a:srgbClr val="9BA7B4"/>
+                        <a:srgbClr val="BFBFBF"/>
                       </a:solidFill>
                       <a:prstDash val="solid"/>
                       <a:round/>
@@ -7918,7 +7954,7 @@
                     </a:lnL>
                     <a:lnR w="6350" cap="flat" cmpd="sng" algn="ctr">
                       <a:solidFill>
-                        <a:srgbClr val="9BA7B4"/>
+                        <a:srgbClr val="BFBFBF"/>
                       </a:solidFill>
                       <a:prstDash val="solid"/>
                       <a:round/>
@@ -7927,7 +7963,7 @@
                     </a:lnR>
                     <a:lnT w="6350" cap="flat" cmpd="sng" algn="ctr">
                       <a:solidFill>
-                        <a:srgbClr val="9BA7B4"/>
+                        <a:srgbClr val="BFBFBF"/>
                       </a:solidFill>
                       <a:prstDash val="solid"/>
                       <a:round/>
@@ -7936,7 +7972,7 @@
                     </a:lnT>
                     <a:lnB w="6350" cap="flat" cmpd="sng" algn="ctr">
                       <a:solidFill>
-                        <a:srgbClr val="9BA7B4"/>
+                        <a:srgbClr val="BFBFBF"/>
                       </a:solidFill>
                       <a:prstDash val="solid"/>
                       <a:round/>
@@ -7944,7 +7980,7 @@
                       <a:tailEnd type="none" w="med" len="med"/>
                     </a:lnB>
                     <a:solidFill>
-                      <a:srgbClr val="EEF3F8"/>
+                      <a:srgbClr val="EDEDED"/>
                     </a:solidFill>
                   </a:tcPr>
                 </a:tc>
@@ -7959,7 +7995,7 @@
                       <a:r>
                         <a:rPr lang="en-US" sz="1150" dirty="0">
                           <a:solidFill>
-                            <a:srgbClr val="1B1F2E"/>
+                            <a:srgbClr val="000000"/>
                           </a:solidFill>
                           <a:latin typeface="Calibri" pitchFamily="34" charset="0"/>
                           <a:ea typeface="Calibri" pitchFamily="34" charset="-122"/>
@@ -7977,7 +8013,7 @@
                   <a:tcPr marL="54864" marR="54864" marT="54864" marB="54864" anchor="ctr">
                     <a:lnL w="6350" cap="flat" cmpd="sng" algn="ctr">
                       <a:solidFill>
-                        <a:srgbClr val="9BA7B4"/>
+                        <a:srgbClr val="BFBFBF"/>
                       </a:solidFill>
                       <a:prstDash val="solid"/>
                       <a:round/>
@@ -7986,7 +8022,7 @@
                     </a:lnL>
                     <a:lnR w="6350" cap="flat" cmpd="sng" algn="ctr">
                       <a:solidFill>
-                        <a:srgbClr val="9BA7B4"/>
+                        <a:srgbClr val="BFBFBF"/>
                       </a:solidFill>
                       <a:prstDash val="solid"/>
                       <a:round/>
@@ -7995,7 +8031,7 @@
                     </a:lnR>
                     <a:lnT w="6350" cap="flat" cmpd="sng" algn="ctr">
                       <a:solidFill>
-                        <a:srgbClr val="9BA7B4"/>
+                        <a:srgbClr val="BFBFBF"/>
                       </a:solidFill>
                       <a:prstDash val="solid"/>
                       <a:round/>
@@ -8004,7 +8040,7 @@
                     </a:lnT>
                     <a:lnB w="6350" cap="flat" cmpd="sng" algn="ctr">
                       <a:solidFill>
-                        <a:srgbClr val="9BA7B4"/>
+                        <a:srgbClr val="BFBFBF"/>
                       </a:solidFill>
                       <a:prstDash val="solid"/>
                       <a:round/>
@@ -8012,7 +8048,7 @@
                       <a:tailEnd type="none" w="med" len="med"/>
                     </a:lnB>
                     <a:solidFill>
-                      <a:srgbClr val="EEF3F8"/>
+                      <a:srgbClr val="EDEDED"/>
                     </a:solidFill>
                   </a:tcPr>
                 </a:tc>
@@ -8027,7 +8063,7 @@
                       <a:r>
                         <a:rPr lang="en-US" sz="1150" dirty="0">
                           <a:solidFill>
-                            <a:srgbClr val="1B1F2E"/>
+                            <a:srgbClr val="000000"/>
                           </a:solidFill>
                           <a:latin typeface="Calibri" pitchFamily="34" charset="0"/>
                           <a:ea typeface="Calibri" pitchFamily="34" charset="-122"/>
@@ -8045,7 +8081,7 @@
                   <a:tcPr marL="54864" marR="54864" marT="54864" marB="54864" anchor="ctr">
                     <a:lnL w="6350" cap="flat" cmpd="sng" algn="ctr">
                       <a:solidFill>
-                        <a:srgbClr val="9BA7B4"/>
+                        <a:srgbClr val="BFBFBF"/>
                       </a:solidFill>
                       <a:prstDash val="solid"/>
                       <a:round/>
@@ -8054,7 +8090,7 @@
                     </a:lnL>
                     <a:lnR w="6350" cap="flat" cmpd="sng" algn="ctr">
                       <a:solidFill>
-                        <a:srgbClr val="9BA7B4"/>
+                        <a:srgbClr val="BFBFBF"/>
                       </a:solidFill>
                       <a:prstDash val="solid"/>
                       <a:round/>
@@ -8063,7 +8099,7 @@
                     </a:lnR>
                     <a:lnT w="6350" cap="flat" cmpd="sng" algn="ctr">
                       <a:solidFill>
-                        <a:srgbClr val="9BA7B4"/>
+                        <a:srgbClr val="BFBFBF"/>
                       </a:solidFill>
                       <a:prstDash val="solid"/>
                       <a:round/>
@@ -8072,7 +8108,7 @@
                     </a:lnT>
                     <a:lnB w="6350" cap="flat" cmpd="sng" algn="ctr">
                       <a:solidFill>
-                        <a:srgbClr val="9BA7B4"/>
+                        <a:srgbClr val="BFBFBF"/>
                       </a:solidFill>
                       <a:prstDash val="solid"/>
                       <a:round/>
@@ -8080,7 +8116,7 @@
                       <a:tailEnd type="none" w="med" len="med"/>
                     </a:lnB>
                     <a:solidFill>
-                      <a:srgbClr val="EEF3F8"/>
+                      <a:srgbClr val="EDEDED"/>
                     </a:solidFill>
                   </a:tcPr>
                 </a:tc>
@@ -8097,7 +8133,7 @@
                       <a:r>
                         <a:rPr lang="en-US" sz="1150" b="1" dirty="0">
                           <a:solidFill>
-                            <a:srgbClr val="1B1F2E"/>
+                            <a:srgbClr val="000000"/>
                           </a:solidFill>
                           <a:latin typeface="Calibri" pitchFamily="34" charset="0"/>
                           <a:ea typeface="Calibri" pitchFamily="34" charset="-122"/>
@@ -8115,7 +8151,7 @@
                   <a:tcPr marL="54864" marR="54864" marT="54864" marB="54864" anchor="ctr">
                     <a:lnL w="6350" cap="flat" cmpd="sng" algn="ctr">
                       <a:solidFill>
-                        <a:srgbClr val="9BA7B4"/>
+                        <a:srgbClr val="BFBFBF"/>
                       </a:solidFill>
                       <a:prstDash val="solid"/>
                       <a:round/>
@@ -8124,7 +8160,7 @@
                     </a:lnL>
                     <a:lnR w="6350" cap="flat" cmpd="sng" algn="ctr">
                       <a:solidFill>
-                        <a:srgbClr val="9BA7B4"/>
+                        <a:srgbClr val="BFBFBF"/>
                       </a:solidFill>
                       <a:prstDash val="solid"/>
                       <a:round/>
@@ -8133,7 +8169,7 @@
                     </a:lnR>
                     <a:lnT w="6350" cap="flat" cmpd="sng" algn="ctr">
                       <a:solidFill>
-                        <a:srgbClr val="9BA7B4"/>
+                        <a:srgbClr val="BFBFBF"/>
                       </a:solidFill>
                       <a:prstDash val="solid"/>
                       <a:round/>
@@ -8142,7 +8178,7 @@
                     </a:lnT>
                     <a:lnB w="6350" cap="flat" cmpd="sng" algn="ctr">
                       <a:solidFill>
-                        <a:srgbClr val="9BA7B4"/>
+                        <a:srgbClr val="BFBFBF"/>
                       </a:solidFill>
                       <a:prstDash val="solid"/>
                       <a:round/>
@@ -8165,7 +8201,7 @@
                       <a:r>
                         <a:rPr lang="en-US" sz="1150" dirty="0">
                           <a:solidFill>
-                            <a:srgbClr val="1B1F2E"/>
+                            <a:srgbClr val="000000"/>
                           </a:solidFill>
                           <a:latin typeface="Calibri" pitchFamily="34" charset="0"/>
                           <a:ea typeface="Calibri" pitchFamily="34" charset="-122"/>
@@ -8183,7 +8219,7 @@
                   <a:tcPr marL="54864" marR="54864" marT="54864" marB="54864" anchor="ctr">
                     <a:lnL w="6350" cap="flat" cmpd="sng" algn="ctr">
                       <a:solidFill>
-                        <a:srgbClr val="9BA7B4"/>
+                        <a:srgbClr val="BFBFBF"/>
                       </a:solidFill>
                       <a:prstDash val="solid"/>
                       <a:round/>
@@ -8192,7 +8228,7 @@
                     </a:lnL>
                     <a:lnR w="6350" cap="flat" cmpd="sng" algn="ctr">
                       <a:solidFill>
-                        <a:srgbClr val="9BA7B4"/>
+                        <a:srgbClr val="BFBFBF"/>
                       </a:solidFill>
                       <a:prstDash val="solid"/>
                       <a:round/>
@@ -8201,7 +8237,7 @@
                     </a:lnR>
                     <a:lnT w="6350" cap="flat" cmpd="sng" algn="ctr">
                       <a:solidFill>
-                        <a:srgbClr val="9BA7B4"/>
+                        <a:srgbClr val="BFBFBF"/>
                       </a:solidFill>
                       <a:prstDash val="solid"/>
                       <a:round/>
@@ -8210,7 +8246,7 @@
                     </a:lnT>
                     <a:lnB w="6350" cap="flat" cmpd="sng" algn="ctr">
                       <a:solidFill>
-                        <a:srgbClr val="9BA7B4"/>
+                        <a:srgbClr val="BFBFBF"/>
                       </a:solidFill>
                       <a:prstDash val="solid"/>
                       <a:round/>
@@ -8233,7 +8269,7 @@
                       <a:r>
                         <a:rPr lang="en-US" sz="1150" dirty="0">
                           <a:solidFill>
-                            <a:srgbClr val="1B1F2E"/>
+                            <a:srgbClr val="000000"/>
                           </a:solidFill>
                           <a:latin typeface="Calibri" pitchFamily="34" charset="0"/>
                           <a:ea typeface="Calibri" pitchFamily="34" charset="-122"/>
@@ -8251,7 +8287,7 @@
                   <a:tcPr marL="54864" marR="54864" marT="54864" marB="54864" anchor="ctr">
                     <a:lnL w="6350" cap="flat" cmpd="sng" algn="ctr">
                       <a:solidFill>
-                        <a:srgbClr val="9BA7B4"/>
+                        <a:srgbClr val="BFBFBF"/>
                       </a:solidFill>
                       <a:prstDash val="solid"/>
                       <a:round/>
@@ -8260,7 +8296,7 @@
                     </a:lnL>
                     <a:lnR w="6350" cap="flat" cmpd="sng" algn="ctr">
                       <a:solidFill>
-                        <a:srgbClr val="9BA7B4"/>
+                        <a:srgbClr val="BFBFBF"/>
                       </a:solidFill>
                       <a:prstDash val="solid"/>
                       <a:round/>
@@ -8269,7 +8305,7 @@
                     </a:lnR>
                     <a:lnT w="6350" cap="flat" cmpd="sng" algn="ctr">
                       <a:solidFill>
-                        <a:srgbClr val="9BA7B4"/>
+                        <a:srgbClr val="BFBFBF"/>
                       </a:solidFill>
                       <a:prstDash val="solid"/>
                       <a:round/>
@@ -8278,7 +8314,7 @@
                     </a:lnT>
                     <a:lnB w="6350" cap="flat" cmpd="sng" algn="ctr">
                       <a:solidFill>
-                        <a:srgbClr val="9BA7B4"/>
+                        <a:srgbClr val="BFBFBF"/>
                       </a:solidFill>
                       <a:prstDash val="solid"/>
                       <a:round/>
@@ -8301,7 +8337,7 @@
                       <a:r>
                         <a:rPr lang="en-US" sz="1150" dirty="0">
                           <a:solidFill>
-                            <a:srgbClr val="1B1F2E"/>
+                            <a:srgbClr val="000000"/>
                           </a:solidFill>
                           <a:latin typeface="Calibri" pitchFamily="34" charset="0"/>
                           <a:ea typeface="Calibri" pitchFamily="34" charset="-122"/>
@@ -8319,7 +8355,7 @@
                   <a:tcPr marL="54864" marR="54864" marT="54864" marB="54864" anchor="ctr">
                     <a:lnL w="6350" cap="flat" cmpd="sng" algn="ctr">
                       <a:solidFill>
-                        <a:srgbClr val="9BA7B4"/>
+                        <a:srgbClr val="BFBFBF"/>
                       </a:solidFill>
                       <a:prstDash val="solid"/>
                       <a:round/>
@@ -8328,7 +8364,7 @@
                     </a:lnL>
                     <a:lnR w="6350" cap="flat" cmpd="sng" algn="ctr">
                       <a:solidFill>
-                        <a:srgbClr val="9BA7B4"/>
+                        <a:srgbClr val="BFBFBF"/>
                       </a:solidFill>
                       <a:prstDash val="solid"/>
                       <a:round/>
@@ -8337,7 +8373,7 @@
                     </a:lnR>
                     <a:lnT w="6350" cap="flat" cmpd="sng" algn="ctr">
                       <a:solidFill>
-                        <a:srgbClr val="9BA7B4"/>
+                        <a:srgbClr val="BFBFBF"/>
                       </a:solidFill>
                       <a:prstDash val="solid"/>
                       <a:round/>
@@ -8346,7 +8382,7 @@
                     </a:lnT>
                     <a:lnB w="6350" cap="flat" cmpd="sng" algn="ctr">
                       <a:solidFill>
-                        <a:srgbClr val="9BA7B4"/>
+                        <a:srgbClr val="BFBFBF"/>
                       </a:solidFill>
                       <a:prstDash val="solid"/>
                       <a:round/>
@@ -8371,7 +8407,7 @@
                       <a:r>
                         <a:rPr lang="en-US" sz="1150" b="1" dirty="0">
                           <a:solidFill>
-                            <a:srgbClr val="1B1F2E"/>
+                            <a:srgbClr val="000000"/>
                           </a:solidFill>
                           <a:latin typeface="Calibri" pitchFamily="34" charset="0"/>
                           <a:ea typeface="Calibri" pitchFamily="34" charset="-122"/>
@@ -8389,7 +8425,7 @@
                   <a:tcPr marL="54864" marR="54864" marT="54864" marB="54864" anchor="ctr">
                     <a:lnL w="6350" cap="flat" cmpd="sng" algn="ctr">
                       <a:solidFill>
-                        <a:srgbClr val="9BA7B4"/>
+                        <a:srgbClr val="BFBFBF"/>
                       </a:solidFill>
                       <a:prstDash val="solid"/>
                       <a:round/>
@@ -8398,7 +8434,7 @@
                     </a:lnL>
                     <a:lnR w="6350" cap="flat" cmpd="sng" algn="ctr">
                       <a:solidFill>
-                        <a:srgbClr val="9BA7B4"/>
+                        <a:srgbClr val="BFBFBF"/>
                       </a:solidFill>
                       <a:prstDash val="solid"/>
                       <a:round/>
@@ -8407,7 +8443,7 @@
                     </a:lnR>
                     <a:lnT w="6350" cap="flat" cmpd="sng" algn="ctr">
                       <a:solidFill>
-                        <a:srgbClr val="9BA7B4"/>
+                        <a:srgbClr val="BFBFBF"/>
                       </a:solidFill>
                       <a:prstDash val="solid"/>
                       <a:round/>
@@ -8416,7 +8452,7 @@
                     </a:lnT>
                     <a:lnB w="6350" cap="flat" cmpd="sng" algn="ctr">
                       <a:solidFill>
-                        <a:srgbClr val="9BA7B4"/>
+                        <a:srgbClr val="BFBFBF"/>
                       </a:solidFill>
                       <a:prstDash val="solid"/>
                       <a:round/>
@@ -8424,7 +8460,7 @@
                       <a:tailEnd type="none" w="med" len="med"/>
                     </a:lnB>
                     <a:solidFill>
-                      <a:srgbClr val="EEF3F8"/>
+                      <a:srgbClr val="EDEDED"/>
                     </a:solidFill>
                   </a:tcPr>
                 </a:tc>
@@ -8439,7 +8475,7 @@
                       <a:r>
                         <a:rPr lang="en-US" sz="1150" dirty="0">
                           <a:solidFill>
-                            <a:srgbClr val="1B1F2E"/>
+                            <a:srgbClr val="000000"/>
                           </a:solidFill>
                           <a:latin typeface="Calibri" pitchFamily="34" charset="0"/>
                           <a:ea typeface="Calibri" pitchFamily="34" charset="-122"/>
@@ -8457,7 +8493,7 @@
                   <a:tcPr marL="54864" marR="54864" marT="54864" marB="54864" anchor="ctr">
                     <a:lnL w="6350" cap="flat" cmpd="sng" algn="ctr">
                       <a:solidFill>
-                        <a:srgbClr val="9BA7B4"/>
+                        <a:srgbClr val="BFBFBF"/>
                       </a:solidFill>
                       <a:prstDash val="solid"/>
                       <a:round/>
@@ -8466,7 +8502,7 @@
                     </a:lnL>
                     <a:lnR w="6350" cap="flat" cmpd="sng" algn="ctr">
                       <a:solidFill>
-                        <a:srgbClr val="9BA7B4"/>
+                        <a:srgbClr val="BFBFBF"/>
                       </a:solidFill>
                       <a:prstDash val="solid"/>
                       <a:round/>
@@ -8475,7 +8511,7 @@
                     </a:lnR>
                     <a:lnT w="6350" cap="flat" cmpd="sng" algn="ctr">
                       <a:solidFill>
-                        <a:srgbClr val="9BA7B4"/>
+                        <a:srgbClr val="BFBFBF"/>
                       </a:solidFill>
                       <a:prstDash val="solid"/>
                       <a:round/>
@@ -8484,7 +8520,7 @@
                     </a:lnT>
                     <a:lnB w="6350" cap="flat" cmpd="sng" algn="ctr">
                       <a:solidFill>
-                        <a:srgbClr val="9BA7B4"/>
+                        <a:srgbClr val="BFBFBF"/>
                       </a:solidFill>
                       <a:prstDash val="solid"/>
                       <a:round/>
@@ -8492,7 +8528,7 @@
                       <a:tailEnd type="none" w="med" len="med"/>
                     </a:lnB>
                     <a:solidFill>
-                      <a:srgbClr val="EEF3F8"/>
+                      <a:srgbClr val="EDEDED"/>
                     </a:solidFill>
                   </a:tcPr>
                 </a:tc>
@@ -8507,7 +8543,7 @@
                       <a:r>
                         <a:rPr lang="en-US" sz="1150" dirty="0">
                           <a:solidFill>
-                            <a:srgbClr val="1B1F2E"/>
+                            <a:srgbClr val="000000"/>
                           </a:solidFill>
                           <a:latin typeface="Calibri" pitchFamily="34" charset="0"/>
                           <a:ea typeface="Calibri" pitchFamily="34" charset="-122"/>
@@ -8525,7 +8561,7 @@
                   <a:tcPr marL="54864" marR="54864" marT="54864" marB="54864" anchor="ctr">
                     <a:lnL w="6350" cap="flat" cmpd="sng" algn="ctr">
                       <a:solidFill>
-                        <a:srgbClr val="9BA7B4"/>
+                        <a:srgbClr val="BFBFBF"/>
                       </a:solidFill>
                       <a:prstDash val="solid"/>
                       <a:round/>
@@ -8534,7 +8570,7 @@
                     </a:lnL>
                     <a:lnR w="6350" cap="flat" cmpd="sng" algn="ctr">
                       <a:solidFill>
-                        <a:srgbClr val="9BA7B4"/>
+                        <a:srgbClr val="BFBFBF"/>
                       </a:solidFill>
                       <a:prstDash val="solid"/>
                       <a:round/>
@@ -8543,7 +8579,7 @@
                     </a:lnR>
                     <a:lnT w="6350" cap="flat" cmpd="sng" algn="ctr">
                       <a:solidFill>
-                        <a:srgbClr val="9BA7B4"/>
+                        <a:srgbClr val="BFBFBF"/>
                       </a:solidFill>
                       <a:prstDash val="solid"/>
                       <a:round/>
@@ -8552,7 +8588,7 @@
                     </a:lnT>
                     <a:lnB w="6350" cap="flat" cmpd="sng" algn="ctr">
                       <a:solidFill>
-                        <a:srgbClr val="9BA7B4"/>
+                        <a:srgbClr val="BFBFBF"/>
                       </a:solidFill>
                       <a:prstDash val="solid"/>
                       <a:round/>
@@ -8560,7 +8596,7 @@
                       <a:tailEnd type="none" w="med" len="med"/>
                     </a:lnB>
                     <a:solidFill>
-                      <a:srgbClr val="EEF3F8"/>
+                      <a:srgbClr val="EDEDED"/>
                     </a:solidFill>
                   </a:tcPr>
                 </a:tc>
@@ -8575,7 +8611,7 @@
                       <a:r>
                         <a:rPr lang="en-US" sz="1150" dirty="0">
                           <a:solidFill>
-                            <a:srgbClr val="1B1F2E"/>
+                            <a:srgbClr val="000000"/>
                           </a:solidFill>
                           <a:latin typeface="Calibri" pitchFamily="34" charset="0"/>
                           <a:ea typeface="Calibri" pitchFamily="34" charset="-122"/>
@@ -8593,7 +8629,7 @@
                   <a:tcPr marL="54864" marR="54864" marT="54864" marB="54864" anchor="ctr">
                     <a:lnL w="6350" cap="flat" cmpd="sng" algn="ctr">
                       <a:solidFill>
-                        <a:srgbClr val="9BA7B4"/>
+                        <a:srgbClr val="BFBFBF"/>
                       </a:solidFill>
                       <a:prstDash val="solid"/>
                       <a:round/>
@@ -8602,7 +8638,7 @@
                     </a:lnL>
                     <a:lnR w="6350" cap="flat" cmpd="sng" algn="ctr">
                       <a:solidFill>
-                        <a:srgbClr val="9BA7B4"/>
+                        <a:srgbClr val="BFBFBF"/>
                       </a:solidFill>
                       <a:prstDash val="solid"/>
                       <a:round/>
@@ -8611,7 +8647,7 @@
                     </a:lnR>
                     <a:lnT w="6350" cap="flat" cmpd="sng" algn="ctr">
                       <a:solidFill>
-                        <a:srgbClr val="9BA7B4"/>
+                        <a:srgbClr val="BFBFBF"/>
                       </a:solidFill>
                       <a:prstDash val="solid"/>
                       <a:round/>
@@ -8620,7 +8656,7 @@
                     </a:lnT>
                     <a:lnB w="6350" cap="flat" cmpd="sng" algn="ctr">
                       <a:solidFill>
-                        <a:srgbClr val="9BA7B4"/>
+                        <a:srgbClr val="BFBFBF"/>
                       </a:solidFill>
                       <a:prstDash val="solid"/>
                       <a:round/>
@@ -8628,7 +8664,7 @@
                       <a:tailEnd type="none" w="med" len="med"/>
                     </a:lnB>
                     <a:solidFill>
-                      <a:srgbClr val="EEF3F8"/>
+                      <a:srgbClr val="EDEDED"/>
                     </a:solidFill>
                   </a:tcPr>
                 </a:tc>
@@ -8645,7 +8681,7 @@
                       <a:r>
                         <a:rPr lang="en-US" sz="1150" b="1" dirty="0">
                           <a:solidFill>
-                            <a:srgbClr val="1B1F2E"/>
+                            <a:srgbClr val="000000"/>
                           </a:solidFill>
                           <a:latin typeface="Calibri" pitchFamily="34" charset="0"/>
                           <a:ea typeface="Calibri" pitchFamily="34" charset="-122"/>
@@ -8663,7 +8699,7 @@
                   <a:tcPr marL="54864" marR="54864" marT="54864" marB="54864" anchor="ctr">
                     <a:lnL w="6350" cap="flat" cmpd="sng" algn="ctr">
                       <a:solidFill>
-                        <a:srgbClr val="9BA7B4"/>
+                        <a:srgbClr val="BFBFBF"/>
                       </a:solidFill>
                       <a:prstDash val="solid"/>
                       <a:round/>
@@ -8672,7 +8708,7 @@
                     </a:lnL>
                     <a:lnR w="6350" cap="flat" cmpd="sng" algn="ctr">
                       <a:solidFill>
-                        <a:srgbClr val="9BA7B4"/>
+                        <a:srgbClr val="BFBFBF"/>
                       </a:solidFill>
                       <a:prstDash val="solid"/>
                       <a:round/>
@@ -8681,7 +8717,7 @@
                     </a:lnR>
                     <a:lnT w="6350" cap="flat" cmpd="sng" algn="ctr">
                       <a:solidFill>
-                        <a:srgbClr val="9BA7B4"/>
+                        <a:srgbClr val="BFBFBF"/>
                       </a:solidFill>
                       <a:prstDash val="solid"/>
                       <a:round/>
@@ -8690,7 +8726,7 @@
                     </a:lnT>
                     <a:lnB w="6350" cap="flat" cmpd="sng" algn="ctr">
                       <a:solidFill>
-                        <a:srgbClr val="9BA7B4"/>
+                        <a:srgbClr val="BFBFBF"/>
                       </a:solidFill>
                       <a:prstDash val="solid"/>
                       <a:round/>
@@ -8713,7 +8749,7 @@
                       <a:r>
                         <a:rPr lang="en-US" sz="1150" dirty="0">
                           <a:solidFill>
-                            <a:srgbClr val="1B1F2E"/>
+                            <a:srgbClr val="000000"/>
                           </a:solidFill>
                           <a:latin typeface="Calibri" pitchFamily="34" charset="0"/>
                           <a:ea typeface="Calibri" pitchFamily="34" charset="-122"/>
@@ -8731,7 +8767,7 @@
                   <a:tcPr marL="54864" marR="54864" marT="54864" marB="54864" anchor="ctr">
                     <a:lnL w="6350" cap="flat" cmpd="sng" algn="ctr">
                       <a:solidFill>
-                        <a:srgbClr val="9BA7B4"/>
+                        <a:srgbClr val="BFBFBF"/>
                       </a:solidFill>
                       <a:prstDash val="solid"/>
                       <a:round/>
@@ -8740,7 +8776,7 @@
                     </a:lnL>
                     <a:lnR w="6350" cap="flat" cmpd="sng" algn="ctr">
                       <a:solidFill>
-                        <a:srgbClr val="9BA7B4"/>
+                        <a:srgbClr val="BFBFBF"/>
                       </a:solidFill>
                       <a:prstDash val="solid"/>
                       <a:round/>
@@ -8749,7 +8785,7 @@
                     </a:lnR>
                     <a:lnT w="6350" cap="flat" cmpd="sng" algn="ctr">
                       <a:solidFill>
-                        <a:srgbClr val="9BA7B4"/>
+                        <a:srgbClr val="BFBFBF"/>
                       </a:solidFill>
                       <a:prstDash val="solid"/>
                       <a:round/>
@@ -8758,7 +8794,7 @@
                     </a:lnT>
                     <a:lnB w="6350" cap="flat" cmpd="sng" algn="ctr">
                       <a:solidFill>
-                        <a:srgbClr val="9BA7B4"/>
+                        <a:srgbClr val="BFBFBF"/>
                       </a:solidFill>
                       <a:prstDash val="solid"/>
                       <a:round/>
@@ -8781,7 +8817,7 @@
                       <a:r>
                         <a:rPr lang="en-US" sz="1150" dirty="0">
                           <a:solidFill>
-                            <a:srgbClr val="1B1F2E"/>
+                            <a:srgbClr val="000000"/>
                           </a:solidFill>
                           <a:latin typeface="Calibri" pitchFamily="34" charset="0"/>
                           <a:ea typeface="Calibri" pitchFamily="34" charset="-122"/>
@@ -8799,7 +8835,7 @@
                   <a:tcPr marL="54864" marR="54864" marT="54864" marB="54864" anchor="ctr">
                     <a:lnL w="6350" cap="flat" cmpd="sng" algn="ctr">
                       <a:solidFill>
-                        <a:srgbClr val="9BA7B4"/>
+                        <a:srgbClr val="BFBFBF"/>
                       </a:solidFill>
                       <a:prstDash val="solid"/>
                       <a:round/>
@@ -8808,7 +8844,7 @@
                     </a:lnL>
                     <a:lnR w="6350" cap="flat" cmpd="sng" algn="ctr">
                       <a:solidFill>
-                        <a:srgbClr val="9BA7B4"/>
+                        <a:srgbClr val="BFBFBF"/>
                       </a:solidFill>
                       <a:prstDash val="solid"/>
                       <a:round/>
@@ -8817,7 +8853,7 @@
                     </a:lnR>
                     <a:lnT w="6350" cap="flat" cmpd="sng" algn="ctr">
                       <a:solidFill>
-                        <a:srgbClr val="9BA7B4"/>
+                        <a:srgbClr val="BFBFBF"/>
                       </a:solidFill>
                       <a:prstDash val="solid"/>
                       <a:round/>
@@ -8826,7 +8862,7 @@
                     </a:lnT>
                     <a:lnB w="6350" cap="flat" cmpd="sng" algn="ctr">
                       <a:solidFill>
-                        <a:srgbClr val="9BA7B4"/>
+                        <a:srgbClr val="BFBFBF"/>
                       </a:solidFill>
                       <a:prstDash val="solid"/>
                       <a:round/>
@@ -8849,7 +8885,7 @@
                       <a:r>
                         <a:rPr lang="en-US" sz="1150" dirty="0">
                           <a:solidFill>
-                            <a:srgbClr val="1B1F2E"/>
+                            <a:srgbClr val="000000"/>
                           </a:solidFill>
                           <a:latin typeface="Calibri" pitchFamily="34" charset="0"/>
                           <a:ea typeface="Calibri" pitchFamily="34" charset="-122"/>
@@ -8867,7 +8903,7 @@
                   <a:tcPr marL="54864" marR="54864" marT="54864" marB="54864" anchor="ctr">
                     <a:lnL w="6350" cap="flat" cmpd="sng" algn="ctr">
                       <a:solidFill>
-                        <a:srgbClr val="9BA7B4"/>
+                        <a:srgbClr val="BFBFBF"/>
                       </a:solidFill>
                       <a:prstDash val="solid"/>
                       <a:round/>
@@ -8876,7 +8912,7 @@
                     </a:lnL>
                     <a:lnR w="6350" cap="flat" cmpd="sng" algn="ctr">
                       <a:solidFill>
-                        <a:srgbClr val="9BA7B4"/>
+                        <a:srgbClr val="BFBFBF"/>
                       </a:solidFill>
                       <a:prstDash val="solid"/>
                       <a:round/>
@@ -8885,7 +8921,7 @@
                     </a:lnR>
                     <a:lnT w="6350" cap="flat" cmpd="sng" algn="ctr">
                       <a:solidFill>
-                        <a:srgbClr val="9BA7B4"/>
+                        <a:srgbClr val="BFBFBF"/>
                       </a:solidFill>
                       <a:prstDash val="solid"/>
                       <a:round/>
@@ -8894,7 +8930,7 @@
                     </a:lnT>
                     <a:lnB w="6350" cap="flat" cmpd="sng" algn="ctr">
                       <a:solidFill>
-                        <a:srgbClr val="9BA7B4"/>
+                        <a:srgbClr val="BFBFBF"/>
                       </a:solidFill>
                       <a:prstDash val="solid"/>
                       <a:round/>
@@ -8919,7 +8955,7 @@
                       <a:r>
                         <a:rPr lang="en-US" sz="1150" b="1" dirty="0">
                           <a:solidFill>
-                            <a:srgbClr val="1B1F2E"/>
+                            <a:srgbClr val="000000"/>
                           </a:solidFill>
                           <a:latin typeface="Calibri" pitchFamily="34" charset="0"/>
                           <a:ea typeface="Calibri" pitchFamily="34" charset="-122"/>
@@ -8937,7 +8973,7 @@
                   <a:tcPr marL="54864" marR="54864" marT="54864" marB="54864" anchor="ctr">
                     <a:lnL w="6350" cap="flat" cmpd="sng" algn="ctr">
                       <a:solidFill>
-                        <a:srgbClr val="9BA7B4"/>
+                        <a:srgbClr val="BFBFBF"/>
                       </a:solidFill>
                       <a:prstDash val="solid"/>
                       <a:round/>
@@ -8946,7 +8982,7 @@
                     </a:lnL>
                     <a:lnR w="6350" cap="flat" cmpd="sng" algn="ctr">
                       <a:solidFill>
-                        <a:srgbClr val="9BA7B4"/>
+                        <a:srgbClr val="BFBFBF"/>
                       </a:solidFill>
                       <a:prstDash val="solid"/>
                       <a:round/>
@@ -8955,7 +8991,7 @@
                     </a:lnR>
                     <a:lnT w="6350" cap="flat" cmpd="sng" algn="ctr">
                       <a:solidFill>
-                        <a:srgbClr val="9BA7B4"/>
+                        <a:srgbClr val="BFBFBF"/>
                       </a:solidFill>
                       <a:prstDash val="solid"/>
                       <a:round/>
@@ -8964,7 +9000,7 @@
                     </a:lnT>
                     <a:lnB w="6350" cap="flat" cmpd="sng" algn="ctr">
                       <a:solidFill>
-                        <a:srgbClr val="9BA7B4"/>
+                        <a:srgbClr val="BFBFBF"/>
                       </a:solidFill>
                       <a:prstDash val="solid"/>
                       <a:round/>
@@ -8972,7 +9008,7 @@
                       <a:tailEnd type="none" w="med" len="med"/>
                     </a:lnB>
                     <a:solidFill>
-                      <a:srgbClr val="EEF3F8"/>
+                      <a:srgbClr val="EDEDED"/>
                     </a:solidFill>
                   </a:tcPr>
                 </a:tc>
@@ -8987,7 +9023,7 @@
                       <a:r>
                         <a:rPr lang="en-US" sz="1150" dirty="0">
                           <a:solidFill>
-                            <a:srgbClr val="1B1F2E"/>
+                            <a:srgbClr val="000000"/>
                           </a:solidFill>
                           <a:latin typeface="Calibri" pitchFamily="34" charset="0"/>
                           <a:ea typeface="Calibri" pitchFamily="34" charset="-122"/>
@@ -9005,7 +9041,7 @@
                   <a:tcPr marL="54864" marR="54864" marT="54864" marB="54864" anchor="ctr">
                     <a:lnL w="6350" cap="flat" cmpd="sng" algn="ctr">
                       <a:solidFill>
-                        <a:srgbClr val="9BA7B4"/>
+                        <a:srgbClr val="BFBFBF"/>
                       </a:solidFill>
                       <a:prstDash val="solid"/>
                       <a:round/>
@@ -9014,7 +9050,7 @@
                     </a:lnL>
                     <a:lnR w="6350" cap="flat" cmpd="sng" algn="ctr">
                       <a:solidFill>
-                        <a:srgbClr val="9BA7B4"/>
+                        <a:srgbClr val="BFBFBF"/>
                       </a:solidFill>
                       <a:prstDash val="solid"/>
                       <a:round/>
@@ -9023,7 +9059,7 @@
                     </a:lnR>
                     <a:lnT w="6350" cap="flat" cmpd="sng" algn="ctr">
                       <a:solidFill>
-                        <a:srgbClr val="9BA7B4"/>
+                        <a:srgbClr val="BFBFBF"/>
                       </a:solidFill>
                       <a:prstDash val="solid"/>
                       <a:round/>
@@ -9032,7 +9068,7 @@
                     </a:lnT>
                     <a:lnB w="6350" cap="flat" cmpd="sng" algn="ctr">
                       <a:solidFill>
-                        <a:srgbClr val="9BA7B4"/>
+                        <a:srgbClr val="BFBFBF"/>
                       </a:solidFill>
                       <a:prstDash val="solid"/>
                       <a:round/>
@@ -9040,7 +9076,7 @@
                       <a:tailEnd type="none" w="med" len="med"/>
                     </a:lnB>
                     <a:solidFill>
-                      <a:srgbClr val="EEF3F8"/>
+                      <a:srgbClr val="EDEDED"/>
                     </a:solidFill>
                   </a:tcPr>
                 </a:tc>
@@ -9055,7 +9091,7 @@
                       <a:r>
                         <a:rPr lang="en-US" sz="1150" dirty="0">
                           <a:solidFill>
-                            <a:srgbClr val="1B1F2E"/>
+                            <a:srgbClr val="000000"/>
                           </a:solidFill>
                           <a:latin typeface="Calibri" pitchFamily="34" charset="0"/>
                           <a:ea typeface="Calibri" pitchFamily="34" charset="-122"/>
@@ -9073,7 +9109,7 @@
                   <a:tcPr marL="54864" marR="54864" marT="54864" marB="54864" anchor="ctr">
                     <a:lnL w="6350" cap="flat" cmpd="sng" algn="ctr">
                       <a:solidFill>
-                        <a:srgbClr val="9BA7B4"/>
+                        <a:srgbClr val="BFBFBF"/>
                       </a:solidFill>
                       <a:prstDash val="solid"/>
                       <a:round/>
@@ -9082,7 +9118,7 @@
                     </a:lnL>
                     <a:lnR w="6350" cap="flat" cmpd="sng" algn="ctr">
                       <a:solidFill>
-                        <a:srgbClr val="9BA7B4"/>
+                        <a:srgbClr val="BFBFBF"/>
                       </a:solidFill>
                       <a:prstDash val="solid"/>
                       <a:round/>
@@ -9091,7 +9127,7 @@
                     </a:lnR>
                     <a:lnT w="6350" cap="flat" cmpd="sng" algn="ctr">
                       <a:solidFill>
-                        <a:srgbClr val="9BA7B4"/>
+                        <a:srgbClr val="BFBFBF"/>
                       </a:solidFill>
                       <a:prstDash val="solid"/>
                       <a:round/>
@@ -9100,7 +9136,7 @@
                     </a:lnT>
                     <a:lnB w="6350" cap="flat" cmpd="sng" algn="ctr">
                       <a:solidFill>
-                        <a:srgbClr val="9BA7B4"/>
+                        <a:srgbClr val="BFBFBF"/>
                       </a:solidFill>
                       <a:prstDash val="solid"/>
                       <a:round/>
@@ -9108,7 +9144,7 @@
                       <a:tailEnd type="none" w="med" len="med"/>
                     </a:lnB>
                     <a:solidFill>
-                      <a:srgbClr val="EEF3F8"/>
+                      <a:srgbClr val="EDEDED"/>
                     </a:solidFill>
                   </a:tcPr>
                 </a:tc>
@@ -9123,7 +9159,7 @@
                       <a:r>
                         <a:rPr lang="en-US" sz="1150" dirty="0">
                           <a:solidFill>
-                            <a:srgbClr val="1B1F2E"/>
+                            <a:srgbClr val="000000"/>
                           </a:solidFill>
                           <a:latin typeface="Calibri" pitchFamily="34" charset="0"/>
                           <a:ea typeface="Calibri" pitchFamily="34" charset="-122"/>
@@ -9141,7 +9177,7 @@
                   <a:tcPr marL="54864" marR="54864" marT="54864" marB="54864" anchor="ctr">
                     <a:lnL w="6350" cap="flat" cmpd="sng" algn="ctr">
                       <a:solidFill>
-                        <a:srgbClr val="9BA7B4"/>
+                        <a:srgbClr val="BFBFBF"/>
                       </a:solidFill>
                       <a:prstDash val="solid"/>
                       <a:round/>
@@ -9150,7 +9186,7 @@
                     </a:lnL>
                     <a:lnR w="6350" cap="flat" cmpd="sng" algn="ctr">
                       <a:solidFill>
-                        <a:srgbClr val="9BA7B4"/>
+                        <a:srgbClr val="BFBFBF"/>
                       </a:solidFill>
                       <a:prstDash val="solid"/>
                       <a:round/>
@@ -9159,7 +9195,7 @@
                     </a:lnR>
                     <a:lnT w="6350" cap="flat" cmpd="sng" algn="ctr">
                       <a:solidFill>
-                        <a:srgbClr val="9BA7B4"/>
+                        <a:srgbClr val="BFBFBF"/>
                       </a:solidFill>
                       <a:prstDash val="solid"/>
                       <a:round/>
@@ -9168,7 +9204,7 @@
                     </a:lnT>
                     <a:lnB w="6350" cap="flat" cmpd="sng" algn="ctr">
                       <a:solidFill>
-                        <a:srgbClr val="9BA7B4"/>
+                        <a:srgbClr val="BFBFBF"/>
                       </a:solidFill>
                       <a:prstDash val="solid"/>
                       <a:round/>
@@ -9176,7 +9212,7 @@
                       <a:tailEnd type="none" w="med" len="med"/>
                     </a:lnB>
                     <a:solidFill>
-                      <a:srgbClr val="EEF3F8"/>
+                      <a:srgbClr val="EDEDED"/>
                     </a:solidFill>
                   </a:tcPr>
                 </a:tc>
@@ -9193,7 +9229,7 @@
                       <a:r>
                         <a:rPr lang="en-US" sz="1150" b="1" dirty="0">
                           <a:solidFill>
-                            <a:srgbClr val="1B1F2E"/>
+                            <a:srgbClr val="000000"/>
                           </a:solidFill>
                           <a:latin typeface="Calibri" pitchFamily="34" charset="0"/>
                           <a:ea typeface="Calibri" pitchFamily="34" charset="-122"/>
@@ -9211,7 +9247,7 @@
                   <a:tcPr marL="54864" marR="54864" marT="54864" marB="54864" anchor="ctr">
                     <a:lnL w="6350" cap="flat" cmpd="sng" algn="ctr">
                       <a:solidFill>
-                        <a:srgbClr val="9BA7B4"/>
+                        <a:srgbClr val="BFBFBF"/>
                       </a:solidFill>
                       <a:prstDash val="solid"/>
                       <a:round/>
@@ -9220,7 +9256,7 @@
                     </a:lnL>
                     <a:lnR w="6350" cap="flat" cmpd="sng" algn="ctr">
                       <a:solidFill>
-                        <a:srgbClr val="9BA7B4"/>
+                        <a:srgbClr val="BFBFBF"/>
                       </a:solidFill>
                       <a:prstDash val="solid"/>
                       <a:round/>
@@ -9229,7 +9265,7 @@
                     </a:lnR>
                     <a:lnT w="6350" cap="flat" cmpd="sng" algn="ctr">
                       <a:solidFill>
-                        <a:srgbClr val="9BA7B4"/>
+                        <a:srgbClr val="BFBFBF"/>
                       </a:solidFill>
                       <a:prstDash val="solid"/>
                       <a:round/>
@@ -9238,7 +9274,7 @@
                     </a:lnT>
                     <a:lnB w="6350" cap="flat" cmpd="sng" algn="ctr">
                       <a:solidFill>
-                        <a:srgbClr val="9BA7B4"/>
+                        <a:srgbClr val="BFBFBF"/>
                       </a:solidFill>
                       <a:prstDash val="solid"/>
                       <a:round/>
@@ -9261,7 +9297,7 @@
                       <a:r>
                         <a:rPr lang="en-US" sz="1150" dirty="0">
                           <a:solidFill>
-                            <a:srgbClr val="1B1F2E"/>
+                            <a:srgbClr val="000000"/>
                           </a:solidFill>
                           <a:latin typeface="Calibri" pitchFamily="34" charset="0"/>
                           <a:ea typeface="Calibri" pitchFamily="34" charset="-122"/>
@@ -9279,7 +9315,7 @@
                   <a:tcPr marL="54864" marR="54864" marT="54864" marB="54864" anchor="ctr">
                     <a:lnL w="6350" cap="flat" cmpd="sng" algn="ctr">
                       <a:solidFill>
-                        <a:srgbClr val="9BA7B4"/>
+                        <a:srgbClr val="BFBFBF"/>
                       </a:solidFill>
                       <a:prstDash val="solid"/>
                       <a:round/>
@@ -9288,7 +9324,7 @@
                     </a:lnL>
                     <a:lnR w="6350" cap="flat" cmpd="sng" algn="ctr">
                       <a:solidFill>
-                        <a:srgbClr val="9BA7B4"/>
+                        <a:srgbClr val="BFBFBF"/>
                       </a:solidFill>
                       <a:prstDash val="solid"/>
                       <a:round/>
@@ -9297,7 +9333,7 @@
                     </a:lnR>
                     <a:lnT w="6350" cap="flat" cmpd="sng" algn="ctr">
                       <a:solidFill>
-                        <a:srgbClr val="9BA7B4"/>
+                        <a:srgbClr val="BFBFBF"/>
                       </a:solidFill>
                       <a:prstDash val="solid"/>
                       <a:round/>
@@ -9306,7 +9342,7 @@
                     </a:lnT>
                     <a:lnB w="6350" cap="flat" cmpd="sng" algn="ctr">
                       <a:solidFill>
-                        <a:srgbClr val="9BA7B4"/>
+                        <a:srgbClr val="BFBFBF"/>
                       </a:solidFill>
                       <a:prstDash val="solid"/>
                       <a:round/>
@@ -9329,7 +9365,7 @@
                       <a:r>
                         <a:rPr lang="en-US" sz="1150" dirty="0">
                           <a:solidFill>
-                            <a:srgbClr val="1B1F2E"/>
+                            <a:srgbClr val="000000"/>
                           </a:solidFill>
                           <a:latin typeface="Calibri" pitchFamily="34" charset="0"/>
                           <a:ea typeface="Calibri" pitchFamily="34" charset="-122"/>
@@ -9347,7 +9383,7 @@
                   <a:tcPr marL="54864" marR="54864" marT="54864" marB="54864" anchor="ctr">
                     <a:lnL w="6350" cap="flat" cmpd="sng" algn="ctr">
                       <a:solidFill>
-                        <a:srgbClr val="9BA7B4"/>
+                        <a:srgbClr val="BFBFBF"/>
                       </a:solidFill>
                       <a:prstDash val="solid"/>
                       <a:round/>
@@ -9356,7 +9392,7 @@
                     </a:lnL>
                     <a:lnR w="6350" cap="flat" cmpd="sng" algn="ctr">
                       <a:solidFill>
-                        <a:srgbClr val="9BA7B4"/>
+                        <a:srgbClr val="BFBFBF"/>
                       </a:solidFill>
                       <a:prstDash val="solid"/>
                       <a:round/>
@@ -9365,7 +9401,7 @@
                     </a:lnR>
                     <a:lnT w="6350" cap="flat" cmpd="sng" algn="ctr">
                       <a:solidFill>
-                        <a:srgbClr val="9BA7B4"/>
+                        <a:srgbClr val="BFBFBF"/>
                       </a:solidFill>
                       <a:prstDash val="solid"/>
                       <a:round/>
@@ -9374,7 +9410,7 @@
                     </a:lnT>
                     <a:lnB w="6350" cap="flat" cmpd="sng" algn="ctr">
                       <a:solidFill>
-                        <a:srgbClr val="9BA7B4"/>
+                        <a:srgbClr val="BFBFBF"/>
                       </a:solidFill>
                       <a:prstDash val="solid"/>
                       <a:round/>
@@ -9397,7 +9433,7 @@
                       <a:r>
                         <a:rPr lang="en-US" sz="1150" dirty="0">
                           <a:solidFill>
-                            <a:srgbClr val="1B1F2E"/>
+                            <a:srgbClr val="000000"/>
                           </a:solidFill>
                           <a:latin typeface="Calibri" pitchFamily="34" charset="0"/>
                           <a:ea typeface="Calibri" pitchFamily="34" charset="-122"/>
@@ -9415,7 +9451,7 @@
                   <a:tcPr marL="54864" marR="54864" marT="54864" marB="54864" anchor="ctr">
                     <a:lnL w="6350" cap="flat" cmpd="sng" algn="ctr">
                       <a:solidFill>
-                        <a:srgbClr val="9BA7B4"/>
+                        <a:srgbClr val="BFBFBF"/>
                       </a:solidFill>
                       <a:prstDash val="solid"/>
                       <a:round/>
@@ -9424,7 +9460,7 @@
                     </a:lnL>
                     <a:lnR w="6350" cap="flat" cmpd="sng" algn="ctr">
                       <a:solidFill>
-                        <a:srgbClr val="9BA7B4"/>
+                        <a:srgbClr val="BFBFBF"/>
                       </a:solidFill>
                       <a:prstDash val="solid"/>
                       <a:round/>
@@ -9433,7 +9469,7 @@
                     </a:lnR>
                     <a:lnT w="6350" cap="flat" cmpd="sng" algn="ctr">
                       <a:solidFill>
-                        <a:srgbClr val="9BA7B4"/>
+                        <a:srgbClr val="BFBFBF"/>
                       </a:solidFill>
                       <a:prstDash val="solid"/>
                       <a:round/>
@@ -9442,7 +9478,7 @@
                     </a:lnT>
                     <a:lnB w="6350" cap="flat" cmpd="sng" algn="ctr">
                       <a:solidFill>
-                        <a:srgbClr val="9BA7B4"/>
+                        <a:srgbClr val="BFBFBF"/>
                       </a:solidFill>
                       <a:prstDash val="solid"/>
                       <a:round/>
@@ -9467,7 +9503,7 @@
                       <a:r>
                         <a:rPr lang="en-US" sz="1150" b="1" dirty="0">
                           <a:solidFill>
-                            <a:srgbClr val="1B1F2E"/>
+                            <a:srgbClr val="000000"/>
                           </a:solidFill>
                           <a:latin typeface="Calibri" pitchFamily="34" charset="0"/>
                           <a:ea typeface="Calibri" pitchFamily="34" charset="-122"/>
@@ -9485,7 +9521,7 @@
                   <a:tcPr marL="54864" marR="54864" marT="54864" marB="54864" anchor="ctr">
                     <a:lnL w="6350" cap="flat" cmpd="sng" algn="ctr">
                       <a:solidFill>
-                        <a:srgbClr val="9BA7B4"/>
+                        <a:srgbClr val="BFBFBF"/>
                       </a:solidFill>
                       <a:prstDash val="solid"/>
                       <a:round/>
@@ -9494,7 +9530,7 @@
                     </a:lnL>
                     <a:lnR w="6350" cap="flat" cmpd="sng" algn="ctr">
                       <a:solidFill>
-                        <a:srgbClr val="9BA7B4"/>
+                        <a:srgbClr val="BFBFBF"/>
                       </a:solidFill>
                       <a:prstDash val="solid"/>
                       <a:round/>
@@ -9503,7 +9539,7 @@
                     </a:lnR>
                     <a:lnT w="6350" cap="flat" cmpd="sng" algn="ctr">
                       <a:solidFill>
-                        <a:srgbClr val="9BA7B4"/>
+                        <a:srgbClr val="BFBFBF"/>
                       </a:solidFill>
                       <a:prstDash val="solid"/>
                       <a:round/>
@@ -9512,7 +9548,7 @@
                     </a:lnT>
                     <a:lnB w="6350" cap="flat" cmpd="sng" algn="ctr">
                       <a:solidFill>
-                        <a:srgbClr val="9BA7B4"/>
+                        <a:srgbClr val="BFBFBF"/>
                       </a:solidFill>
                       <a:prstDash val="solid"/>
                       <a:round/>
@@ -9520,7 +9556,7 @@
                       <a:tailEnd type="none" w="med" len="med"/>
                     </a:lnB>
                     <a:solidFill>
-                      <a:srgbClr val="EEF3F8"/>
+                      <a:srgbClr val="EDEDED"/>
                     </a:solidFill>
                   </a:tcPr>
                 </a:tc>
@@ -9535,7 +9571,7 @@
                       <a:r>
                         <a:rPr lang="en-US" sz="1150" dirty="0">
                           <a:solidFill>
-                            <a:srgbClr val="1B1F2E"/>
+                            <a:srgbClr val="000000"/>
                           </a:solidFill>
                           <a:latin typeface="Calibri" pitchFamily="34" charset="0"/>
                           <a:ea typeface="Calibri" pitchFamily="34" charset="-122"/>
@@ -9553,7 +9589,7 @@
                   <a:tcPr marL="54864" marR="54864" marT="54864" marB="54864" anchor="ctr">
                     <a:lnL w="6350" cap="flat" cmpd="sng" algn="ctr">
                       <a:solidFill>
-                        <a:srgbClr val="9BA7B4"/>
+                        <a:srgbClr val="BFBFBF"/>
                       </a:solidFill>
                       <a:prstDash val="solid"/>
                       <a:round/>
@@ -9562,7 +9598,7 @@
                     </a:lnL>
                     <a:lnR w="6350" cap="flat" cmpd="sng" algn="ctr">
                       <a:solidFill>
-                        <a:srgbClr val="9BA7B4"/>
+                        <a:srgbClr val="BFBFBF"/>
                       </a:solidFill>
                       <a:prstDash val="solid"/>
                       <a:round/>
@@ -9571,7 +9607,7 @@
                     </a:lnR>
                     <a:lnT w="6350" cap="flat" cmpd="sng" algn="ctr">
                       <a:solidFill>
-                        <a:srgbClr val="9BA7B4"/>
+                        <a:srgbClr val="BFBFBF"/>
                       </a:solidFill>
                       <a:prstDash val="solid"/>
                       <a:round/>
@@ -9580,7 +9616,7 @@
                     </a:lnT>
                     <a:lnB w="6350" cap="flat" cmpd="sng" algn="ctr">
                       <a:solidFill>
-                        <a:srgbClr val="9BA7B4"/>
+                        <a:srgbClr val="BFBFBF"/>
                       </a:solidFill>
                       <a:prstDash val="solid"/>
                       <a:round/>
@@ -9588,7 +9624,7 @@
                       <a:tailEnd type="none" w="med" len="med"/>
                     </a:lnB>
                     <a:solidFill>
-                      <a:srgbClr val="EEF3F8"/>
+                      <a:srgbClr val="EDEDED"/>
                     </a:solidFill>
                   </a:tcPr>
                 </a:tc>
@@ -9603,7 +9639,7 @@
                       <a:r>
                         <a:rPr lang="en-US" sz="1150" dirty="0">
                           <a:solidFill>
-                            <a:srgbClr val="1B1F2E"/>
+                            <a:srgbClr val="000000"/>
                           </a:solidFill>
                           <a:latin typeface="Calibri" pitchFamily="34" charset="0"/>
                           <a:ea typeface="Calibri" pitchFamily="34" charset="-122"/>
@@ -9621,7 +9657,7 @@
                   <a:tcPr marL="54864" marR="54864" marT="54864" marB="54864" anchor="ctr">
                     <a:lnL w="6350" cap="flat" cmpd="sng" algn="ctr">
                       <a:solidFill>
-                        <a:srgbClr val="9BA7B4"/>
+                        <a:srgbClr val="BFBFBF"/>
                       </a:solidFill>
                       <a:prstDash val="solid"/>
                       <a:round/>
@@ -9630,7 +9666,7 @@
                     </a:lnL>
                     <a:lnR w="6350" cap="flat" cmpd="sng" algn="ctr">
                       <a:solidFill>
-                        <a:srgbClr val="9BA7B4"/>
+                        <a:srgbClr val="BFBFBF"/>
                       </a:solidFill>
                       <a:prstDash val="solid"/>
                       <a:round/>
@@ -9639,7 +9675,7 @@
                     </a:lnR>
                     <a:lnT w="6350" cap="flat" cmpd="sng" algn="ctr">
                       <a:solidFill>
-                        <a:srgbClr val="9BA7B4"/>
+                        <a:srgbClr val="BFBFBF"/>
                       </a:solidFill>
                       <a:prstDash val="solid"/>
                       <a:round/>
@@ -9648,7 +9684,7 @@
                     </a:lnT>
                     <a:lnB w="6350" cap="flat" cmpd="sng" algn="ctr">
                       <a:solidFill>
-                        <a:srgbClr val="9BA7B4"/>
+                        <a:srgbClr val="BFBFBF"/>
                       </a:solidFill>
                       <a:prstDash val="solid"/>
                       <a:round/>
@@ -9656,7 +9692,7 @@
                       <a:tailEnd type="none" w="med" len="med"/>
                     </a:lnB>
                     <a:solidFill>
-                      <a:srgbClr val="EEF3F8"/>
+                      <a:srgbClr val="EDEDED"/>
                     </a:solidFill>
                   </a:tcPr>
                 </a:tc>
@@ -9671,7 +9707,7 @@
                       <a:r>
                         <a:rPr lang="en-US" sz="1150" dirty="0">
                           <a:solidFill>
-                            <a:srgbClr val="1B1F2E"/>
+                            <a:srgbClr val="000000"/>
                           </a:solidFill>
                           <a:latin typeface="Calibri" pitchFamily="34" charset="0"/>
                           <a:ea typeface="Calibri" pitchFamily="34" charset="-122"/>
@@ -9689,7 +9725,7 @@
                   <a:tcPr marL="54864" marR="54864" marT="54864" marB="54864" anchor="ctr">
                     <a:lnL w="6350" cap="flat" cmpd="sng" algn="ctr">
                       <a:solidFill>
-                        <a:srgbClr val="9BA7B4"/>
+                        <a:srgbClr val="BFBFBF"/>
                       </a:solidFill>
                       <a:prstDash val="solid"/>
                       <a:round/>
@@ -9698,7 +9734,7 @@
                     </a:lnL>
                     <a:lnR w="6350" cap="flat" cmpd="sng" algn="ctr">
                       <a:solidFill>
-                        <a:srgbClr val="9BA7B4"/>
+                        <a:srgbClr val="BFBFBF"/>
                       </a:solidFill>
                       <a:prstDash val="solid"/>
                       <a:round/>
@@ -9707,7 +9743,7 @@
                     </a:lnR>
                     <a:lnT w="6350" cap="flat" cmpd="sng" algn="ctr">
                       <a:solidFill>
-                        <a:srgbClr val="9BA7B4"/>
+                        <a:srgbClr val="BFBFBF"/>
                       </a:solidFill>
                       <a:prstDash val="solid"/>
                       <a:round/>
@@ -9716,7 +9752,7 @@
                     </a:lnT>
                     <a:lnB w="6350" cap="flat" cmpd="sng" algn="ctr">
                       <a:solidFill>
-                        <a:srgbClr val="9BA7B4"/>
+                        <a:srgbClr val="BFBFBF"/>
                       </a:solidFill>
                       <a:prstDash val="solid"/>
                       <a:round/>
@@ -9724,7 +9760,7 @@
                       <a:tailEnd type="none" w="med" len="med"/>
                     </a:lnB>
                     <a:solidFill>
-                      <a:srgbClr val="EEF3F8"/>
+                      <a:srgbClr val="EDEDED"/>
                     </a:solidFill>
                   </a:tcPr>
                 </a:tc>
@@ -9763,7 +9799,7 @@
             <a:lvl1pPr>
               <a:defRPr sz="1000">
                 <a:solidFill>
-                  <a:srgbClr val="4A6670"/>
+                  <a:srgbClr val="595959"/>
                 </a:solidFill>
               </a:defRPr>
             </a:lvl1pPr>
@@ -9858,11 +9894,11 @@
             </a:avLst>
           </a:prstGeom>
           <a:solidFill>
-            <a:srgbClr val="1F3A5F"/>
+            <a:srgbClr val="333333"/>
           </a:solidFill>
           <a:ln w="12700">
             <a:solidFill>
-              <a:srgbClr val="1F3A5F"/>
+              <a:srgbClr val="333333"/>
             </a:solidFill>
             <a:prstDash val="solid"/>
           </a:ln>
@@ -9883,11 +9919,11 @@
             <a:avLst/>
           </a:prstGeom>
           <a:solidFill>
-            <a:srgbClr val="D9931D"/>
+            <a:srgbClr val="A6A6A6"/>
           </a:solidFill>
           <a:ln w="12700">
             <a:solidFill>
-              <a:srgbClr val="D9931D"/>
+              <a:srgbClr val="A6A6A6"/>
             </a:solidFill>
             <a:prstDash val="solid"/>
           </a:ln>
@@ -10053,11 +10089,11 @@
             <a:avLst/>
           </a:prstGeom>
           <a:solidFill>
-            <a:srgbClr val="D9931D"/>
+            <a:srgbClr val="A6A6A6"/>
           </a:solidFill>
           <a:ln w="12700">
             <a:solidFill>
-              <a:srgbClr val="D9931D"/>
+              <a:srgbClr val="A6A6A6"/>
             </a:solidFill>
             <a:prstDash val="solid"/>
           </a:ln>
@@ -10090,7 +10126,7 @@
             <a:r>
               <a:rPr lang="en-US" sz="1400" b="1" dirty="0">
                 <a:solidFill>
-                  <a:schemeClr val="bg1"/>
+                  <a:srgbClr val="000000"/>
                 </a:solidFill>
               </a:rPr>
               <a:t>1</a:t>
@@ -10150,11 +10186,11 @@
             <a:avLst/>
           </a:prstGeom>
           <a:solidFill>
-            <a:srgbClr val="D9931D"/>
+            <a:srgbClr val="A6A6A6"/>
           </a:solidFill>
           <a:ln w="12700">
             <a:solidFill>
-              <a:srgbClr val="D9931D"/>
+              <a:srgbClr val="A6A6A6"/>
             </a:solidFill>
             <a:prstDash val="solid"/>
           </a:ln>
@@ -10187,7 +10223,7 @@
             <a:r>
               <a:rPr lang="en-US" sz="1400" b="1" dirty="0">
                 <a:solidFill>
-                  <a:schemeClr val="bg1"/>
+                  <a:srgbClr val="000000"/>
                 </a:solidFill>
               </a:rPr>
               <a:t>2</a:t>
@@ -10247,11 +10283,11 @@
             <a:avLst/>
           </a:prstGeom>
           <a:solidFill>
-            <a:srgbClr val="D9931D"/>
+            <a:srgbClr val="A6A6A6"/>
           </a:solidFill>
           <a:ln w="12700">
             <a:solidFill>
-              <a:srgbClr val="D9931D"/>
+              <a:srgbClr val="A6A6A6"/>
             </a:solidFill>
             <a:prstDash val="solid"/>
           </a:ln>
@@ -10284,7 +10320,7 @@
             <a:r>
               <a:rPr lang="en-US" sz="1400" b="1" dirty="0">
                 <a:solidFill>
-                  <a:schemeClr val="bg1"/>
+                  <a:srgbClr val="000000"/>
                 </a:solidFill>
               </a:rPr>
               <a:t>3</a:t>
@@ -10395,7 +10431,7 @@
             <a:lvl1pPr>
               <a:defRPr sz="1000">
                 <a:solidFill>
-                  <a:srgbClr val="9BA7B4"/>
+                  <a:srgbClr val="BFBFBF"/>
                 </a:solidFill>
               </a:defRPr>
             </a:lvl1pPr>
@@ -10490,11 +10526,11 @@
             </a:avLst>
           </a:prstGeom>
           <a:solidFill>
-            <a:srgbClr val="1F3A5F"/>
+            <a:srgbClr val="333333"/>
           </a:solidFill>
           <a:ln w="12700">
             <a:solidFill>
-              <a:srgbClr val="1F3A5F"/>
+              <a:srgbClr val="333333"/>
             </a:solidFill>
             <a:prstDash val="solid"/>
           </a:ln>
@@ -10515,11 +10551,11 @@
             <a:avLst/>
           </a:prstGeom>
           <a:solidFill>
-            <a:srgbClr val="D9931D"/>
+            <a:srgbClr val="A6A6A6"/>
           </a:solidFill>
           <a:ln w="12700">
             <a:solidFill>
-              <a:srgbClr val="D9931D"/>
+              <a:srgbClr val="A6A6A6"/>
             </a:solidFill>
             <a:prstDash val="solid"/>
           </a:ln>
@@ -10706,11 +10742,11 @@
             <a:avLst/>
           </a:prstGeom>
           <a:solidFill>
-            <a:srgbClr val="0E7C86"/>
+            <a:srgbClr val="404040"/>
           </a:solidFill>
           <a:ln w="12700">
             <a:solidFill>
-              <a:srgbClr val="0E7C86"/>
+              <a:srgbClr val="404040"/>
             </a:solidFill>
             <a:prstDash val="solid"/>
           </a:ln>
@@ -10743,7 +10779,7 @@
             <a:r>
               <a:rPr lang="en-US" sz="1400" b="1" dirty="0">
                 <a:solidFill>
-                  <a:schemeClr val="bg1"/>
+                  <a:srgbClr val="FFFFFF"/>
                 </a:solidFill>
               </a:rPr>
               <a:t>1</a:t>
@@ -10803,11 +10839,11 @@
             <a:avLst/>
           </a:prstGeom>
           <a:solidFill>
-            <a:srgbClr val="0E7C86"/>
+            <a:srgbClr val="404040"/>
           </a:solidFill>
           <a:ln w="12700">
             <a:solidFill>
-              <a:srgbClr val="0E7C86"/>
+              <a:srgbClr val="404040"/>
             </a:solidFill>
             <a:prstDash val="solid"/>
           </a:ln>
@@ -10840,7 +10876,7 @@
             <a:r>
               <a:rPr lang="en-US" sz="1400" b="1" dirty="0">
                 <a:solidFill>
-                  <a:schemeClr val="bg1"/>
+                  <a:srgbClr val="FFFFFF"/>
                 </a:solidFill>
               </a:rPr>
               <a:t>2</a:t>
@@ -10900,11 +10936,11 @@
             <a:avLst/>
           </a:prstGeom>
           <a:solidFill>
-            <a:srgbClr val="0E7C86"/>
+            <a:srgbClr val="404040"/>
           </a:solidFill>
           <a:ln w="12700">
             <a:solidFill>
-              <a:srgbClr val="0E7C86"/>
+              <a:srgbClr val="404040"/>
             </a:solidFill>
             <a:prstDash val="solid"/>
           </a:ln>
@@ -10937,7 +10973,7 @@
             <a:r>
               <a:rPr lang="en-US" sz="1400" b="1" dirty="0">
                 <a:solidFill>
-                  <a:schemeClr val="bg1"/>
+                  <a:srgbClr val="FFFFFF"/>
                 </a:solidFill>
               </a:rPr>
               <a:t>3</a:t>
@@ -10997,11 +11033,11 @@
             <a:avLst/>
           </a:prstGeom>
           <a:solidFill>
-            <a:srgbClr val="0E7C86"/>
+            <a:srgbClr val="404040"/>
           </a:solidFill>
           <a:ln w="12700">
             <a:solidFill>
-              <a:srgbClr val="0E7C86"/>
+              <a:srgbClr val="404040"/>
             </a:solidFill>
             <a:prstDash val="solid"/>
           </a:ln>
@@ -11034,7 +11070,7 @@
             <a:r>
               <a:rPr lang="en-US" sz="1400" b="1" dirty="0">
                 <a:solidFill>
-                  <a:schemeClr val="bg1"/>
+                  <a:srgbClr val="FFFFFF"/>
                 </a:solidFill>
               </a:rPr>
               <a:t>4</a:t>
@@ -11109,7 +11145,7 @@
             <a:lvl1pPr>
               <a:defRPr sz="1000">
                 <a:solidFill>
-                  <a:srgbClr val="4A6670"/>
+                  <a:srgbClr val="595959"/>
                 </a:solidFill>
               </a:defRPr>
             </a:lvl1pPr>
@@ -11240,11 +11276,11 @@
             </a:avLst>
           </a:prstGeom>
           <a:solidFill>
-            <a:srgbClr val="EEF3F8"/>
+            <a:srgbClr val="EDEDED"/>
           </a:solidFill>
           <a:ln w="12700">
             <a:solidFill>
-              <a:srgbClr val="EEF3F8"/>
+              <a:srgbClr val="EDEDED"/>
             </a:solidFill>
             <a:prstDash val="solid"/>
           </a:ln>
@@ -11265,11 +11301,11 @@
             <a:avLst/>
           </a:prstGeom>
           <a:solidFill>
-            <a:srgbClr val="B5413F"/>
+            <a:srgbClr val="4D4D4D"/>
           </a:solidFill>
           <a:ln w="12700">
             <a:solidFill>
-              <a:srgbClr val="B5413F"/>
+              <a:srgbClr val="4D4D4D"/>
             </a:solidFill>
             <a:prstDash val="solid"/>
           </a:ln>
@@ -11302,7 +11338,7 @@
             <a:r>
               <a:rPr lang="en-US" sz="1400" b="1" dirty="0">
                 <a:solidFill>
-                  <a:schemeClr val="bg1"/>
+                  <a:srgbClr val="FFFFFF"/>
                 </a:solidFill>
               </a:rPr>
               <a:t>1</a:t>
@@ -11364,11 +11400,11 @@
             </a:avLst>
           </a:prstGeom>
           <a:solidFill>
-            <a:srgbClr val="EEF3F8"/>
+            <a:srgbClr val="EDEDED"/>
           </a:solidFill>
           <a:ln w="12700">
             <a:solidFill>
-              <a:srgbClr val="EEF3F8"/>
+              <a:srgbClr val="EDEDED"/>
             </a:solidFill>
             <a:prstDash val="solid"/>
           </a:ln>
@@ -11389,11 +11425,11 @@
             <a:avLst/>
           </a:prstGeom>
           <a:solidFill>
-            <a:srgbClr val="B5413F"/>
+            <a:srgbClr val="4D4D4D"/>
           </a:solidFill>
           <a:ln w="12700">
             <a:solidFill>
-              <a:srgbClr val="B5413F"/>
+              <a:srgbClr val="4D4D4D"/>
             </a:solidFill>
             <a:prstDash val="solid"/>
           </a:ln>
@@ -11426,7 +11462,7 @@
             <a:r>
               <a:rPr lang="en-US" sz="1400" b="1" dirty="0">
                 <a:solidFill>
-                  <a:schemeClr val="bg1"/>
+                  <a:srgbClr val="FFFFFF"/>
                 </a:solidFill>
               </a:rPr>
               <a:t>2</a:t>
@@ -11524,11 +11560,11 @@
             </a:avLst>
           </a:prstGeom>
           <a:solidFill>
-            <a:srgbClr val="1F3A5F"/>
+            <a:srgbClr val="333333"/>
           </a:solidFill>
           <a:ln w="12700">
             <a:solidFill>
-              <a:srgbClr val="1F3A5F"/>
+              <a:srgbClr val="333333"/>
             </a:solidFill>
             <a:prstDash val="solid"/>
           </a:ln>
@@ -11658,7 +11694,7 @@
             <a:lvl1pPr>
               <a:defRPr sz="1000">
                 <a:solidFill>
-                  <a:srgbClr val="4A6670"/>
+                  <a:srgbClr val="595959"/>
                 </a:solidFill>
               </a:defRPr>
             </a:lvl1pPr>
@@ -11753,11 +11789,11 @@
             </a:avLst>
           </a:prstGeom>
           <a:solidFill>
-            <a:srgbClr val="1F3A5F"/>
+            <a:srgbClr val="333333"/>
           </a:solidFill>
           <a:ln w="12700">
             <a:solidFill>
-              <a:srgbClr val="1F3A5F"/>
+              <a:srgbClr val="333333"/>
             </a:solidFill>
             <a:prstDash val="solid"/>
           </a:ln>
@@ -11827,11 +11863,11 @@
             </a:avLst>
           </a:prstGeom>
           <a:solidFill>
-            <a:srgbClr val="1F3A5F"/>
+            <a:srgbClr val="333333"/>
           </a:solidFill>
           <a:ln w="12700">
             <a:solidFill>
-              <a:srgbClr val="1F3A5F"/>
+              <a:srgbClr val="333333"/>
             </a:solidFill>
             <a:prstDash val="solid"/>
           </a:ln>
@@ -11901,11 +11937,11 @@
             </a:avLst>
           </a:prstGeom>
           <a:solidFill>
-            <a:srgbClr val="1F3A5F"/>
+            <a:srgbClr val="333333"/>
           </a:solidFill>
           <a:ln w="12700">
             <a:solidFill>
-              <a:srgbClr val="1F3A5F"/>
+              <a:srgbClr val="333333"/>
             </a:solidFill>
             <a:prstDash val="solid"/>
           </a:ln>
@@ -12011,11 +12047,11 @@
             </a:avLst>
           </a:prstGeom>
           <a:solidFill>
-            <a:srgbClr val="0E7C86"/>
+            <a:srgbClr val="404040"/>
           </a:solidFill>
           <a:ln w="12700">
             <a:solidFill>
-              <a:srgbClr val="0E7C86"/>
+              <a:srgbClr val="404040"/>
             </a:solidFill>
             <a:prstDash val="solid"/>
           </a:ln>
@@ -12074,11 +12110,11 @@
             </a:avLst>
           </a:prstGeom>
           <a:solidFill>
-            <a:srgbClr val="0E7C86"/>
+            <a:srgbClr val="404040"/>
           </a:solidFill>
           <a:ln w="12700">
             <a:solidFill>
-              <a:srgbClr val="0E7C86"/>
+              <a:srgbClr val="404040"/>
             </a:solidFill>
             <a:prstDash val="solid"/>
           </a:ln>
@@ -12137,11 +12173,11 @@
             </a:avLst>
           </a:prstGeom>
           <a:solidFill>
-            <a:srgbClr val="0E7C86"/>
+            <a:srgbClr val="404040"/>
           </a:solidFill>
           <a:ln w="12700">
             <a:solidFill>
-              <a:srgbClr val="0E7C86"/>
+              <a:srgbClr val="404040"/>
             </a:solidFill>
             <a:prstDash val="solid"/>
           </a:ln>
@@ -12200,11 +12236,11 @@
             </a:avLst>
           </a:prstGeom>
           <a:solidFill>
-            <a:srgbClr val="0E7C86"/>
+            <a:srgbClr val="404040"/>
           </a:solidFill>
           <a:ln w="12700">
             <a:solidFill>
-              <a:srgbClr val="0E7C86"/>
+              <a:srgbClr val="404040"/>
             </a:solidFill>
             <a:prstDash val="solid"/>
           </a:ln>
@@ -12263,11 +12299,11 @@
             </a:avLst>
           </a:prstGeom>
           <a:solidFill>
-            <a:srgbClr val="0E7C86"/>
+            <a:srgbClr val="404040"/>
           </a:solidFill>
           <a:ln w="12700">
             <a:solidFill>
-              <a:srgbClr val="0E7C86"/>
+              <a:srgbClr val="404040"/>
             </a:solidFill>
             <a:prstDash val="solid"/>
           </a:ln>
@@ -12326,11 +12362,11 @@
             </a:avLst>
           </a:prstGeom>
           <a:solidFill>
-            <a:srgbClr val="0E7C86"/>
+            <a:srgbClr val="404040"/>
           </a:solidFill>
           <a:ln w="12700">
             <a:solidFill>
-              <a:srgbClr val="0E7C86"/>
+              <a:srgbClr val="404040"/>
             </a:solidFill>
             <a:prstDash val="solid"/>
           </a:ln>
@@ -12389,11 +12425,11 @@
             </a:avLst>
           </a:prstGeom>
           <a:solidFill>
-            <a:srgbClr val="0E7C86"/>
+            <a:srgbClr val="404040"/>
           </a:solidFill>
           <a:ln w="12700">
             <a:solidFill>
-              <a:srgbClr val="0E7C86"/>
+              <a:srgbClr val="404040"/>
             </a:solidFill>
             <a:prstDash val="solid"/>
           </a:ln>
@@ -12452,11 +12488,11 @@
             </a:avLst>
           </a:prstGeom>
           <a:solidFill>
-            <a:srgbClr val="0E7C86"/>
+            <a:srgbClr val="404040"/>
           </a:solidFill>
           <a:ln w="12700">
             <a:solidFill>
-              <a:srgbClr val="0E7C86"/>
+              <a:srgbClr val="404040"/>
             </a:solidFill>
             <a:prstDash val="solid"/>
           </a:ln>
@@ -12515,11 +12551,11 @@
             </a:avLst>
           </a:prstGeom>
           <a:solidFill>
-            <a:srgbClr val="0E7C86"/>
+            <a:srgbClr val="404040"/>
           </a:solidFill>
           <a:ln w="12700">
             <a:solidFill>
-              <a:srgbClr val="0E7C86"/>
+              <a:srgbClr val="404040"/>
             </a:solidFill>
             <a:prstDash val="solid"/>
           </a:ln>
@@ -12578,11 +12614,11 @@
             </a:avLst>
           </a:prstGeom>
           <a:solidFill>
-            <a:srgbClr val="0E7C86"/>
+            <a:srgbClr val="404040"/>
           </a:solidFill>
           <a:ln w="12700">
             <a:solidFill>
-              <a:srgbClr val="0E7C86"/>
+              <a:srgbClr val="404040"/>
             </a:solidFill>
             <a:prstDash val="solid"/>
           </a:ln>
@@ -12641,11 +12677,11 @@
             </a:avLst>
           </a:prstGeom>
           <a:solidFill>
-            <a:srgbClr val="0E7C86"/>
+            <a:srgbClr val="404040"/>
           </a:solidFill>
           <a:ln w="12700">
             <a:solidFill>
-              <a:srgbClr val="0E7C86"/>
+              <a:srgbClr val="404040"/>
             </a:solidFill>
             <a:prstDash val="solid"/>
           </a:ln>
@@ -12704,11 +12740,11 @@
             </a:avLst>
           </a:prstGeom>
           <a:solidFill>
-            <a:srgbClr val="0E7C86"/>
+            <a:srgbClr val="404040"/>
           </a:solidFill>
           <a:ln w="12700">
             <a:solidFill>
-              <a:srgbClr val="0E7C86"/>
+              <a:srgbClr val="404040"/>
             </a:solidFill>
             <a:prstDash val="solid"/>
           </a:ln>
@@ -12780,7 +12816,7 @@
             <a:lvl1pPr>
               <a:defRPr sz="1000">
                 <a:solidFill>
-                  <a:srgbClr val="9BA7B4"/>
+                  <a:srgbClr val="BFBFBF"/>
                 </a:solidFill>
               </a:defRPr>
             </a:lvl1pPr>
@@ -12873,11 +12909,11 @@
             <a:avLst/>
           </a:prstGeom>
           <a:solidFill>
-            <a:srgbClr val="D9931D"/>
+            <a:srgbClr val="A6A6A6"/>
           </a:solidFill>
           <a:ln w="12700">
             <a:solidFill>
-              <a:srgbClr val="D9931D"/>
+              <a:srgbClr val="A6A6A6"/>
             </a:solidFill>
             <a:prstDash val="solid"/>
           </a:ln>
@@ -12960,11 +12996,11 @@
             </a:avLst>
           </a:prstGeom>
           <a:solidFill>
-            <a:srgbClr val="1F3A5F"/>
+            <a:srgbClr val="333333"/>
           </a:solidFill>
           <a:ln w="12700">
             <a:solidFill>
-              <a:srgbClr val="1F3A5F"/>
+              <a:srgbClr val="333333"/>
             </a:solidFill>
             <a:prstDash val="solid"/>
           </a:ln>
@@ -13059,11 +13095,11 @@
             </a:avLst>
           </a:prstGeom>
           <a:solidFill>
-            <a:srgbClr val="1F3A5F"/>
+            <a:srgbClr val="333333"/>
           </a:solidFill>
           <a:ln w="12700">
             <a:solidFill>
-              <a:srgbClr val="1F3A5F"/>
+              <a:srgbClr val="333333"/>
             </a:solidFill>
             <a:prstDash val="solid"/>
           </a:ln>
@@ -13158,11 +13194,11 @@
             </a:avLst>
           </a:prstGeom>
           <a:solidFill>
-            <a:srgbClr val="1F3A5F"/>
+            <a:srgbClr val="333333"/>
           </a:solidFill>
           <a:ln w="12700">
             <a:solidFill>
-              <a:srgbClr val="1F3A5F"/>
+              <a:srgbClr val="333333"/>
             </a:solidFill>
             <a:prstDash val="solid"/>
           </a:ln>
@@ -13306,7 +13342,7 @@
             <a:lvl1pPr>
               <a:defRPr sz="1000">
                 <a:solidFill>
-                  <a:srgbClr val="9BA7B4"/>
+                  <a:srgbClr val="BFBFBF"/>
                 </a:solidFill>
               </a:defRPr>
             </a:lvl1pPr>
@@ -13401,11 +13437,11 @@
             </a:avLst>
           </a:prstGeom>
           <a:solidFill>
-            <a:srgbClr val="EEF3F8"/>
+            <a:srgbClr val="EDEDED"/>
           </a:solidFill>
           <a:ln w="12700">
             <a:solidFill>
-              <a:srgbClr val="EEF3F8"/>
+              <a:srgbClr val="EDEDED"/>
             </a:solidFill>
             <a:prstDash val="solid"/>
           </a:ln>
@@ -13478,11 +13514,11 @@
             </a:avLst>
           </a:prstGeom>
           <a:solidFill>
-            <a:srgbClr val="EEF3F8"/>
+            <a:srgbClr val="EDEDED"/>
           </a:solidFill>
           <a:ln w="12700">
             <a:solidFill>
-              <a:srgbClr val="EEF3F8"/>
+              <a:srgbClr val="EDEDED"/>
             </a:solidFill>
             <a:prstDash val="solid"/>
           </a:ln>
@@ -13555,11 +13591,11 @@
             </a:avLst>
           </a:prstGeom>
           <a:solidFill>
-            <a:srgbClr val="1F3A5F"/>
+            <a:srgbClr val="333333"/>
           </a:solidFill>
           <a:ln w="12700">
             <a:solidFill>
-              <a:srgbClr val="1F3A5F"/>
+              <a:srgbClr val="333333"/>
             </a:solidFill>
             <a:prstDash val="solid"/>
           </a:ln>
@@ -13678,7 +13714,7 @@
             <a:lvl1pPr>
               <a:defRPr sz="1000">
                 <a:solidFill>
-                  <a:srgbClr val="4A6670"/>
+                  <a:srgbClr val="595959"/>
                 </a:solidFill>
               </a:defRPr>
             </a:lvl1pPr>
@@ -13773,11 +13809,11 @@
             </a:avLst>
           </a:prstGeom>
           <a:solidFill>
-            <a:srgbClr val="EEF3F8"/>
+            <a:srgbClr val="EDEDED"/>
           </a:solidFill>
           <a:ln w="12700">
             <a:solidFill>
-              <a:srgbClr val="EEF3F8"/>
+              <a:srgbClr val="EDEDED"/>
             </a:solidFill>
             <a:prstDash val="solid"/>
           </a:ln>
@@ -13798,11 +13834,11 @@
             <a:avLst/>
           </a:prstGeom>
           <a:solidFill>
-            <a:srgbClr val="D9931D"/>
+            <a:srgbClr val="A6A6A6"/>
           </a:solidFill>
           <a:ln w="12700">
             <a:solidFill>
-              <a:srgbClr val="D9931D"/>
+              <a:srgbClr val="A6A6A6"/>
             </a:solidFill>
             <a:prstDash val="solid"/>
           </a:ln>
@@ -13957,11 +13993,11 @@
             </a:avLst>
           </a:prstGeom>
           <a:solidFill>
-            <a:srgbClr val="EEF3F8"/>
+            <a:srgbClr val="EDEDED"/>
           </a:solidFill>
           <a:ln w="12700">
             <a:solidFill>
-              <a:srgbClr val="EEF3F8"/>
+              <a:srgbClr val="EDEDED"/>
             </a:solidFill>
             <a:prstDash val="solid"/>
           </a:ln>
@@ -13982,11 +14018,11 @@
             <a:avLst/>
           </a:prstGeom>
           <a:solidFill>
-            <a:srgbClr val="D9931D"/>
+            <a:srgbClr val="A6A6A6"/>
           </a:solidFill>
           <a:ln w="12700">
             <a:solidFill>
-              <a:srgbClr val="D9931D"/>
+              <a:srgbClr val="A6A6A6"/>
             </a:solidFill>
             <a:prstDash val="solid"/>
           </a:ln>
@@ -14141,11 +14177,11 @@
             </a:avLst>
           </a:prstGeom>
           <a:solidFill>
-            <a:srgbClr val="EEF3F8"/>
+            <a:srgbClr val="EDEDED"/>
           </a:solidFill>
           <a:ln w="12700">
             <a:solidFill>
-              <a:srgbClr val="EEF3F8"/>
+              <a:srgbClr val="EDEDED"/>
             </a:solidFill>
             <a:prstDash val="solid"/>
           </a:ln>
@@ -14166,11 +14202,11 @@
             <a:avLst/>
           </a:prstGeom>
           <a:solidFill>
-            <a:srgbClr val="D9931D"/>
+            <a:srgbClr val="A6A6A6"/>
           </a:solidFill>
           <a:ln w="12700">
             <a:solidFill>
-              <a:srgbClr val="D9931D"/>
+              <a:srgbClr val="A6A6A6"/>
             </a:solidFill>
             <a:prstDash val="solid"/>
           </a:ln>
@@ -14338,7 +14374,7 @@
             <a:lvl1pPr>
               <a:defRPr sz="1000">
                 <a:solidFill>
-                  <a:srgbClr val="4A6670"/>
+                  <a:srgbClr val="595959"/>
                 </a:solidFill>
               </a:defRPr>
             </a:lvl1pPr>
@@ -14431,11 +14467,11 @@
             <a:avLst/>
           </a:prstGeom>
           <a:solidFill>
-            <a:srgbClr val="D9931D"/>
+            <a:srgbClr val="A6A6A6"/>
           </a:solidFill>
           <a:ln w="12700">
             <a:solidFill>
-              <a:srgbClr val="D9931D"/>
+              <a:srgbClr val="A6A6A6"/>
             </a:solidFill>
             <a:prstDash val="solid"/>
           </a:ln>
@@ -14468,7 +14504,7 @@
             <a:r>
               <a:rPr lang="en-US" sz="1400" b="1" dirty="0">
                 <a:solidFill>
-                  <a:schemeClr val="bg1"/>
+                  <a:srgbClr val="000000"/>
                 </a:solidFill>
               </a:rPr>
               <a:t>1</a:t>
@@ -14528,11 +14564,11 @@
             <a:avLst/>
           </a:prstGeom>
           <a:solidFill>
-            <a:srgbClr val="D9931D"/>
+            <a:srgbClr val="A6A6A6"/>
           </a:solidFill>
           <a:ln w="12700">
             <a:solidFill>
-              <a:srgbClr val="D9931D"/>
+              <a:srgbClr val="A6A6A6"/>
             </a:solidFill>
             <a:prstDash val="solid"/>
           </a:ln>
@@ -14565,7 +14601,7 @@
             <a:r>
               <a:rPr lang="en-US" sz="1400" b="1" dirty="0">
                 <a:solidFill>
-                  <a:schemeClr val="bg1"/>
+                  <a:srgbClr val="000000"/>
                 </a:solidFill>
               </a:rPr>
               <a:t>2</a:t>
@@ -14625,11 +14661,11 @@
             <a:avLst/>
           </a:prstGeom>
           <a:solidFill>
-            <a:srgbClr val="D9931D"/>
+            <a:srgbClr val="A6A6A6"/>
           </a:solidFill>
           <a:ln w="12700">
             <a:solidFill>
-              <a:srgbClr val="D9931D"/>
+              <a:srgbClr val="A6A6A6"/>
             </a:solidFill>
             <a:prstDash val="solid"/>
           </a:ln>
@@ -14662,7 +14698,7 @@
             <a:r>
               <a:rPr lang="en-US" sz="1400" b="1" dirty="0">
                 <a:solidFill>
-                  <a:schemeClr val="bg1"/>
+                  <a:srgbClr val="000000"/>
                 </a:solidFill>
               </a:rPr>
               <a:t>3</a:t>
@@ -14722,11 +14758,11 @@
             <a:avLst/>
           </a:prstGeom>
           <a:solidFill>
-            <a:srgbClr val="D9931D"/>
+            <a:srgbClr val="A6A6A6"/>
           </a:solidFill>
           <a:ln w="12700">
             <a:solidFill>
-              <a:srgbClr val="D9931D"/>
+              <a:srgbClr val="A6A6A6"/>
             </a:solidFill>
             <a:prstDash val="solid"/>
           </a:ln>
@@ -14759,7 +14795,7 @@
             <a:r>
               <a:rPr lang="en-US" sz="1400" b="1" dirty="0">
                 <a:solidFill>
-                  <a:schemeClr val="bg1"/>
+                  <a:srgbClr val="000000"/>
                 </a:solidFill>
               </a:rPr>
               <a:t>4</a:t>
@@ -14819,11 +14855,11 @@
             <a:avLst/>
           </a:prstGeom>
           <a:solidFill>
-            <a:srgbClr val="D9931D"/>
+            <a:srgbClr val="A6A6A6"/>
           </a:solidFill>
           <a:ln w="12700">
             <a:solidFill>
-              <a:srgbClr val="D9931D"/>
+              <a:srgbClr val="A6A6A6"/>
             </a:solidFill>
             <a:prstDash val="solid"/>
           </a:ln>
@@ -14856,7 +14892,7 @@
             <a:r>
               <a:rPr lang="en-US" sz="1400" b="1" dirty="0">
                 <a:solidFill>
-                  <a:schemeClr val="bg1"/>
+                  <a:srgbClr val="000000"/>
                 </a:solidFill>
               </a:rPr>
               <a:t>5</a:t>
@@ -14931,7 +14967,7 @@
             <a:lvl1pPr>
               <a:defRPr sz="1000">
                 <a:solidFill>
-                  <a:srgbClr val="9BA7B4"/>
+                  <a:srgbClr val="BFBFBF"/>
                 </a:solidFill>
               </a:defRPr>
             </a:lvl1pPr>
@@ -15026,11 +15062,11 @@
             </a:avLst>
           </a:prstGeom>
           <a:solidFill>
-            <a:srgbClr val="EEF3F8"/>
+            <a:srgbClr val="EDEDED"/>
           </a:solidFill>
           <a:ln w="12700">
             <a:solidFill>
-              <a:srgbClr val="EEF3F8"/>
+              <a:srgbClr val="EDEDED"/>
             </a:solidFill>
             <a:prstDash val="solid"/>
           </a:ln>
@@ -15051,11 +15087,11 @@
             <a:avLst/>
           </a:prstGeom>
           <a:solidFill>
-            <a:srgbClr val="0E7C86"/>
+            <a:srgbClr val="404040"/>
           </a:solidFill>
           <a:ln w="12700">
             <a:solidFill>
-              <a:srgbClr val="0E7C86"/>
+              <a:srgbClr val="404040"/>
             </a:solidFill>
             <a:prstDash val="solid"/>
           </a:ln>
@@ -15250,11 +15286,11 @@
             </a:avLst>
           </a:prstGeom>
           <a:solidFill>
-            <a:srgbClr val="1F3A5F"/>
+            <a:srgbClr val="333333"/>
           </a:solidFill>
           <a:ln w="12700">
             <a:solidFill>
-              <a:srgbClr val="1F3A5F"/>
+              <a:srgbClr val="333333"/>
             </a:solidFill>
             <a:prstDash val="solid"/>
           </a:ln>
@@ -15331,7 +15367,7 @@
           </a:solidFill>
           <a:ln w="9525">
             <a:solidFill>
-              <a:srgbClr val="9BA7B4"/>
+              <a:srgbClr val="BFBFBF"/>
             </a:solidFill>
             <a:prstDash val="solid"/>
           </a:ln>
@@ -15431,7 +15467,7 @@
             <a:lvl1pPr>
               <a:defRPr sz="1000">
                 <a:solidFill>
-                  <a:srgbClr val="4A6670"/>
+                  <a:srgbClr val="595959"/>
                 </a:solidFill>
               </a:defRPr>
             </a:lvl1pPr>
@@ -15687,7 +15723,7 @@
             <a:lvl1pPr>
               <a:defRPr sz="1000">
                 <a:solidFill>
-                  <a:srgbClr val="4A6670"/>
+                  <a:srgbClr val="595959"/>
                 </a:solidFill>
               </a:defRPr>
             </a:lvl1pPr>
@@ -15780,11 +15816,11 @@
             <a:avLst/>
           </a:prstGeom>
           <a:solidFill>
-            <a:srgbClr val="0E7C86"/>
+            <a:srgbClr val="404040"/>
           </a:solidFill>
           <a:ln w="12700">
             <a:solidFill>
-              <a:srgbClr val="0E7C86"/>
+              <a:srgbClr val="404040"/>
             </a:solidFill>
             <a:prstDash val="solid"/>
           </a:ln>
@@ -15876,11 +15912,11 @@
             <a:avLst/>
           </a:prstGeom>
           <a:solidFill>
-            <a:srgbClr val="0E7C86"/>
+            <a:srgbClr val="404040"/>
           </a:solidFill>
           <a:ln w="12700">
             <a:solidFill>
-              <a:srgbClr val="0E7C86"/>
+              <a:srgbClr val="404040"/>
             </a:solidFill>
             <a:prstDash val="solid"/>
           </a:ln>
@@ -15972,11 +16008,11 @@
             <a:avLst/>
           </a:prstGeom>
           <a:solidFill>
-            <a:srgbClr val="0E7C86"/>
+            <a:srgbClr val="404040"/>
           </a:solidFill>
           <a:ln w="12700">
             <a:solidFill>
-              <a:srgbClr val="0E7C86"/>
+              <a:srgbClr val="404040"/>
             </a:solidFill>
             <a:prstDash val="solid"/>
           </a:ln>
@@ -16068,11 +16104,11 @@
             <a:avLst/>
           </a:prstGeom>
           <a:solidFill>
-            <a:srgbClr val="0E7C86"/>
+            <a:srgbClr val="404040"/>
           </a:solidFill>
           <a:ln w="12700">
             <a:solidFill>
-              <a:srgbClr val="0E7C86"/>
+              <a:srgbClr val="404040"/>
             </a:solidFill>
             <a:prstDash val="solid"/>
           </a:ln>
@@ -16164,11 +16200,11 @@
             <a:avLst/>
           </a:prstGeom>
           <a:solidFill>
-            <a:srgbClr val="0E7C86"/>
+            <a:srgbClr val="404040"/>
           </a:solidFill>
           <a:ln w="12700">
             <a:solidFill>
-              <a:srgbClr val="0E7C86"/>
+              <a:srgbClr val="404040"/>
             </a:solidFill>
             <a:prstDash val="solid"/>
           </a:ln>
@@ -16260,11 +16296,11 @@
             <a:avLst/>
           </a:prstGeom>
           <a:solidFill>
-            <a:srgbClr val="0E7C86"/>
+            <a:srgbClr val="404040"/>
           </a:solidFill>
           <a:ln w="12700">
             <a:solidFill>
-              <a:srgbClr val="0E7C86"/>
+              <a:srgbClr val="404040"/>
             </a:solidFill>
             <a:prstDash val="solid"/>
           </a:ln>
@@ -16371,7 +16407,7 @@
             <a:lvl1pPr>
               <a:defRPr sz="1000">
                 <a:solidFill>
-                  <a:srgbClr val="4A6670"/>
+                  <a:srgbClr val="595959"/>
                 </a:solidFill>
               </a:defRPr>
             </a:lvl1pPr>
@@ -16466,11 +16502,11 @@
             </a:avLst>
           </a:prstGeom>
           <a:solidFill>
-            <a:srgbClr val="EEF3F8"/>
+            <a:srgbClr val="EDEDED"/>
           </a:solidFill>
           <a:ln w="12700">
             <a:solidFill>
-              <a:srgbClr val="EEF3F8"/>
+              <a:srgbClr val="EDEDED"/>
             </a:solidFill>
             <a:prstDash val="solid"/>
           </a:ln>
@@ -16544,7 +16580,7 @@
           </a:solidFill>
           <a:ln w="9525">
             <a:solidFill>
-              <a:srgbClr val="9BA7B4"/>
+              <a:srgbClr val="BFBFBF"/>
             </a:solidFill>
             <a:prstDash val="solid"/>
           </a:ln>
@@ -16626,11 +16662,11 @@
             <a:avLst/>
           </a:prstGeom>
           <a:solidFill>
-            <a:srgbClr val="D9931D"/>
+            <a:srgbClr val="A6A6A6"/>
           </a:solidFill>
           <a:ln w="12700">
             <a:solidFill>
-              <a:srgbClr val="D9931D"/>
+              <a:srgbClr val="A6A6A6"/>
             </a:solidFill>
             <a:prstDash val="solid"/>
           </a:ln>
@@ -16725,11 +16761,11 @@
             <a:avLst/>
           </a:prstGeom>
           <a:solidFill>
-            <a:srgbClr val="D9931D"/>
+            <a:srgbClr val="A6A6A6"/>
           </a:solidFill>
           <a:ln w="12700">
             <a:solidFill>
-              <a:srgbClr val="D9931D"/>
+              <a:srgbClr val="A6A6A6"/>
             </a:solidFill>
             <a:prstDash val="solid"/>
           </a:ln>
@@ -16824,11 +16860,11 @@
             <a:avLst/>
           </a:prstGeom>
           <a:solidFill>
-            <a:srgbClr val="D9931D"/>
+            <a:srgbClr val="A6A6A6"/>
           </a:solidFill>
           <a:ln w="12700">
             <a:solidFill>
-              <a:srgbClr val="D9931D"/>
+              <a:srgbClr val="A6A6A6"/>
             </a:solidFill>
             <a:prstDash val="solid"/>
           </a:ln>
@@ -16974,7 +17010,7 @@
             <a:lvl1pPr>
               <a:defRPr sz="1000">
                 <a:solidFill>
-                  <a:srgbClr val="4A6670"/>
+                  <a:srgbClr val="595959"/>
                 </a:solidFill>
               </a:defRPr>
             </a:lvl1pPr>
@@ -17069,11 +17105,11 @@
             </a:avLst>
           </a:prstGeom>
           <a:solidFill>
-            <a:srgbClr val="EEF3F8"/>
+            <a:srgbClr val="EDEDED"/>
           </a:solidFill>
           <a:ln w="12700">
             <a:solidFill>
-              <a:srgbClr val="EEF3F8"/>
+              <a:srgbClr val="EDEDED"/>
             </a:solidFill>
             <a:prstDash val="solid"/>
           </a:ln>
@@ -17094,11 +17130,11 @@
             <a:avLst/>
           </a:prstGeom>
           <a:solidFill>
-            <a:srgbClr val="0E7C86"/>
+            <a:srgbClr val="404040"/>
           </a:solidFill>
           <a:ln w="12700">
             <a:solidFill>
-              <a:srgbClr val="0E7C86"/>
+              <a:srgbClr val="404040"/>
             </a:solidFill>
             <a:prstDash val="solid"/>
           </a:ln>
@@ -17264,11 +17300,11 @@
             </a:avLst>
           </a:prstGeom>
           <a:solidFill>
-            <a:srgbClr val="EEF3F8"/>
+            <a:srgbClr val="EDEDED"/>
           </a:solidFill>
           <a:ln w="12700">
             <a:solidFill>
-              <a:srgbClr val="EEF3F8"/>
+              <a:srgbClr val="EDEDED"/>
             </a:solidFill>
             <a:prstDash val="solid"/>
           </a:ln>
@@ -17289,11 +17325,11 @@
             <a:avLst/>
           </a:prstGeom>
           <a:solidFill>
-            <a:srgbClr val="5B7DB1"/>
+            <a:srgbClr val="737373"/>
           </a:solidFill>
           <a:ln w="12700">
             <a:solidFill>
-              <a:srgbClr val="5B7DB1"/>
+              <a:srgbClr val="737373"/>
             </a:solidFill>
             <a:prstDash val="solid"/>
           </a:ln>
@@ -17459,11 +17495,11 @@
             </a:avLst>
           </a:prstGeom>
           <a:solidFill>
-            <a:srgbClr val="EEF3F8"/>
+            <a:srgbClr val="EDEDED"/>
           </a:solidFill>
           <a:ln w="12700">
             <a:solidFill>
-              <a:srgbClr val="EEF3F8"/>
+              <a:srgbClr val="EDEDED"/>
             </a:solidFill>
             <a:prstDash val="solid"/>
           </a:ln>
@@ -17484,11 +17520,11 @@
             <a:avLst/>
           </a:prstGeom>
           <a:solidFill>
-            <a:srgbClr val="4A6670"/>
+            <a:srgbClr val="595959"/>
           </a:solidFill>
           <a:ln w="12700">
             <a:solidFill>
-              <a:srgbClr val="4A6670"/>
+              <a:srgbClr val="595959"/>
             </a:solidFill>
             <a:prstDash val="solid"/>
           </a:ln>
@@ -17667,7 +17703,7 @@
             <a:lvl1pPr>
               <a:defRPr sz="1000">
                 <a:solidFill>
-                  <a:srgbClr val="4A6670"/>
+                  <a:srgbClr val="595959"/>
                 </a:solidFill>
               </a:defRPr>
             </a:lvl1pPr>
@@ -17762,11 +17798,11 @@
             </a:avLst>
           </a:prstGeom>
           <a:solidFill>
-            <a:srgbClr val="EEF3F8"/>
+            <a:srgbClr val="EDEDED"/>
           </a:solidFill>
           <a:ln w="12700">
             <a:solidFill>
-              <a:srgbClr val="EEF3F8"/>
+              <a:srgbClr val="EDEDED"/>
             </a:solidFill>
             <a:prstDash val="solid"/>
           </a:ln>
@@ -17787,11 +17823,11 @@
             <a:avLst/>
           </a:prstGeom>
           <a:solidFill>
-            <a:srgbClr val="0E7C86"/>
+            <a:srgbClr val="404040"/>
           </a:solidFill>
           <a:ln w="12700">
             <a:solidFill>
-              <a:srgbClr val="0E7C86"/>
+              <a:srgbClr val="404040"/>
             </a:solidFill>
             <a:prstDash val="solid"/>
           </a:ln>
@@ -17924,11 +17960,11 @@
             </a:avLst>
           </a:prstGeom>
           <a:solidFill>
-            <a:srgbClr val="EEF3F8"/>
+            <a:srgbClr val="EDEDED"/>
           </a:solidFill>
           <a:ln w="12700">
             <a:solidFill>
-              <a:srgbClr val="EEF3F8"/>
+              <a:srgbClr val="EDEDED"/>
             </a:solidFill>
             <a:prstDash val="solid"/>
           </a:ln>
@@ -17949,11 +17985,11 @@
             <a:avLst/>
           </a:prstGeom>
           <a:solidFill>
-            <a:srgbClr val="0E7C86"/>
+            <a:srgbClr val="404040"/>
           </a:solidFill>
           <a:ln w="12700">
             <a:solidFill>
-              <a:srgbClr val="0E7C86"/>
+              <a:srgbClr val="404040"/>
             </a:solidFill>
             <a:prstDash val="solid"/>
           </a:ln>
@@ -18086,11 +18122,11 @@
             </a:avLst>
           </a:prstGeom>
           <a:solidFill>
-            <a:srgbClr val="EEF3F8"/>
+            <a:srgbClr val="EDEDED"/>
           </a:solidFill>
           <a:ln w="12700">
             <a:solidFill>
-              <a:srgbClr val="EEF3F8"/>
+              <a:srgbClr val="EDEDED"/>
             </a:solidFill>
             <a:prstDash val="solid"/>
           </a:ln>
@@ -18111,11 +18147,11 @@
             <a:avLst/>
           </a:prstGeom>
           <a:solidFill>
-            <a:srgbClr val="0E7C86"/>
+            <a:srgbClr val="404040"/>
           </a:solidFill>
           <a:ln w="12700">
             <a:solidFill>
-              <a:srgbClr val="0E7C86"/>
+              <a:srgbClr val="404040"/>
             </a:solidFill>
             <a:prstDash val="solid"/>
           </a:ln>
@@ -18248,11 +18284,11 @@
             </a:avLst>
           </a:prstGeom>
           <a:solidFill>
-            <a:srgbClr val="EEF3F8"/>
+            <a:srgbClr val="EDEDED"/>
           </a:solidFill>
           <a:ln w="12700">
             <a:solidFill>
-              <a:srgbClr val="EEF3F8"/>
+              <a:srgbClr val="EDEDED"/>
             </a:solidFill>
             <a:prstDash val="solid"/>
           </a:ln>
@@ -18273,11 +18309,11 @@
             <a:avLst/>
           </a:prstGeom>
           <a:solidFill>
-            <a:srgbClr val="0E7C86"/>
+            <a:srgbClr val="404040"/>
           </a:solidFill>
           <a:ln w="12700">
             <a:solidFill>
-              <a:srgbClr val="0E7C86"/>
+              <a:srgbClr val="404040"/>
             </a:solidFill>
             <a:prstDash val="solid"/>
           </a:ln>
@@ -18459,7 +18495,7 @@
             <a:lvl1pPr>
               <a:defRPr sz="1000">
                 <a:solidFill>
-                  <a:srgbClr val="4A6670"/>
+                  <a:srgbClr val="595959"/>
                 </a:solidFill>
               </a:defRPr>
             </a:lvl1pPr>
@@ -18590,11 +18626,11 @@
             </a:avLst>
           </a:prstGeom>
           <a:solidFill>
-            <a:srgbClr val="1F3A5F"/>
+            <a:srgbClr val="333333"/>
           </a:solidFill>
           <a:ln w="12700">
             <a:solidFill>
-              <a:srgbClr val="1F3A5F"/>
+              <a:srgbClr val="333333"/>
             </a:solidFill>
             <a:prstDash val="solid"/>
           </a:ln>
@@ -18615,11 +18651,11 @@
             <a:avLst/>
           </a:prstGeom>
           <a:solidFill>
-            <a:srgbClr val="D9931D"/>
+            <a:srgbClr val="A6A6A6"/>
           </a:solidFill>
           <a:ln w="12700">
             <a:solidFill>
-              <a:srgbClr val="D9931D"/>
+              <a:srgbClr val="A6A6A6"/>
             </a:solidFill>
             <a:prstDash val="solid"/>
           </a:ln>
@@ -18652,7 +18688,7 @@
             <a:r>
               <a:rPr lang="en-US" sz="1400" b="1" dirty="0">
                 <a:solidFill>
-                  <a:schemeClr val="bg1"/>
+                  <a:srgbClr val="000000"/>
                 </a:solidFill>
               </a:rPr>
               <a:t>1</a:t>
@@ -18750,11 +18786,11 @@
             </a:avLst>
           </a:prstGeom>
           <a:solidFill>
-            <a:srgbClr val="1F3A5F"/>
+            <a:srgbClr val="333333"/>
           </a:solidFill>
           <a:ln w="12700">
             <a:solidFill>
-              <a:srgbClr val="1F3A5F"/>
+              <a:srgbClr val="333333"/>
             </a:solidFill>
             <a:prstDash val="solid"/>
           </a:ln>
@@ -18775,11 +18811,11 @@
             <a:avLst/>
           </a:prstGeom>
           <a:solidFill>
-            <a:srgbClr val="D9931D"/>
+            <a:srgbClr val="A6A6A6"/>
           </a:solidFill>
           <a:ln w="12700">
             <a:solidFill>
-              <a:srgbClr val="D9931D"/>
+              <a:srgbClr val="A6A6A6"/>
             </a:solidFill>
             <a:prstDash val="solid"/>
           </a:ln>
@@ -18812,7 +18848,7 @@
             <a:r>
               <a:rPr lang="en-US" sz="1400" b="1" dirty="0">
                 <a:solidFill>
-                  <a:schemeClr val="bg1"/>
+                  <a:srgbClr val="000000"/>
                 </a:solidFill>
               </a:rPr>
               <a:t>2</a:t>
@@ -18910,11 +18946,11 @@
             </a:avLst>
           </a:prstGeom>
           <a:solidFill>
-            <a:srgbClr val="1F3A5F"/>
+            <a:srgbClr val="333333"/>
           </a:solidFill>
           <a:ln w="12700">
             <a:solidFill>
-              <a:srgbClr val="1F3A5F"/>
+              <a:srgbClr val="333333"/>
             </a:solidFill>
             <a:prstDash val="solid"/>
           </a:ln>
@@ -18935,11 +18971,11 @@
             <a:avLst/>
           </a:prstGeom>
           <a:solidFill>
-            <a:srgbClr val="D9931D"/>
+            <a:srgbClr val="A6A6A6"/>
           </a:solidFill>
           <a:ln w="12700">
             <a:solidFill>
-              <a:srgbClr val="D9931D"/>
+              <a:srgbClr val="A6A6A6"/>
             </a:solidFill>
             <a:prstDash val="solid"/>
           </a:ln>
@@ -18972,7 +19008,7 @@
             <a:r>
               <a:rPr lang="en-US" sz="1400" b="1" dirty="0">
                 <a:solidFill>
-                  <a:schemeClr val="bg1"/>
+                  <a:srgbClr val="000000"/>
                 </a:solidFill>
               </a:rPr>
               <a:t>3</a:t>
@@ -19070,11 +19106,11 @@
             </a:avLst>
           </a:prstGeom>
           <a:solidFill>
-            <a:srgbClr val="1F3A5F"/>
+            <a:srgbClr val="333333"/>
           </a:solidFill>
           <a:ln w="12700">
             <a:solidFill>
-              <a:srgbClr val="1F3A5F"/>
+              <a:srgbClr val="333333"/>
             </a:solidFill>
             <a:prstDash val="solid"/>
           </a:ln>
@@ -19095,11 +19131,11 @@
             <a:avLst/>
           </a:prstGeom>
           <a:solidFill>
-            <a:srgbClr val="D9931D"/>
+            <a:srgbClr val="A6A6A6"/>
           </a:solidFill>
           <a:ln w="12700">
             <a:solidFill>
-              <a:srgbClr val="D9931D"/>
+              <a:srgbClr val="A6A6A6"/>
             </a:solidFill>
             <a:prstDash val="solid"/>
           </a:ln>
@@ -19132,7 +19168,7 @@
             <a:r>
               <a:rPr lang="en-US" sz="1400" b="1" dirty="0">
                 <a:solidFill>
-                  <a:schemeClr val="bg1"/>
+                  <a:srgbClr val="000000"/>
                 </a:solidFill>
               </a:rPr>
               <a:t>4</a:t>
@@ -19230,11 +19266,11 @@
             </a:avLst>
           </a:prstGeom>
           <a:solidFill>
-            <a:srgbClr val="1F3A5F"/>
+            <a:srgbClr val="333333"/>
           </a:solidFill>
           <a:ln w="12700">
             <a:solidFill>
-              <a:srgbClr val="1F3A5F"/>
+              <a:srgbClr val="333333"/>
             </a:solidFill>
             <a:prstDash val="solid"/>
           </a:ln>
@@ -19255,11 +19291,11 @@
             <a:avLst/>
           </a:prstGeom>
           <a:solidFill>
-            <a:srgbClr val="D9931D"/>
+            <a:srgbClr val="A6A6A6"/>
           </a:solidFill>
           <a:ln w="12700">
             <a:solidFill>
-              <a:srgbClr val="D9931D"/>
+              <a:srgbClr val="A6A6A6"/>
             </a:solidFill>
             <a:prstDash val="solid"/>
           </a:ln>
@@ -19292,7 +19328,7 @@
             <a:r>
               <a:rPr lang="en-US" sz="1400" b="1" dirty="0">
                 <a:solidFill>
-                  <a:schemeClr val="bg1"/>
+                  <a:srgbClr val="000000"/>
                 </a:solidFill>
               </a:rPr>
               <a:t>5</a:t>
@@ -19403,7 +19439,7 @@
             <a:lvl1pPr>
               <a:defRPr sz="1000">
                 <a:solidFill>
-                  <a:srgbClr val="9BA7B4"/>
+                  <a:srgbClr val="BFBFBF"/>
                 </a:solidFill>
               </a:defRPr>
             </a:lvl1pPr>
@@ -19498,7 +19534,7 @@
           <a:noFill/>
           <a:ln w="25400">
             <a:solidFill>
-              <a:srgbClr val="9BA7B4"/>
+              <a:srgbClr val="BFBFBF"/>
             </a:solidFill>
             <a:prstDash val="solid"/>
           </a:ln>
@@ -19519,7 +19555,7 @@
             <a:avLst/>
           </a:prstGeom>
           <a:solidFill>
-            <a:srgbClr val="4A6670"/>
+            <a:srgbClr val="595959"/>
           </a:solidFill>
           <a:ln w="25400">
             <a:solidFill>
@@ -19582,11 +19618,11 @@
             </a:avLst>
           </a:prstGeom>
           <a:solidFill>
-            <a:srgbClr val="EEF3F8"/>
+            <a:srgbClr val="EDEDED"/>
           </a:solidFill>
           <a:ln w="12700">
             <a:solidFill>
-              <a:srgbClr val="EEF3F8"/>
+              <a:srgbClr val="EDEDED"/>
             </a:solidFill>
             <a:prstDash val="solid"/>
           </a:ln>
@@ -19679,7 +19715,7 @@
             <a:avLst/>
           </a:prstGeom>
           <a:solidFill>
-            <a:srgbClr val="5B7DB1"/>
+            <a:srgbClr val="737373"/>
           </a:solidFill>
           <a:ln w="25400">
             <a:solidFill>
@@ -19742,11 +19778,11 @@
             </a:avLst>
           </a:prstGeom>
           <a:solidFill>
-            <a:srgbClr val="EEF3F8"/>
+            <a:srgbClr val="EDEDED"/>
           </a:solidFill>
           <a:ln w="12700">
             <a:solidFill>
-              <a:srgbClr val="EEF3F8"/>
+              <a:srgbClr val="EDEDED"/>
             </a:solidFill>
             <a:prstDash val="solid"/>
           </a:ln>
@@ -19839,7 +19875,7 @@
             <a:avLst/>
           </a:prstGeom>
           <a:solidFill>
-            <a:srgbClr val="0E7C86"/>
+            <a:srgbClr val="404040"/>
           </a:solidFill>
           <a:ln w="25400">
             <a:solidFill>
@@ -19902,11 +19938,11 @@
             </a:avLst>
           </a:prstGeom>
           <a:solidFill>
-            <a:srgbClr val="EEF3F8"/>
+            <a:srgbClr val="EDEDED"/>
           </a:solidFill>
           <a:ln w="12700">
             <a:solidFill>
-              <a:srgbClr val="EEF3F8"/>
+              <a:srgbClr val="EDEDED"/>
             </a:solidFill>
             <a:prstDash val="solid"/>
           </a:ln>
@@ -19999,7 +20035,7 @@
             <a:avLst/>
           </a:prstGeom>
           <a:solidFill>
-            <a:srgbClr val="D9931D"/>
+            <a:srgbClr val="A6A6A6"/>
           </a:solidFill>
           <a:ln w="25400">
             <a:solidFill>
@@ -20062,11 +20098,11 @@
             </a:avLst>
           </a:prstGeom>
           <a:solidFill>
-            <a:srgbClr val="EEF3F8"/>
+            <a:srgbClr val="EDEDED"/>
           </a:solidFill>
           <a:ln w="12700">
             <a:solidFill>
-              <a:srgbClr val="EEF3F8"/>
+              <a:srgbClr val="EDEDED"/>
             </a:solidFill>
             <a:prstDash val="solid"/>
           </a:ln>
@@ -20174,7 +20210,7 @@
             <a:lvl1pPr>
               <a:defRPr sz="1000">
                 <a:solidFill>
-                  <a:srgbClr val="4A6670"/>
+                  <a:srgbClr val="595959"/>
                 </a:solidFill>
               </a:defRPr>
             </a:lvl1pPr>
@@ -20343,7 +20379,7 @@
                       <a:tailEnd type="none" w="med" len="med"/>
                     </a:lnB>
                     <a:solidFill>
-                      <a:srgbClr val="1F3A5F"/>
+                      <a:srgbClr val="333333"/>
                     </a:solidFill>
                   </a:tcPr>
                 </a:tc>
@@ -20358,7 +20394,7 @@
                       <a:r>
                         <a:rPr lang="en-US" sz="1300" dirty="0">
                           <a:solidFill>
-                            <a:srgbClr val="1B1F2E"/>
+                            <a:srgbClr val="000000"/>
                           </a:solidFill>
                           <a:latin typeface="Calibri" pitchFamily="34" charset="0"/>
                           <a:ea typeface="Calibri" pitchFamily="34" charset="-122"/>
@@ -20411,7 +20447,7 @@
                       <a:tailEnd type="none" w="med" len="med"/>
                     </a:lnB>
                     <a:solidFill>
-                      <a:srgbClr val="EEF3F8"/>
+                      <a:srgbClr val="EDEDED"/>
                     </a:solidFill>
                   </a:tcPr>
                 </a:tc>
@@ -20481,7 +20517,7 @@
                       <a:tailEnd type="none" w="med" len="med"/>
                     </a:lnB>
                     <a:solidFill>
-                      <a:srgbClr val="1F3A5F"/>
+                      <a:srgbClr val="333333"/>
                     </a:solidFill>
                   </a:tcPr>
                 </a:tc>
@@ -20496,7 +20532,7 @@
                       <a:r>
                         <a:rPr lang="en-US" sz="1300" dirty="0">
                           <a:solidFill>
-                            <a:srgbClr val="1B1F2E"/>
+                            <a:srgbClr val="000000"/>
                           </a:solidFill>
                           <a:latin typeface="Calibri" pitchFamily="34" charset="0"/>
                           <a:ea typeface="Calibri" pitchFamily="34" charset="-122"/>
@@ -20549,7 +20585,7 @@
                       <a:tailEnd type="none" w="med" len="med"/>
                     </a:lnB>
                     <a:solidFill>
-                      <a:srgbClr val="EEF3F8"/>
+                      <a:srgbClr val="EDEDED"/>
                     </a:solidFill>
                   </a:tcPr>
                 </a:tc>
@@ -20619,7 +20655,7 @@
                       <a:tailEnd type="none" w="med" len="med"/>
                     </a:lnB>
                     <a:solidFill>
-                      <a:srgbClr val="1F3A5F"/>
+                      <a:srgbClr val="333333"/>
                     </a:solidFill>
                   </a:tcPr>
                 </a:tc>
@@ -20634,7 +20670,7 @@
                       <a:r>
                         <a:rPr lang="en-US" sz="1300" dirty="0">
                           <a:solidFill>
-                            <a:srgbClr val="1B1F2E"/>
+                            <a:srgbClr val="000000"/>
                           </a:solidFill>
                           <a:latin typeface="Calibri" pitchFamily="34" charset="0"/>
                           <a:ea typeface="Calibri" pitchFamily="34" charset="-122"/>
@@ -20687,7 +20723,7 @@
                       <a:tailEnd type="none" w="med" len="med"/>
                     </a:lnB>
                     <a:solidFill>
-                      <a:srgbClr val="EEF3F8"/>
+                      <a:srgbClr val="EDEDED"/>
                     </a:solidFill>
                   </a:tcPr>
                 </a:tc>
@@ -20757,7 +20793,7 @@
                       <a:tailEnd type="none" w="med" len="med"/>
                     </a:lnB>
                     <a:solidFill>
-                      <a:srgbClr val="1F3A5F"/>
+                      <a:srgbClr val="333333"/>
                     </a:solidFill>
                   </a:tcPr>
                 </a:tc>
@@ -20772,7 +20808,7 @@
                       <a:r>
                         <a:rPr lang="en-US" sz="1300" dirty="0">
                           <a:solidFill>
-                            <a:srgbClr val="1B1F2E"/>
+                            <a:srgbClr val="000000"/>
                           </a:solidFill>
                           <a:latin typeface="Calibri" pitchFamily="34" charset="0"/>
                           <a:ea typeface="Calibri" pitchFamily="34" charset="-122"/>
@@ -20825,7 +20861,7 @@
                       <a:tailEnd type="none" w="med" len="med"/>
                     </a:lnB>
                     <a:solidFill>
-                      <a:srgbClr val="EEF3F8"/>
+                      <a:srgbClr val="EDEDED"/>
                     </a:solidFill>
                   </a:tcPr>
                 </a:tc>
@@ -20895,7 +20931,7 @@
                       <a:tailEnd type="none" w="med" len="med"/>
                     </a:lnB>
                     <a:solidFill>
-                      <a:srgbClr val="1F3A5F"/>
+                      <a:srgbClr val="333333"/>
                     </a:solidFill>
                   </a:tcPr>
                 </a:tc>
@@ -20910,7 +20946,7 @@
                       <a:r>
                         <a:rPr lang="en-US" sz="1300" dirty="0">
                           <a:solidFill>
-                            <a:srgbClr val="1B1F2E"/>
+                            <a:srgbClr val="000000"/>
                           </a:solidFill>
                           <a:latin typeface="Calibri" pitchFamily="34" charset="0"/>
                           <a:ea typeface="Calibri" pitchFamily="34" charset="-122"/>
@@ -20963,7 +20999,7 @@
                       <a:tailEnd type="none" w="med" len="med"/>
                     </a:lnB>
                     <a:solidFill>
-                      <a:srgbClr val="EEF3F8"/>
+                      <a:srgbClr val="EDEDED"/>
                     </a:solidFill>
                   </a:tcPr>
                 </a:tc>
@@ -21033,7 +21069,7 @@
                       <a:tailEnd type="none" w="med" len="med"/>
                     </a:lnB>
                     <a:solidFill>
-                      <a:srgbClr val="1F3A5F"/>
+                      <a:srgbClr val="333333"/>
                     </a:solidFill>
                   </a:tcPr>
                 </a:tc>
@@ -21048,7 +21084,7 @@
                       <a:r>
                         <a:rPr lang="en-US" sz="1300" dirty="0">
                           <a:solidFill>
-                            <a:srgbClr val="1B1F2E"/>
+                            <a:srgbClr val="000000"/>
                           </a:solidFill>
                           <a:latin typeface="Calibri" pitchFamily="34" charset="0"/>
                           <a:ea typeface="Calibri" pitchFamily="34" charset="-122"/>
@@ -21101,7 +21137,7 @@
                       <a:tailEnd type="none" w="med" len="med"/>
                     </a:lnB>
                     <a:solidFill>
-                      <a:srgbClr val="EEF3F8"/>
+                      <a:srgbClr val="EDEDED"/>
                     </a:solidFill>
                   </a:tcPr>
                 </a:tc>
@@ -21171,7 +21207,7 @@
                       <a:tailEnd type="none" w="med" len="med"/>
                     </a:lnB>
                     <a:solidFill>
-                      <a:srgbClr val="1F3A5F"/>
+                      <a:srgbClr val="333333"/>
                     </a:solidFill>
                   </a:tcPr>
                 </a:tc>
@@ -21186,7 +21222,7 @@
                       <a:r>
                         <a:rPr lang="en-US" sz="1300" dirty="0">
                           <a:solidFill>
-                            <a:srgbClr val="1B1F2E"/>
+                            <a:srgbClr val="000000"/>
                           </a:solidFill>
                           <a:latin typeface="Calibri" pitchFamily="34" charset="0"/>
                           <a:ea typeface="Calibri" pitchFamily="34" charset="-122"/>
@@ -21239,7 +21275,7 @@
                       <a:tailEnd type="none" w="med" len="med"/>
                     </a:lnB>
                     <a:solidFill>
-                      <a:srgbClr val="EEF3F8"/>
+                      <a:srgbClr val="EDEDED"/>
                     </a:solidFill>
                   </a:tcPr>
                 </a:tc>
@@ -21309,7 +21345,7 @@
                       <a:tailEnd type="none" w="med" len="med"/>
                     </a:lnB>
                     <a:solidFill>
-                      <a:srgbClr val="1F3A5F"/>
+                      <a:srgbClr val="333333"/>
                     </a:solidFill>
                   </a:tcPr>
                 </a:tc>
@@ -21324,7 +21360,7 @@
                       <a:r>
                         <a:rPr lang="en-US" sz="1300" dirty="0">
                           <a:solidFill>
-                            <a:srgbClr val="1B1F2E"/>
+                            <a:srgbClr val="000000"/>
                           </a:solidFill>
                           <a:latin typeface="Calibri" pitchFamily="34" charset="0"/>
                           <a:ea typeface="Calibri" pitchFamily="34" charset="-122"/>
@@ -21377,7 +21413,7 @@
                       <a:tailEnd type="none" w="med" len="med"/>
                     </a:lnB>
                     <a:solidFill>
-                      <a:srgbClr val="EEF3F8"/>
+                      <a:srgbClr val="EDEDED"/>
                     </a:solidFill>
                   </a:tcPr>
                 </a:tc>
@@ -21416,7 +21452,7 @@
             <a:lvl1pPr>
               <a:defRPr sz="1000">
                 <a:solidFill>
-                  <a:srgbClr val="4A6670"/>
+                  <a:srgbClr val="595959"/>
                 </a:solidFill>
               </a:defRPr>
             </a:lvl1pPr>
@@ -21440,47 +21476,47 @@
 </file>
 
 <file path=ppt/theme/theme1.xml><?xml version="1.0" encoding="utf-8"?>
-<a:theme xmlns:a="http://schemas.openxmlformats.org/drawingml/2006/main" name="Derecho Informatico UFPS">
+<a:theme xmlns:a="http://schemas.openxmlformats.org/drawingml/2006/main" name="Derecho Informatico UFPS BN">
   <a:themeElements>
-    <a:clrScheme name="Derecho Informatico UFPS">
+    <a:clrScheme name="Derecho Informatico UFPS BN">
       <a:dk1>
-        <a:srgbClr val="1B1F2E"/>
+        <a:srgbClr val="000000"/>
       </a:dk1>
       <a:lt1>
         <a:srgbClr val="FFFFFF"/>
       </a:lt1>
       <a:dk2>
-        <a:srgbClr val="1F3A5F"/>
+        <a:srgbClr val="333333"/>
       </a:dk2>
       <a:lt2>
-        <a:srgbClr val="EEF3F8"/>
+        <a:srgbClr val="EDEDED"/>
       </a:lt2>
       <a:accent1>
-        <a:srgbClr val="0E7C86"/>
+        <a:srgbClr val="404040"/>
       </a:accent1>
       <a:accent2>
-        <a:srgbClr val="D9931D"/>
+        <a:srgbClr val="A6A6A6"/>
       </a:accent2>
       <a:accent3>
-        <a:srgbClr val="5B7DB1"/>
+        <a:srgbClr val="737373"/>
       </a:accent3>
       <a:accent4>
-        <a:srgbClr val="B5413F"/>
+        <a:srgbClr val="4D4D4D"/>
       </a:accent4>
       <a:accent5>
-        <a:srgbClr val="4A6670"/>
+        <a:srgbClr val="595959"/>
       </a:accent5>
       <a:accent6>
-        <a:srgbClr val="9BA7B4"/>
+        <a:srgbClr val="BFBFBF"/>
       </a:accent6>
       <a:hlink>
-        <a:srgbClr val="0E7C86"/>
+        <a:srgbClr val="404040"/>
       </a:hlink>
       <a:folHlink>
-        <a:srgbClr val="5B7DB1"/>
+        <a:srgbClr val="666666"/>
       </a:folHlink>
     </a:clrScheme>
-    <a:fontScheme name="Derecho Informatico UFPS">
+    <a:fontScheme name="Derecho Informatico UFPS BN">
       <a:majorFont>
         <a:latin typeface="Cambria"/>
         <a:ea typeface=""/>

--- a/clase-derecho-informatico/DIAPOSITIVAS.pptx
+++ b/clase-derecho-informatico/DIAPOSITIVAS.pptx
@@ -130,13 +130,13 @@
   <p:extLst>
     <p:ext uri="{521415D9-36F7-43E2-AB2F-B90AF26B5E84}">
       <p14:sectionLst xmlns:p14="http://schemas.microsoft.com/office/powerpoint/2010/main">
-        <p14:section name="Apertura" id="{18dfa427-8683-4697-cd80-a63e3dc1e69d}">
+        <p14:section name="Apertura" id="{01578536-ecd2-9390-3217-f03983d241d6}">
           <p14:sldIdLst>
             <p14:sldId id="256"/>
             <p14:sldId id="257"/>
           </p14:sldIdLst>
         </p14:section>
-        <p14:section name="Fundamentos" id="{4c771d39-a643-b884-895d-2fc239228856}">
+        <p14:section name="Fundamentos" id="{83558663-c051-3e95-1bfb-2a42d9b8b99a}">
           <p14:sldIdLst>
             <p14:sldId id="258"/>
             <p14:sldId id="259"/>
@@ -145,7 +145,7 @@
             <p14:sldId id="262"/>
           </p14:sldIdLst>
         </p14:section>
-        <p14:section name="Evolución, objeto y fuentes" id="{0963994f-8ccf-5353-30cf-f7206ac8a87b}">
+        <p14:section name="Evolución, objeto y fuentes" id="{2c5dd3d8-66c5-814e-03e5-7abf4a255a24}">
           <p14:sldIdLst>
             <p14:sldId id="263"/>
             <p14:sldId id="264"/>
@@ -154,14 +154,14 @@
             <p14:sldId id="267"/>
           </p14:sldIdLst>
         </p14:section>
-        <p14:section name="Principios y campos" id="{b223d529-a319-6003-c50a-543657b6bc0d}">
+        <p14:section name="Principios y campos" id="{863301fb-46a3-c4da-f807-7ad27c4c738a}">
           <p14:sldIdLst>
             <p14:sldId id="268"/>
             <p14:sldId id="269"/>
             <p14:sldId id="270"/>
           </p14:sldIdLst>
         </p14:section>
-        <p14:section name="Video y sentencia hito" id="{7bb36d2b-c862-ac7f-667f-279dc30f879f}">
+        <p14:section name="Video y sentencia hito" id="{b36bda21-1920-cc64-dea9-b9519cfc0c77}">
           <p14:sldIdLst>
             <p14:sldId id="271"/>
             <p14:sldId id="272"/>
@@ -170,7 +170,7 @@
             <p14:sldId id="275"/>
           </p14:sldIdLst>
         </p14:section>
-        <p14:section name="Aplicación y cierre" id="{3877039d-f6e0-956c-e18e-bb2580c15910}">
+        <p14:section name="Aplicación y cierre" id="{0eca91ad-399b-4c5b-8f70-1eb0703285fa}">
           <p14:sldIdLst>
             <p14:sldId id="276"/>
             <p14:sldId id="277"/>
@@ -3576,56 +3576,7 @@
       </p:sp>
       <p:sp>
         <p:nvSpPr>
-          <p:cNvPr id="4" name="Shape 2"/>
-          <p:cNvSpPr/>
-          <p:nvPr/>
-        </p:nvSpPr>
-        <p:spPr>
-          <a:xfrm>
-            <a:off x="548640" y="822960"/>
-            <a:ext cx="1005840" cy="1005840"/>
-          </a:xfrm>
-          <a:prstGeom prst="ellipse">
-            <a:avLst/>
-          </a:prstGeom>
-          <a:solidFill>
-            <a:srgbClr val="404040"/>
-          </a:solidFill>
-          <a:ln w="12700">
-            <a:solidFill>
-              <a:srgbClr val="404040"/>
-            </a:solidFill>
-            <a:prstDash val="solid"/>
-          </a:ln>
-        </p:spPr>
-      </p:sp>
-      <p:pic>
-        <p:nvPicPr>
-          <p:cNvPr id="5" name="Image 0" descr="preencoded.png">    </p:cNvPr>
-          <p:cNvPicPr>
-            <a:picLocks noChangeAspect="1"/>
-          </p:cNvPicPr>
-          <p:nvPr/>
-        </p:nvPicPr>
-        <p:blipFill>
-          <a:blip r:embed="rId1"/>
-          <a:stretch>
-            <a:fillRect/>
-          </a:stretch>
-        </p:blipFill>
-        <p:spPr>
-          <a:xfrm>
-            <a:off x="800100" y="1074420"/>
-            <a:ext cx="502920" cy="502920"/>
-          </a:xfrm>
-          <a:prstGeom prst="rect">
-            <a:avLst/>
-          </a:prstGeom>
-        </p:spPr>
-      </p:pic>
-      <p:sp>
-        <p:nvSpPr>
-          <p:cNvPr id="6" name="Text 3"/>
+          <p:cNvPr id="4" name="Text 2"/>
           <p:cNvSpPr txBox="1"/>
           <p:nvPr/>
         </p:nvSpPr>
@@ -3731,11 +3682,11 @@
         <p:spPr>
           <a:xfrm>
             <a:off x="548640" y="1508760"/>
-            <a:ext cx="3520440" cy="3749040"/>
+            <a:ext cx="3520440" cy="3200400"/>
           </a:xfrm>
           <a:prstGeom prst="roundRect">
             <a:avLst>
-              <a:gd name="adj" fmla="val 2078"/>
+              <a:gd name="adj" fmla="val 2286"/>
             </a:avLst>
           </a:prstGeom>
           <a:solidFill>
@@ -3751,175 +3702,126 @@
       </p:sp>
       <p:sp>
         <p:nvSpPr>
-          <p:cNvPr id="4" name="Shape 2"/>
+          <p:cNvPr id="4" name="Text 2"/>
+          <p:cNvSpPr txBox="1"/>
+          <p:nvPr/>
+        </p:nvSpPr>
+        <p:spPr>
+          <a:xfrm>
+            <a:off x="777240" y="1691640"/>
+            <a:ext cx="3063240" cy="822960"/>
+          </a:xfrm>
+          <a:prstGeom prst="rect">
+            <a:avLst/>
+          </a:prstGeom>
+          <a:noFill/>
+          <a:ln/>
+        </p:spPr>
+        <p:txBody>
+          <a:bodyPr wrap="square" lIns="0" tIns="0" rIns="0" bIns="0" rtlCol="0" anchor="t"/>
+          <a:lstStyle/>
+          <a:p>
+            <a:pPr algn="ctr" indent="0" marL="0">
+              <a:buNone/>
+            </a:pPr>
+            <a:r>
+              <a:rPr lang="en-US" sz="1600" b="1" dirty="0">
+                <a:solidFill>
+                  <a:schemeClr val="bg1"/>
+                </a:solidFill>
+              </a:rPr>
+              <a:t>La información sobre las personas</a:t>
+            </a:r>
+            <a:endParaRPr lang="en-US" sz="1600" dirty="0"/>
+          </a:p>
+        </p:txBody>
+      </p:sp>
+      <p:sp>
+        <p:nvSpPr>
+          <p:cNvPr id="5" name="Text 3"/>
+          <p:cNvSpPr txBox="1"/>
+          <p:nvPr/>
+        </p:nvSpPr>
+        <p:spPr>
+          <a:xfrm>
+            <a:off x="777240" y="2606040"/>
+            <a:ext cx="3063240" cy="1097280"/>
+          </a:xfrm>
+          <a:prstGeom prst="rect">
+            <a:avLst/>
+          </a:prstGeom>
+          <a:noFill/>
+          <a:ln/>
+        </p:spPr>
+        <p:txBody>
+          <a:bodyPr wrap="square" lIns="0" tIns="0" rIns="0" bIns="0" rtlCol="0" anchor="t"/>
+          <a:lstStyle/>
+          <a:p>
+            <a:pPr algn="ctr" indent="0" marL="0">
+              <a:buNone/>
+            </a:pPr>
+            <a:r>
+              <a:rPr lang="en-US" sz="1350" dirty="0">
+                <a:solidFill>
+                  <a:schemeClr val="accent6"/>
+                </a:solidFill>
+              </a:rPr>
+              <a:t>Datos personales, habeas data, identidad digital, imagen y voz.</a:t>
+            </a:r>
+            <a:endParaRPr lang="en-US" sz="1350" dirty="0"/>
+          </a:p>
+        </p:txBody>
+      </p:sp>
+      <p:sp>
+        <p:nvSpPr>
+          <p:cNvPr id="6" name="Text 4"/>
+          <p:cNvSpPr txBox="1"/>
+          <p:nvPr/>
+        </p:nvSpPr>
+        <p:spPr>
+          <a:xfrm>
+            <a:off x="777240" y="3794760"/>
+            <a:ext cx="3063240" cy="777240"/>
+          </a:xfrm>
+          <a:prstGeom prst="rect">
+            <a:avLst/>
+          </a:prstGeom>
+          <a:noFill/>
+          <a:ln/>
+        </p:spPr>
+        <p:txBody>
+          <a:bodyPr wrap="square" lIns="0" tIns="0" rIns="0" bIns="0" rtlCol="0" anchor="t"/>
+          <a:lstStyle/>
+          <a:p>
+            <a:pPr algn="ctr" indent="0" marL="0">
+              <a:buNone/>
+            </a:pPr>
+            <a:r>
+              <a:rPr lang="en-US" sz="1250" dirty="0">
+                <a:solidFill>
+                  <a:schemeClr val="accent2"/>
+                </a:solidFill>
+              </a:rPr>
+              <a:t>Art. 15 C.P.; Leyes 1266 de 2008 y 1581 de 2012</a:t>
+            </a:r>
+            <a:endParaRPr lang="en-US" sz="1250" dirty="0"/>
+          </a:p>
+        </p:txBody>
+      </p:sp>
+      <p:sp>
+        <p:nvSpPr>
+          <p:cNvPr id="7" name="Shape 5"/>
           <p:cNvSpPr/>
           <p:nvPr/>
         </p:nvSpPr>
         <p:spPr>
           <a:xfrm>
-            <a:off x="1828800" y="1737360"/>
-            <a:ext cx="960120" cy="960120"/>
-          </a:xfrm>
-          <a:prstGeom prst="ellipse">
-            <a:avLst/>
-          </a:prstGeom>
-          <a:solidFill>
-            <a:srgbClr val="A6A6A6"/>
-          </a:solidFill>
-          <a:ln w="12700">
-            <a:solidFill>
-              <a:srgbClr val="A6A6A6"/>
-            </a:solidFill>
-            <a:prstDash val="solid"/>
-          </a:ln>
-        </p:spPr>
-      </p:sp>
-      <p:pic>
-        <p:nvPicPr>
-          <p:cNvPr id="5" name="Image 0" descr="preencoded.png">    </p:cNvPr>
-          <p:cNvPicPr>
-            <a:picLocks noChangeAspect="1"/>
-          </p:cNvPicPr>
-          <p:nvPr/>
-        </p:nvPicPr>
-        <p:blipFill>
-          <a:blip r:embed="rId1"/>
-          <a:stretch>
-            <a:fillRect/>
-          </a:stretch>
-        </p:blipFill>
-        <p:spPr>
-          <a:xfrm>
-            <a:off x="2068830" y="1977390"/>
-            <a:ext cx="480060" cy="480060"/>
-          </a:xfrm>
-          <a:prstGeom prst="rect">
-            <a:avLst/>
-          </a:prstGeom>
-        </p:spPr>
-      </p:pic>
-      <p:sp>
-        <p:nvSpPr>
-          <p:cNvPr id="6" name="Text 3"/>
-          <p:cNvSpPr txBox="1"/>
-          <p:nvPr/>
-        </p:nvSpPr>
-        <p:spPr>
-          <a:xfrm>
-            <a:off x="777240" y="2834640"/>
-            <a:ext cx="3063240" cy="731520"/>
-          </a:xfrm>
-          <a:prstGeom prst="rect">
-            <a:avLst/>
-          </a:prstGeom>
-          <a:noFill/>
-          <a:ln/>
-        </p:spPr>
-        <p:txBody>
-          <a:bodyPr wrap="square" lIns="0" tIns="0" rIns="0" bIns="0" rtlCol="0" anchor="t"/>
-          <a:lstStyle/>
-          <a:p>
-            <a:pPr algn="ctr" indent="0" marL="0">
-              <a:buNone/>
-            </a:pPr>
-            <a:r>
-              <a:rPr lang="en-US" sz="1600" b="1" dirty="0">
-                <a:solidFill>
-                  <a:schemeClr val="bg1"/>
-                </a:solidFill>
-              </a:rPr>
-              <a:t>La información sobre las personas</a:t>
-            </a:r>
-            <a:endParaRPr lang="en-US" sz="1600" dirty="0"/>
-          </a:p>
-        </p:txBody>
-      </p:sp>
-      <p:sp>
-        <p:nvSpPr>
-          <p:cNvPr id="7" name="Text 4"/>
-          <p:cNvSpPr txBox="1"/>
-          <p:nvPr/>
-        </p:nvSpPr>
-        <p:spPr>
-          <a:xfrm>
-            <a:off x="777240" y="3611880"/>
-            <a:ext cx="3063240" cy="914400"/>
-          </a:xfrm>
-          <a:prstGeom prst="rect">
-            <a:avLst/>
-          </a:prstGeom>
-          <a:noFill/>
-          <a:ln/>
-        </p:spPr>
-        <p:txBody>
-          <a:bodyPr wrap="square" lIns="0" tIns="0" rIns="0" bIns="0" rtlCol="0" anchor="t"/>
-          <a:lstStyle/>
-          <a:p>
-            <a:pPr algn="ctr" indent="0" marL="0">
-              <a:buNone/>
-            </a:pPr>
-            <a:r>
-              <a:rPr lang="en-US" sz="1350" dirty="0">
-                <a:solidFill>
-                  <a:schemeClr val="accent6"/>
-                </a:solidFill>
-              </a:rPr>
-              <a:t>Datos personales, habeas data, identidad digital, imagen y voz.</a:t>
-            </a:r>
-            <a:endParaRPr lang="en-US" sz="1350" dirty="0"/>
-          </a:p>
-        </p:txBody>
-      </p:sp>
-      <p:sp>
-        <p:nvSpPr>
-          <p:cNvPr id="8" name="Text 5"/>
-          <p:cNvSpPr txBox="1"/>
-          <p:nvPr/>
-        </p:nvSpPr>
-        <p:spPr>
-          <a:xfrm>
-            <a:off x="777240" y="4572000"/>
-            <a:ext cx="3063240" cy="594360"/>
-          </a:xfrm>
-          <a:prstGeom prst="rect">
-            <a:avLst/>
-          </a:prstGeom>
-          <a:noFill/>
-          <a:ln/>
-        </p:spPr>
-        <p:txBody>
-          <a:bodyPr wrap="square" lIns="0" tIns="0" rIns="0" bIns="0" rtlCol="0" anchor="t"/>
-          <a:lstStyle/>
-          <a:p>
-            <a:pPr algn="ctr" indent="0" marL="0">
-              <a:buNone/>
-            </a:pPr>
-            <a:r>
-              <a:rPr lang="en-US" sz="1250" dirty="0">
-                <a:solidFill>
-                  <a:schemeClr val="accent2"/>
-                </a:solidFill>
-              </a:rPr>
-              <a:t>Art. 15 C.P.; Leyes 1266 de 2008 y 1581 de 2012</a:t>
-            </a:r>
-            <a:endParaRPr lang="en-US" sz="1250" dirty="0"/>
-          </a:p>
-        </p:txBody>
-      </p:sp>
-      <p:sp>
-        <p:nvSpPr>
-          <p:cNvPr id="9" name="Shape 6"/>
-          <p:cNvSpPr/>
-          <p:nvPr/>
-        </p:nvSpPr>
-        <p:spPr>
-          <a:xfrm>
             <a:off x="4297680" y="1508760"/>
-            <a:ext cx="3520440" cy="3749040"/>
+            <a:ext cx="3520440" cy="3200400"/>
           </a:xfrm>
           <a:prstGeom prst="roundRect">
             <a:avLst>
-              <a:gd name="adj" fmla="val 2078"/>
+              <a:gd name="adj" fmla="val 2286"/>
             </a:avLst>
           </a:prstGeom>
           <a:solidFill>
@@ -3935,175 +3837,126 @@
       </p:sp>
       <p:sp>
         <p:nvSpPr>
-          <p:cNvPr id="10" name="Shape 7"/>
+          <p:cNvPr id="8" name="Text 6"/>
+          <p:cNvSpPr txBox="1"/>
+          <p:nvPr/>
+        </p:nvSpPr>
+        <p:spPr>
+          <a:xfrm>
+            <a:off x="4526280" y="1691640"/>
+            <a:ext cx="3063240" cy="822960"/>
+          </a:xfrm>
+          <a:prstGeom prst="rect">
+            <a:avLst/>
+          </a:prstGeom>
+          <a:noFill/>
+          <a:ln/>
+        </p:spPr>
+        <p:txBody>
+          <a:bodyPr wrap="square" lIns="0" tIns="0" rIns="0" bIns="0" rtlCol="0" anchor="t"/>
+          <a:lstStyle/>
+          <a:p>
+            <a:pPr algn="ctr" indent="0" marL="0">
+              <a:buNone/>
+            </a:pPr>
+            <a:r>
+              <a:rPr lang="en-US" sz="1600" b="1" dirty="0">
+                <a:solidFill>
+                  <a:schemeClr val="bg1"/>
+                </a:solidFill>
+              </a:rPr>
+              <a:t>Los actos y hechos por medios electrónicos</a:t>
+            </a:r>
+            <a:endParaRPr lang="en-US" sz="1600" dirty="0"/>
+          </a:p>
+        </p:txBody>
+      </p:sp>
+      <p:sp>
+        <p:nvSpPr>
+          <p:cNvPr id="9" name="Text 7"/>
+          <p:cNvSpPr txBox="1"/>
+          <p:nvPr/>
+        </p:nvSpPr>
+        <p:spPr>
+          <a:xfrm>
+            <a:off x="4526280" y="2606040"/>
+            <a:ext cx="3063240" cy="1097280"/>
+          </a:xfrm>
+          <a:prstGeom prst="rect">
+            <a:avLst/>
+          </a:prstGeom>
+          <a:noFill/>
+          <a:ln/>
+        </p:spPr>
+        <p:txBody>
+          <a:bodyPr wrap="square" lIns="0" tIns="0" rIns="0" bIns="0" rtlCol="0" anchor="t"/>
+          <a:lstStyle/>
+          <a:p>
+            <a:pPr algn="ctr" indent="0" marL="0">
+              <a:buNone/>
+            </a:pPr>
+            <a:r>
+              <a:rPr lang="en-US" sz="1350" dirty="0">
+                <a:solidFill>
+                  <a:schemeClr val="accent6"/>
+                </a:solidFill>
+              </a:rPr>
+              <a:t>Contratos, firmas, documentos, prueba, trámites y notificaciones.</a:t>
+            </a:r>
+            <a:endParaRPr lang="en-US" sz="1350" dirty="0"/>
+          </a:p>
+        </p:txBody>
+      </p:sp>
+      <p:sp>
+        <p:nvSpPr>
+          <p:cNvPr id="10" name="Text 8"/>
+          <p:cNvSpPr txBox="1"/>
+          <p:nvPr/>
+        </p:nvSpPr>
+        <p:spPr>
+          <a:xfrm>
+            <a:off x="4526280" y="3794760"/>
+            <a:ext cx="3063240" cy="777240"/>
+          </a:xfrm>
+          <a:prstGeom prst="rect">
+            <a:avLst/>
+          </a:prstGeom>
+          <a:noFill/>
+          <a:ln/>
+        </p:spPr>
+        <p:txBody>
+          <a:bodyPr wrap="square" lIns="0" tIns="0" rIns="0" bIns="0" rtlCol="0" anchor="t"/>
+          <a:lstStyle/>
+          <a:p>
+            <a:pPr algn="ctr" indent="0" marL="0">
+              <a:buNone/>
+            </a:pPr>
+            <a:r>
+              <a:rPr lang="en-US" sz="1250" dirty="0">
+                <a:solidFill>
+                  <a:schemeClr val="accent2"/>
+                </a:solidFill>
+              </a:rPr>
+              <a:t>Ley 527 de 1999; CGP art. 247; Ley 2213 de 2022</a:t>
+            </a:r>
+            <a:endParaRPr lang="en-US" sz="1250" dirty="0"/>
+          </a:p>
+        </p:txBody>
+      </p:sp>
+      <p:sp>
+        <p:nvSpPr>
+          <p:cNvPr id="11" name="Shape 9"/>
           <p:cNvSpPr/>
           <p:nvPr/>
         </p:nvSpPr>
         <p:spPr>
           <a:xfrm>
-            <a:off x="5577840" y="1737360"/>
-            <a:ext cx="960120" cy="960120"/>
-          </a:xfrm>
-          <a:prstGeom prst="ellipse">
-            <a:avLst/>
-          </a:prstGeom>
-          <a:solidFill>
-            <a:srgbClr val="A6A6A6"/>
-          </a:solidFill>
-          <a:ln w="12700">
-            <a:solidFill>
-              <a:srgbClr val="A6A6A6"/>
-            </a:solidFill>
-            <a:prstDash val="solid"/>
-          </a:ln>
-        </p:spPr>
-      </p:sp>
-      <p:pic>
-        <p:nvPicPr>
-          <p:cNvPr id="11" name="Image 1" descr="preencoded.png">    </p:cNvPr>
-          <p:cNvPicPr>
-            <a:picLocks noChangeAspect="1"/>
-          </p:cNvPicPr>
-          <p:nvPr/>
-        </p:nvPicPr>
-        <p:blipFill>
-          <a:blip r:embed="rId2"/>
-          <a:stretch>
-            <a:fillRect/>
-          </a:stretch>
-        </p:blipFill>
-        <p:spPr>
-          <a:xfrm>
-            <a:off x="5817870" y="1977390"/>
-            <a:ext cx="480060" cy="480060"/>
-          </a:xfrm>
-          <a:prstGeom prst="rect">
-            <a:avLst/>
-          </a:prstGeom>
-        </p:spPr>
-      </p:pic>
-      <p:sp>
-        <p:nvSpPr>
-          <p:cNvPr id="12" name="Text 8"/>
-          <p:cNvSpPr txBox="1"/>
-          <p:nvPr/>
-        </p:nvSpPr>
-        <p:spPr>
-          <a:xfrm>
-            <a:off x="4526280" y="2834640"/>
-            <a:ext cx="3063240" cy="731520"/>
-          </a:xfrm>
-          <a:prstGeom prst="rect">
-            <a:avLst/>
-          </a:prstGeom>
-          <a:noFill/>
-          <a:ln/>
-        </p:spPr>
-        <p:txBody>
-          <a:bodyPr wrap="square" lIns="0" tIns="0" rIns="0" bIns="0" rtlCol="0" anchor="t"/>
-          <a:lstStyle/>
-          <a:p>
-            <a:pPr algn="ctr" indent="0" marL="0">
-              <a:buNone/>
-            </a:pPr>
-            <a:r>
-              <a:rPr lang="en-US" sz="1600" b="1" dirty="0">
-                <a:solidFill>
-                  <a:schemeClr val="bg1"/>
-                </a:solidFill>
-              </a:rPr>
-              <a:t>Los actos y hechos por medios electrónicos</a:t>
-            </a:r>
-            <a:endParaRPr lang="en-US" sz="1600" dirty="0"/>
-          </a:p>
-        </p:txBody>
-      </p:sp>
-      <p:sp>
-        <p:nvSpPr>
-          <p:cNvPr id="13" name="Text 9"/>
-          <p:cNvSpPr txBox="1"/>
-          <p:nvPr/>
-        </p:nvSpPr>
-        <p:spPr>
-          <a:xfrm>
-            <a:off x="4526280" y="3611880"/>
-            <a:ext cx="3063240" cy="914400"/>
-          </a:xfrm>
-          <a:prstGeom prst="rect">
-            <a:avLst/>
-          </a:prstGeom>
-          <a:noFill/>
-          <a:ln/>
-        </p:spPr>
-        <p:txBody>
-          <a:bodyPr wrap="square" lIns="0" tIns="0" rIns="0" bIns="0" rtlCol="0" anchor="t"/>
-          <a:lstStyle/>
-          <a:p>
-            <a:pPr algn="ctr" indent="0" marL="0">
-              <a:buNone/>
-            </a:pPr>
-            <a:r>
-              <a:rPr lang="en-US" sz="1350" dirty="0">
-                <a:solidFill>
-                  <a:schemeClr val="accent6"/>
-                </a:solidFill>
-              </a:rPr>
-              <a:t>Contratos, firmas, documentos, prueba, trámites y notificaciones.</a:t>
-            </a:r>
-            <a:endParaRPr lang="en-US" sz="1350" dirty="0"/>
-          </a:p>
-        </p:txBody>
-      </p:sp>
-      <p:sp>
-        <p:nvSpPr>
-          <p:cNvPr id="14" name="Text 10"/>
-          <p:cNvSpPr txBox="1"/>
-          <p:nvPr/>
-        </p:nvSpPr>
-        <p:spPr>
-          <a:xfrm>
-            <a:off x="4526280" y="4572000"/>
-            <a:ext cx="3063240" cy="594360"/>
-          </a:xfrm>
-          <a:prstGeom prst="rect">
-            <a:avLst/>
-          </a:prstGeom>
-          <a:noFill/>
-          <a:ln/>
-        </p:spPr>
-        <p:txBody>
-          <a:bodyPr wrap="square" lIns="0" tIns="0" rIns="0" bIns="0" rtlCol="0" anchor="t"/>
-          <a:lstStyle/>
-          <a:p>
-            <a:pPr algn="ctr" indent="0" marL="0">
-              <a:buNone/>
-            </a:pPr>
-            <a:r>
-              <a:rPr lang="en-US" sz="1250" dirty="0">
-                <a:solidFill>
-                  <a:schemeClr val="accent2"/>
-                </a:solidFill>
-              </a:rPr>
-              <a:t>Ley 527 de 1999; CGP art. 247; Ley 2213 de 2022</a:t>
-            </a:r>
-            <a:endParaRPr lang="en-US" sz="1250" dirty="0"/>
-          </a:p>
-        </p:txBody>
-      </p:sp>
-      <p:sp>
-        <p:nvSpPr>
-          <p:cNvPr id="15" name="Shape 11"/>
-          <p:cNvSpPr/>
-          <p:nvPr/>
-        </p:nvSpPr>
-        <p:spPr>
-          <a:xfrm>
             <a:off x="8046720" y="1508760"/>
-            <a:ext cx="3520440" cy="3749040"/>
+            <a:ext cx="3520440" cy="3200400"/>
           </a:xfrm>
           <a:prstGeom prst="roundRect">
             <a:avLst>
-              <a:gd name="adj" fmla="val 2078"/>
+              <a:gd name="adj" fmla="val 2286"/>
             </a:avLst>
           </a:prstGeom>
           <a:solidFill>
@@ -4119,170 +3972,121 @@
       </p:sp>
       <p:sp>
         <p:nvSpPr>
-          <p:cNvPr id="16" name="Shape 12"/>
+          <p:cNvPr id="12" name="Text 10"/>
+          <p:cNvSpPr txBox="1"/>
+          <p:nvPr/>
+        </p:nvSpPr>
+        <p:spPr>
+          <a:xfrm>
+            <a:off x="8275320" y="1691640"/>
+            <a:ext cx="3063240" cy="822960"/>
+          </a:xfrm>
+          <a:prstGeom prst="rect">
+            <a:avLst/>
+          </a:prstGeom>
+          <a:noFill/>
+          <a:ln/>
+        </p:spPr>
+        <p:txBody>
+          <a:bodyPr wrap="square" lIns="0" tIns="0" rIns="0" bIns="0" rtlCol="0" anchor="t"/>
+          <a:lstStyle/>
+          <a:p>
+            <a:pPr algn="ctr" indent="0" marL="0">
+              <a:buNone/>
+            </a:pPr>
+            <a:r>
+              <a:rPr lang="en-US" sz="1600" b="1" dirty="0">
+                <a:solidFill>
+                  <a:schemeClr val="bg1"/>
+                </a:solidFill>
+              </a:rPr>
+              <a:t>Las conductas lesivas contra sistemas e información</a:t>
+            </a:r>
+            <a:endParaRPr lang="en-US" sz="1600" dirty="0"/>
+          </a:p>
+        </p:txBody>
+      </p:sp>
+      <p:sp>
+        <p:nvSpPr>
+          <p:cNvPr id="13" name="Text 11"/>
+          <p:cNvSpPr txBox="1"/>
+          <p:nvPr/>
+        </p:nvSpPr>
+        <p:spPr>
+          <a:xfrm>
+            <a:off x="8275320" y="2606040"/>
+            <a:ext cx="3063240" cy="1097280"/>
+          </a:xfrm>
+          <a:prstGeom prst="rect">
+            <a:avLst/>
+          </a:prstGeom>
+          <a:noFill/>
+          <a:ln/>
+        </p:spPr>
+        <p:txBody>
+          <a:bodyPr wrap="square" lIns="0" tIns="0" rIns="0" bIns="0" rtlCol="0" anchor="t"/>
+          <a:lstStyle/>
+          <a:p>
+            <a:pPr algn="ctr" indent="0" marL="0">
+              <a:buNone/>
+            </a:pPr>
+            <a:r>
+              <a:rPr lang="en-US" sz="1350" dirty="0">
+                <a:solidFill>
+                  <a:schemeClr val="accent6"/>
+                </a:solidFill>
+              </a:rPr>
+              <a:t>Acceso abusivo, interceptación, daño, hurto por medios informáticos, suplantación.</a:t>
+            </a:r>
+            <a:endParaRPr lang="en-US" sz="1350" dirty="0"/>
+          </a:p>
+        </p:txBody>
+      </p:sp>
+      <p:sp>
+        <p:nvSpPr>
+          <p:cNvPr id="14" name="Text 12"/>
+          <p:cNvSpPr txBox="1"/>
+          <p:nvPr/>
+        </p:nvSpPr>
+        <p:spPr>
+          <a:xfrm>
+            <a:off x="8275320" y="3794760"/>
+            <a:ext cx="3063240" cy="777240"/>
+          </a:xfrm>
+          <a:prstGeom prst="rect">
+            <a:avLst/>
+          </a:prstGeom>
+          <a:noFill/>
+          <a:ln/>
+        </p:spPr>
+        <p:txBody>
+          <a:bodyPr wrap="square" lIns="0" tIns="0" rIns="0" bIns="0" rtlCol="0" anchor="t"/>
+          <a:lstStyle/>
+          <a:p>
+            <a:pPr algn="ctr" indent="0" marL="0">
+              <a:buNone/>
+            </a:pPr>
+            <a:r>
+              <a:rPr lang="en-US" sz="1250" dirty="0">
+                <a:solidFill>
+                  <a:schemeClr val="accent2"/>
+                </a:solidFill>
+              </a:rPr>
+              <a:t>Ley 1273 de 2009; Convenio de Budapest</a:t>
+            </a:r>
+            <a:endParaRPr lang="en-US" sz="1250" dirty="0"/>
+          </a:p>
+        </p:txBody>
+      </p:sp>
+      <p:sp>
+        <p:nvSpPr>
+          <p:cNvPr id="15" name="Shape 13"/>
           <p:cNvSpPr/>
           <p:nvPr/>
         </p:nvSpPr>
         <p:spPr>
           <a:xfrm>
-            <a:off x="9326880" y="1737360"/>
-            <a:ext cx="960120" cy="960120"/>
-          </a:xfrm>
-          <a:prstGeom prst="ellipse">
-            <a:avLst/>
-          </a:prstGeom>
-          <a:solidFill>
-            <a:srgbClr val="A6A6A6"/>
-          </a:solidFill>
-          <a:ln w="12700">
-            <a:solidFill>
-              <a:srgbClr val="A6A6A6"/>
-            </a:solidFill>
-            <a:prstDash val="solid"/>
-          </a:ln>
-        </p:spPr>
-      </p:sp>
-      <p:pic>
-        <p:nvPicPr>
-          <p:cNvPr id="17" name="Image 2" descr="preencoded.png">    </p:cNvPr>
-          <p:cNvPicPr>
-            <a:picLocks noChangeAspect="1"/>
-          </p:cNvPicPr>
-          <p:nvPr/>
-        </p:nvPicPr>
-        <p:blipFill>
-          <a:blip r:embed="rId3"/>
-          <a:stretch>
-            <a:fillRect/>
-          </a:stretch>
-        </p:blipFill>
-        <p:spPr>
-          <a:xfrm>
-            <a:off x="9566910" y="1977390"/>
-            <a:ext cx="480060" cy="480060"/>
-          </a:xfrm>
-          <a:prstGeom prst="rect">
-            <a:avLst/>
-          </a:prstGeom>
-        </p:spPr>
-      </p:pic>
-      <p:sp>
-        <p:nvSpPr>
-          <p:cNvPr id="18" name="Text 13"/>
-          <p:cNvSpPr txBox="1"/>
-          <p:nvPr/>
-        </p:nvSpPr>
-        <p:spPr>
-          <a:xfrm>
-            <a:off x="8275320" y="2834640"/>
-            <a:ext cx="3063240" cy="731520"/>
-          </a:xfrm>
-          <a:prstGeom prst="rect">
-            <a:avLst/>
-          </a:prstGeom>
-          <a:noFill/>
-          <a:ln/>
-        </p:spPr>
-        <p:txBody>
-          <a:bodyPr wrap="square" lIns="0" tIns="0" rIns="0" bIns="0" rtlCol="0" anchor="t"/>
-          <a:lstStyle/>
-          <a:p>
-            <a:pPr algn="ctr" indent="0" marL="0">
-              <a:buNone/>
-            </a:pPr>
-            <a:r>
-              <a:rPr lang="en-US" sz="1600" b="1" dirty="0">
-                <a:solidFill>
-                  <a:schemeClr val="bg1"/>
-                </a:solidFill>
-              </a:rPr>
-              <a:t>Las conductas lesivas contra sistemas e información</a:t>
-            </a:r>
-            <a:endParaRPr lang="en-US" sz="1600" dirty="0"/>
-          </a:p>
-        </p:txBody>
-      </p:sp>
-      <p:sp>
-        <p:nvSpPr>
-          <p:cNvPr id="19" name="Text 14"/>
-          <p:cNvSpPr txBox="1"/>
-          <p:nvPr/>
-        </p:nvSpPr>
-        <p:spPr>
-          <a:xfrm>
-            <a:off x="8275320" y="3611880"/>
-            <a:ext cx="3063240" cy="914400"/>
-          </a:xfrm>
-          <a:prstGeom prst="rect">
-            <a:avLst/>
-          </a:prstGeom>
-          <a:noFill/>
-          <a:ln/>
-        </p:spPr>
-        <p:txBody>
-          <a:bodyPr wrap="square" lIns="0" tIns="0" rIns="0" bIns="0" rtlCol="0" anchor="t"/>
-          <a:lstStyle/>
-          <a:p>
-            <a:pPr algn="ctr" indent="0" marL="0">
-              <a:buNone/>
-            </a:pPr>
-            <a:r>
-              <a:rPr lang="en-US" sz="1350" dirty="0">
-                <a:solidFill>
-                  <a:schemeClr val="accent6"/>
-                </a:solidFill>
-              </a:rPr>
-              <a:t>Acceso abusivo, interceptación, daño, hurto por medios informáticos, suplantación.</a:t>
-            </a:r>
-            <a:endParaRPr lang="en-US" sz="1350" dirty="0"/>
-          </a:p>
-        </p:txBody>
-      </p:sp>
-      <p:sp>
-        <p:nvSpPr>
-          <p:cNvPr id="20" name="Text 15"/>
-          <p:cNvSpPr txBox="1"/>
-          <p:nvPr/>
-        </p:nvSpPr>
-        <p:spPr>
-          <a:xfrm>
-            <a:off x="8275320" y="4572000"/>
-            <a:ext cx="3063240" cy="594360"/>
-          </a:xfrm>
-          <a:prstGeom prst="rect">
-            <a:avLst/>
-          </a:prstGeom>
-          <a:noFill/>
-          <a:ln/>
-        </p:spPr>
-        <p:txBody>
-          <a:bodyPr wrap="square" lIns="0" tIns="0" rIns="0" bIns="0" rtlCol="0" anchor="t"/>
-          <a:lstStyle/>
-          <a:p>
-            <a:pPr algn="ctr" indent="0" marL="0">
-              <a:buNone/>
-            </a:pPr>
-            <a:r>
-              <a:rPr lang="en-US" sz="1250" dirty="0">
-                <a:solidFill>
-                  <a:schemeClr val="accent2"/>
-                </a:solidFill>
-              </a:rPr>
-              <a:t>Ley 1273 de 2009; Convenio de Budapest</a:t>
-            </a:r>
-            <a:endParaRPr lang="en-US" sz="1250" dirty="0"/>
-          </a:p>
-        </p:txBody>
-      </p:sp>
-      <p:sp>
-        <p:nvSpPr>
-          <p:cNvPr id="21" name="Shape 16"/>
-          <p:cNvSpPr/>
-          <p:nvPr/>
-        </p:nvSpPr>
-        <p:spPr>
-          <a:xfrm>
-            <a:off x="548640" y="5486400"/>
+            <a:off x="548640" y="5029200"/>
             <a:ext cx="11091672" cy="685800"/>
           </a:xfrm>
           <a:prstGeom prst="roundRect">
@@ -4303,13 +4107,13 @@
       </p:sp>
       <p:sp>
         <p:nvSpPr>
-          <p:cNvPr id="22" name="Text 17"/>
+          <p:cNvPr id="16" name="Text 14"/>
           <p:cNvSpPr txBox="1"/>
           <p:nvPr/>
         </p:nvSpPr>
         <p:spPr>
           <a:xfrm>
-            <a:off x="822960" y="5486400"/>
+            <a:off x="822960" y="5029200"/>
             <a:ext cx="10543032" cy="685800"/>
           </a:xfrm>
           <a:prstGeom prst="rect">
@@ -5086,63 +4890,14 @@
       </p:sp>
       <p:sp>
         <p:nvSpPr>
-          <p:cNvPr id="4" name="Shape 2"/>
-          <p:cNvSpPr/>
+          <p:cNvPr id="4" name="Text 2"/>
+          <p:cNvSpPr txBox="1"/>
           <p:nvPr/>
         </p:nvSpPr>
         <p:spPr>
           <a:xfrm>
             <a:off x="777240" y="1645920"/>
-            <a:ext cx="731520" cy="731520"/>
-          </a:xfrm>
-          <a:prstGeom prst="ellipse">
-            <a:avLst/>
-          </a:prstGeom>
-          <a:solidFill>
-            <a:srgbClr val="404040"/>
-          </a:solidFill>
-          <a:ln w="12700">
-            <a:solidFill>
-              <a:srgbClr val="404040"/>
-            </a:solidFill>
-            <a:prstDash val="solid"/>
-          </a:ln>
-        </p:spPr>
-      </p:sp>
-      <p:pic>
-        <p:nvPicPr>
-          <p:cNvPr id="5" name="Image 0" descr="preencoded.png">    </p:cNvPr>
-          <p:cNvPicPr>
-            <a:picLocks noChangeAspect="1"/>
-          </p:cNvPicPr>
-          <p:nvPr/>
-        </p:nvPicPr>
-        <p:blipFill>
-          <a:blip r:embed="rId1"/>
-          <a:stretch>
-            <a:fillRect/>
-          </a:stretch>
-        </p:blipFill>
-        <p:spPr>
-          <a:xfrm>
-            <a:off x="960120" y="1828800"/>
-            <a:ext cx="365760" cy="365760"/>
-          </a:xfrm>
-          <a:prstGeom prst="rect">
-            <a:avLst/>
-          </a:prstGeom>
-        </p:spPr>
-      </p:pic>
-      <p:sp>
-        <p:nvSpPr>
-          <p:cNvPr id="6" name="Text 3"/>
-          <p:cNvSpPr txBox="1"/>
-          <p:nvPr/>
-        </p:nvSpPr>
-        <p:spPr>
-          <a:xfrm>
-            <a:off x="777240" y="2514600"/>
-            <a:ext cx="4480560" cy="3474720"/>
+            <a:ext cx="4480560" cy="4297680"/>
           </a:xfrm>
           <a:prstGeom prst="rect">
             <a:avLst/>
@@ -5192,6 +4947,27 @@
                 </a:solidFill>
               </a:rPr>
               <a:t>Academia Judicial de Chile, Santiago, 2021 (PDF en línea desde marzo de 2022). Complemento colombiano: Flórez Rojas, M. L. (coord.), Derecho de las tecnologías y las tecnologías para el derecho, GECTI, Ediciones Uniandes, 2022: Presentación (pp. xi-xiv) y «El papel de la academia» (pp. 44-53)</a:t>
+            </a:r>
+            <a:endParaRPr lang="en-US" sz="1250" dirty="0"/>
+          </a:p>
+          <a:p>
+            <a:pPr indent="0" marL="0">
+              <a:buNone/>
+            </a:pPr>
+            <a:r>
+              <a:rPr lang="en-US" sz="1050" u="sng" dirty="0">
+                <a:solidFill>
+                  <a:schemeClr val="accent1"/>
+                </a:solidFill>
+                <a:hlinkClick r:id="rId1" invalidUrl="" action="" tgtFrame="" tooltip="" history="1" highlightClick="0" endSnd="0">
+                  <a:extLst>
+                    <a:ext uri="{A12FA001-AC4F-418D-AE19-62706E023703}">
+                      <ahyp:hlinkClr xmlns:ahyp="http://schemas.microsoft.com/office/drawing/2018/hyperlinkcolor" val="tx"/>
+                    </a:ext>
+                  </a:extLst>
+                </a:hlinkClick>
+              </a:rPr>
+              <a:t>https://academiajudicial.cl/wp-content/uploads/2022/03/Derecho-informatico.pdf</a:t>
             </a:r>
             <a:endParaRPr lang="en-US" sz="1250" dirty="0"/>
           </a:p>
@@ -5212,36 +4988,15 @@
                   </a:extLst>
                 </a:hlinkClick>
               </a:rPr>
-              <a:t>https://academiajudicial.cl/wp-content/uploads/2022/03/Derecho-informatico.pdf</a:t>
+              <a:t>https://ediciones.uniandes.edu.co/library/publication/derecho-de-las-tecnologias-y-las-tecnologias-para-el-derecho</a:t>
             </a:r>
             <a:endParaRPr lang="en-US" sz="1250" dirty="0"/>
           </a:p>
-          <a:p>
-            <a:pPr indent="0" marL="0">
-              <a:buNone/>
-            </a:pPr>
-            <a:r>
-              <a:rPr lang="en-US" sz="1050" u="sng" dirty="0">
-                <a:solidFill>
-                  <a:schemeClr val="accent1"/>
-                </a:solidFill>
-                <a:hlinkClick r:id="rId3" invalidUrl="" action="" tgtFrame="" tooltip="" history="1" highlightClick="0" endSnd="0">
-                  <a:extLst>
-                    <a:ext uri="{A12FA001-AC4F-418D-AE19-62706E023703}">
-                      <ahyp:hlinkClr xmlns:ahyp="http://schemas.microsoft.com/office/drawing/2018/hyperlinkcolor" val="tx"/>
-                    </a:ext>
-                  </a:extLst>
-                </a:hlinkClick>
-              </a:rPr>
-              <a:t>https://ediciones.uniandes.edu.co/library/publication/derecho-de-las-tecnologias-y-las-tecnologias-para-el-derecho</a:t>
-            </a:r>
-            <a:endParaRPr lang="en-US" sz="1250" dirty="0"/>
-          </a:p>
-        </p:txBody>
-      </p:sp>
-      <p:sp>
-        <p:nvSpPr>
-          <p:cNvPr id="7" name="Text 4"/>
+        </p:txBody>
+      </p:sp>
+      <p:sp>
+        <p:nvSpPr>
+          <p:cNvPr id="5" name="Text 3"/>
           <p:cNvSpPr txBox="1"/>
           <p:nvPr/>
         </p:nvSpPr>
@@ -5277,40 +5032,15 @@
       </p:sp>
       <p:sp>
         <p:nvSpPr>
-          <p:cNvPr id="8" name="Shape 5"/>
-          <p:cNvSpPr/>
-          <p:nvPr/>
-        </p:nvSpPr>
-        <p:spPr>
-          <a:xfrm>
-            <a:off x="5852160" y="2057400"/>
+          <p:cNvPr id="6" name="Text 4"/>
+          <p:cNvSpPr txBox="1"/>
+          <p:nvPr/>
+        </p:nvSpPr>
+        <p:spPr>
+          <a:xfrm>
+            <a:off x="5852160" y="1965960"/>
             <a:ext cx="384048" cy="384048"/>
           </a:xfrm>
-          <a:prstGeom prst="ellipse">
-            <a:avLst/>
-          </a:prstGeom>
-          <a:solidFill>
-            <a:srgbClr val="A6A6A6"/>
-          </a:solidFill>
-          <a:ln w="12700">
-            <a:solidFill>
-              <a:srgbClr val="A6A6A6"/>
-            </a:solidFill>
-            <a:prstDash val="solid"/>
-          </a:ln>
-        </p:spPr>
-      </p:sp>
-      <p:sp>
-        <p:nvSpPr>
-          <p:cNvPr id="9" name="Text 6"/>
-          <p:cNvSpPr txBox="1"/>
-          <p:nvPr/>
-        </p:nvSpPr>
-        <p:spPr>
-          <a:xfrm>
-            <a:off x="5852160" y="2057400"/>
-            <a:ext cx="384048" cy="384048"/>
-          </a:xfrm>
           <a:prstGeom prst="rect">
             <a:avLst/>
           </a:prstGeom>
@@ -5321,24 +5051,24 @@
           <a:bodyPr wrap="square" lIns="0" tIns="0" rIns="0" bIns="0" rtlCol="0" anchor="ctr"/>
           <a:lstStyle/>
           <a:p>
-            <a:pPr algn="ctr" indent="0" marL="0">
-              <a:buNone/>
-            </a:pPr>
-            <a:r>
-              <a:rPr lang="en-US" sz="1400" b="1" dirty="0">
-                <a:solidFill>
-                  <a:srgbClr val="000000"/>
-                </a:solidFill>
-              </a:rPr>
-              <a:t>1</a:t>
-            </a:r>
-            <a:endParaRPr lang="en-US" sz="1400" dirty="0"/>
-          </a:p>
-        </p:txBody>
-      </p:sp>
-      <p:sp>
-        <p:nvSpPr>
-          <p:cNvPr id="10" name="Text 7"/>
+            <a:pPr algn="l" indent="0" marL="0">
+              <a:buNone/>
+            </a:pPr>
+            <a:r>
+              <a:rPr lang="en-US" sz="1500" b="1" dirty="0">
+                <a:solidFill>
+                  <a:srgbClr val="333333"/>
+                </a:solidFill>
+              </a:rPr>
+              <a:t>1.</a:t>
+            </a:r>
+            <a:endParaRPr lang="en-US" sz="1500" dirty="0"/>
+          </a:p>
+        </p:txBody>
+      </p:sp>
+      <p:sp>
+        <p:nvSpPr>
+          <p:cNvPr id="7" name="Text 5"/>
           <p:cNvSpPr txBox="1"/>
           <p:nvPr/>
         </p:nvSpPr>
@@ -5374,40 +5104,15 @@
       </p:sp>
       <p:sp>
         <p:nvSpPr>
-          <p:cNvPr id="11" name="Shape 8"/>
-          <p:cNvSpPr/>
-          <p:nvPr/>
-        </p:nvSpPr>
-        <p:spPr>
-          <a:xfrm>
-            <a:off x="5852160" y="3108960"/>
+          <p:cNvPr id="8" name="Text 6"/>
+          <p:cNvSpPr txBox="1"/>
+          <p:nvPr/>
+        </p:nvSpPr>
+        <p:spPr>
+          <a:xfrm>
+            <a:off x="5852160" y="3017520"/>
             <a:ext cx="384048" cy="384048"/>
           </a:xfrm>
-          <a:prstGeom prst="ellipse">
-            <a:avLst/>
-          </a:prstGeom>
-          <a:solidFill>
-            <a:srgbClr val="A6A6A6"/>
-          </a:solidFill>
-          <a:ln w="12700">
-            <a:solidFill>
-              <a:srgbClr val="A6A6A6"/>
-            </a:solidFill>
-            <a:prstDash val="solid"/>
-          </a:ln>
-        </p:spPr>
-      </p:sp>
-      <p:sp>
-        <p:nvSpPr>
-          <p:cNvPr id="12" name="Text 9"/>
-          <p:cNvSpPr txBox="1"/>
-          <p:nvPr/>
-        </p:nvSpPr>
-        <p:spPr>
-          <a:xfrm>
-            <a:off x="5852160" y="3108960"/>
-            <a:ext cx="384048" cy="384048"/>
-          </a:xfrm>
           <a:prstGeom prst="rect">
             <a:avLst/>
           </a:prstGeom>
@@ -5418,24 +5123,24 @@
           <a:bodyPr wrap="square" lIns="0" tIns="0" rIns="0" bIns="0" rtlCol="0" anchor="ctr"/>
           <a:lstStyle/>
           <a:p>
-            <a:pPr algn="ctr" indent="0" marL="0">
-              <a:buNone/>
-            </a:pPr>
-            <a:r>
-              <a:rPr lang="en-US" sz="1400" b="1" dirty="0">
-                <a:solidFill>
-                  <a:srgbClr val="000000"/>
-                </a:solidFill>
-              </a:rPr>
-              <a:t>2</a:t>
-            </a:r>
-            <a:endParaRPr lang="en-US" sz="1400" dirty="0"/>
-          </a:p>
-        </p:txBody>
-      </p:sp>
-      <p:sp>
-        <p:nvSpPr>
-          <p:cNvPr id="13" name="Text 10"/>
+            <a:pPr algn="l" indent="0" marL="0">
+              <a:buNone/>
+            </a:pPr>
+            <a:r>
+              <a:rPr lang="en-US" sz="1500" b="1" dirty="0">
+                <a:solidFill>
+                  <a:srgbClr val="333333"/>
+                </a:solidFill>
+              </a:rPr>
+              <a:t>2.</a:t>
+            </a:r>
+            <a:endParaRPr lang="en-US" sz="1500" dirty="0"/>
+          </a:p>
+        </p:txBody>
+      </p:sp>
+      <p:sp>
+        <p:nvSpPr>
+          <p:cNvPr id="9" name="Text 7"/>
           <p:cNvSpPr txBox="1"/>
           <p:nvPr/>
         </p:nvSpPr>
@@ -5471,40 +5176,15 @@
       </p:sp>
       <p:sp>
         <p:nvSpPr>
-          <p:cNvPr id="14" name="Shape 11"/>
-          <p:cNvSpPr/>
-          <p:nvPr/>
-        </p:nvSpPr>
-        <p:spPr>
-          <a:xfrm>
-            <a:off x="5852160" y="4160520"/>
+          <p:cNvPr id="10" name="Text 8"/>
+          <p:cNvSpPr txBox="1"/>
+          <p:nvPr/>
+        </p:nvSpPr>
+        <p:spPr>
+          <a:xfrm>
+            <a:off x="5852160" y="4069080"/>
             <a:ext cx="384048" cy="384048"/>
           </a:xfrm>
-          <a:prstGeom prst="ellipse">
-            <a:avLst/>
-          </a:prstGeom>
-          <a:solidFill>
-            <a:srgbClr val="A6A6A6"/>
-          </a:solidFill>
-          <a:ln w="12700">
-            <a:solidFill>
-              <a:srgbClr val="A6A6A6"/>
-            </a:solidFill>
-            <a:prstDash val="solid"/>
-          </a:ln>
-        </p:spPr>
-      </p:sp>
-      <p:sp>
-        <p:nvSpPr>
-          <p:cNvPr id="15" name="Text 12"/>
-          <p:cNvSpPr txBox="1"/>
-          <p:nvPr/>
-        </p:nvSpPr>
-        <p:spPr>
-          <a:xfrm>
-            <a:off x="5852160" y="4160520"/>
-            <a:ext cx="384048" cy="384048"/>
-          </a:xfrm>
           <a:prstGeom prst="rect">
             <a:avLst/>
           </a:prstGeom>
@@ -5515,24 +5195,24 @@
           <a:bodyPr wrap="square" lIns="0" tIns="0" rIns="0" bIns="0" rtlCol="0" anchor="ctr"/>
           <a:lstStyle/>
           <a:p>
-            <a:pPr algn="ctr" indent="0" marL="0">
-              <a:buNone/>
-            </a:pPr>
-            <a:r>
-              <a:rPr lang="en-US" sz="1400" b="1" dirty="0">
-                <a:solidFill>
-                  <a:srgbClr val="000000"/>
-                </a:solidFill>
-              </a:rPr>
-              <a:t>3</a:t>
-            </a:r>
-            <a:endParaRPr lang="en-US" sz="1400" dirty="0"/>
-          </a:p>
-        </p:txBody>
-      </p:sp>
-      <p:sp>
-        <p:nvSpPr>
-          <p:cNvPr id="16" name="Text 13"/>
+            <a:pPr algn="l" indent="0" marL="0">
+              <a:buNone/>
+            </a:pPr>
+            <a:r>
+              <a:rPr lang="en-US" sz="1500" b="1" dirty="0">
+                <a:solidFill>
+                  <a:srgbClr val="333333"/>
+                </a:solidFill>
+              </a:rPr>
+              <a:t>3.</a:t>
+            </a:r>
+            <a:endParaRPr lang="en-US" sz="1500" dirty="0"/>
+          </a:p>
+        </p:txBody>
+      </p:sp>
+      <p:sp>
+        <p:nvSpPr>
+          <p:cNvPr id="11" name="Text 9"/>
           <p:cNvSpPr txBox="1"/>
           <p:nvPr/>
         </p:nvSpPr>
@@ -5568,7 +5248,7 @@
       </p:sp>
       <p:sp>
         <p:nvSpPr>
-          <p:cNvPr id="17" name="Shape 14"/>
+          <p:cNvPr id="12" name="Shape 10"/>
           <p:cNvSpPr/>
           <p:nvPr/>
         </p:nvSpPr>
@@ -5595,7 +5275,7 @@
       </p:sp>
       <p:sp>
         <p:nvSpPr>
-          <p:cNvPr id="18" name="Text 15"/>
+          <p:cNvPr id="13" name="Text 11"/>
           <p:cNvSpPr txBox="1"/>
           <p:nvPr/>
         </p:nvSpPr>
@@ -5750,63 +5430,50 @@
       </p:sp>
       <p:sp>
         <p:nvSpPr>
-          <p:cNvPr id="3" name="Shape 1"/>
-          <p:cNvSpPr/>
-          <p:nvPr/>
-        </p:nvSpPr>
-        <p:spPr>
-          <a:xfrm>
-            <a:off x="548640" y="1417320"/>
-            <a:ext cx="640080" cy="640080"/>
-          </a:xfrm>
-          <a:prstGeom prst="ellipse">
-            <a:avLst/>
-          </a:prstGeom>
-          <a:solidFill>
-            <a:srgbClr val="404040"/>
-          </a:solidFill>
-          <a:ln w="12700">
-            <a:solidFill>
-              <a:srgbClr val="404040"/>
-            </a:solidFill>
-            <a:prstDash val="solid"/>
-          </a:ln>
-        </p:spPr>
-      </p:sp>
-      <p:pic>
-        <p:nvPicPr>
-          <p:cNvPr id="4" name="Image 0" descr="preencoded.png">    </p:cNvPr>
-          <p:cNvPicPr>
-            <a:picLocks noChangeAspect="1"/>
-          </p:cNvPicPr>
-          <p:nvPr/>
-        </p:nvPicPr>
-        <p:blipFill>
-          <a:blip r:embed="rId1"/>
-          <a:stretch>
-            <a:fillRect/>
-          </a:stretch>
-        </p:blipFill>
-        <p:spPr>
-          <a:xfrm>
-            <a:off x="708660" y="1577340"/>
-            <a:ext cx="320040" cy="320040"/>
-          </a:xfrm>
-          <a:prstGeom prst="rect">
-            <a:avLst/>
-          </a:prstGeom>
-        </p:spPr>
-      </p:pic>
-      <p:sp>
-        <p:nvSpPr>
-          <p:cNvPr id="5" name="Text 2"/>
+          <p:cNvPr id="3" name="Text 1"/>
           <p:cNvSpPr txBox="1"/>
           <p:nvPr/>
         </p:nvSpPr>
         <p:spPr>
           <a:xfrm>
-            <a:off x="1371600" y="1371600"/>
-            <a:ext cx="4663440" cy="1097280"/>
+            <a:off x="548640" y="1344168"/>
+            <a:ext cx="384048" cy="384048"/>
+          </a:xfrm>
+          <a:prstGeom prst="rect">
+            <a:avLst/>
+          </a:prstGeom>
+          <a:noFill/>
+          <a:ln/>
+        </p:spPr>
+        <p:txBody>
+          <a:bodyPr wrap="square" lIns="0" tIns="0" rIns="0" bIns="0" rtlCol="0" anchor="ctr"/>
+          <a:lstStyle/>
+          <a:p>
+            <a:pPr algn="l" indent="0" marL="0">
+              <a:buNone/>
+            </a:pPr>
+            <a:r>
+              <a:rPr lang="en-US" sz="1500" b="1" dirty="0">
+                <a:solidFill>
+                  <a:srgbClr val="333333"/>
+                </a:solidFill>
+              </a:rPr>
+              <a:t>1.</a:t>
+            </a:r>
+            <a:endParaRPr lang="en-US" sz="1500" dirty="0"/>
+          </a:p>
+        </p:txBody>
+      </p:sp>
+      <p:sp>
+        <p:nvSpPr>
+          <p:cNvPr id="4" name="Text 2"/>
+          <p:cNvSpPr txBox="1"/>
+          <p:nvPr/>
+        </p:nvSpPr>
+        <p:spPr>
+          <a:xfrm>
+            <a:off x="1051560" y="1371600"/>
+            <a:ext cx="4983480" cy="1097280"/>
           </a:xfrm>
           <a:prstGeom prst="rect">
             <a:avLst/>
@@ -5849,63 +5516,50 @@
       </p:sp>
       <p:sp>
         <p:nvSpPr>
-          <p:cNvPr id="6" name="Shape 3"/>
-          <p:cNvSpPr/>
-          <p:nvPr/>
-        </p:nvSpPr>
-        <p:spPr>
-          <a:xfrm>
-            <a:off x="548640" y="2606040"/>
-            <a:ext cx="640080" cy="640080"/>
-          </a:xfrm>
-          <a:prstGeom prst="ellipse">
-            <a:avLst/>
-          </a:prstGeom>
-          <a:solidFill>
-            <a:srgbClr val="404040"/>
-          </a:solidFill>
-          <a:ln w="12700">
-            <a:solidFill>
-              <a:srgbClr val="404040"/>
-            </a:solidFill>
-            <a:prstDash val="solid"/>
-          </a:ln>
-        </p:spPr>
-      </p:sp>
-      <p:pic>
-        <p:nvPicPr>
-          <p:cNvPr id="7" name="Image 1" descr="preencoded.png">    </p:cNvPr>
-          <p:cNvPicPr>
-            <a:picLocks noChangeAspect="1"/>
-          </p:cNvPicPr>
-          <p:nvPr/>
-        </p:nvPicPr>
-        <p:blipFill>
-          <a:blip r:embed="rId2"/>
-          <a:stretch>
-            <a:fillRect/>
-          </a:stretch>
-        </p:blipFill>
-        <p:spPr>
-          <a:xfrm>
-            <a:off x="708660" y="2766060"/>
-            <a:ext cx="320040" cy="320040"/>
-          </a:xfrm>
-          <a:prstGeom prst="rect">
-            <a:avLst/>
-          </a:prstGeom>
-        </p:spPr>
-      </p:pic>
-      <p:sp>
-        <p:nvSpPr>
-          <p:cNvPr id="8" name="Text 4"/>
+          <p:cNvPr id="5" name="Text 3"/>
           <p:cNvSpPr txBox="1"/>
           <p:nvPr/>
         </p:nvSpPr>
         <p:spPr>
           <a:xfrm>
-            <a:off x="1371600" y="2560320"/>
-            <a:ext cx="4663440" cy="1097280"/>
+            <a:off x="548640" y="2532888"/>
+            <a:ext cx="384048" cy="384048"/>
+          </a:xfrm>
+          <a:prstGeom prst="rect">
+            <a:avLst/>
+          </a:prstGeom>
+          <a:noFill/>
+          <a:ln/>
+        </p:spPr>
+        <p:txBody>
+          <a:bodyPr wrap="square" lIns="0" tIns="0" rIns="0" bIns="0" rtlCol="0" anchor="ctr"/>
+          <a:lstStyle/>
+          <a:p>
+            <a:pPr algn="l" indent="0" marL="0">
+              <a:buNone/>
+            </a:pPr>
+            <a:r>
+              <a:rPr lang="en-US" sz="1500" b="1" dirty="0">
+                <a:solidFill>
+                  <a:srgbClr val="333333"/>
+                </a:solidFill>
+              </a:rPr>
+              <a:t>2.</a:t>
+            </a:r>
+            <a:endParaRPr lang="en-US" sz="1500" dirty="0"/>
+          </a:p>
+        </p:txBody>
+      </p:sp>
+      <p:sp>
+        <p:nvSpPr>
+          <p:cNvPr id="6" name="Text 4"/>
+          <p:cNvSpPr txBox="1"/>
+          <p:nvPr/>
+        </p:nvSpPr>
+        <p:spPr>
+          <a:xfrm>
+            <a:off x="1051560" y="2560320"/>
+            <a:ext cx="4983480" cy="1097280"/>
           </a:xfrm>
           <a:prstGeom prst="rect">
             <a:avLst/>
@@ -5948,63 +5602,50 @@
       </p:sp>
       <p:sp>
         <p:nvSpPr>
-          <p:cNvPr id="9" name="Shape 5"/>
-          <p:cNvSpPr/>
-          <p:nvPr/>
-        </p:nvSpPr>
-        <p:spPr>
-          <a:xfrm>
-            <a:off x="548640" y="3794760"/>
-            <a:ext cx="640080" cy="640080"/>
-          </a:xfrm>
-          <a:prstGeom prst="ellipse">
-            <a:avLst/>
-          </a:prstGeom>
-          <a:solidFill>
-            <a:srgbClr val="404040"/>
-          </a:solidFill>
-          <a:ln w="12700">
-            <a:solidFill>
-              <a:srgbClr val="404040"/>
-            </a:solidFill>
-            <a:prstDash val="solid"/>
-          </a:ln>
-        </p:spPr>
-      </p:sp>
-      <p:pic>
-        <p:nvPicPr>
-          <p:cNvPr id="10" name="Image 2" descr="preencoded.png">    </p:cNvPr>
-          <p:cNvPicPr>
-            <a:picLocks noChangeAspect="1"/>
-          </p:cNvPicPr>
-          <p:nvPr/>
-        </p:nvPicPr>
-        <p:blipFill>
-          <a:blip r:embed="rId3"/>
-          <a:stretch>
-            <a:fillRect/>
-          </a:stretch>
-        </p:blipFill>
-        <p:spPr>
-          <a:xfrm>
-            <a:off x="708660" y="3954780"/>
-            <a:ext cx="320040" cy="320040"/>
-          </a:xfrm>
-          <a:prstGeom prst="rect">
-            <a:avLst/>
-          </a:prstGeom>
-        </p:spPr>
-      </p:pic>
-      <p:sp>
-        <p:nvSpPr>
-          <p:cNvPr id="11" name="Text 6"/>
+          <p:cNvPr id="7" name="Text 5"/>
           <p:cNvSpPr txBox="1"/>
           <p:nvPr/>
         </p:nvSpPr>
         <p:spPr>
           <a:xfrm>
-            <a:off x="1371600" y="3749040"/>
-            <a:ext cx="4663440" cy="1097280"/>
+            <a:off x="548640" y="3721608"/>
+            <a:ext cx="384048" cy="384048"/>
+          </a:xfrm>
+          <a:prstGeom prst="rect">
+            <a:avLst/>
+          </a:prstGeom>
+          <a:noFill/>
+          <a:ln/>
+        </p:spPr>
+        <p:txBody>
+          <a:bodyPr wrap="square" lIns="0" tIns="0" rIns="0" bIns="0" rtlCol="0" anchor="ctr"/>
+          <a:lstStyle/>
+          <a:p>
+            <a:pPr algn="l" indent="0" marL="0">
+              <a:buNone/>
+            </a:pPr>
+            <a:r>
+              <a:rPr lang="en-US" sz="1500" b="1" dirty="0">
+                <a:solidFill>
+                  <a:srgbClr val="333333"/>
+                </a:solidFill>
+              </a:rPr>
+              <a:t>3.</a:t>
+            </a:r>
+            <a:endParaRPr lang="en-US" sz="1500" dirty="0"/>
+          </a:p>
+        </p:txBody>
+      </p:sp>
+      <p:sp>
+        <p:nvSpPr>
+          <p:cNvPr id="8" name="Text 6"/>
+          <p:cNvSpPr txBox="1"/>
+          <p:nvPr/>
+        </p:nvSpPr>
+        <p:spPr>
+          <a:xfrm>
+            <a:off x="1051560" y="3749040"/>
+            <a:ext cx="4983480" cy="1097280"/>
           </a:xfrm>
           <a:prstGeom prst="rect">
             <a:avLst/>
@@ -6047,63 +5688,50 @@
       </p:sp>
       <p:sp>
         <p:nvSpPr>
-          <p:cNvPr id="12" name="Shape 7"/>
-          <p:cNvSpPr/>
-          <p:nvPr/>
-        </p:nvSpPr>
-        <p:spPr>
-          <a:xfrm>
-            <a:off x="548640" y="4983480"/>
-            <a:ext cx="640080" cy="640080"/>
-          </a:xfrm>
-          <a:prstGeom prst="ellipse">
-            <a:avLst/>
-          </a:prstGeom>
-          <a:solidFill>
-            <a:srgbClr val="404040"/>
-          </a:solidFill>
-          <a:ln w="12700">
-            <a:solidFill>
-              <a:srgbClr val="404040"/>
-            </a:solidFill>
-            <a:prstDash val="solid"/>
-          </a:ln>
-        </p:spPr>
-      </p:sp>
-      <p:pic>
-        <p:nvPicPr>
-          <p:cNvPr id="13" name="Image 3" descr="preencoded.png">    </p:cNvPr>
-          <p:cNvPicPr>
-            <a:picLocks noChangeAspect="1"/>
-          </p:cNvPicPr>
-          <p:nvPr/>
-        </p:nvPicPr>
-        <p:blipFill>
-          <a:blip r:embed="rId4"/>
-          <a:stretch>
-            <a:fillRect/>
-          </a:stretch>
-        </p:blipFill>
-        <p:spPr>
-          <a:xfrm>
-            <a:off x="708660" y="5143500"/>
-            <a:ext cx="320040" cy="320040"/>
-          </a:xfrm>
-          <a:prstGeom prst="rect">
-            <a:avLst/>
-          </a:prstGeom>
-        </p:spPr>
-      </p:pic>
-      <p:sp>
-        <p:nvSpPr>
-          <p:cNvPr id="14" name="Text 8"/>
+          <p:cNvPr id="9" name="Text 7"/>
           <p:cNvSpPr txBox="1"/>
           <p:nvPr/>
         </p:nvSpPr>
         <p:spPr>
           <a:xfrm>
-            <a:off x="1371600" y="4937760"/>
-            <a:ext cx="4663440" cy="1097280"/>
+            <a:off x="548640" y="4910328"/>
+            <a:ext cx="384048" cy="384048"/>
+          </a:xfrm>
+          <a:prstGeom prst="rect">
+            <a:avLst/>
+          </a:prstGeom>
+          <a:noFill/>
+          <a:ln/>
+        </p:spPr>
+        <p:txBody>
+          <a:bodyPr wrap="square" lIns="0" tIns="0" rIns="0" bIns="0" rtlCol="0" anchor="ctr"/>
+          <a:lstStyle/>
+          <a:p>
+            <a:pPr algn="l" indent="0" marL="0">
+              <a:buNone/>
+            </a:pPr>
+            <a:r>
+              <a:rPr lang="en-US" sz="1500" b="1" dirty="0">
+                <a:solidFill>
+                  <a:srgbClr val="333333"/>
+                </a:solidFill>
+              </a:rPr>
+              <a:t>4.</a:t>
+            </a:r>
+            <a:endParaRPr lang="en-US" sz="1500" dirty="0"/>
+          </a:p>
+        </p:txBody>
+      </p:sp>
+      <p:sp>
+        <p:nvSpPr>
+          <p:cNvPr id="10" name="Text 8"/>
+          <p:cNvSpPr txBox="1"/>
+          <p:nvPr/>
+        </p:nvSpPr>
+        <p:spPr>
+          <a:xfrm>
+            <a:off x="1051560" y="4937760"/>
+            <a:ext cx="4983480" cy="1097280"/>
           </a:xfrm>
           <a:prstGeom prst="rect">
             <a:avLst/>
@@ -6146,63 +5774,50 @@
       </p:sp>
       <p:sp>
         <p:nvSpPr>
-          <p:cNvPr id="15" name="Shape 9"/>
-          <p:cNvSpPr/>
-          <p:nvPr/>
-        </p:nvSpPr>
-        <p:spPr>
-          <a:xfrm>
-            <a:off x="6217920" y="1417320"/>
-            <a:ext cx="640080" cy="640080"/>
-          </a:xfrm>
-          <a:prstGeom prst="ellipse">
-            <a:avLst/>
-          </a:prstGeom>
-          <a:solidFill>
-            <a:srgbClr val="404040"/>
-          </a:solidFill>
-          <a:ln w="12700">
-            <a:solidFill>
-              <a:srgbClr val="404040"/>
-            </a:solidFill>
-            <a:prstDash val="solid"/>
-          </a:ln>
-        </p:spPr>
-      </p:sp>
-      <p:pic>
-        <p:nvPicPr>
-          <p:cNvPr id="16" name="Image 4" descr="preencoded.png">    </p:cNvPr>
-          <p:cNvPicPr>
-            <a:picLocks noChangeAspect="1"/>
-          </p:cNvPicPr>
-          <p:nvPr/>
-        </p:nvPicPr>
-        <p:blipFill>
-          <a:blip r:embed="rId5"/>
-          <a:stretch>
-            <a:fillRect/>
-          </a:stretch>
-        </p:blipFill>
-        <p:spPr>
-          <a:xfrm>
-            <a:off x="6377940" y="1577340"/>
-            <a:ext cx="320040" cy="320040"/>
-          </a:xfrm>
-          <a:prstGeom prst="rect">
-            <a:avLst/>
-          </a:prstGeom>
-        </p:spPr>
-      </p:pic>
-      <p:sp>
-        <p:nvSpPr>
-          <p:cNvPr id="17" name="Text 10"/>
+          <p:cNvPr id="11" name="Text 9"/>
           <p:cNvSpPr txBox="1"/>
           <p:nvPr/>
         </p:nvSpPr>
         <p:spPr>
           <a:xfrm>
-            <a:off x="7040880" y="1371600"/>
-            <a:ext cx="4663440" cy="1097280"/>
+            <a:off x="6217920" y="1344168"/>
+            <a:ext cx="384048" cy="384048"/>
+          </a:xfrm>
+          <a:prstGeom prst="rect">
+            <a:avLst/>
+          </a:prstGeom>
+          <a:noFill/>
+          <a:ln/>
+        </p:spPr>
+        <p:txBody>
+          <a:bodyPr wrap="square" lIns="0" tIns="0" rIns="0" bIns="0" rtlCol="0" anchor="ctr"/>
+          <a:lstStyle/>
+          <a:p>
+            <a:pPr algn="l" indent="0" marL="0">
+              <a:buNone/>
+            </a:pPr>
+            <a:r>
+              <a:rPr lang="en-US" sz="1500" b="1" dirty="0">
+                <a:solidFill>
+                  <a:srgbClr val="333333"/>
+                </a:solidFill>
+              </a:rPr>
+              <a:t>5.</a:t>
+            </a:r>
+            <a:endParaRPr lang="en-US" sz="1500" dirty="0"/>
+          </a:p>
+        </p:txBody>
+      </p:sp>
+      <p:sp>
+        <p:nvSpPr>
+          <p:cNvPr id="12" name="Text 10"/>
+          <p:cNvSpPr txBox="1"/>
+          <p:nvPr/>
+        </p:nvSpPr>
+        <p:spPr>
+          <a:xfrm>
+            <a:off x="6720840" y="1371600"/>
+            <a:ext cx="4983480" cy="1097280"/>
           </a:xfrm>
           <a:prstGeom prst="rect">
             <a:avLst/>
@@ -6245,63 +5860,50 @@
       </p:sp>
       <p:sp>
         <p:nvSpPr>
-          <p:cNvPr id="18" name="Shape 11"/>
-          <p:cNvSpPr/>
-          <p:nvPr/>
-        </p:nvSpPr>
-        <p:spPr>
-          <a:xfrm>
-            <a:off x="6217920" y="2606040"/>
-            <a:ext cx="640080" cy="640080"/>
-          </a:xfrm>
-          <a:prstGeom prst="ellipse">
-            <a:avLst/>
-          </a:prstGeom>
-          <a:solidFill>
-            <a:srgbClr val="404040"/>
-          </a:solidFill>
-          <a:ln w="12700">
-            <a:solidFill>
-              <a:srgbClr val="404040"/>
-            </a:solidFill>
-            <a:prstDash val="solid"/>
-          </a:ln>
-        </p:spPr>
-      </p:sp>
-      <p:pic>
-        <p:nvPicPr>
-          <p:cNvPr id="19" name="Image 5" descr="preencoded.png">    </p:cNvPr>
-          <p:cNvPicPr>
-            <a:picLocks noChangeAspect="1"/>
-          </p:cNvPicPr>
-          <p:nvPr/>
-        </p:nvPicPr>
-        <p:blipFill>
-          <a:blip r:embed="rId6"/>
-          <a:stretch>
-            <a:fillRect/>
-          </a:stretch>
-        </p:blipFill>
-        <p:spPr>
-          <a:xfrm>
-            <a:off x="6377940" y="2766060"/>
-            <a:ext cx="320040" cy="320040"/>
-          </a:xfrm>
-          <a:prstGeom prst="rect">
-            <a:avLst/>
-          </a:prstGeom>
-        </p:spPr>
-      </p:pic>
-      <p:sp>
-        <p:nvSpPr>
-          <p:cNvPr id="20" name="Text 12"/>
+          <p:cNvPr id="13" name="Text 11"/>
           <p:cNvSpPr txBox="1"/>
           <p:nvPr/>
         </p:nvSpPr>
         <p:spPr>
           <a:xfrm>
-            <a:off x="7040880" y="2560320"/>
-            <a:ext cx="4663440" cy="1097280"/>
+            <a:off x="6217920" y="2532888"/>
+            <a:ext cx="384048" cy="384048"/>
+          </a:xfrm>
+          <a:prstGeom prst="rect">
+            <a:avLst/>
+          </a:prstGeom>
+          <a:noFill/>
+          <a:ln/>
+        </p:spPr>
+        <p:txBody>
+          <a:bodyPr wrap="square" lIns="0" tIns="0" rIns="0" bIns="0" rtlCol="0" anchor="ctr"/>
+          <a:lstStyle/>
+          <a:p>
+            <a:pPr algn="l" indent="0" marL="0">
+              <a:buNone/>
+            </a:pPr>
+            <a:r>
+              <a:rPr lang="en-US" sz="1500" b="1" dirty="0">
+                <a:solidFill>
+                  <a:srgbClr val="333333"/>
+                </a:solidFill>
+              </a:rPr>
+              <a:t>6.</a:t>
+            </a:r>
+            <a:endParaRPr lang="en-US" sz="1500" dirty="0"/>
+          </a:p>
+        </p:txBody>
+      </p:sp>
+      <p:sp>
+        <p:nvSpPr>
+          <p:cNvPr id="14" name="Text 12"/>
+          <p:cNvSpPr txBox="1"/>
+          <p:nvPr/>
+        </p:nvSpPr>
+        <p:spPr>
+          <a:xfrm>
+            <a:off x="6720840" y="2560320"/>
+            <a:ext cx="4983480" cy="1097280"/>
           </a:xfrm>
           <a:prstGeom prst="rect">
             <a:avLst/>
@@ -6344,63 +5946,50 @@
       </p:sp>
       <p:sp>
         <p:nvSpPr>
-          <p:cNvPr id="21" name="Shape 13"/>
-          <p:cNvSpPr/>
-          <p:nvPr/>
-        </p:nvSpPr>
-        <p:spPr>
-          <a:xfrm>
-            <a:off x="6217920" y="3794760"/>
-            <a:ext cx="640080" cy="640080"/>
-          </a:xfrm>
-          <a:prstGeom prst="ellipse">
-            <a:avLst/>
-          </a:prstGeom>
-          <a:solidFill>
-            <a:srgbClr val="404040"/>
-          </a:solidFill>
-          <a:ln w="12700">
-            <a:solidFill>
-              <a:srgbClr val="404040"/>
-            </a:solidFill>
-            <a:prstDash val="solid"/>
-          </a:ln>
-        </p:spPr>
-      </p:sp>
-      <p:pic>
-        <p:nvPicPr>
-          <p:cNvPr id="22" name="Image 6" descr="preencoded.png">    </p:cNvPr>
-          <p:cNvPicPr>
-            <a:picLocks noChangeAspect="1"/>
-          </p:cNvPicPr>
-          <p:nvPr/>
-        </p:nvPicPr>
-        <p:blipFill>
-          <a:blip r:embed="rId7"/>
-          <a:stretch>
-            <a:fillRect/>
-          </a:stretch>
-        </p:blipFill>
-        <p:spPr>
-          <a:xfrm>
-            <a:off x="6377940" y="3954780"/>
-            <a:ext cx="320040" cy="320040"/>
-          </a:xfrm>
-          <a:prstGeom prst="rect">
-            <a:avLst/>
-          </a:prstGeom>
-        </p:spPr>
-      </p:pic>
-      <p:sp>
-        <p:nvSpPr>
-          <p:cNvPr id="23" name="Text 14"/>
+          <p:cNvPr id="15" name="Text 13"/>
           <p:cNvSpPr txBox="1"/>
           <p:nvPr/>
         </p:nvSpPr>
         <p:spPr>
           <a:xfrm>
-            <a:off x="7040880" y="3749040"/>
-            <a:ext cx="4663440" cy="1097280"/>
+            <a:off x="6217920" y="3721608"/>
+            <a:ext cx="384048" cy="384048"/>
+          </a:xfrm>
+          <a:prstGeom prst="rect">
+            <a:avLst/>
+          </a:prstGeom>
+          <a:noFill/>
+          <a:ln/>
+        </p:spPr>
+        <p:txBody>
+          <a:bodyPr wrap="square" lIns="0" tIns="0" rIns="0" bIns="0" rtlCol="0" anchor="ctr"/>
+          <a:lstStyle/>
+          <a:p>
+            <a:pPr algn="l" indent="0" marL="0">
+              <a:buNone/>
+            </a:pPr>
+            <a:r>
+              <a:rPr lang="en-US" sz="1500" b="1" dirty="0">
+                <a:solidFill>
+                  <a:srgbClr val="333333"/>
+                </a:solidFill>
+              </a:rPr>
+              <a:t>7.</a:t>
+            </a:r>
+            <a:endParaRPr lang="en-US" sz="1500" dirty="0"/>
+          </a:p>
+        </p:txBody>
+      </p:sp>
+      <p:sp>
+        <p:nvSpPr>
+          <p:cNvPr id="16" name="Text 14"/>
+          <p:cNvSpPr txBox="1"/>
+          <p:nvPr/>
+        </p:nvSpPr>
+        <p:spPr>
+          <a:xfrm>
+            <a:off x="6720840" y="3749040"/>
+            <a:ext cx="4983480" cy="1097280"/>
           </a:xfrm>
           <a:prstGeom prst="rect">
             <a:avLst/>
@@ -6578,63 +6167,14 @@
       </p:sp>
       <p:sp>
         <p:nvSpPr>
-          <p:cNvPr id="4" name="Shape 2"/>
-          <p:cNvSpPr/>
-          <p:nvPr/>
-        </p:nvSpPr>
-        <p:spPr>
-          <a:xfrm>
-            <a:off x="777240" y="1691640"/>
-            <a:ext cx="640080" cy="640080"/>
-          </a:xfrm>
-          <a:prstGeom prst="ellipse">
-            <a:avLst/>
-          </a:prstGeom>
-          <a:solidFill>
-            <a:srgbClr val="A6A6A6"/>
-          </a:solidFill>
-          <a:ln w="12700">
-            <a:solidFill>
-              <a:srgbClr val="A6A6A6"/>
-            </a:solidFill>
-            <a:prstDash val="solid"/>
-          </a:ln>
-        </p:spPr>
-      </p:sp>
-      <p:pic>
-        <p:nvPicPr>
-          <p:cNvPr id="5" name="Image 0" descr="preencoded.png">    </p:cNvPr>
-          <p:cNvPicPr>
-            <a:picLocks noChangeAspect="1"/>
-          </p:cNvPicPr>
-          <p:nvPr/>
-        </p:nvPicPr>
-        <p:blipFill>
-          <a:blip r:embed="rId1"/>
-          <a:stretch>
-            <a:fillRect/>
-          </a:stretch>
-        </p:blipFill>
-        <p:spPr>
-          <a:xfrm>
-            <a:off x="937260" y="1851660"/>
-            <a:ext cx="320040" cy="320040"/>
-          </a:xfrm>
-          <a:prstGeom prst="rect">
-            <a:avLst/>
-          </a:prstGeom>
-        </p:spPr>
-      </p:pic>
-      <p:sp>
-        <p:nvSpPr>
-          <p:cNvPr id="6" name="Text 3"/>
+          <p:cNvPr id="4" name="Text 2"/>
           <p:cNvSpPr txBox="1"/>
           <p:nvPr/>
         </p:nvSpPr>
         <p:spPr>
           <a:xfrm>
-            <a:off x="1554480" y="1645920"/>
-            <a:ext cx="2377440" cy="777240"/>
+            <a:off x="777240" y="1645920"/>
+            <a:ext cx="3063240" cy="777240"/>
           </a:xfrm>
           <a:prstGeom prst="rect">
             <a:avLst/>
@@ -6663,7 +6203,7 @@
       </p:sp>
       <p:sp>
         <p:nvSpPr>
-          <p:cNvPr id="7" name="Text 4"/>
+          <p:cNvPr id="5" name="Text 3"/>
           <p:cNvSpPr txBox="1"/>
           <p:nvPr/>
         </p:nvSpPr>
@@ -6699,7 +6239,7 @@
       </p:sp>
       <p:sp>
         <p:nvSpPr>
-          <p:cNvPr id="8" name="Shape 5"/>
+          <p:cNvPr id="6" name="Shape 4"/>
           <p:cNvSpPr/>
           <p:nvPr/>
         </p:nvSpPr>
@@ -6726,63 +6266,14 @@
       </p:sp>
       <p:sp>
         <p:nvSpPr>
-          <p:cNvPr id="9" name="Shape 6"/>
-          <p:cNvSpPr/>
-          <p:nvPr/>
-        </p:nvSpPr>
-        <p:spPr>
-          <a:xfrm>
-            <a:off x="4526280" y="1691640"/>
-            <a:ext cx="640080" cy="640080"/>
-          </a:xfrm>
-          <a:prstGeom prst="ellipse">
-            <a:avLst/>
-          </a:prstGeom>
-          <a:solidFill>
-            <a:srgbClr val="A6A6A6"/>
-          </a:solidFill>
-          <a:ln w="12700">
-            <a:solidFill>
-              <a:srgbClr val="A6A6A6"/>
-            </a:solidFill>
-            <a:prstDash val="solid"/>
-          </a:ln>
-        </p:spPr>
-      </p:sp>
-      <p:pic>
-        <p:nvPicPr>
-          <p:cNvPr id="10" name="Image 1" descr="preencoded.png">    </p:cNvPr>
-          <p:cNvPicPr>
-            <a:picLocks noChangeAspect="1"/>
-          </p:cNvPicPr>
-          <p:nvPr/>
-        </p:nvPicPr>
-        <p:blipFill>
-          <a:blip r:embed="rId2"/>
-          <a:stretch>
-            <a:fillRect/>
-          </a:stretch>
-        </p:blipFill>
-        <p:spPr>
-          <a:xfrm>
-            <a:off x="4686300" y="1851660"/>
-            <a:ext cx="320040" cy="320040"/>
-          </a:xfrm>
-          <a:prstGeom prst="rect">
-            <a:avLst/>
-          </a:prstGeom>
-        </p:spPr>
-      </p:pic>
-      <p:sp>
-        <p:nvSpPr>
-          <p:cNvPr id="11" name="Text 7"/>
+          <p:cNvPr id="7" name="Text 5"/>
           <p:cNvSpPr txBox="1"/>
           <p:nvPr/>
         </p:nvSpPr>
         <p:spPr>
           <a:xfrm>
-            <a:off x="5303520" y="1645920"/>
-            <a:ext cx="2377440" cy="777240"/>
+            <a:off x="4526280" y="1645920"/>
+            <a:ext cx="3063240" cy="777240"/>
           </a:xfrm>
           <a:prstGeom prst="rect">
             <a:avLst/>
@@ -6811,7 +6302,7 @@
       </p:sp>
       <p:sp>
         <p:nvSpPr>
-          <p:cNvPr id="12" name="Text 8"/>
+          <p:cNvPr id="8" name="Text 6"/>
           <p:cNvSpPr txBox="1"/>
           <p:nvPr/>
         </p:nvSpPr>
@@ -6847,7 +6338,7 @@
       </p:sp>
       <p:sp>
         <p:nvSpPr>
-          <p:cNvPr id="13" name="Shape 9"/>
+          <p:cNvPr id="9" name="Shape 7"/>
           <p:cNvSpPr/>
           <p:nvPr/>
         </p:nvSpPr>
@@ -6874,63 +6365,14 @@
       </p:sp>
       <p:sp>
         <p:nvSpPr>
-          <p:cNvPr id="14" name="Shape 10"/>
-          <p:cNvSpPr/>
-          <p:nvPr/>
-        </p:nvSpPr>
-        <p:spPr>
-          <a:xfrm>
-            <a:off x="8275320" y="1691640"/>
-            <a:ext cx="640080" cy="640080"/>
-          </a:xfrm>
-          <a:prstGeom prst="ellipse">
-            <a:avLst/>
-          </a:prstGeom>
-          <a:solidFill>
-            <a:srgbClr val="A6A6A6"/>
-          </a:solidFill>
-          <a:ln w="12700">
-            <a:solidFill>
-              <a:srgbClr val="A6A6A6"/>
-            </a:solidFill>
-            <a:prstDash val="solid"/>
-          </a:ln>
-        </p:spPr>
-      </p:sp>
-      <p:pic>
-        <p:nvPicPr>
-          <p:cNvPr id="15" name="Image 2" descr="preencoded.png">    </p:cNvPr>
-          <p:cNvPicPr>
-            <a:picLocks noChangeAspect="1"/>
-          </p:cNvPicPr>
-          <p:nvPr/>
-        </p:nvPicPr>
-        <p:blipFill>
-          <a:blip r:embed="rId3"/>
-          <a:stretch>
-            <a:fillRect/>
-          </a:stretch>
-        </p:blipFill>
-        <p:spPr>
-          <a:xfrm>
-            <a:off x="8435340" y="1851660"/>
-            <a:ext cx="320040" cy="320040"/>
-          </a:xfrm>
-          <a:prstGeom prst="rect">
-            <a:avLst/>
-          </a:prstGeom>
-        </p:spPr>
-      </p:pic>
-      <p:sp>
-        <p:nvSpPr>
-          <p:cNvPr id="16" name="Text 11"/>
+          <p:cNvPr id="10" name="Text 8"/>
           <p:cNvSpPr txBox="1"/>
           <p:nvPr/>
         </p:nvSpPr>
         <p:spPr>
           <a:xfrm>
-            <a:off x="9052560" y="1645920"/>
-            <a:ext cx="2377440" cy="777240"/>
+            <a:off x="8275320" y="1645920"/>
+            <a:ext cx="3063240" cy="777240"/>
           </a:xfrm>
           <a:prstGeom prst="rect">
             <a:avLst/>
@@ -6959,7 +6401,7 @@
       </p:sp>
       <p:sp>
         <p:nvSpPr>
-          <p:cNvPr id="17" name="Text 12"/>
+          <p:cNvPr id="11" name="Text 9"/>
           <p:cNvSpPr txBox="1"/>
           <p:nvPr/>
         </p:nvSpPr>
@@ -6995,7 +6437,7 @@
       </p:sp>
       <p:sp>
         <p:nvSpPr>
-          <p:cNvPr id="18" name="Shape 13"/>
+          <p:cNvPr id="12" name="Shape 10"/>
           <p:cNvSpPr/>
           <p:nvPr/>
         </p:nvSpPr>
@@ -7022,63 +6464,14 @@
       </p:sp>
       <p:sp>
         <p:nvSpPr>
-          <p:cNvPr id="19" name="Shape 14"/>
-          <p:cNvSpPr/>
-          <p:nvPr/>
-        </p:nvSpPr>
-        <p:spPr>
-          <a:xfrm>
-            <a:off x="777240" y="4069080"/>
-            <a:ext cx="640080" cy="640080"/>
-          </a:xfrm>
-          <a:prstGeom prst="ellipse">
-            <a:avLst/>
-          </a:prstGeom>
-          <a:solidFill>
-            <a:srgbClr val="A6A6A6"/>
-          </a:solidFill>
-          <a:ln w="12700">
-            <a:solidFill>
-              <a:srgbClr val="A6A6A6"/>
-            </a:solidFill>
-            <a:prstDash val="solid"/>
-          </a:ln>
-        </p:spPr>
-      </p:sp>
-      <p:pic>
-        <p:nvPicPr>
-          <p:cNvPr id="20" name="Image 3" descr="preencoded.png">    </p:cNvPr>
-          <p:cNvPicPr>
-            <a:picLocks noChangeAspect="1"/>
-          </p:cNvPicPr>
-          <p:nvPr/>
-        </p:nvPicPr>
-        <p:blipFill>
-          <a:blip r:embed="rId4"/>
-          <a:stretch>
-            <a:fillRect/>
-          </a:stretch>
-        </p:blipFill>
-        <p:spPr>
-          <a:xfrm>
-            <a:off x="937260" y="4229100"/>
-            <a:ext cx="320040" cy="320040"/>
-          </a:xfrm>
-          <a:prstGeom prst="rect">
-            <a:avLst/>
-          </a:prstGeom>
-        </p:spPr>
-      </p:pic>
-      <p:sp>
-        <p:nvSpPr>
-          <p:cNvPr id="21" name="Text 15"/>
+          <p:cNvPr id="13" name="Text 11"/>
           <p:cNvSpPr txBox="1"/>
           <p:nvPr/>
         </p:nvSpPr>
         <p:spPr>
           <a:xfrm>
-            <a:off x="1554480" y="4023360"/>
-            <a:ext cx="2377440" cy="777240"/>
+            <a:off x="777240" y="4023360"/>
+            <a:ext cx="3063240" cy="777240"/>
           </a:xfrm>
           <a:prstGeom prst="rect">
             <a:avLst/>
@@ -7107,7 +6500,7 @@
       </p:sp>
       <p:sp>
         <p:nvSpPr>
-          <p:cNvPr id="22" name="Text 16"/>
+          <p:cNvPr id="14" name="Text 12"/>
           <p:cNvSpPr txBox="1"/>
           <p:nvPr/>
         </p:nvSpPr>
@@ -7143,7 +6536,7 @@
       </p:sp>
       <p:sp>
         <p:nvSpPr>
-          <p:cNvPr id="23" name="Shape 17"/>
+          <p:cNvPr id="15" name="Shape 13"/>
           <p:cNvSpPr/>
           <p:nvPr/>
         </p:nvSpPr>
@@ -7170,63 +6563,14 @@
       </p:sp>
       <p:sp>
         <p:nvSpPr>
-          <p:cNvPr id="24" name="Shape 18"/>
-          <p:cNvSpPr/>
-          <p:nvPr/>
-        </p:nvSpPr>
-        <p:spPr>
-          <a:xfrm>
-            <a:off x="4526280" y="4069080"/>
-            <a:ext cx="640080" cy="640080"/>
-          </a:xfrm>
-          <a:prstGeom prst="ellipse">
-            <a:avLst/>
-          </a:prstGeom>
-          <a:solidFill>
-            <a:srgbClr val="A6A6A6"/>
-          </a:solidFill>
-          <a:ln w="12700">
-            <a:solidFill>
-              <a:srgbClr val="A6A6A6"/>
-            </a:solidFill>
-            <a:prstDash val="solid"/>
-          </a:ln>
-        </p:spPr>
-      </p:sp>
-      <p:pic>
-        <p:nvPicPr>
-          <p:cNvPr id="25" name="Image 4" descr="preencoded.png">    </p:cNvPr>
-          <p:cNvPicPr>
-            <a:picLocks noChangeAspect="1"/>
-          </p:cNvPicPr>
-          <p:nvPr/>
-        </p:nvPicPr>
-        <p:blipFill>
-          <a:blip r:embed="rId5"/>
-          <a:stretch>
-            <a:fillRect/>
-          </a:stretch>
-        </p:blipFill>
-        <p:spPr>
-          <a:xfrm>
-            <a:off x="4686300" y="4229100"/>
-            <a:ext cx="320040" cy="320040"/>
-          </a:xfrm>
-          <a:prstGeom prst="rect">
-            <a:avLst/>
-          </a:prstGeom>
-        </p:spPr>
-      </p:pic>
-      <p:sp>
-        <p:nvSpPr>
-          <p:cNvPr id="26" name="Text 19"/>
+          <p:cNvPr id="16" name="Text 14"/>
           <p:cNvSpPr txBox="1"/>
           <p:nvPr/>
         </p:nvSpPr>
         <p:spPr>
           <a:xfrm>
-            <a:off x="5303520" y="4023360"/>
-            <a:ext cx="2377440" cy="777240"/>
+            <a:off x="4526280" y="4023360"/>
+            <a:ext cx="3063240" cy="777240"/>
           </a:xfrm>
           <a:prstGeom prst="rect">
             <a:avLst/>
@@ -7255,7 +6599,7 @@
       </p:sp>
       <p:sp>
         <p:nvSpPr>
-          <p:cNvPr id="27" name="Text 20"/>
+          <p:cNvPr id="17" name="Text 15"/>
           <p:cNvSpPr txBox="1"/>
           <p:nvPr/>
         </p:nvSpPr>
@@ -7291,7 +6635,7 @@
       </p:sp>
       <p:sp>
         <p:nvSpPr>
-          <p:cNvPr id="28" name="Shape 21"/>
+          <p:cNvPr id="18" name="Shape 16"/>
           <p:cNvSpPr/>
           <p:nvPr/>
         </p:nvSpPr>
@@ -7318,63 +6662,14 @@
       </p:sp>
       <p:sp>
         <p:nvSpPr>
-          <p:cNvPr id="29" name="Shape 22"/>
-          <p:cNvSpPr/>
-          <p:nvPr/>
-        </p:nvSpPr>
-        <p:spPr>
-          <a:xfrm>
-            <a:off x="8275320" y="4069080"/>
-            <a:ext cx="640080" cy="640080"/>
-          </a:xfrm>
-          <a:prstGeom prst="ellipse">
-            <a:avLst/>
-          </a:prstGeom>
-          <a:solidFill>
-            <a:srgbClr val="A6A6A6"/>
-          </a:solidFill>
-          <a:ln w="12700">
-            <a:solidFill>
-              <a:srgbClr val="A6A6A6"/>
-            </a:solidFill>
-            <a:prstDash val="solid"/>
-          </a:ln>
-        </p:spPr>
-      </p:sp>
-      <p:pic>
-        <p:nvPicPr>
-          <p:cNvPr id="30" name="Image 5" descr="preencoded.png">    </p:cNvPr>
-          <p:cNvPicPr>
-            <a:picLocks noChangeAspect="1"/>
-          </p:cNvPicPr>
-          <p:nvPr/>
-        </p:nvPicPr>
-        <p:blipFill>
-          <a:blip r:embed="rId6"/>
-          <a:stretch>
-            <a:fillRect/>
-          </a:stretch>
-        </p:blipFill>
-        <p:spPr>
-          <a:xfrm>
-            <a:off x="8435340" y="4229100"/>
-            <a:ext cx="320040" cy="320040"/>
-          </a:xfrm>
-          <a:prstGeom prst="rect">
-            <a:avLst/>
-          </a:prstGeom>
-        </p:spPr>
-      </p:pic>
-      <p:sp>
-        <p:nvSpPr>
-          <p:cNvPr id="31" name="Text 23"/>
+          <p:cNvPr id="19" name="Text 17"/>
           <p:cNvSpPr txBox="1"/>
           <p:nvPr/>
         </p:nvSpPr>
         <p:spPr>
           <a:xfrm>
-            <a:off x="9052560" y="4023360"/>
-            <a:ext cx="2377440" cy="777240"/>
+            <a:off x="8275320" y="4023360"/>
+            <a:ext cx="3063240" cy="777240"/>
           </a:xfrm>
           <a:prstGeom prst="rect">
             <a:avLst/>
@@ -7403,7 +6698,7 @@
       </p:sp>
       <p:sp>
         <p:nvSpPr>
-          <p:cNvPr id="32" name="Text 24"/>
+          <p:cNvPr id="20" name="Text 18"/>
           <p:cNvSpPr txBox="1"/>
           <p:nvPr/>
         </p:nvSpPr>
@@ -9906,63 +9201,14 @@
       </p:sp>
       <p:sp>
         <p:nvSpPr>
-          <p:cNvPr id="4" name="Shape 2"/>
-          <p:cNvSpPr/>
-          <p:nvPr/>
-        </p:nvSpPr>
-        <p:spPr>
-          <a:xfrm>
-            <a:off x="822960" y="1691640"/>
-            <a:ext cx="822960" cy="822960"/>
-          </a:xfrm>
-          <a:prstGeom prst="ellipse">
-            <a:avLst/>
-          </a:prstGeom>
-          <a:solidFill>
-            <a:srgbClr val="A6A6A6"/>
-          </a:solidFill>
-          <a:ln w="12700">
-            <a:solidFill>
-              <a:srgbClr val="A6A6A6"/>
-            </a:solidFill>
-            <a:prstDash val="solid"/>
-          </a:ln>
-        </p:spPr>
-      </p:sp>
-      <p:pic>
-        <p:nvPicPr>
-          <p:cNvPr id="5" name="Image 0" descr="preencoded.png">    </p:cNvPr>
-          <p:cNvPicPr>
-            <a:picLocks noChangeAspect="1"/>
-          </p:cNvPicPr>
-          <p:nvPr/>
-        </p:nvPicPr>
-        <p:blipFill>
-          <a:blip r:embed="rId1"/>
-          <a:stretch>
-            <a:fillRect/>
-          </a:stretch>
-        </p:blipFill>
-        <p:spPr>
-          <a:xfrm>
-            <a:off x="1028700" y="1897380"/>
-            <a:ext cx="411480" cy="411480"/>
-          </a:xfrm>
-          <a:prstGeom prst="rect">
-            <a:avLst/>
-          </a:prstGeom>
-        </p:spPr>
-      </p:pic>
-      <p:sp>
-        <p:nvSpPr>
-          <p:cNvPr id="6" name="Text 3"/>
+          <p:cNvPr id="4" name="Text 2"/>
           <p:cNvSpPr txBox="1"/>
           <p:nvPr/>
         </p:nvSpPr>
         <p:spPr>
           <a:xfrm>
-            <a:off x="822960" y="2697480"/>
-            <a:ext cx="4937760" cy="2834640"/>
+            <a:off x="822960" y="1645920"/>
+            <a:ext cx="4937760" cy="3840480"/>
           </a:xfrm>
           <a:prstGeom prst="rect">
             <a:avLst/>
@@ -10024,7 +9270,7 @@
                 <a:solidFill>
                   <a:schemeClr val="accent2"/>
                 </a:solidFill>
-                <a:hlinkClick r:id="rId2" invalidUrl="" action="" tgtFrame="" tooltip="" history="1" highlightClick="0" endSnd="0">
+                <a:hlinkClick r:id="rId1" invalidUrl="" action="" tgtFrame="" tooltip="" history="1" highlightClick="0" endSnd="0">
                   <a:extLst>
                     <a:ext uri="{A12FA001-AC4F-418D-AE19-62706E023703}">
                       <ahyp:hlinkClr xmlns:ahyp="http://schemas.microsoft.com/office/drawing/2018/hyperlinkcolor" val="tx"/>
@@ -10040,7 +9286,7 @@
       </p:sp>
       <p:sp>
         <p:nvSpPr>
-          <p:cNvPr id="7" name="Text 4"/>
+          <p:cNvPr id="5" name="Text 3"/>
           <p:cNvSpPr txBox="1"/>
           <p:nvPr/>
         </p:nvSpPr>
@@ -10076,40 +9322,15 @@
       </p:sp>
       <p:sp>
         <p:nvSpPr>
-          <p:cNvPr id="8" name="Shape 5"/>
-          <p:cNvSpPr/>
-          <p:nvPr/>
-        </p:nvSpPr>
-        <p:spPr>
-          <a:xfrm>
-            <a:off x="6400800" y="2103120"/>
+          <p:cNvPr id="6" name="Text 4"/>
+          <p:cNvSpPr txBox="1"/>
+          <p:nvPr/>
+        </p:nvSpPr>
+        <p:spPr>
+          <a:xfrm>
+            <a:off x="6400800" y="2011680"/>
             <a:ext cx="384048" cy="384048"/>
           </a:xfrm>
-          <a:prstGeom prst="ellipse">
-            <a:avLst/>
-          </a:prstGeom>
-          <a:solidFill>
-            <a:srgbClr val="A6A6A6"/>
-          </a:solidFill>
-          <a:ln w="12700">
-            <a:solidFill>
-              <a:srgbClr val="A6A6A6"/>
-            </a:solidFill>
-            <a:prstDash val="solid"/>
-          </a:ln>
-        </p:spPr>
-      </p:sp>
-      <p:sp>
-        <p:nvSpPr>
-          <p:cNvPr id="9" name="Text 6"/>
-          <p:cNvSpPr txBox="1"/>
-          <p:nvPr/>
-        </p:nvSpPr>
-        <p:spPr>
-          <a:xfrm>
-            <a:off x="6400800" y="2103120"/>
-            <a:ext cx="384048" cy="384048"/>
-          </a:xfrm>
           <a:prstGeom prst="rect">
             <a:avLst/>
           </a:prstGeom>
@@ -10120,24 +9341,24 @@
           <a:bodyPr wrap="square" lIns="0" tIns="0" rIns="0" bIns="0" rtlCol="0" anchor="ctr"/>
           <a:lstStyle/>
           <a:p>
-            <a:pPr algn="ctr" indent="0" marL="0">
-              <a:buNone/>
-            </a:pPr>
-            <a:r>
-              <a:rPr lang="en-US" sz="1400" b="1" dirty="0">
-                <a:solidFill>
-                  <a:srgbClr val="000000"/>
-                </a:solidFill>
-              </a:rPr>
-              <a:t>1</a:t>
-            </a:r>
-            <a:endParaRPr lang="en-US" sz="1400" dirty="0"/>
-          </a:p>
-        </p:txBody>
-      </p:sp>
-      <p:sp>
-        <p:nvSpPr>
-          <p:cNvPr id="10" name="Text 7"/>
+            <a:pPr algn="l" indent="0" marL="0">
+              <a:buNone/>
+            </a:pPr>
+            <a:r>
+              <a:rPr lang="en-US" sz="1500" b="1" dirty="0">
+                <a:solidFill>
+                  <a:srgbClr val="A6A6A6"/>
+                </a:solidFill>
+              </a:rPr>
+              <a:t>1.</a:t>
+            </a:r>
+            <a:endParaRPr lang="en-US" sz="1500" dirty="0"/>
+          </a:p>
+        </p:txBody>
+      </p:sp>
+      <p:sp>
+        <p:nvSpPr>
+          <p:cNvPr id="7" name="Text 5"/>
           <p:cNvSpPr txBox="1"/>
           <p:nvPr/>
         </p:nvSpPr>
@@ -10173,40 +9394,15 @@
       </p:sp>
       <p:sp>
         <p:nvSpPr>
-          <p:cNvPr id="11" name="Shape 8"/>
-          <p:cNvSpPr/>
-          <p:nvPr/>
-        </p:nvSpPr>
-        <p:spPr>
-          <a:xfrm>
-            <a:off x="6400800" y="3291840"/>
+          <p:cNvPr id="8" name="Text 6"/>
+          <p:cNvSpPr txBox="1"/>
+          <p:nvPr/>
+        </p:nvSpPr>
+        <p:spPr>
+          <a:xfrm>
+            <a:off x="6400800" y="3200400"/>
             <a:ext cx="384048" cy="384048"/>
           </a:xfrm>
-          <a:prstGeom prst="ellipse">
-            <a:avLst/>
-          </a:prstGeom>
-          <a:solidFill>
-            <a:srgbClr val="A6A6A6"/>
-          </a:solidFill>
-          <a:ln w="12700">
-            <a:solidFill>
-              <a:srgbClr val="A6A6A6"/>
-            </a:solidFill>
-            <a:prstDash val="solid"/>
-          </a:ln>
-        </p:spPr>
-      </p:sp>
-      <p:sp>
-        <p:nvSpPr>
-          <p:cNvPr id="12" name="Text 9"/>
-          <p:cNvSpPr txBox="1"/>
-          <p:nvPr/>
-        </p:nvSpPr>
-        <p:spPr>
-          <a:xfrm>
-            <a:off x="6400800" y="3291840"/>
-            <a:ext cx="384048" cy="384048"/>
-          </a:xfrm>
           <a:prstGeom prst="rect">
             <a:avLst/>
           </a:prstGeom>
@@ -10217,24 +9413,24 @@
           <a:bodyPr wrap="square" lIns="0" tIns="0" rIns="0" bIns="0" rtlCol="0" anchor="ctr"/>
           <a:lstStyle/>
           <a:p>
-            <a:pPr algn="ctr" indent="0" marL="0">
-              <a:buNone/>
-            </a:pPr>
-            <a:r>
-              <a:rPr lang="en-US" sz="1400" b="1" dirty="0">
-                <a:solidFill>
-                  <a:srgbClr val="000000"/>
-                </a:solidFill>
-              </a:rPr>
-              <a:t>2</a:t>
-            </a:r>
-            <a:endParaRPr lang="en-US" sz="1400" dirty="0"/>
-          </a:p>
-        </p:txBody>
-      </p:sp>
-      <p:sp>
-        <p:nvSpPr>
-          <p:cNvPr id="13" name="Text 10"/>
+            <a:pPr algn="l" indent="0" marL="0">
+              <a:buNone/>
+            </a:pPr>
+            <a:r>
+              <a:rPr lang="en-US" sz="1500" b="1" dirty="0">
+                <a:solidFill>
+                  <a:srgbClr val="A6A6A6"/>
+                </a:solidFill>
+              </a:rPr>
+              <a:t>2.</a:t>
+            </a:r>
+            <a:endParaRPr lang="en-US" sz="1500" dirty="0"/>
+          </a:p>
+        </p:txBody>
+      </p:sp>
+      <p:sp>
+        <p:nvSpPr>
+          <p:cNvPr id="9" name="Text 7"/>
           <p:cNvSpPr txBox="1"/>
           <p:nvPr/>
         </p:nvSpPr>
@@ -10270,40 +9466,15 @@
       </p:sp>
       <p:sp>
         <p:nvSpPr>
-          <p:cNvPr id="14" name="Shape 11"/>
-          <p:cNvSpPr/>
-          <p:nvPr/>
-        </p:nvSpPr>
-        <p:spPr>
-          <a:xfrm>
-            <a:off x="6400800" y="4480560"/>
+          <p:cNvPr id="10" name="Text 8"/>
+          <p:cNvSpPr txBox="1"/>
+          <p:nvPr/>
+        </p:nvSpPr>
+        <p:spPr>
+          <a:xfrm>
+            <a:off x="6400800" y="4389120"/>
             <a:ext cx="384048" cy="384048"/>
           </a:xfrm>
-          <a:prstGeom prst="ellipse">
-            <a:avLst/>
-          </a:prstGeom>
-          <a:solidFill>
-            <a:srgbClr val="A6A6A6"/>
-          </a:solidFill>
-          <a:ln w="12700">
-            <a:solidFill>
-              <a:srgbClr val="A6A6A6"/>
-            </a:solidFill>
-            <a:prstDash val="solid"/>
-          </a:ln>
-        </p:spPr>
-      </p:sp>
-      <p:sp>
-        <p:nvSpPr>
-          <p:cNvPr id="15" name="Text 12"/>
-          <p:cNvSpPr txBox="1"/>
-          <p:nvPr/>
-        </p:nvSpPr>
-        <p:spPr>
-          <a:xfrm>
-            <a:off x="6400800" y="4480560"/>
-            <a:ext cx="384048" cy="384048"/>
-          </a:xfrm>
           <a:prstGeom prst="rect">
             <a:avLst/>
           </a:prstGeom>
@@ -10314,24 +9485,24 @@
           <a:bodyPr wrap="square" lIns="0" tIns="0" rIns="0" bIns="0" rtlCol="0" anchor="ctr"/>
           <a:lstStyle/>
           <a:p>
-            <a:pPr algn="ctr" indent="0" marL="0">
-              <a:buNone/>
-            </a:pPr>
-            <a:r>
-              <a:rPr lang="en-US" sz="1400" b="1" dirty="0">
-                <a:solidFill>
-                  <a:srgbClr val="000000"/>
-                </a:solidFill>
-              </a:rPr>
-              <a:t>3</a:t>
-            </a:r>
-            <a:endParaRPr lang="en-US" sz="1400" dirty="0"/>
-          </a:p>
-        </p:txBody>
-      </p:sp>
-      <p:sp>
-        <p:nvSpPr>
-          <p:cNvPr id="16" name="Text 13"/>
+            <a:pPr algn="l" indent="0" marL="0">
+              <a:buNone/>
+            </a:pPr>
+            <a:r>
+              <a:rPr lang="en-US" sz="1500" b="1" dirty="0">
+                <a:solidFill>
+                  <a:srgbClr val="A6A6A6"/>
+                </a:solidFill>
+              </a:rPr>
+              <a:t>3.</a:t>
+            </a:r>
+            <a:endParaRPr lang="en-US" sz="1500" dirty="0"/>
+          </a:p>
+        </p:txBody>
+      </p:sp>
+      <p:sp>
+        <p:nvSpPr>
+          <p:cNvPr id="11" name="Text 9"/>
           <p:cNvSpPr txBox="1"/>
           <p:nvPr/>
         </p:nvSpPr>
@@ -10367,7 +9538,7 @@
       </p:sp>
       <p:sp>
         <p:nvSpPr>
-          <p:cNvPr id="17" name="Text 14"/>
+          <p:cNvPr id="12" name="Text 10"/>
           <p:cNvSpPr txBox="1"/>
           <p:nvPr/>
         </p:nvSpPr>
@@ -10538,63 +9709,14 @@
       </p:sp>
       <p:sp>
         <p:nvSpPr>
-          <p:cNvPr id="4" name="Shape 2"/>
-          <p:cNvSpPr/>
-          <p:nvPr/>
-        </p:nvSpPr>
-        <p:spPr>
-          <a:xfrm>
-            <a:off x="822960" y="1691640"/>
-            <a:ext cx="822960" cy="822960"/>
-          </a:xfrm>
-          <a:prstGeom prst="ellipse">
-            <a:avLst/>
-          </a:prstGeom>
-          <a:solidFill>
-            <a:srgbClr val="A6A6A6"/>
-          </a:solidFill>
-          <a:ln w="12700">
-            <a:solidFill>
-              <a:srgbClr val="A6A6A6"/>
-            </a:solidFill>
-            <a:prstDash val="solid"/>
-          </a:ln>
-        </p:spPr>
-      </p:sp>
-      <p:pic>
-        <p:nvPicPr>
-          <p:cNvPr id="5" name="Image 0" descr="preencoded.png">    </p:cNvPr>
-          <p:cNvPicPr>
-            <a:picLocks noChangeAspect="1"/>
-          </p:cNvPicPr>
-          <p:nvPr/>
-        </p:nvPicPr>
-        <p:blipFill>
-          <a:blip r:embed="rId1"/>
-          <a:stretch>
-            <a:fillRect/>
-          </a:stretch>
-        </p:blipFill>
-        <p:spPr>
-          <a:xfrm>
-            <a:off x="1028700" y="1897380"/>
-            <a:ext cx="411480" cy="411480"/>
-          </a:xfrm>
-          <a:prstGeom prst="rect">
-            <a:avLst/>
-          </a:prstGeom>
-        </p:spPr>
-      </p:pic>
-      <p:sp>
-        <p:nvSpPr>
-          <p:cNvPr id="6" name="Text 3"/>
+          <p:cNvPr id="4" name="Text 2"/>
           <p:cNvSpPr txBox="1"/>
           <p:nvPr/>
         </p:nvSpPr>
         <p:spPr>
           <a:xfrm>
-            <a:off x="822960" y="2697480"/>
-            <a:ext cx="3383280" cy="3291840"/>
+            <a:off x="822960" y="1645920"/>
+            <a:ext cx="3383280" cy="4297680"/>
           </a:xfrm>
           <a:prstGeom prst="rect">
             <a:avLst/>
@@ -10693,7 +9815,7 @@
       </p:sp>
       <p:sp>
         <p:nvSpPr>
-          <p:cNvPr id="7" name="Text 4"/>
+          <p:cNvPr id="5" name="Text 3"/>
           <p:cNvSpPr txBox="1"/>
           <p:nvPr/>
         </p:nvSpPr>
@@ -10729,40 +9851,15 @@
       </p:sp>
       <p:sp>
         <p:nvSpPr>
-          <p:cNvPr id="8" name="Shape 5"/>
-          <p:cNvSpPr/>
-          <p:nvPr/>
-        </p:nvSpPr>
-        <p:spPr>
-          <a:xfrm>
-            <a:off x="4846320" y="2057400"/>
+          <p:cNvPr id="6" name="Text 4"/>
+          <p:cNvSpPr txBox="1"/>
+          <p:nvPr/>
+        </p:nvSpPr>
+        <p:spPr>
+          <a:xfrm>
+            <a:off x="4846320" y="1965960"/>
             <a:ext cx="384048" cy="384048"/>
           </a:xfrm>
-          <a:prstGeom prst="ellipse">
-            <a:avLst/>
-          </a:prstGeom>
-          <a:solidFill>
-            <a:srgbClr val="404040"/>
-          </a:solidFill>
-          <a:ln w="12700">
-            <a:solidFill>
-              <a:srgbClr val="404040"/>
-            </a:solidFill>
-            <a:prstDash val="solid"/>
-          </a:ln>
-        </p:spPr>
-      </p:sp>
-      <p:sp>
-        <p:nvSpPr>
-          <p:cNvPr id="9" name="Text 6"/>
-          <p:cNvSpPr txBox="1"/>
-          <p:nvPr/>
-        </p:nvSpPr>
-        <p:spPr>
-          <a:xfrm>
-            <a:off x="4846320" y="2057400"/>
-            <a:ext cx="384048" cy="384048"/>
-          </a:xfrm>
           <a:prstGeom prst="rect">
             <a:avLst/>
           </a:prstGeom>
@@ -10773,24 +9870,24 @@
           <a:bodyPr wrap="square" lIns="0" tIns="0" rIns="0" bIns="0" rtlCol="0" anchor="ctr"/>
           <a:lstStyle/>
           <a:p>
-            <a:pPr algn="ctr" indent="0" marL="0">
-              <a:buNone/>
-            </a:pPr>
-            <a:r>
-              <a:rPr lang="en-US" sz="1400" b="1" dirty="0">
-                <a:solidFill>
-                  <a:srgbClr val="FFFFFF"/>
-                </a:solidFill>
-              </a:rPr>
-              <a:t>1</a:t>
-            </a:r>
-            <a:endParaRPr lang="en-US" sz="1400" dirty="0"/>
-          </a:p>
-        </p:txBody>
-      </p:sp>
-      <p:sp>
-        <p:nvSpPr>
-          <p:cNvPr id="10" name="Text 7"/>
+            <a:pPr algn="l" indent="0" marL="0">
+              <a:buNone/>
+            </a:pPr>
+            <a:r>
+              <a:rPr lang="en-US" sz="1500" b="1" dirty="0">
+                <a:solidFill>
+                  <a:srgbClr val="404040"/>
+                </a:solidFill>
+              </a:rPr>
+              <a:t>1.</a:t>
+            </a:r>
+            <a:endParaRPr lang="en-US" sz="1500" dirty="0"/>
+          </a:p>
+        </p:txBody>
+      </p:sp>
+      <p:sp>
+        <p:nvSpPr>
+          <p:cNvPr id="7" name="Text 5"/>
           <p:cNvSpPr txBox="1"/>
           <p:nvPr/>
         </p:nvSpPr>
@@ -10826,40 +9923,15 @@
       </p:sp>
       <p:sp>
         <p:nvSpPr>
-          <p:cNvPr id="11" name="Shape 8"/>
-          <p:cNvSpPr/>
-          <p:nvPr/>
-        </p:nvSpPr>
-        <p:spPr>
-          <a:xfrm>
-            <a:off x="4846320" y="3063240"/>
+          <p:cNvPr id="8" name="Text 6"/>
+          <p:cNvSpPr txBox="1"/>
+          <p:nvPr/>
+        </p:nvSpPr>
+        <p:spPr>
+          <a:xfrm>
+            <a:off x="4846320" y="2971800"/>
             <a:ext cx="384048" cy="384048"/>
           </a:xfrm>
-          <a:prstGeom prst="ellipse">
-            <a:avLst/>
-          </a:prstGeom>
-          <a:solidFill>
-            <a:srgbClr val="404040"/>
-          </a:solidFill>
-          <a:ln w="12700">
-            <a:solidFill>
-              <a:srgbClr val="404040"/>
-            </a:solidFill>
-            <a:prstDash val="solid"/>
-          </a:ln>
-        </p:spPr>
-      </p:sp>
-      <p:sp>
-        <p:nvSpPr>
-          <p:cNvPr id="12" name="Text 9"/>
-          <p:cNvSpPr txBox="1"/>
-          <p:nvPr/>
-        </p:nvSpPr>
-        <p:spPr>
-          <a:xfrm>
-            <a:off x="4846320" y="3063240"/>
-            <a:ext cx="384048" cy="384048"/>
-          </a:xfrm>
           <a:prstGeom prst="rect">
             <a:avLst/>
           </a:prstGeom>
@@ -10870,24 +9942,24 @@
           <a:bodyPr wrap="square" lIns="0" tIns="0" rIns="0" bIns="0" rtlCol="0" anchor="ctr"/>
           <a:lstStyle/>
           <a:p>
-            <a:pPr algn="ctr" indent="0" marL="0">
-              <a:buNone/>
-            </a:pPr>
-            <a:r>
-              <a:rPr lang="en-US" sz="1400" b="1" dirty="0">
-                <a:solidFill>
-                  <a:srgbClr val="FFFFFF"/>
-                </a:solidFill>
-              </a:rPr>
-              <a:t>2</a:t>
-            </a:r>
-            <a:endParaRPr lang="en-US" sz="1400" dirty="0"/>
-          </a:p>
-        </p:txBody>
-      </p:sp>
-      <p:sp>
-        <p:nvSpPr>
-          <p:cNvPr id="13" name="Text 10"/>
+            <a:pPr algn="l" indent="0" marL="0">
+              <a:buNone/>
+            </a:pPr>
+            <a:r>
+              <a:rPr lang="en-US" sz="1500" b="1" dirty="0">
+                <a:solidFill>
+                  <a:srgbClr val="404040"/>
+                </a:solidFill>
+              </a:rPr>
+              <a:t>2.</a:t>
+            </a:r>
+            <a:endParaRPr lang="en-US" sz="1500" dirty="0"/>
+          </a:p>
+        </p:txBody>
+      </p:sp>
+      <p:sp>
+        <p:nvSpPr>
+          <p:cNvPr id="9" name="Text 7"/>
           <p:cNvSpPr txBox="1"/>
           <p:nvPr/>
         </p:nvSpPr>
@@ -10923,40 +9995,15 @@
       </p:sp>
       <p:sp>
         <p:nvSpPr>
-          <p:cNvPr id="14" name="Shape 11"/>
-          <p:cNvSpPr/>
-          <p:nvPr/>
-        </p:nvSpPr>
-        <p:spPr>
-          <a:xfrm>
-            <a:off x="4846320" y="4069080"/>
+          <p:cNvPr id="10" name="Text 8"/>
+          <p:cNvSpPr txBox="1"/>
+          <p:nvPr/>
+        </p:nvSpPr>
+        <p:spPr>
+          <a:xfrm>
+            <a:off x="4846320" y="3977640"/>
             <a:ext cx="384048" cy="384048"/>
           </a:xfrm>
-          <a:prstGeom prst="ellipse">
-            <a:avLst/>
-          </a:prstGeom>
-          <a:solidFill>
-            <a:srgbClr val="404040"/>
-          </a:solidFill>
-          <a:ln w="12700">
-            <a:solidFill>
-              <a:srgbClr val="404040"/>
-            </a:solidFill>
-            <a:prstDash val="solid"/>
-          </a:ln>
-        </p:spPr>
-      </p:sp>
-      <p:sp>
-        <p:nvSpPr>
-          <p:cNvPr id="15" name="Text 12"/>
-          <p:cNvSpPr txBox="1"/>
-          <p:nvPr/>
-        </p:nvSpPr>
-        <p:spPr>
-          <a:xfrm>
-            <a:off x="4846320" y="4069080"/>
-            <a:ext cx="384048" cy="384048"/>
-          </a:xfrm>
           <a:prstGeom prst="rect">
             <a:avLst/>
           </a:prstGeom>
@@ -10967,24 +10014,24 @@
           <a:bodyPr wrap="square" lIns="0" tIns="0" rIns="0" bIns="0" rtlCol="0" anchor="ctr"/>
           <a:lstStyle/>
           <a:p>
-            <a:pPr algn="ctr" indent="0" marL="0">
-              <a:buNone/>
-            </a:pPr>
-            <a:r>
-              <a:rPr lang="en-US" sz="1400" b="1" dirty="0">
-                <a:solidFill>
-                  <a:srgbClr val="FFFFFF"/>
-                </a:solidFill>
-              </a:rPr>
-              <a:t>3</a:t>
-            </a:r>
-            <a:endParaRPr lang="en-US" sz="1400" dirty="0"/>
-          </a:p>
-        </p:txBody>
-      </p:sp>
-      <p:sp>
-        <p:nvSpPr>
-          <p:cNvPr id="16" name="Text 13"/>
+            <a:pPr algn="l" indent="0" marL="0">
+              <a:buNone/>
+            </a:pPr>
+            <a:r>
+              <a:rPr lang="en-US" sz="1500" b="1" dirty="0">
+                <a:solidFill>
+                  <a:srgbClr val="404040"/>
+                </a:solidFill>
+              </a:rPr>
+              <a:t>3.</a:t>
+            </a:r>
+            <a:endParaRPr lang="en-US" sz="1500" dirty="0"/>
+          </a:p>
+        </p:txBody>
+      </p:sp>
+      <p:sp>
+        <p:nvSpPr>
+          <p:cNvPr id="11" name="Text 9"/>
           <p:cNvSpPr txBox="1"/>
           <p:nvPr/>
         </p:nvSpPr>
@@ -11020,40 +10067,15 @@
       </p:sp>
       <p:sp>
         <p:nvSpPr>
-          <p:cNvPr id="17" name="Shape 14"/>
-          <p:cNvSpPr/>
-          <p:nvPr/>
-        </p:nvSpPr>
-        <p:spPr>
-          <a:xfrm>
-            <a:off x="4846320" y="5074920"/>
+          <p:cNvPr id="12" name="Text 10"/>
+          <p:cNvSpPr txBox="1"/>
+          <p:nvPr/>
+        </p:nvSpPr>
+        <p:spPr>
+          <a:xfrm>
+            <a:off x="4846320" y="4983480"/>
             <a:ext cx="384048" cy="384048"/>
           </a:xfrm>
-          <a:prstGeom prst="ellipse">
-            <a:avLst/>
-          </a:prstGeom>
-          <a:solidFill>
-            <a:srgbClr val="404040"/>
-          </a:solidFill>
-          <a:ln w="12700">
-            <a:solidFill>
-              <a:srgbClr val="404040"/>
-            </a:solidFill>
-            <a:prstDash val="solid"/>
-          </a:ln>
-        </p:spPr>
-      </p:sp>
-      <p:sp>
-        <p:nvSpPr>
-          <p:cNvPr id="18" name="Text 15"/>
-          <p:cNvSpPr txBox="1"/>
-          <p:nvPr/>
-        </p:nvSpPr>
-        <p:spPr>
-          <a:xfrm>
-            <a:off x="4846320" y="5074920"/>
-            <a:ext cx="384048" cy="384048"/>
-          </a:xfrm>
           <a:prstGeom prst="rect">
             <a:avLst/>
           </a:prstGeom>
@@ -11064,24 +10086,24 @@
           <a:bodyPr wrap="square" lIns="0" tIns="0" rIns="0" bIns="0" rtlCol="0" anchor="ctr"/>
           <a:lstStyle/>
           <a:p>
-            <a:pPr algn="ctr" indent="0" marL="0">
-              <a:buNone/>
-            </a:pPr>
-            <a:r>
-              <a:rPr lang="en-US" sz="1400" b="1" dirty="0">
-                <a:solidFill>
-                  <a:srgbClr val="FFFFFF"/>
-                </a:solidFill>
-              </a:rPr>
-              <a:t>4</a:t>
-            </a:r>
-            <a:endParaRPr lang="en-US" sz="1400" dirty="0"/>
-          </a:p>
-        </p:txBody>
-      </p:sp>
-      <p:sp>
-        <p:nvSpPr>
-          <p:cNvPr id="19" name="Text 16"/>
+            <a:pPr algn="l" indent="0" marL="0">
+              <a:buNone/>
+            </a:pPr>
+            <a:r>
+              <a:rPr lang="en-US" sz="1500" b="1" dirty="0">
+                <a:solidFill>
+                  <a:srgbClr val="404040"/>
+                </a:solidFill>
+              </a:rPr>
+              <a:t>4.</a:t>
+            </a:r>
+            <a:endParaRPr lang="en-US" sz="1500" dirty="0"/>
+          </a:p>
+        </p:txBody>
+      </p:sp>
+      <p:sp>
+        <p:nvSpPr>
+          <p:cNvPr id="13" name="Text 11"/>
           <p:cNvSpPr txBox="1"/>
           <p:nvPr/>
         </p:nvSpPr>
@@ -11288,28 +10310,39 @@
       </p:sp>
       <p:sp>
         <p:nvSpPr>
-          <p:cNvPr id="5" name="Shape 3"/>
-          <p:cNvSpPr/>
-          <p:nvPr/>
-        </p:nvSpPr>
-        <p:spPr>
-          <a:xfrm>
-            <a:off x="731520" y="2103120"/>
+          <p:cNvPr id="5" name="Text 3"/>
+          <p:cNvSpPr txBox="1"/>
+          <p:nvPr/>
+        </p:nvSpPr>
+        <p:spPr>
+          <a:xfrm>
+            <a:off x="731520" y="2011680"/>
             <a:ext cx="384048" cy="384048"/>
           </a:xfrm>
-          <a:prstGeom prst="ellipse">
-            <a:avLst/>
-          </a:prstGeom>
-          <a:solidFill>
-            <a:srgbClr val="4D4D4D"/>
-          </a:solidFill>
-          <a:ln w="12700">
-            <a:solidFill>
-              <a:srgbClr val="4D4D4D"/>
-            </a:solidFill>
-            <a:prstDash val="solid"/>
-          </a:ln>
-        </p:spPr>
+          <a:prstGeom prst="rect">
+            <a:avLst/>
+          </a:prstGeom>
+          <a:noFill/>
+          <a:ln/>
+        </p:spPr>
+        <p:txBody>
+          <a:bodyPr wrap="square" lIns="0" tIns="0" rIns="0" bIns="0" rtlCol="0" anchor="ctr"/>
+          <a:lstStyle/>
+          <a:p>
+            <a:pPr algn="l" indent="0" marL="0">
+              <a:buNone/>
+            </a:pPr>
+            <a:r>
+              <a:rPr lang="en-US" sz="1500" b="1" dirty="0">
+                <a:solidFill>
+                  <a:srgbClr val="4D4D4D"/>
+                </a:solidFill>
+              </a:rPr>
+              <a:t>1.</a:t>
+            </a:r>
+            <a:endParaRPr lang="en-US" sz="1500" dirty="0"/>
+          </a:p>
+        </p:txBody>
       </p:sp>
       <p:sp>
         <p:nvSpPr>
@@ -11319,42 +10352,6 @@
         </p:nvSpPr>
         <p:spPr>
           <a:xfrm>
-            <a:off x="731520" y="2103120"/>
-            <a:ext cx="384048" cy="384048"/>
-          </a:xfrm>
-          <a:prstGeom prst="rect">
-            <a:avLst/>
-          </a:prstGeom>
-          <a:noFill/>
-          <a:ln/>
-        </p:spPr>
-        <p:txBody>
-          <a:bodyPr wrap="square" lIns="0" tIns="0" rIns="0" bIns="0" rtlCol="0" anchor="ctr"/>
-          <a:lstStyle/>
-          <a:p>
-            <a:pPr algn="ctr" indent="0" marL="0">
-              <a:buNone/>
-            </a:pPr>
-            <a:r>
-              <a:rPr lang="en-US" sz="1400" b="1" dirty="0">
-                <a:solidFill>
-                  <a:srgbClr val="FFFFFF"/>
-                </a:solidFill>
-              </a:rPr>
-              <a:t>1</a:t>
-            </a:r>
-            <a:endParaRPr lang="en-US" sz="1400" dirty="0"/>
-          </a:p>
-        </p:txBody>
-      </p:sp>
-      <p:sp>
-        <p:nvSpPr>
-          <p:cNvPr id="7" name="Text 5"/>
-          <p:cNvSpPr txBox="1"/>
-          <p:nvPr/>
-        </p:nvSpPr>
-        <p:spPr>
-          <a:xfrm>
             <a:off x="1280160" y="2057400"/>
             <a:ext cx="4572000" cy="1188720"/>
           </a:xfrm>
@@ -11385,7 +10382,7 @@
       </p:sp>
       <p:sp>
         <p:nvSpPr>
-          <p:cNvPr id="8" name="Shape 6"/>
+          <p:cNvPr id="7" name="Shape 5"/>
           <p:cNvSpPr/>
           <p:nvPr/>
         </p:nvSpPr>
@@ -11412,28 +10409,75 @@
       </p:sp>
       <p:sp>
         <p:nvSpPr>
-          <p:cNvPr id="9" name="Shape 7"/>
-          <p:cNvSpPr/>
-          <p:nvPr/>
-        </p:nvSpPr>
-        <p:spPr>
-          <a:xfrm>
-            <a:off x="731520" y="3703320"/>
+          <p:cNvPr id="8" name="Text 6"/>
+          <p:cNvSpPr txBox="1"/>
+          <p:nvPr/>
+        </p:nvSpPr>
+        <p:spPr>
+          <a:xfrm>
+            <a:off x="731520" y="3611880"/>
             <a:ext cx="384048" cy="384048"/>
           </a:xfrm>
-          <a:prstGeom prst="ellipse">
-            <a:avLst/>
-          </a:prstGeom>
-          <a:solidFill>
-            <a:srgbClr val="4D4D4D"/>
-          </a:solidFill>
-          <a:ln w="12700">
-            <a:solidFill>
-              <a:srgbClr val="4D4D4D"/>
-            </a:solidFill>
-            <a:prstDash val="solid"/>
-          </a:ln>
-        </p:spPr>
+          <a:prstGeom prst="rect">
+            <a:avLst/>
+          </a:prstGeom>
+          <a:noFill/>
+          <a:ln/>
+        </p:spPr>
+        <p:txBody>
+          <a:bodyPr wrap="square" lIns="0" tIns="0" rIns="0" bIns="0" rtlCol="0" anchor="ctr"/>
+          <a:lstStyle/>
+          <a:p>
+            <a:pPr algn="l" indent="0" marL="0">
+              <a:buNone/>
+            </a:pPr>
+            <a:r>
+              <a:rPr lang="en-US" sz="1500" b="1" dirty="0">
+                <a:solidFill>
+                  <a:srgbClr val="4D4D4D"/>
+                </a:solidFill>
+              </a:rPr>
+              <a:t>2.</a:t>
+            </a:r>
+            <a:endParaRPr lang="en-US" sz="1500" dirty="0"/>
+          </a:p>
+        </p:txBody>
+      </p:sp>
+      <p:sp>
+        <p:nvSpPr>
+          <p:cNvPr id="9" name="Text 7"/>
+          <p:cNvSpPr txBox="1"/>
+          <p:nvPr/>
+        </p:nvSpPr>
+        <p:spPr>
+          <a:xfrm>
+            <a:off x="1280160" y="3657600"/>
+            <a:ext cx="4572000" cy="1188720"/>
+          </a:xfrm>
+          <a:prstGeom prst="rect">
+            <a:avLst/>
+          </a:prstGeom>
+          <a:noFill/>
+          <a:ln/>
+        </p:spPr>
+        <p:txBody>
+          <a:bodyPr wrap="square" lIns="0" tIns="0" rIns="0" bIns="0" rtlCol="0" anchor="t"/>
+          <a:lstStyle/>
+          <a:p>
+            <a:pPr indent="0" marL="0">
+              <a:buNone/>
+            </a:pPr>
+            <a:r>
+              <a:rPr lang="en-US" sz="1350" dirty="0">
+                <a:solidFill>
+                  <a:schemeClr val="tx1"/>
+                </a:solidFill>
+              </a:rPr>
+              <a:t>¿Vulneró la EPS los derechos a la salud, a la vida digna y a la seguridad social del niño al no exonerarlo de copagos y cuotas moderadoras, negar el transporte por falta de orden médica y no autorizar el tratamiento integral?</a:t>
+            </a:r>
+            <a:endParaRPr lang="en-US" sz="1350" dirty="0"/>
+          </a:p>
+        </p:txBody>
       </p:sp>
       <p:sp>
         <p:nvSpPr>
@@ -11443,78 +10487,6 @@
         </p:nvSpPr>
         <p:spPr>
           <a:xfrm>
-            <a:off x="731520" y="3703320"/>
-            <a:ext cx="384048" cy="384048"/>
-          </a:xfrm>
-          <a:prstGeom prst="rect">
-            <a:avLst/>
-          </a:prstGeom>
-          <a:noFill/>
-          <a:ln/>
-        </p:spPr>
-        <p:txBody>
-          <a:bodyPr wrap="square" lIns="0" tIns="0" rIns="0" bIns="0" rtlCol="0" anchor="ctr"/>
-          <a:lstStyle/>
-          <a:p>
-            <a:pPr algn="ctr" indent="0" marL="0">
-              <a:buNone/>
-            </a:pPr>
-            <a:r>
-              <a:rPr lang="en-US" sz="1400" b="1" dirty="0">
-                <a:solidFill>
-                  <a:srgbClr val="FFFFFF"/>
-                </a:solidFill>
-              </a:rPr>
-              <a:t>2</a:t>
-            </a:r>
-            <a:endParaRPr lang="en-US" sz="1400" dirty="0"/>
-          </a:p>
-        </p:txBody>
-      </p:sp>
-      <p:sp>
-        <p:nvSpPr>
-          <p:cNvPr id="11" name="Text 9"/>
-          <p:cNvSpPr txBox="1"/>
-          <p:nvPr/>
-        </p:nvSpPr>
-        <p:spPr>
-          <a:xfrm>
-            <a:off x="1280160" y="3657600"/>
-            <a:ext cx="4572000" cy="1188720"/>
-          </a:xfrm>
-          <a:prstGeom prst="rect">
-            <a:avLst/>
-          </a:prstGeom>
-          <a:noFill/>
-          <a:ln/>
-        </p:spPr>
-        <p:txBody>
-          <a:bodyPr wrap="square" lIns="0" tIns="0" rIns="0" bIns="0" rtlCol="0" anchor="t"/>
-          <a:lstStyle/>
-          <a:p>
-            <a:pPr indent="0" marL="0">
-              <a:buNone/>
-            </a:pPr>
-            <a:r>
-              <a:rPr lang="en-US" sz="1350" dirty="0">
-                <a:solidFill>
-                  <a:schemeClr val="tx1"/>
-                </a:solidFill>
-              </a:rPr>
-              <a:t>¿Vulneró la EPS los derechos a la salud, a la vida digna y a la seguridad social del niño al no exonerarlo de copagos y cuotas moderadoras, negar el transporte por falta de orden médica y no autorizar el tratamiento integral?</a:t>
-            </a:r>
-            <a:endParaRPr lang="en-US" sz="1350" dirty="0"/>
-          </a:p>
-        </p:txBody>
-      </p:sp>
-      <p:sp>
-        <p:nvSpPr>
-          <p:cNvPr id="12" name="Text 10"/>
-          <p:cNvSpPr txBox="1"/>
-          <p:nvPr/>
-        </p:nvSpPr>
-        <p:spPr>
-          <a:xfrm>
             <a:off x="6400800" y="1371600"/>
             <a:ext cx="5212080" cy="457200"/>
           </a:xfrm>
@@ -11545,7 +10517,7 @@
       </p:sp>
       <p:sp>
         <p:nvSpPr>
-          <p:cNvPr id="13" name="Shape 11"/>
+          <p:cNvPr id="11" name="Shape 9"/>
           <p:cNvSpPr/>
           <p:nvPr/>
         </p:nvSpPr>
@@ -11572,7 +10544,7 @@
       </p:sp>
       <p:sp>
         <p:nvSpPr>
-          <p:cNvPr id="14" name="Text 12"/>
+          <p:cNvPr id="12" name="Text 10"/>
           <p:cNvSpPr txBox="1"/>
           <p:nvPr/>
         </p:nvSpPr>
@@ -12896,99 +11868,50 @@
       </p:sp>
       <p:sp>
         <p:nvSpPr>
-          <p:cNvPr id="3" name="Shape 1"/>
+          <p:cNvPr id="3" name="Text 1"/>
+          <p:cNvSpPr txBox="1"/>
+          <p:nvPr/>
+        </p:nvSpPr>
+        <p:spPr>
+          <a:xfrm>
+            <a:off x="548640" y="1554480"/>
+            <a:ext cx="11091672" cy="1463040"/>
+          </a:xfrm>
+          <a:prstGeom prst="rect">
+            <a:avLst/>
+          </a:prstGeom>
+          <a:noFill/>
+          <a:ln/>
+        </p:spPr>
+        <p:txBody>
+          <a:bodyPr wrap="square" lIns="0" tIns="0" rIns="0" bIns="0" rtlCol="0" anchor="t"/>
+          <a:lstStyle/>
+          <a:p>
+            <a:pPr indent="0" marL="0">
+              <a:buNone/>
+            </a:pPr>
+            <a:r>
+              <a:rPr lang="en-US" sz="1800" dirty="0">
+                <a:solidFill>
+                  <a:schemeClr val="bg1"/>
+                </a:solidFill>
+              </a:rPr>
+              <a:t>En enero de 2023 un juez de Cartagena resolvió una tutela de salud de un niño con autismo y transcribió en la sentencia las preguntas que le hizo a ChatGPT y las respuestas que recibió. La Corte Constitucional revisó el caso en 2024.</a:t>
+            </a:r>
+            <a:endParaRPr lang="en-US" sz="1800" dirty="0"/>
+          </a:p>
+        </p:txBody>
+      </p:sp>
+      <p:sp>
+        <p:nvSpPr>
+          <p:cNvPr id="4" name="Shape 2"/>
           <p:cNvSpPr/>
           <p:nvPr/>
         </p:nvSpPr>
         <p:spPr>
           <a:xfrm>
-            <a:off x="548640" y="1737360"/>
-            <a:ext cx="1188720" cy="1188720"/>
-          </a:xfrm>
-          <a:prstGeom prst="ellipse">
-            <a:avLst/>
-          </a:prstGeom>
-          <a:solidFill>
-            <a:srgbClr val="A6A6A6"/>
-          </a:solidFill>
-          <a:ln w="12700">
-            <a:solidFill>
-              <a:srgbClr val="A6A6A6"/>
-            </a:solidFill>
-            <a:prstDash val="solid"/>
-          </a:ln>
-        </p:spPr>
-      </p:sp>
-      <p:pic>
-        <p:nvPicPr>
-          <p:cNvPr id="4" name="Image 0" descr="preencoded.png">    </p:cNvPr>
-          <p:cNvPicPr>
-            <a:picLocks noChangeAspect="1"/>
-          </p:cNvPicPr>
-          <p:nvPr/>
-        </p:nvPicPr>
-        <p:blipFill>
-          <a:blip r:embed="rId1"/>
-          <a:stretch>
-            <a:fillRect/>
-          </a:stretch>
-        </p:blipFill>
-        <p:spPr>
-          <a:xfrm>
-            <a:off x="845820" y="2034540"/>
-            <a:ext cx="594360" cy="594360"/>
-          </a:xfrm>
-          <a:prstGeom prst="rect">
-            <a:avLst/>
-          </a:prstGeom>
-        </p:spPr>
-      </p:pic>
-      <p:sp>
-        <p:nvSpPr>
-          <p:cNvPr id="5" name="Text 2"/>
-          <p:cNvSpPr txBox="1"/>
-          <p:nvPr/>
-        </p:nvSpPr>
-        <p:spPr>
-          <a:xfrm>
-            <a:off x="2103120" y="1645920"/>
-            <a:ext cx="9418320" cy="1463040"/>
-          </a:xfrm>
-          <a:prstGeom prst="rect">
-            <a:avLst/>
-          </a:prstGeom>
-          <a:noFill/>
-          <a:ln/>
-        </p:spPr>
-        <p:txBody>
-          <a:bodyPr wrap="square" lIns="0" tIns="0" rIns="0" bIns="0" rtlCol="0" anchor="t"/>
-          <a:lstStyle/>
-          <a:p>
-            <a:pPr indent="0" marL="0">
-              <a:buNone/>
-            </a:pPr>
-            <a:r>
-              <a:rPr lang="en-US" sz="1800" dirty="0">
-                <a:solidFill>
-                  <a:schemeClr val="bg1"/>
-                </a:solidFill>
-              </a:rPr>
-              <a:t>En enero de 2023 un juez de Cartagena resolvió una tutela de salud de un niño con autismo y transcribió en la sentencia las preguntas que le hizo a ChatGPT y las respuestas que recibió. La Corte Constitucional revisó el caso en 2024.</a:t>
-            </a:r>
-            <a:endParaRPr lang="en-US" sz="1800" dirty="0"/>
-          </a:p>
-        </p:txBody>
-      </p:sp>
-      <p:sp>
-        <p:nvSpPr>
-          <p:cNvPr id="6" name="Shape 3"/>
-          <p:cNvSpPr/>
-          <p:nvPr/>
-        </p:nvSpPr>
-        <p:spPr>
-          <a:xfrm>
-            <a:off x="2103120" y="3474720"/>
-            <a:ext cx="9418320" cy="713232"/>
+            <a:off x="548640" y="3474720"/>
+            <a:ext cx="11091672" cy="713232"/>
           </a:xfrm>
           <a:prstGeom prst="roundRect">
             <a:avLst>
@@ -13008,13 +11931,13 @@
       </p:sp>
       <p:sp>
         <p:nvSpPr>
-          <p:cNvPr id="7" name="Text 4"/>
+          <p:cNvPr id="5" name="Text 3"/>
           <p:cNvSpPr txBox="1"/>
           <p:nvPr/>
         </p:nvSpPr>
         <p:spPr>
           <a:xfrm>
-            <a:off x="2286000" y="3602736"/>
+            <a:off x="777240" y="3602736"/>
             <a:ext cx="457200" cy="457200"/>
           </a:xfrm>
           <a:prstGeom prst="rect">
@@ -13044,14 +11967,14 @@
       </p:sp>
       <p:sp>
         <p:nvSpPr>
-          <p:cNvPr id="8" name="Text 5"/>
+          <p:cNvPr id="6" name="Text 4"/>
           <p:cNvSpPr txBox="1"/>
           <p:nvPr/>
         </p:nvSpPr>
         <p:spPr>
           <a:xfrm>
-            <a:off x="2834640" y="3566160"/>
-            <a:ext cx="8503920" cy="530352"/>
+            <a:off x="1325880" y="3566160"/>
+            <a:ext cx="10085832" cy="530352"/>
           </a:xfrm>
           <a:prstGeom prst="rect">
             <a:avLst/>
@@ -13080,14 +12003,14 @@
       </p:sp>
       <p:sp>
         <p:nvSpPr>
-          <p:cNvPr id="9" name="Shape 6"/>
+          <p:cNvPr id="7" name="Shape 5"/>
           <p:cNvSpPr/>
           <p:nvPr/>
         </p:nvSpPr>
         <p:spPr>
           <a:xfrm>
-            <a:off x="2103120" y="4343400"/>
-            <a:ext cx="9418320" cy="713232"/>
+            <a:off x="548640" y="4343400"/>
+            <a:ext cx="11091672" cy="713232"/>
           </a:xfrm>
           <a:prstGeom prst="roundRect">
             <a:avLst>
@@ -13107,13 +12030,13 @@
       </p:sp>
       <p:sp>
         <p:nvSpPr>
-          <p:cNvPr id="10" name="Text 7"/>
+          <p:cNvPr id="8" name="Text 6"/>
           <p:cNvSpPr txBox="1"/>
           <p:nvPr/>
         </p:nvSpPr>
         <p:spPr>
           <a:xfrm>
-            <a:off x="2286000" y="4471416"/>
+            <a:off x="777240" y="4471416"/>
             <a:ext cx="457200" cy="457200"/>
           </a:xfrm>
           <a:prstGeom prst="rect">
@@ -13143,14 +12066,14 @@
       </p:sp>
       <p:sp>
         <p:nvSpPr>
-          <p:cNvPr id="11" name="Text 8"/>
+          <p:cNvPr id="9" name="Text 7"/>
           <p:cNvSpPr txBox="1"/>
           <p:nvPr/>
         </p:nvSpPr>
         <p:spPr>
           <a:xfrm>
-            <a:off x="2834640" y="4434840"/>
-            <a:ext cx="8503920" cy="530352"/>
+            <a:off x="1325880" y="4434840"/>
+            <a:ext cx="10085832" cy="530352"/>
           </a:xfrm>
           <a:prstGeom prst="rect">
             <a:avLst/>
@@ -13179,14 +12102,14 @@
       </p:sp>
       <p:sp>
         <p:nvSpPr>
-          <p:cNvPr id="12" name="Shape 9"/>
+          <p:cNvPr id="10" name="Shape 8"/>
           <p:cNvSpPr/>
           <p:nvPr/>
         </p:nvSpPr>
         <p:spPr>
           <a:xfrm>
-            <a:off x="2103120" y="5212080"/>
-            <a:ext cx="9418320" cy="713232"/>
+            <a:off x="548640" y="5212080"/>
+            <a:ext cx="11091672" cy="713232"/>
           </a:xfrm>
           <a:prstGeom prst="roundRect">
             <a:avLst>
@@ -13206,13 +12129,13 @@
       </p:sp>
       <p:sp>
         <p:nvSpPr>
-          <p:cNvPr id="13" name="Text 10"/>
+          <p:cNvPr id="11" name="Text 9"/>
           <p:cNvSpPr txBox="1"/>
           <p:nvPr/>
         </p:nvSpPr>
         <p:spPr>
           <a:xfrm>
-            <a:off x="2286000" y="5340096"/>
+            <a:off x="777240" y="5340096"/>
             <a:ext cx="457200" cy="457200"/>
           </a:xfrm>
           <a:prstGeom prst="rect">
@@ -13242,14 +12165,14 @@
       </p:sp>
       <p:sp>
         <p:nvSpPr>
-          <p:cNvPr id="14" name="Text 11"/>
+          <p:cNvPr id="12" name="Text 10"/>
           <p:cNvSpPr txBox="1"/>
           <p:nvPr/>
         </p:nvSpPr>
         <p:spPr>
           <a:xfrm>
-            <a:off x="2834640" y="5303520"/>
-            <a:ext cx="8503920" cy="530352"/>
+            <a:off x="1325880" y="5303520"/>
+            <a:ext cx="10085832" cy="530352"/>
           </a:xfrm>
           <a:prstGeom prst="rect">
             <a:avLst/>
@@ -13278,13 +12201,13 @@
       </p:sp>
       <p:sp>
         <p:nvSpPr>
-          <p:cNvPr id="15" name="Text 12"/>
+          <p:cNvPr id="13" name="Text 11"/>
           <p:cNvSpPr txBox="1"/>
           <p:nvPr/>
         </p:nvSpPr>
         <p:spPr>
           <a:xfrm>
-            <a:off x="2103120" y="5989320"/>
+            <a:off x="548640" y="5989320"/>
             <a:ext cx="9144000" cy="320040"/>
           </a:xfrm>
           <a:prstGeom prst="rect">
@@ -13821,92 +12744,43 @@
       </p:sp>
       <p:sp>
         <p:nvSpPr>
-          <p:cNvPr id="4" name="Shape 2"/>
-          <p:cNvSpPr/>
-          <p:nvPr/>
-        </p:nvSpPr>
-        <p:spPr>
-          <a:xfrm>
-            <a:off x="777240" y="1645920"/>
-            <a:ext cx="731520" cy="731520"/>
-          </a:xfrm>
-          <a:prstGeom prst="ellipse">
-            <a:avLst/>
-          </a:prstGeom>
-          <a:solidFill>
-            <a:srgbClr val="A6A6A6"/>
-          </a:solidFill>
-          <a:ln w="12700">
-            <a:solidFill>
-              <a:srgbClr val="A6A6A6"/>
-            </a:solidFill>
-            <a:prstDash val="solid"/>
-          </a:ln>
-        </p:spPr>
-      </p:sp>
-      <p:pic>
-        <p:nvPicPr>
-          <p:cNvPr id="5" name="Image 0" descr="preencoded.png">    </p:cNvPr>
-          <p:cNvPicPr>
-            <a:picLocks noChangeAspect="1"/>
-          </p:cNvPicPr>
-          <p:nvPr/>
-        </p:nvPicPr>
-        <p:blipFill>
-          <a:blip r:embed="rId1"/>
-          <a:stretch>
-            <a:fillRect/>
-          </a:stretch>
-        </p:blipFill>
-        <p:spPr>
-          <a:xfrm>
-            <a:off x="960120" y="1828800"/>
-            <a:ext cx="365760" cy="365760"/>
-          </a:xfrm>
-          <a:prstGeom prst="rect">
-            <a:avLst/>
-          </a:prstGeom>
-        </p:spPr>
-      </p:pic>
-      <p:sp>
-        <p:nvSpPr>
-          <p:cNvPr id="6" name="Text 3"/>
+          <p:cNvPr id="4" name="Text 2"/>
           <p:cNvSpPr txBox="1"/>
           <p:nvPr/>
         </p:nvSpPr>
         <p:spPr>
           <a:xfrm>
-            <a:off x="1645920" y="1645920"/>
-            <a:ext cx="2286000" cy="731520"/>
-          </a:xfrm>
-          <a:prstGeom prst="rect">
-            <a:avLst/>
-          </a:prstGeom>
-          <a:noFill/>
-          <a:ln/>
-        </p:spPr>
-        <p:txBody>
-          <a:bodyPr wrap="square" lIns="0" tIns="0" rIns="0" bIns="0" rtlCol="0" anchor="ctr"/>
-          <a:lstStyle/>
-          <a:p>
-            <a:pPr indent="0" marL="0">
-              <a:buNone/>
-            </a:pPr>
-            <a:r>
-              <a:rPr lang="en-US" sz="1500" b="1" dirty="0">
+            <a:off x="777240" y="1600200"/>
+            <a:ext cx="3063240" cy="822960"/>
+          </a:xfrm>
+          <a:prstGeom prst="rect">
+            <a:avLst/>
+          </a:prstGeom>
+          <a:noFill/>
+          <a:ln/>
+        </p:spPr>
+        <p:txBody>
+          <a:bodyPr wrap="square" lIns="0" tIns="0" rIns="0" bIns="0" rtlCol="0" anchor="t"/>
+          <a:lstStyle/>
+          <a:p>
+            <a:pPr indent="0" marL="0">
+              <a:buNone/>
+            </a:pPr>
+            <a:r>
+              <a:rPr lang="en-US" sz="1600" b="1" dirty="0">
                 <a:solidFill>
                   <a:schemeClr val="tx2"/>
                 </a:solidFill>
               </a:rPr>
               <a:t>El auto redactado por la máquina</a:t>
             </a:r>
-            <a:endParaRPr lang="en-US" sz="1500" dirty="0"/>
-          </a:p>
-        </p:txBody>
-      </p:sp>
-      <p:sp>
-        <p:nvSpPr>
-          <p:cNvPr id="7" name="Text 4"/>
+            <a:endParaRPr lang="en-US" sz="1600" dirty="0"/>
+          </a:p>
+        </p:txBody>
+      </p:sp>
+      <p:sp>
+        <p:nvSpPr>
+          <p:cNvPr id="5" name="Text 3"/>
           <p:cNvSpPr txBox="1"/>
           <p:nvPr/>
         </p:nvSpPr>
@@ -13942,7 +12816,7 @@
       </p:sp>
       <p:sp>
         <p:nvSpPr>
-          <p:cNvPr id="8" name="Text 5"/>
+          <p:cNvPr id="6" name="Text 4"/>
           <p:cNvSpPr txBox="1"/>
           <p:nvPr/>
         </p:nvSpPr>
@@ -13978,7 +12852,7 @@
       </p:sp>
       <p:sp>
         <p:nvSpPr>
-          <p:cNvPr id="9" name="Shape 6"/>
+          <p:cNvPr id="7" name="Shape 5"/>
           <p:cNvSpPr/>
           <p:nvPr/>
         </p:nvSpPr>
@@ -14005,92 +12879,43 @@
       </p:sp>
       <p:sp>
         <p:nvSpPr>
-          <p:cNvPr id="10" name="Shape 7"/>
-          <p:cNvSpPr/>
-          <p:nvPr/>
-        </p:nvSpPr>
-        <p:spPr>
-          <a:xfrm>
-            <a:off x="4526280" y="1645920"/>
-            <a:ext cx="731520" cy="731520"/>
-          </a:xfrm>
-          <a:prstGeom prst="ellipse">
-            <a:avLst/>
-          </a:prstGeom>
-          <a:solidFill>
-            <a:srgbClr val="A6A6A6"/>
-          </a:solidFill>
-          <a:ln w="12700">
-            <a:solidFill>
-              <a:srgbClr val="A6A6A6"/>
-            </a:solidFill>
-            <a:prstDash val="solid"/>
-          </a:ln>
-        </p:spPr>
-      </p:sp>
-      <p:pic>
-        <p:nvPicPr>
-          <p:cNvPr id="11" name="Image 1" descr="preencoded.png">    </p:cNvPr>
-          <p:cNvPicPr>
-            <a:picLocks noChangeAspect="1"/>
-          </p:cNvPicPr>
-          <p:nvPr/>
-        </p:nvPicPr>
-        <p:blipFill>
-          <a:blip r:embed="rId2"/>
-          <a:stretch>
-            <a:fillRect/>
-          </a:stretch>
-        </p:blipFill>
-        <p:spPr>
-          <a:xfrm>
-            <a:off x="4709160" y="1828800"/>
-            <a:ext cx="365760" cy="365760"/>
-          </a:xfrm>
-          <a:prstGeom prst="rect">
-            <a:avLst/>
-          </a:prstGeom>
-        </p:spPr>
-      </p:pic>
-      <p:sp>
-        <p:nvSpPr>
-          <p:cNvPr id="12" name="Text 8"/>
+          <p:cNvPr id="8" name="Text 6"/>
           <p:cNvSpPr txBox="1"/>
           <p:nvPr/>
         </p:nvSpPr>
         <p:spPr>
           <a:xfrm>
-            <a:off x="5394960" y="1645920"/>
-            <a:ext cx="2286000" cy="731520"/>
-          </a:xfrm>
-          <a:prstGeom prst="rect">
-            <a:avLst/>
-          </a:prstGeom>
-          <a:noFill/>
-          <a:ln/>
-        </p:spPr>
-        <p:txBody>
-          <a:bodyPr wrap="square" lIns="0" tIns="0" rIns="0" bIns="0" rtlCol="0" anchor="ctr"/>
-          <a:lstStyle/>
-          <a:p>
-            <a:pPr indent="0" marL="0">
-              <a:buNone/>
-            </a:pPr>
-            <a:r>
-              <a:rPr lang="en-US" sz="1500" b="1" dirty="0">
+            <a:off x="4526280" y="1600200"/>
+            <a:ext cx="3063240" cy="822960"/>
+          </a:xfrm>
+          <a:prstGeom prst="rect">
+            <a:avLst/>
+          </a:prstGeom>
+          <a:noFill/>
+          <a:ln/>
+        </p:spPr>
+        <p:txBody>
+          <a:bodyPr wrap="square" lIns="0" tIns="0" rIns="0" bIns="0" rtlCol="0" anchor="t"/>
+          <a:lstStyle/>
+          <a:p>
+            <a:pPr indent="0" marL="0">
+              <a:buNone/>
+            </a:pPr>
+            <a:r>
+              <a:rPr lang="en-US" sz="1600" b="1" dirty="0">
                 <a:solidFill>
                   <a:schemeClr val="tx2"/>
                 </a:solidFill>
               </a:rPr>
               <a:t>La tutela con la cita inexistente</a:t>
             </a:r>
-            <a:endParaRPr lang="en-US" sz="1500" dirty="0"/>
-          </a:p>
-        </p:txBody>
-      </p:sp>
-      <p:sp>
-        <p:nvSpPr>
-          <p:cNvPr id="13" name="Text 9"/>
+            <a:endParaRPr lang="en-US" sz="1600" dirty="0"/>
+          </a:p>
+        </p:txBody>
+      </p:sp>
+      <p:sp>
+        <p:nvSpPr>
+          <p:cNvPr id="9" name="Text 7"/>
           <p:cNvSpPr txBox="1"/>
           <p:nvPr/>
         </p:nvSpPr>
@@ -14126,7 +12951,7 @@
       </p:sp>
       <p:sp>
         <p:nvSpPr>
-          <p:cNvPr id="14" name="Text 10"/>
+          <p:cNvPr id="10" name="Text 8"/>
           <p:cNvSpPr txBox="1"/>
           <p:nvPr/>
         </p:nvSpPr>
@@ -14162,7 +12987,7 @@
       </p:sp>
       <p:sp>
         <p:nvSpPr>
-          <p:cNvPr id="15" name="Shape 11"/>
+          <p:cNvPr id="11" name="Shape 9"/>
           <p:cNvSpPr/>
           <p:nvPr/>
         </p:nvSpPr>
@@ -14189,92 +13014,43 @@
       </p:sp>
       <p:sp>
         <p:nvSpPr>
-          <p:cNvPr id="16" name="Shape 12"/>
-          <p:cNvSpPr/>
-          <p:nvPr/>
-        </p:nvSpPr>
-        <p:spPr>
-          <a:xfrm>
-            <a:off x="8275320" y="1645920"/>
-            <a:ext cx="731520" cy="731520"/>
-          </a:xfrm>
-          <a:prstGeom prst="ellipse">
-            <a:avLst/>
-          </a:prstGeom>
-          <a:solidFill>
-            <a:srgbClr val="A6A6A6"/>
-          </a:solidFill>
-          <a:ln w="12700">
-            <a:solidFill>
-              <a:srgbClr val="A6A6A6"/>
-            </a:solidFill>
-            <a:prstDash val="solid"/>
-          </a:ln>
-        </p:spPr>
-      </p:sp>
-      <p:pic>
-        <p:nvPicPr>
-          <p:cNvPr id="17" name="Image 2" descr="preencoded.png">    </p:cNvPr>
-          <p:cNvPicPr>
-            <a:picLocks noChangeAspect="1"/>
-          </p:cNvPicPr>
-          <p:nvPr/>
-        </p:nvPicPr>
-        <p:blipFill>
-          <a:blip r:embed="rId3"/>
-          <a:stretch>
-            <a:fillRect/>
-          </a:stretch>
-        </p:blipFill>
-        <p:spPr>
-          <a:xfrm>
-            <a:off x="8458200" y="1828800"/>
-            <a:ext cx="365760" cy="365760"/>
-          </a:xfrm>
-          <a:prstGeom prst="rect">
-            <a:avLst/>
-          </a:prstGeom>
-        </p:spPr>
-      </p:pic>
-      <p:sp>
-        <p:nvSpPr>
-          <p:cNvPr id="18" name="Text 13"/>
+          <p:cNvPr id="12" name="Text 10"/>
           <p:cNvSpPr txBox="1"/>
           <p:nvPr/>
         </p:nvSpPr>
         <p:spPr>
           <a:xfrm>
-            <a:off x="9144000" y="1645920"/>
-            <a:ext cx="2286000" cy="731520"/>
-          </a:xfrm>
-          <a:prstGeom prst="rect">
-            <a:avLst/>
-          </a:prstGeom>
-          <a:noFill/>
-          <a:ln/>
-        </p:spPr>
-        <p:txBody>
-          <a:bodyPr wrap="square" lIns="0" tIns="0" rIns="0" bIns="0" rtlCol="0" anchor="ctr"/>
-          <a:lstStyle/>
-          <a:p>
-            <a:pPr indent="0" marL="0">
-              <a:buNone/>
-            </a:pPr>
-            <a:r>
-              <a:rPr lang="en-US" sz="1500" b="1" dirty="0">
+            <a:off x="8275320" y="1600200"/>
+            <a:ext cx="3063240" cy="822960"/>
+          </a:xfrm>
+          <a:prstGeom prst="rect">
+            <a:avLst/>
+          </a:prstGeom>
+          <a:noFill/>
+          <a:ln/>
+        </p:spPr>
+        <p:txBody>
+          <a:bodyPr wrap="square" lIns="0" tIns="0" rIns="0" bIns="0" rtlCol="0" anchor="t"/>
+          <a:lstStyle/>
+          <a:p>
+            <a:pPr indent="0" marL="0">
+              <a:buNone/>
+            </a:pPr>
+            <a:r>
+              <a:rPr lang="en-US" sz="1600" b="1" dirty="0">
                 <a:solidFill>
                   <a:schemeClr val="tx2"/>
                 </a:solidFill>
               </a:rPr>
               <a:t>La EPS que decide sola</a:t>
             </a:r>
-            <a:endParaRPr lang="en-US" sz="1500" dirty="0"/>
-          </a:p>
-        </p:txBody>
-      </p:sp>
-      <p:sp>
-        <p:nvSpPr>
-          <p:cNvPr id="19" name="Text 14"/>
+            <a:endParaRPr lang="en-US" sz="1600" dirty="0"/>
+          </a:p>
+        </p:txBody>
+      </p:sp>
+      <p:sp>
+        <p:nvSpPr>
+          <p:cNvPr id="13" name="Text 11"/>
           <p:cNvSpPr txBox="1"/>
           <p:nvPr/>
         </p:nvSpPr>
@@ -14310,7 +13086,7 @@
       </p:sp>
       <p:sp>
         <p:nvSpPr>
-          <p:cNvPr id="20" name="Text 15"/>
+          <p:cNvPr id="14" name="Text 12"/>
           <p:cNvSpPr txBox="1"/>
           <p:nvPr/>
         </p:nvSpPr>
@@ -14454,28 +13230,39 @@
       </p:sp>
       <p:sp>
         <p:nvSpPr>
-          <p:cNvPr id="3" name="Shape 1"/>
-          <p:cNvSpPr/>
-          <p:nvPr/>
-        </p:nvSpPr>
-        <p:spPr>
-          <a:xfrm>
-            <a:off x="548640" y="1600200"/>
+          <p:cNvPr id="3" name="Text 1"/>
+          <p:cNvSpPr txBox="1"/>
+          <p:nvPr/>
+        </p:nvSpPr>
+        <p:spPr>
+          <a:xfrm>
+            <a:off x="548640" y="1682496"/>
             <a:ext cx="384048" cy="384048"/>
           </a:xfrm>
-          <a:prstGeom prst="ellipse">
-            <a:avLst/>
-          </a:prstGeom>
-          <a:solidFill>
-            <a:srgbClr val="A6A6A6"/>
-          </a:solidFill>
-          <a:ln w="12700">
-            <a:solidFill>
-              <a:srgbClr val="A6A6A6"/>
-            </a:solidFill>
-            <a:prstDash val="solid"/>
-          </a:ln>
-        </p:spPr>
+          <a:prstGeom prst="rect">
+            <a:avLst/>
+          </a:prstGeom>
+          <a:noFill/>
+          <a:ln/>
+        </p:spPr>
+        <p:txBody>
+          <a:bodyPr wrap="square" lIns="0" tIns="0" rIns="0" bIns="0" rtlCol="0" anchor="ctr"/>
+          <a:lstStyle/>
+          <a:p>
+            <a:pPr algn="l" indent="0" marL="0">
+              <a:buNone/>
+            </a:pPr>
+            <a:r>
+              <a:rPr lang="en-US" sz="1500" b="1" dirty="0">
+                <a:solidFill>
+                  <a:srgbClr val="A6A6A6"/>
+                </a:solidFill>
+              </a:rPr>
+              <a:t>1.</a:t>
+            </a:r>
+            <a:endParaRPr lang="en-US" sz="1500" dirty="0"/>
+          </a:p>
+        </p:txBody>
       </p:sp>
       <p:sp>
         <p:nvSpPr>
@@ -14485,8 +13272,8 @@
         </p:nvSpPr>
         <p:spPr>
           <a:xfrm>
-            <a:off x="548640" y="1600200"/>
-            <a:ext cx="384048" cy="384048"/>
+            <a:off x="1051560" y="1463040"/>
+            <a:ext cx="10451592" cy="822960"/>
           </a:xfrm>
           <a:prstGeom prst="rect">
             <a:avLst/>
@@ -14498,18 +13285,18 @@
           <a:bodyPr wrap="square" lIns="0" tIns="0" rIns="0" bIns="0" rtlCol="0" anchor="ctr"/>
           <a:lstStyle/>
           <a:p>
-            <a:pPr algn="ctr" indent="0" marL="0">
-              <a:buNone/>
-            </a:pPr>
-            <a:r>
-              <a:rPr lang="en-US" sz="1400" b="1" dirty="0">
-                <a:solidFill>
-                  <a:srgbClr val="000000"/>
-                </a:solidFill>
-              </a:rPr>
-              <a:t>1</a:t>
-            </a:r>
-            <a:endParaRPr lang="en-US" sz="1400" dirty="0"/>
+            <a:pPr indent="0" marL="0">
+              <a:buNone/>
+            </a:pPr>
+            <a:r>
+              <a:rPr lang="en-US" sz="1600" dirty="0">
+                <a:solidFill>
+                  <a:schemeClr val="bg1"/>
+                </a:solidFill>
+              </a:rPr>
+              <a:t>El Derecho Informático regula la información digital y sus sistemas como objeto; la informática jurídica los usa como herramienta.</a:t>
+            </a:r>
+            <a:endParaRPr lang="en-US" sz="1600" dirty="0"/>
           </a:p>
         </p:txBody>
       </p:sp>
@@ -14521,7 +13308,43 @@
         </p:nvSpPr>
         <p:spPr>
           <a:xfrm>
-            <a:off x="1188720" y="1463040"/>
+            <a:off x="548640" y="2596896"/>
+            <a:ext cx="384048" cy="384048"/>
+          </a:xfrm>
+          <a:prstGeom prst="rect">
+            <a:avLst/>
+          </a:prstGeom>
+          <a:noFill/>
+          <a:ln/>
+        </p:spPr>
+        <p:txBody>
+          <a:bodyPr wrap="square" lIns="0" tIns="0" rIns="0" bIns="0" rtlCol="0" anchor="ctr"/>
+          <a:lstStyle/>
+          <a:p>
+            <a:pPr algn="l" indent="0" marL="0">
+              <a:buNone/>
+            </a:pPr>
+            <a:r>
+              <a:rPr lang="en-US" sz="1500" b="1" dirty="0">
+                <a:solidFill>
+                  <a:srgbClr val="A6A6A6"/>
+                </a:solidFill>
+              </a:rPr>
+              <a:t>2.</a:t>
+            </a:r>
+            <a:endParaRPr lang="en-US" sz="1500" dirty="0"/>
+          </a:p>
+        </p:txBody>
+      </p:sp>
+      <p:sp>
+        <p:nvSpPr>
+          <p:cNvPr id="6" name="Text 4"/>
+          <p:cNvSpPr txBox="1"/>
+          <p:nvPr/>
+        </p:nvSpPr>
+        <p:spPr>
+          <a:xfrm>
+            <a:off x="1051560" y="2377440"/>
             <a:ext cx="10451592" cy="822960"/>
           </a:xfrm>
           <a:prstGeom prst="rect">
@@ -14543,36 +13366,11 @@
                   <a:schemeClr val="bg1"/>
                 </a:solidFill>
               </a:rPr>
-              <a:t>El Derecho Informático regula la información digital y sus sistemas como objeto; la informática jurídica los usa como herramienta.</a:t>
+              <a:t>Es una disciplina con normas, cátedra, doctrina e instituciones propias, pero transversal a todas las ramas.</a:t>
             </a:r>
             <a:endParaRPr lang="en-US" sz="1600" dirty="0"/>
           </a:p>
         </p:txBody>
-      </p:sp>
-      <p:sp>
-        <p:nvSpPr>
-          <p:cNvPr id="6" name="Shape 4"/>
-          <p:cNvSpPr/>
-          <p:nvPr/>
-        </p:nvSpPr>
-        <p:spPr>
-          <a:xfrm>
-            <a:off x="548640" y="2514600"/>
-            <a:ext cx="384048" cy="384048"/>
-          </a:xfrm>
-          <a:prstGeom prst="ellipse">
-            <a:avLst/>
-          </a:prstGeom>
-          <a:solidFill>
-            <a:srgbClr val="A6A6A6"/>
-          </a:solidFill>
-          <a:ln w="12700">
-            <a:solidFill>
-              <a:srgbClr val="A6A6A6"/>
-            </a:solidFill>
-            <a:prstDash val="solid"/>
-          </a:ln>
-        </p:spPr>
       </p:sp>
       <p:sp>
         <p:nvSpPr>
@@ -14582,7 +13380,7 @@
         </p:nvSpPr>
         <p:spPr>
           <a:xfrm>
-            <a:off x="548640" y="2514600"/>
+            <a:off x="548640" y="3511296"/>
             <a:ext cx="384048" cy="384048"/>
           </a:xfrm>
           <a:prstGeom prst="rect">
@@ -14595,18 +13393,18 @@
           <a:bodyPr wrap="square" lIns="0" tIns="0" rIns="0" bIns="0" rtlCol="0" anchor="ctr"/>
           <a:lstStyle/>
           <a:p>
-            <a:pPr algn="ctr" indent="0" marL="0">
-              <a:buNone/>
-            </a:pPr>
-            <a:r>
-              <a:rPr lang="en-US" sz="1400" b="1" dirty="0">
-                <a:solidFill>
-                  <a:srgbClr val="000000"/>
-                </a:solidFill>
-              </a:rPr>
-              <a:t>2</a:t>
-            </a:r>
-            <a:endParaRPr lang="en-US" sz="1400" dirty="0"/>
+            <a:pPr algn="l" indent="0" marL="0">
+              <a:buNone/>
+            </a:pPr>
+            <a:r>
+              <a:rPr lang="en-US" sz="1500" b="1" dirty="0">
+                <a:solidFill>
+                  <a:srgbClr val="A6A6A6"/>
+                </a:solidFill>
+              </a:rPr>
+              <a:t>3.</a:t>
+            </a:r>
+            <a:endParaRPr lang="en-US" sz="1500" dirty="0"/>
           </a:p>
         </p:txBody>
       </p:sp>
@@ -14618,7 +13416,7 @@
         </p:nvSpPr>
         <p:spPr>
           <a:xfrm>
-            <a:off x="1188720" y="2377440"/>
+            <a:off x="1051560" y="3291840"/>
             <a:ext cx="10451592" cy="822960"/>
           </a:xfrm>
           <a:prstGeom prst="rect">
@@ -14640,7 +13438,7 @@
                   <a:schemeClr val="bg1"/>
                 </a:solidFill>
               </a:rPr>
-              <a:t>Es una disciplina con normas, cátedra, doctrina e instituciones propias, pero transversal a todas las ramas.</a:t>
+              <a:t>Sus principios vienen de tres fuentes: la equivalencia funcional (Ley 527), la autodeterminación informativa (Ley 1581) y la supervisión humana (T-323 de 2024).</a:t>
             </a:r>
             <a:endParaRPr lang="en-US" sz="1600" dirty="0"/>
           </a:p>
@@ -14648,28 +13446,39 @@
       </p:sp>
       <p:sp>
         <p:nvSpPr>
-          <p:cNvPr id="9" name="Shape 7"/>
-          <p:cNvSpPr/>
-          <p:nvPr/>
-        </p:nvSpPr>
-        <p:spPr>
-          <a:xfrm>
-            <a:off x="548640" y="3429000"/>
+          <p:cNvPr id="9" name="Text 7"/>
+          <p:cNvSpPr txBox="1"/>
+          <p:nvPr/>
+        </p:nvSpPr>
+        <p:spPr>
+          <a:xfrm>
+            <a:off x="548640" y="4425696"/>
             <a:ext cx="384048" cy="384048"/>
           </a:xfrm>
-          <a:prstGeom prst="ellipse">
-            <a:avLst/>
-          </a:prstGeom>
-          <a:solidFill>
-            <a:srgbClr val="A6A6A6"/>
-          </a:solidFill>
-          <a:ln w="12700">
-            <a:solidFill>
-              <a:srgbClr val="A6A6A6"/>
-            </a:solidFill>
-            <a:prstDash val="solid"/>
-          </a:ln>
-        </p:spPr>
+          <a:prstGeom prst="rect">
+            <a:avLst/>
+          </a:prstGeom>
+          <a:noFill/>
+          <a:ln/>
+        </p:spPr>
+        <p:txBody>
+          <a:bodyPr wrap="square" lIns="0" tIns="0" rIns="0" bIns="0" rtlCol="0" anchor="ctr"/>
+          <a:lstStyle/>
+          <a:p>
+            <a:pPr algn="l" indent="0" marL="0">
+              <a:buNone/>
+            </a:pPr>
+            <a:r>
+              <a:rPr lang="en-US" sz="1500" b="1" dirty="0">
+                <a:solidFill>
+                  <a:srgbClr val="A6A6A6"/>
+                </a:solidFill>
+              </a:rPr>
+              <a:t>4.</a:t>
+            </a:r>
+            <a:endParaRPr lang="en-US" sz="1500" dirty="0"/>
+          </a:p>
+        </p:txBody>
       </p:sp>
       <p:sp>
         <p:nvSpPr>
@@ -14679,8 +13488,8 @@
         </p:nvSpPr>
         <p:spPr>
           <a:xfrm>
-            <a:off x="548640" y="3429000"/>
-            <a:ext cx="384048" cy="384048"/>
+            <a:off x="1051560" y="4206240"/>
+            <a:ext cx="10451592" cy="822960"/>
           </a:xfrm>
           <a:prstGeom prst="rect">
             <a:avLst/>
@@ -14692,18 +13501,18 @@
           <a:bodyPr wrap="square" lIns="0" tIns="0" rIns="0" bIns="0" rtlCol="0" anchor="ctr"/>
           <a:lstStyle/>
           <a:p>
-            <a:pPr algn="ctr" indent="0" marL="0">
-              <a:buNone/>
-            </a:pPr>
-            <a:r>
-              <a:rPr lang="en-US" sz="1400" b="1" dirty="0">
-                <a:solidFill>
-                  <a:srgbClr val="000000"/>
-                </a:solidFill>
-              </a:rPr>
-              <a:t>3</a:t>
-            </a:r>
-            <a:endParaRPr lang="en-US" sz="1400" dirty="0"/>
+            <a:pPr indent="0" marL="0">
+              <a:buNone/>
+            </a:pPr>
+            <a:r>
+              <a:rPr lang="en-US" sz="1600" dirty="0">
+                <a:solidFill>
+                  <a:schemeClr val="bg1"/>
+                </a:solidFill>
+              </a:rPr>
+              <a:t>La T-323 de 2024 no prohíbe la IA: exige transparencia, verificación, protección de datos y que el juez responda por la decisión.</a:t>
+            </a:r>
+            <a:endParaRPr lang="en-US" sz="1600" dirty="0"/>
           </a:p>
         </p:txBody>
       </p:sp>
@@ -14715,8 +13524,8 @@
         </p:nvSpPr>
         <p:spPr>
           <a:xfrm>
-            <a:off x="1188720" y="3291840"/>
-            <a:ext cx="10451592" cy="822960"/>
+            <a:off x="548640" y="5340096"/>
+            <a:ext cx="384048" cy="384048"/>
           </a:xfrm>
           <a:prstGeom prst="rect">
             <a:avLst/>
@@ -14728,188 +13537,30 @@
           <a:bodyPr wrap="square" lIns="0" tIns="0" rIns="0" bIns="0" rtlCol="0" anchor="ctr"/>
           <a:lstStyle/>
           <a:p>
-            <a:pPr indent="0" marL="0">
-              <a:buNone/>
-            </a:pPr>
-            <a:r>
-              <a:rPr lang="en-US" sz="1600" dirty="0">
-                <a:solidFill>
-                  <a:schemeClr val="bg1"/>
-                </a:solidFill>
-              </a:rPr>
-              <a:t>Sus principios vienen de tres fuentes: la equivalencia funcional (Ley 527), la autodeterminación informativa (Ley 1581) y la supervisión humana (T-323 de 2024).</a:t>
-            </a:r>
-            <a:endParaRPr lang="en-US" sz="1600" dirty="0"/>
-          </a:p>
-        </p:txBody>
-      </p:sp>
-      <p:sp>
-        <p:nvSpPr>
-          <p:cNvPr id="12" name="Shape 10"/>
-          <p:cNvSpPr/>
-          <p:nvPr/>
-        </p:nvSpPr>
-        <p:spPr>
-          <a:xfrm>
-            <a:off x="548640" y="4343400"/>
-            <a:ext cx="384048" cy="384048"/>
-          </a:xfrm>
-          <a:prstGeom prst="ellipse">
-            <a:avLst/>
-          </a:prstGeom>
-          <a:solidFill>
-            <a:srgbClr val="A6A6A6"/>
-          </a:solidFill>
-          <a:ln w="12700">
-            <a:solidFill>
-              <a:srgbClr val="A6A6A6"/>
-            </a:solidFill>
-            <a:prstDash val="solid"/>
-          </a:ln>
-        </p:spPr>
-      </p:sp>
-      <p:sp>
-        <p:nvSpPr>
-          <p:cNvPr id="13" name="Text 11"/>
+            <a:pPr algn="l" indent="0" marL="0">
+              <a:buNone/>
+            </a:pPr>
+            <a:r>
+              <a:rPr lang="en-US" sz="1500" b="1" dirty="0">
+                <a:solidFill>
+                  <a:srgbClr val="A6A6A6"/>
+                </a:solidFill>
+              </a:rPr>
+              <a:t>5.</a:t>
+            </a:r>
+            <a:endParaRPr lang="en-US" sz="1500" dirty="0"/>
+          </a:p>
+        </p:txBody>
+      </p:sp>
+      <p:sp>
+        <p:nvSpPr>
+          <p:cNvPr id="12" name="Text 10"/>
           <p:cNvSpPr txBox="1"/>
           <p:nvPr/>
         </p:nvSpPr>
         <p:spPr>
           <a:xfrm>
-            <a:off x="548640" y="4343400"/>
-            <a:ext cx="384048" cy="384048"/>
-          </a:xfrm>
-          <a:prstGeom prst="rect">
-            <a:avLst/>
-          </a:prstGeom>
-          <a:noFill/>
-          <a:ln/>
-        </p:spPr>
-        <p:txBody>
-          <a:bodyPr wrap="square" lIns="0" tIns="0" rIns="0" bIns="0" rtlCol="0" anchor="ctr"/>
-          <a:lstStyle/>
-          <a:p>
-            <a:pPr algn="ctr" indent="0" marL="0">
-              <a:buNone/>
-            </a:pPr>
-            <a:r>
-              <a:rPr lang="en-US" sz="1400" b="1" dirty="0">
-                <a:solidFill>
-                  <a:srgbClr val="000000"/>
-                </a:solidFill>
-              </a:rPr>
-              <a:t>4</a:t>
-            </a:r>
-            <a:endParaRPr lang="en-US" sz="1400" dirty="0"/>
-          </a:p>
-        </p:txBody>
-      </p:sp>
-      <p:sp>
-        <p:nvSpPr>
-          <p:cNvPr id="14" name="Text 12"/>
-          <p:cNvSpPr txBox="1"/>
-          <p:nvPr/>
-        </p:nvSpPr>
-        <p:spPr>
-          <a:xfrm>
-            <a:off x="1188720" y="4206240"/>
-            <a:ext cx="10451592" cy="822960"/>
-          </a:xfrm>
-          <a:prstGeom prst="rect">
-            <a:avLst/>
-          </a:prstGeom>
-          <a:noFill/>
-          <a:ln/>
-        </p:spPr>
-        <p:txBody>
-          <a:bodyPr wrap="square" lIns="0" tIns="0" rIns="0" bIns="0" rtlCol="0" anchor="ctr"/>
-          <a:lstStyle/>
-          <a:p>
-            <a:pPr indent="0" marL="0">
-              <a:buNone/>
-            </a:pPr>
-            <a:r>
-              <a:rPr lang="en-US" sz="1600" dirty="0">
-                <a:solidFill>
-                  <a:schemeClr val="bg1"/>
-                </a:solidFill>
-              </a:rPr>
-              <a:t>La T-323 de 2024 no prohíbe la IA: exige transparencia, verificación, protección de datos y que el juez responda por la decisión.</a:t>
-            </a:r>
-            <a:endParaRPr lang="en-US" sz="1600" dirty="0"/>
-          </a:p>
-        </p:txBody>
-      </p:sp>
-      <p:sp>
-        <p:nvSpPr>
-          <p:cNvPr id="15" name="Shape 13"/>
-          <p:cNvSpPr/>
-          <p:nvPr/>
-        </p:nvSpPr>
-        <p:spPr>
-          <a:xfrm>
-            <a:off x="548640" y="5257800"/>
-            <a:ext cx="384048" cy="384048"/>
-          </a:xfrm>
-          <a:prstGeom prst="ellipse">
-            <a:avLst/>
-          </a:prstGeom>
-          <a:solidFill>
-            <a:srgbClr val="A6A6A6"/>
-          </a:solidFill>
-          <a:ln w="12700">
-            <a:solidFill>
-              <a:srgbClr val="A6A6A6"/>
-            </a:solidFill>
-            <a:prstDash val="solid"/>
-          </a:ln>
-        </p:spPr>
-      </p:sp>
-      <p:sp>
-        <p:nvSpPr>
-          <p:cNvPr id="16" name="Text 14"/>
-          <p:cNvSpPr txBox="1"/>
-          <p:nvPr/>
-        </p:nvSpPr>
-        <p:spPr>
-          <a:xfrm>
-            <a:off x="548640" y="5257800"/>
-            <a:ext cx="384048" cy="384048"/>
-          </a:xfrm>
-          <a:prstGeom prst="rect">
-            <a:avLst/>
-          </a:prstGeom>
-          <a:noFill/>
-          <a:ln/>
-        </p:spPr>
-        <p:txBody>
-          <a:bodyPr wrap="square" lIns="0" tIns="0" rIns="0" bIns="0" rtlCol="0" anchor="ctr"/>
-          <a:lstStyle/>
-          <a:p>
-            <a:pPr algn="ctr" indent="0" marL="0">
-              <a:buNone/>
-            </a:pPr>
-            <a:r>
-              <a:rPr lang="en-US" sz="1400" b="1" dirty="0">
-                <a:solidFill>
-                  <a:srgbClr val="000000"/>
-                </a:solidFill>
-              </a:rPr>
-              <a:t>5</a:t>
-            </a:r>
-            <a:endParaRPr lang="en-US" sz="1400" dirty="0"/>
-          </a:p>
-        </p:txBody>
-      </p:sp>
-      <p:sp>
-        <p:nvSpPr>
-          <p:cNvPr id="17" name="Text 15"/>
-          <p:cNvSpPr txBox="1"/>
-          <p:nvPr/>
-        </p:nvSpPr>
-        <p:spPr>
-          <a:xfrm>
-            <a:off x="1188720" y="5120640"/>
+            <a:off x="1051560" y="5120640"/>
             <a:ext cx="10451592" cy="822960"/>
           </a:xfrm>
           <a:prstGeom prst="rect">
@@ -15074,63 +13725,14 @@
       </p:sp>
       <p:sp>
         <p:nvSpPr>
-          <p:cNvPr id="4" name="Shape 2"/>
-          <p:cNvSpPr/>
-          <p:nvPr/>
-        </p:nvSpPr>
-        <p:spPr>
-          <a:xfrm>
-            <a:off x="822960" y="1691640"/>
-            <a:ext cx="731520" cy="731520"/>
-          </a:xfrm>
-          <a:prstGeom prst="ellipse">
-            <a:avLst/>
-          </a:prstGeom>
-          <a:solidFill>
-            <a:srgbClr val="404040"/>
-          </a:solidFill>
-          <a:ln w="12700">
-            <a:solidFill>
-              <a:srgbClr val="404040"/>
-            </a:solidFill>
-            <a:prstDash val="solid"/>
-          </a:ln>
-        </p:spPr>
-      </p:sp>
-      <p:pic>
-        <p:nvPicPr>
-          <p:cNvPr id="5" name="Image 0" descr="preencoded.png">    </p:cNvPr>
-          <p:cNvPicPr>
-            <a:picLocks noChangeAspect="1"/>
-          </p:cNvPicPr>
-          <p:nvPr/>
-        </p:nvPicPr>
-        <p:blipFill>
-          <a:blip r:embed="rId1"/>
-          <a:stretch>
-            <a:fillRect/>
-          </a:stretch>
-        </p:blipFill>
-        <p:spPr>
-          <a:xfrm>
-            <a:off x="1005840" y="1874520"/>
-            <a:ext cx="365760" cy="365760"/>
-          </a:xfrm>
-          <a:prstGeom prst="rect">
-            <a:avLst/>
-          </a:prstGeom>
-        </p:spPr>
-      </p:pic>
-      <p:sp>
-        <p:nvSpPr>
-          <p:cNvPr id="6" name="Text 3"/>
+          <p:cNvPr id="4" name="Text 2"/>
           <p:cNvSpPr txBox="1"/>
           <p:nvPr/>
         </p:nvSpPr>
         <p:spPr>
           <a:xfrm>
-            <a:off x="1737360" y="1737360"/>
-            <a:ext cx="4114800" cy="640080"/>
+            <a:off x="822960" y="1645920"/>
+            <a:ext cx="4937760" cy="640080"/>
           </a:xfrm>
           <a:prstGeom prst="rect">
             <a:avLst/>
@@ -15159,7 +13761,7 @@
       </p:sp>
       <p:sp>
         <p:nvSpPr>
-          <p:cNvPr id="7" name="Text 4"/>
+          <p:cNvPr id="5" name="Text 3"/>
           <p:cNvSpPr txBox="1"/>
           <p:nvPr/>
         </p:nvSpPr>
@@ -15271,7 +13873,7 @@
       </p:sp>
       <p:sp>
         <p:nvSpPr>
-          <p:cNvPr id="8" name="Shape 5"/>
+          <p:cNvPr id="6" name="Shape 4"/>
           <p:cNvSpPr/>
           <p:nvPr/>
         </p:nvSpPr>
@@ -15298,7 +13900,7 @@
       </p:sp>
       <p:sp>
         <p:nvSpPr>
-          <p:cNvPr id="9" name="Text 6"/>
+          <p:cNvPr id="7" name="Text 5"/>
           <p:cNvSpPr txBox="1"/>
           <p:nvPr/>
         </p:nvSpPr>
@@ -15348,7 +13950,7 @@
       </p:sp>
       <p:sp>
         <p:nvSpPr>
-          <p:cNvPr id="10" name="Shape 7"/>
+          <p:cNvPr id="8" name="Shape 6"/>
           <p:cNvSpPr/>
           <p:nvPr/>
         </p:nvSpPr>
@@ -15375,7 +13977,7 @@
       </p:sp>
       <p:sp>
         <p:nvSpPr>
-          <p:cNvPr id="11" name="Text 8"/>
+          <p:cNvPr id="9" name="Text 7"/>
           <p:cNvSpPr txBox="1"/>
           <p:nvPr/>
         </p:nvSpPr>
@@ -15999,63 +14601,14 @@
       </p:sp>
       <p:sp>
         <p:nvSpPr>
-          <p:cNvPr id="10" name="Shape 8"/>
-          <p:cNvSpPr/>
-          <p:nvPr/>
-        </p:nvSpPr>
-        <p:spPr>
-          <a:xfrm>
-            <a:off x="777240" y="2971800"/>
-            <a:ext cx="731520" cy="731520"/>
-          </a:xfrm>
-          <a:prstGeom prst="ellipse">
-            <a:avLst/>
-          </a:prstGeom>
-          <a:solidFill>
-            <a:srgbClr val="404040"/>
-          </a:solidFill>
-          <a:ln w="12700">
-            <a:solidFill>
-              <a:srgbClr val="404040"/>
-            </a:solidFill>
-            <a:prstDash val="solid"/>
-          </a:ln>
-        </p:spPr>
-      </p:sp>
-      <p:pic>
-        <p:nvPicPr>
-          <p:cNvPr id="11" name="Image 0" descr="preencoded.png">    </p:cNvPr>
-          <p:cNvPicPr>
-            <a:picLocks noChangeAspect="1"/>
-          </p:cNvPicPr>
-          <p:nvPr/>
-        </p:nvPicPr>
-        <p:blipFill>
-          <a:blip r:embed="rId1"/>
-          <a:stretch>
-            <a:fillRect/>
-          </a:stretch>
-        </p:blipFill>
-        <p:spPr>
-          <a:xfrm>
-            <a:off x="960120" y="3154680"/>
-            <a:ext cx="365760" cy="365760"/>
-          </a:xfrm>
-          <a:prstGeom prst="rect">
-            <a:avLst/>
-          </a:prstGeom>
-        </p:spPr>
-      </p:pic>
-      <p:sp>
-        <p:nvSpPr>
-          <p:cNvPr id="12" name="Text 9"/>
+          <p:cNvPr id="10" name="Text 8"/>
           <p:cNvSpPr txBox="1"/>
           <p:nvPr/>
         </p:nvSpPr>
         <p:spPr>
           <a:xfrm>
-            <a:off x="1645920" y="2926080"/>
-            <a:ext cx="4114800" cy="914400"/>
+            <a:off x="777240" y="2926080"/>
+            <a:ext cx="4937760" cy="914400"/>
           </a:xfrm>
           <a:prstGeom prst="rect">
             <a:avLst/>
@@ -16098,7 +14651,7 @@
       </p:sp>
       <p:sp>
         <p:nvSpPr>
-          <p:cNvPr id="13" name="Text 10"/>
+          <p:cNvPr id="11" name="Text 9"/>
           <p:cNvSpPr txBox="1"/>
           <p:nvPr/>
         </p:nvSpPr>
@@ -16213,7 +14766,7 @@
       </p:sp>
       <p:sp>
         <p:nvSpPr>
-          <p:cNvPr id="14" name="Shape 11"/>
+          <p:cNvPr id="12" name="Shape 10"/>
           <p:cNvSpPr/>
           <p:nvPr/>
         </p:nvSpPr>
@@ -16240,63 +14793,14 @@
       </p:sp>
       <p:sp>
         <p:nvSpPr>
-          <p:cNvPr id="15" name="Shape 12"/>
-          <p:cNvSpPr/>
-          <p:nvPr/>
-        </p:nvSpPr>
-        <p:spPr>
-          <a:xfrm>
-            <a:off x="6473952" y="2971800"/>
-            <a:ext cx="731520" cy="731520"/>
-          </a:xfrm>
-          <a:prstGeom prst="ellipse">
-            <a:avLst/>
-          </a:prstGeom>
-          <a:solidFill>
-            <a:srgbClr val="A6A6A6"/>
-          </a:solidFill>
-          <a:ln w="12700">
-            <a:solidFill>
-              <a:srgbClr val="A6A6A6"/>
-            </a:solidFill>
-            <a:prstDash val="solid"/>
-          </a:ln>
-        </p:spPr>
-      </p:sp>
-      <p:pic>
-        <p:nvPicPr>
-          <p:cNvPr id="16" name="Image 1" descr="preencoded.png">    </p:cNvPr>
-          <p:cNvPicPr>
-            <a:picLocks noChangeAspect="1"/>
-          </p:cNvPicPr>
-          <p:nvPr/>
-        </p:nvPicPr>
-        <p:blipFill>
-          <a:blip r:embed="rId2"/>
-          <a:stretch>
-            <a:fillRect/>
-          </a:stretch>
-        </p:blipFill>
-        <p:spPr>
-          <a:xfrm>
-            <a:off x="6656832" y="3154680"/>
-            <a:ext cx="365760" cy="365760"/>
-          </a:xfrm>
-          <a:prstGeom prst="rect">
-            <a:avLst/>
-          </a:prstGeom>
-        </p:spPr>
-      </p:pic>
-      <p:sp>
-        <p:nvSpPr>
-          <p:cNvPr id="17" name="Text 13"/>
+          <p:cNvPr id="13" name="Text 11"/>
           <p:cNvSpPr txBox="1"/>
           <p:nvPr/>
         </p:nvSpPr>
         <p:spPr>
           <a:xfrm>
-            <a:off x="7342632" y="2926080"/>
-            <a:ext cx="4114800" cy="914400"/>
+            <a:off x="6473952" y="2926080"/>
+            <a:ext cx="4937760" cy="914400"/>
           </a:xfrm>
           <a:prstGeom prst="rect">
             <a:avLst/>
@@ -16339,7 +14843,7 @@
       </p:sp>
       <p:sp>
         <p:nvSpPr>
-          <p:cNvPr id="18" name="Text 14"/>
+          <p:cNvPr id="14" name="Text 12"/>
           <p:cNvSpPr txBox="1"/>
           <p:nvPr/>
         </p:nvSpPr>
@@ -16485,7 +14989,7 @@
       </p:sp>
       <p:sp>
         <p:nvSpPr>
-          <p:cNvPr id="19" name="Text 15"/>
+          <p:cNvPr id="15" name="Text 13"/>
           <p:cNvSpPr txBox="1"/>
           <p:nvPr/>
         </p:nvSpPr>
@@ -16798,65 +15302,39 @@
         <p:spPr>
           <a:xfrm>
             <a:off x="7772400" y="1417320"/>
-            <a:ext cx="914400" cy="914400"/>
-          </a:xfrm>
-          <a:prstGeom prst="ellipse">
-            <a:avLst/>
-          </a:prstGeom>
-          <a:solidFill>
-            <a:srgbClr val="A6A6A6"/>
-          </a:solidFill>
+            <a:ext cx="3840480" cy="0"/>
+          </a:xfrm>
+          <a:prstGeom prst="line">
+            <a:avLst/>
+          </a:prstGeom>
+          <a:noFill/>
           <a:ln w="12700">
             <a:solidFill>
-              <a:srgbClr val="A6A6A6"/>
+              <a:srgbClr val="BFBFBF"/>
             </a:solidFill>
             <a:prstDash val="solid"/>
           </a:ln>
         </p:spPr>
       </p:sp>
-      <p:pic>
-        <p:nvPicPr>
-          <p:cNvPr id="8" name="Image 0" descr="preencoded.png">    </p:cNvPr>
-          <p:cNvPicPr>
-            <a:picLocks noChangeAspect="1"/>
-          </p:cNvPicPr>
-          <p:nvPr/>
-        </p:nvPicPr>
-        <p:blipFill>
-          <a:blip r:embed="rId1"/>
-          <a:stretch>
-            <a:fillRect/>
-          </a:stretch>
-        </p:blipFill>
-        <p:spPr>
-          <a:xfrm>
-            <a:off x="8001000" y="1645920"/>
-            <a:ext cx="457200" cy="457200"/>
-          </a:xfrm>
-          <a:prstGeom prst="rect">
-            <a:avLst/>
-          </a:prstGeom>
-        </p:spPr>
-      </p:pic>
-      <p:sp>
-        <p:nvSpPr>
-          <p:cNvPr id="9" name="Text 6"/>
+      <p:sp>
+        <p:nvSpPr>
+          <p:cNvPr id="8" name="Text 6"/>
           <p:cNvSpPr txBox="1"/>
           <p:nvPr/>
         </p:nvSpPr>
         <p:spPr>
           <a:xfrm>
-            <a:off x="8869680" y="1463040"/>
-            <a:ext cx="2743200" cy="868680"/>
-          </a:xfrm>
-          <a:prstGeom prst="rect">
-            <a:avLst/>
-          </a:prstGeom>
-          <a:noFill/>
-          <a:ln/>
-        </p:spPr>
-        <p:txBody>
-          <a:bodyPr wrap="square" lIns="0" tIns="0" rIns="0" bIns="0" rtlCol="0" anchor="ctr"/>
+            <a:off x="7772400" y="1554480"/>
+            <a:ext cx="3840480" cy="1005840"/>
+          </a:xfrm>
+          <a:prstGeom prst="rect">
+            <a:avLst/>
+          </a:prstGeom>
+          <a:noFill/>
+          <a:ln/>
+        </p:spPr>
+        <p:txBody>
+          <a:bodyPr wrap="square" lIns="0" tIns="0" rIns="0" bIns="0" rtlCol="0" anchor="t"/>
           <a:lstStyle/>
           <a:p>
             <a:pPr indent="0" marL="0">
@@ -16890,72 +15368,46 @@
       </p:sp>
       <p:sp>
         <p:nvSpPr>
-          <p:cNvPr id="10" name="Shape 7"/>
+          <p:cNvPr id="9" name="Shape 7"/>
           <p:cNvSpPr/>
           <p:nvPr/>
         </p:nvSpPr>
         <p:spPr>
           <a:xfrm>
             <a:off x="7772400" y="3017520"/>
-            <a:ext cx="914400" cy="914400"/>
-          </a:xfrm>
-          <a:prstGeom prst="ellipse">
-            <a:avLst/>
-          </a:prstGeom>
-          <a:solidFill>
-            <a:srgbClr val="A6A6A6"/>
-          </a:solidFill>
+            <a:ext cx="3840480" cy="0"/>
+          </a:xfrm>
+          <a:prstGeom prst="line">
+            <a:avLst/>
+          </a:prstGeom>
+          <a:noFill/>
           <a:ln w="12700">
             <a:solidFill>
-              <a:srgbClr val="A6A6A6"/>
+              <a:srgbClr val="BFBFBF"/>
             </a:solidFill>
             <a:prstDash val="solid"/>
           </a:ln>
         </p:spPr>
       </p:sp>
-      <p:pic>
-        <p:nvPicPr>
-          <p:cNvPr id="11" name="Image 1" descr="preencoded.png">    </p:cNvPr>
-          <p:cNvPicPr>
-            <a:picLocks noChangeAspect="1"/>
-          </p:cNvPicPr>
-          <p:nvPr/>
-        </p:nvPicPr>
-        <p:blipFill>
-          <a:blip r:embed="rId2"/>
-          <a:stretch>
-            <a:fillRect/>
-          </a:stretch>
-        </p:blipFill>
-        <p:spPr>
-          <a:xfrm>
-            <a:off x="8001000" y="3246120"/>
-            <a:ext cx="457200" cy="457200"/>
-          </a:xfrm>
-          <a:prstGeom prst="rect">
-            <a:avLst/>
-          </a:prstGeom>
-        </p:spPr>
-      </p:pic>
-      <p:sp>
-        <p:nvSpPr>
-          <p:cNvPr id="12" name="Text 8"/>
+      <p:sp>
+        <p:nvSpPr>
+          <p:cNvPr id="10" name="Text 8"/>
           <p:cNvSpPr txBox="1"/>
           <p:nvPr/>
         </p:nvSpPr>
         <p:spPr>
           <a:xfrm>
-            <a:off x="8869680" y="3063240"/>
-            <a:ext cx="2743200" cy="868680"/>
-          </a:xfrm>
-          <a:prstGeom prst="rect">
-            <a:avLst/>
-          </a:prstGeom>
-          <a:noFill/>
-          <a:ln/>
-        </p:spPr>
-        <p:txBody>
-          <a:bodyPr wrap="square" lIns="0" tIns="0" rIns="0" bIns="0" rtlCol="0" anchor="ctr"/>
+            <a:off x="7772400" y="3154680"/>
+            <a:ext cx="3840480" cy="1005840"/>
+          </a:xfrm>
+          <a:prstGeom prst="rect">
+            <a:avLst/>
+          </a:prstGeom>
+          <a:noFill/>
+          <a:ln/>
+        </p:spPr>
+        <p:txBody>
+          <a:bodyPr wrap="square" lIns="0" tIns="0" rIns="0" bIns="0" rtlCol="0" anchor="t"/>
           <a:lstStyle/>
           <a:p>
             <a:pPr indent="0" marL="0">
@@ -16989,72 +15441,46 @@
       </p:sp>
       <p:sp>
         <p:nvSpPr>
-          <p:cNvPr id="13" name="Shape 9"/>
+          <p:cNvPr id="11" name="Shape 9"/>
           <p:cNvSpPr/>
           <p:nvPr/>
         </p:nvSpPr>
         <p:spPr>
           <a:xfrm>
             <a:off x="7772400" y="4617720"/>
-            <a:ext cx="914400" cy="914400"/>
-          </a:xfrm>
-          <a:prstGeom prst="ellipse">
-            <a:avLst/>
-          </a:prstGeom>
-          <a:solidFill>
-            <a:srgbClr val="A6A6A6"/>
-          </a:solidFill>
+            <a:ext cx="3840480" cy="0"/>
+          </a:xfrm>
+          <a:prstGeom prst="line">
+            <a:avLst/>
+          </a:prstGeom>
+          <a:noFill/>
           <a:ln w="12700">
             <a:solidFill>
-              <a:srgbClr val="A6A6A6"/>
+              <a:srgbClr val="BFBFBF"/>
             </a:solidFill>
             <a:prstDash val="solid"/>
           </a:ln>
         </p:spPr>
       </p:sp>
-      <p:pic>
-        <p:nvPicPr>
-          <p:cNvPr id="14" name="Image 2" descr="preencoded.png">    </p:cNvPr>
-          <p:cNvPicPr>
-            <a:picLocks noChangeAspect="1"/>
-          </p:cNvPicPr>
-          <p:nvPr/>
-        </p:nvPicPr>
-        <p:blipFill>
-          <a:blip r:embed="rId3"/>
-          <a:stretch>
-            <a:fillRect/>
-          </a:stretch>
-        </p:blipFill>
-        <p:spPr>
-          <a:xfrm>
-            <a:off x="8001000" y="4846320"/>
-            <a:ext cx="457200" cy="457200"/>
-          </a:xfrm>
-          <a:prstGeom prst="rect">
-            <a:avLst/>
-          </a:prstGeom>
-        </p:spPr>
-      </p:pic>
-      <p:sp>
-        <p:nvSpPr>
-          <p:cNvPr id="15" name="Text 10"/>
+      <p:sp>
+        <p:nvSpPr>
+          <p:cNvPr id="12" name="Text 10"/>
           <p:cNvSpPr txBox="1"/>
           <p:nvPr/>
         </p:nvSpPr>
         <p:spPr>
           <a:xfrm>
-            <a:off x="8869680" y="4663440"/>
-            <a:ext cx="2743200" cy="868680"/>
-          </a:xfrm>
-          <a:prstGeom prst="rect">
-            <a:avLst/>
-          </a:prstGeom>
-          <a:noFill/>
-          <a:ln/>
-        </p:spPr>
-        <p:txBody>
-          <a:bodyPr wrap="square" lIns="0" tIns="0" rIns="0" bIns="0" rtlCol="0" anchor="ctr"/>
+            <a:off x="7772400" y="4754880"/>
+            <a:ext cx="3840480" cy="1005840"/>
+          </a:xfrm>
+          <a:prstGeom prst="rect">
+            <a:avLst/>
+          </a:prstGeom>
+          <a:noFill/>
+          <a:ln/>
+        </p:spPr>
+        <p:txBody>
+          <a:bodyPr wrap="square" lIns="0" tIns="0" rIns="0" bIns="0" rtlCol="0" anchor="t"/>
           <a:lstStyle/>
           <a:p>
             <a:pPr indent="0" marL="0">
@@ -17088,7 +15514,7 @@
       </p:sp>
       <p:sp>
         <p:nvSpPr>
-          <p:cNvPr id="16" name="Text 11"/>
+          <p:cNvPr id="13" name="Text 11"/>
           <p:cNvSpPr txBox="1"/>
           <p:nvPr/>
         </p:nvSpPr>
@@ -17259,63 +15685,14 @@
       </p:sp>
       <p:sp>
         <p:nvSpPr>
-          <p:cNvPr id="4" name="Shape 2"/>
-          <p:cNvSpPr/>
-          <p:nvPr/>
-        </p:nvSpPr>
-        <p:spPr>
-          <a:xfrm>
-            <a:off x="822960" y="1737360"/>
-            <a:ext cx="822960" cy="822960"/>
-          </a:xfrm>
-          <a:prstGeom prst="ellipse">
-            <a:avLst/>
-          </a:prstGeom>
-          <a:solidFill>
-            <a:srgbClr val="404040"/>
-          </a:solidFill>
-          <a:ln w="12700">
-            <a:solidFill>
-              <a:srgbClr val="404040"/>
-            </a:solidFill>
-            <a:prstDash val="solid"/>
-          </a:ln>
-        </p:spPr>
-      </p:sp>
-      <p:pic>
-        <p:nvPicPr>
-          <p:cNvPr id="5" name="Image 0" descr="preencoded.png">    </p:cNvPr>
-          <p:cNvPicPr>
-            <a:picLocks noChangeAspect="1"/>
-          </p:cNvPicPr>
-          <p:nvPr/>
-        </p:nvPicPr>
-        <p:blipFill>
-          <a:blip r:embed="rId1"/>
-          <a:stretch>
-            <a:fillRect/>
-          </a:stretch>
-        </p:blipFill>
-        <p:spPr>
-          <a:xfrm>
-            <a:off x="1028700" y="1943100"/>
-            <a:ext cx="411480" cy="411480"/>
-          </a:xfrm>
-          <a:prstGeom prst="rect">
-            <a:avLst/>
-          </a:prstGeom>
-        </p:spPr>
-      </p:pic>
-      <p:sp>
-        <p:nvSpPr>
-          <p:cNvPr id="6" name="Text 3"/>
+          <p:cNvPr id="4" name="Text 2"/>
           <p:cNvSpPr txBox="1"/>
           <p:nvPr/>
         </p:nvSpPr>
         <p:spPr>
           <a:xfrm>
-            <a:off x="822960" y="2697480"/>
-            <a:ext cx="3017520" cy="731520"/>
+            <a:off x="822960" y="1691640"/>
+            <a:ext cx="3017520" cy="822960"/>
           </a:xfrm>
           <a:prstGeom prst="rect">
             <a:avLst/>
@@ -17344,14 +15721,14 @@
       </p:sp>
       <p:sp>
         <p:nvSpPr>
-          <p:cNvPr id="7" name="Text 4"/>
+          <p:cNvPr id="5" name="Text 3"/>
           <p:cNvSpPr txBox="1"/>
           <p:nvPr/>
         </p:nvSpPr>
         <p:spPr>
           <a:xfrm>
-            <a:off x="822960" y="3474720"/>
-            <a:ext cx="3017520" cy="822960"/>
+            <a:off x="822960" y="2606040"/>
+            <a:ext cx="3017520" cy="1005840"/>
           </a:xfrm>
           <a:prstGeom prst="rect">
             <a:avLst/>
@@ -17380,14 +15757,14 @@
       </p:sp>
       <p:sp>
         <p:nvSpPr>
-          <p:cNvPr id="8" name="Text 5"/>
+          <p:cNvPr id="6" name="Text 4"/>
           <p:cNvSpPr txBox="1"/>
           <p:nvPr/>
         </p:nvSpPr>
         <p:spPr>
           <a:xfrm>
-            <a:off x="822960" y="4343400"/>
-            <a:ext cx="3017520" cy="1463040"/>
+            <a:off x="822960" y="3703320"/>
+            <a:ext cx="3017520" cy="2103120"/>
           </a:xfrm>
           <a:prstGeom prst="rect">
             <a:avLst/>
@@ -17427,7 +15804,7 @@
       </p:sp>
       <p:sp>
         <p:nvSpPr>
-          <p:cNvPr id="9" name="Shape 6"/>
+          <p:cNvPr id="7" name="Shape 5"/>
           <p:cNvSpPr/>
           <p:nvPr/>
         </p:nvSpPr>
@@ -17454,63 +15831,14 @@
       </p:sp>
       <p:sp>
         <p:nvSpPr>
-          <p:cNvPr id="10" name="Shape 7"/>
-          <p:cNvSpPr/>
-          <p:nvPr/>
-        </p:nvSpPr>
-        <p:spPr>
-          <a:xfrm>
-            <a:off x="4572000" y="1737360"/>
-            <a:ext cx="822960" cy="822960"/>
-          </a:xfrm>
-          <a:prstGeom prst="ellipse">
-            <a:avLst/>
-          </a:prstGeom>
-          <a:solidFill>
-            <a:srgbClr val="737373"/>
-          </a:solidFill>
-          <a:ln w="12700">
-            <a:solidFill>
-              <a:srgbClr val="737373"/>
-            </a:solidFill>
-            <a:prstDash val="solid"/>
-          </a:ln>
-        </p:spPr>
-      </p:sp>
-      <p:pic>
-        <p:nvPicPr>
-          <p:cNvPr id="11" name="Image 1" descr="preencoded.png">    </p:cNvPr>
-          <p:cNvPicPr>
-            <a:picLocks noChangeAspect="1"/>
-          </p:cNvPicPr>
-          <p:nvPr/>
-        </p:nvPicPr>
-        <p:blipFill>
-          <a:blip r:embed="rId2"/>
-          <a:stretch>
-            <a:fillRect/>
-          </a:stretch>
-        </p:blipFill>
-        <p:spPr>
-          <a:xfrm>
-            <a:off x="4777740" y="1943100"/>
-            <a:ext cx="411480" cy="411480"/>
-          </a:xfrm>
-          <a:prstGeom prst="rect">
-            <a:avLst/>
-          </a:prstGeom>
-        </p:spPr>
-      </p:pic>
-      <p:sp>
-        <p:nvSpPr>
-          <p:cNvPr id="12" name="Text 8"/>
+          <p:cNvPr id="8" name="Text 6"/>
           <p:cNvSpPr txBox="1"/>
           <p:nvPr/>
         </p:nvSpPr>
         <p:spPr>
           <a:xfrm>
-            <a:off x="4572000" y="2697480"/>
-            <a:ext cx="3017520" cy="731520"/>
+            <a:off x="4572000" y="1691640"/>
+            <a:ext cx="3017520" cy="822960"/>
           </a:xfrm>
           <a:prstGeom prst="rect">
             <a:avLst/>
@@ -17539,14 +15867,14 @@
       </p:sp>
       <p:sp>
         <p:nvSpPr>
-          <p:cNvPr id="13" name="Text 9"/>
+          <p:cNvPr id="9" name="Text 7"/>
           <p:cNvSpPr txBox="1"/>
           <p:nvPr/>
         </p:nvSpPr>
         <p:spPr>
           <a:xfrm>
-            <a:off x="4572000" y="3474720"/>
-            <a:ext cx="3017520" cy="822960"/>
+            <a:off x="4572000" y="2606040"/>
+            <a:ext cx="3017520" cy="1005840"/>
           </a:xfrm>
           <a:prstGeom prst="rect">
             <a:avLst/>
@@ -17575,14 +15903,14 @@
       </p:sp>
       <p:sp>
         <p:nvSpPr>
-          <p:cNvPr id="14" name="Text 10"/>
+          <p:cNvPr id="10" name="Text 8"/>
           <p:cNvSpPr txBox="1"/>
           <p:nvPr/>
         </p:nvSpPr>
         <p:spPr>
           <a:xfrm>
-            <a:off x="4572000" y="4343400"/>
-            <a:ext cx="3017520" cy="1463040"/>
+            <a:off x="4572000" y="3703320"/>
+            <a:ext cx="3017520" cy="2103120"/>
           </a:xfrm>
           <a:prstGeom prst="rect">
             <a:avLst/>
@@ -17622,7 +15950,7 @@
       </p:sp>
       <p:sp>
         <p:nvSpPr>
-          <p:cNvPr id="15" name="Shape 11"/>
+          <p:cNvPr id="11" name="Shape 9"/>
           <p:cNvSpPr/>
           <p:nvPr/>
         </p:nvSpPr>
@@ -17649,63 +15977,14 @@
       </p:sp>
       <p:sp>
         <p:nvSpPr>
-          <p:cNvPr id="16" name="Shape 12"/>
-          <p:cNvSpPr/>
-          <p:nvPr/>
-        </p:nvSpPr>
-        <p:spPr>
-          <a:xfrm>
-            <a:off x="8321040" y="1737360"/>
-            <a:ext cx="822960" cy="822960"/>
-          </a:xfrm>
-          <a:prstGeom prst="ellipse">
-            <a:avLst/>
-          </a:prstGeom>
-          <a:solidFill>
-            <a:srgbClr val="595959"/>
-          </a:solidFill>
-          <a:ln w="12700">
-            <a:solidFill>
-              <a:srgbClr val="595959"/>
-            </a:solidFill>
-            <a:prstDash val="solid"/>
-          </a:ln>
-        </p:spPr>
-      </p:sp>
-      <p:pic>
-        <p:nvPicPr>
-          <p:cNvPr id="17" name="Image 2" descr="preencoded.png">    </p:cNvPr>
-          <p:cNvPicPr>
-            <a:picLocks noChangeAspect="1"/>
-          </p:cNvPicPr>
-          <p:nvPr/>
-        </p:nvPicPr>
-        <p:blipFill>
-          <a:blip r:embed="rId3"/>
-          <a:stretch>
-            <a:fillRect/>
-          </a:stretch>
-        </p:blipFill>
-        <p:spPr>
-          <a:xfrm>
-            <a:off x="8526780" y="1943100"/>
-            <a:ext cx="411480" cy="411480"/>
-          </a:xfrm>
-          <a:prstGeom prst="rect">
-            <a:avLst/>
-          </a:prstGeom>
-        </p:spPr>
-      </p:pic>
-      <p:sp>
-        <p:nvSpPr>
-          <p:cNvPr id="18" name="Text 13"/>
+          <p:cNvPr id="12" name="Text 10"/>
           <p:cNvSpPr txBox="1"/>
           <p:nvPr/>
         </p:nvSpPr>
         <p:spPr>
           <a:xfrm>
-            <a:off x="8321040" y="2697480"/>
-            <a:ext cx="3017520" cy="731520"/>
+            <a:off x="8321040" y="1691640"/>
+            <a:ext cx="3017520" cy="822960"/>
           </a:xfrm>
           <a:prstGeom prst="rect">
             <a:avLst/>
@@ -17734,14 +16013,14 @@
       </p:sp>
       <p:sp>
         <p:nvSpPr>
-          <p:cNvPr id="19" name="Text 14"/>
+          <p:cNvPr id="13" name="Text 11"/>
           <p:cNvSpPr txBox="1"/>
           <p:nvPr/>
         </p:nvSpPr>
         <p:spPr>
           <a:xfrm>
-            <a:off x="8321040" y="3474720"/>
-            <a:ext cx="3017520" cy="822960"/>
+            <a:off x="8321040" y="2606040"/>
+            <a:ext cx="3017520" cy="1005840"/>
           </a:xfrm>
           <a:prstGeom prst="rect">
             <a:avLst/>
@@ -17770,14 +16049,14 @@
       </p:sp>
       <p:sp>
         <p:nvSpPr>
-          <p:cNvPr id="20" name="Text 15"/>
+          <p:cNvPr id="14" name="Text 12"/>
           <p:cNvSpPr txBox="1"/>
           <p:nvPr/>
         </p:nvSpPr>
         <p:spPr>
           <a:xfrm>
-            <a:off x="8321040" y="4343400"/>
-            <a:ext cx="3017520" cy="1463040"/>
+            <a:off x="8321040" y="3703320"/>
+            <a:ext cx="3017520" cy="2103120"/>
           </a:xfrm>
           <a:prstGeom prst="rect">
             <a:avLst/>
@@ -17952,63 +16231,14 @@
       </p:sp>
       <p:sp>
         <p:nvSpPr>
-          <p:cNvPr id="4" name="Shape 2"/>
-          <p:cNvSpPr/>
-          <p:nvPr/>
-        </p:nvSpPr>
-        <p:spPr>
-          <a:xfrm>
-            <a:off x="777240" y="1645920"/>
-            <a:ext cx="685800" cy="685800"/>
-          </a:xfrm>
-          <a:prstGeom prst="ellipse">
-            <a:avLst/>
-          </a:prstGeom>
-          <a:solidFill>
-            <a:srgbClr val="404040"/>
-          </a:solidFill>
-          <a:ln w="12700">
-            <a:solidFill>
-              <a:srgbClr val="404040"/>
-            </a:solidFill>
-            <a:prstDash val="solid"/>
-          </a:ln>
-        </p:spPr>
-      </p:sp>
-      <p:pic>
-        <p:nvPicPr>
-          <p:cNvPr id="5" name="Image 0" descr="preencoded.png">    </p:cNvPr>
-          <p:cNvPicPr>
-            <a:picLocks noChangeAspect="1"/>
-          </p:cNvPicPr>
-          <p:nvPr/>
-        </p:nvPicPr>
-        <p:blipFill>
-          <a:blip r:embed="rId1"/>
-          <a:stretch>
-            <a:fillRect/>
-          </a:stretch>
-        </p:blipFill>
-        <p:spPr>
-          <a:xfrm>
-            <a:off x="948690" y="1817370"/>
-            <a:ext cx="342900" cy="342900"/>
-          </a:xfrm>
-          <a:prstGeom prst="rect">
-            <a:avLst/>
-          </a:prstGeom>
-        </p:spPr>
-      </p:pic>
-      <p:sp>
-        <p:nvSpPr>
-          <p:cNvPr id="6" name="Text 3"/>
+          <p:cNvPr id="4" name="Text 2"/>
           <p:cNvSpPr txBox="1"/>
           <p:nvPr/>
         </p:nvSpPr>
         <p:spPr>
           <a:xfrm>
-            <a:off x="1600200" y="1600200"/>
-            <a:ext cx="4206240" cy="777240"/>
+            <a:off x="777240" y="1600200"/>
+            <a:ext cx="5029200" cy="777240"/>
           </a:xfrm>
           <a:prstGeom prst="rect">
             <a:avLst/>
@@ -18051,7 +16281,7 @@
       </p:sp>
       <p:sp>
         <p:nvSpPr>
-          <p:cNvPr id="7" name="Text 4"/>
+          <p:cNvPr id="5" name="Text 3"/>
           <p:cNvSpPr txBox="1"/>
           <p:nvPr/>
         </p:nvSpPr>
@@ -18087,7 +16317,7 @@
       </p:sp>
       <p:sp>
         <p:nvSpPr>
-          <p:cNvPr id="8" name="Shape 5"/>
+          <p:cNvPr id="6" name="Shape 4"/>
           <p:cNvSpPr/>
           <p:nvPr/>
         </p:nvSpPr>
@@ -18114,63 +16344,14 @@
       </p:sp>
       <p:sp>
         <p:nvSpPr>
-          <p:cNvPr id="9" name="Shape 6"/>
-          <p:cNvSpPr/>
-          <p:nvPr/>
-        </p:nvSpPr>
-        <p:spPr>
-          <a:xfrm>
-            <a:off x="6400800" y="1645920"/>
-            <a:ext cx="685800" cy="685800"/>
-          </a:xfrm>
-          <a:prstGeom prst="ellipse">
-            <a:avLst/>
-          </a:prstGeom>
-          <a:solidFill>
-            <a:srgbClr val="404040"/>
-          </a:solidFill>
-          <a:ln w="12700">
-            <a:solidFill>
-              <a:srgbClr val="404040"/>
-            </a:solidFill>
-            <a:prstDash val="solid"/>
-          </a:ln>
-        </p:spPr>
-      </p:sp>
-      <p:pic>
-        <p:nvPicPr>
-          <p:cNvPr id="10" name="Image 1" descr="preencoded.png">    </p:cNvPr>
-          <p:cNvPicPr>
-            <a:picLocks noChangeAspect="1"/>
-          </p:cNvPicPr>
-          <p:nvPr/>
-        </p:nvPicPr>
-        <p:blipFill>
-          <a:blip r:embed="rId2"/>
-          <a:stretch>
-            <a:fillRect/>
-          </a:stretch>
-        </p:blipFill>
-        <p:spPr>
-          <a:xfrm>
-            <a:off x="6572250" y="1817370"/>
-            <a:ext cx="342900" cy="342900"/>
-          </a:xfrm>
-          <a:prstGeom prst="rect">
-            <a:avLst/>
-          </a:prstGeom>
-        </p:spPr>
-      </p:pic>
-      <p:sp>
-        <p:nvSpPr>
-          <p:cNvPr id="11" name="Text 7"/>
+          <p:cNvPr id="7" name="Text 5"/>
           <p:cNvSpPr txBox="1"/>
           <p:nvPr/>
         </p:nvSpPr>
         <p:spPr>
           <a:xfrm>
-            <a:off x="7223760" y="1600200"/>
-            <a:ext cx="4206240" cy="777240"/>
+            <a:off x="6400800" y="1600200"/>
+            <a:ext cx="5029200" cy="777240"/>
           </a:xfrm>
           <a:prstGeom prst="rect">
             <a:avLst/>
@@ -18213,7 +16394,7 @@
       </p:sp>
       <p:sp>
         <p:nvSpPr>
-          <p:cNvPr id="12" name="Text 8"/>
+          <p:cNvPr id="8" name="Text 6"/>
           <p:cNvSpPr txBox="1"/>
           <p:nvPr/>
         </p:nvSpPr>
@@ -18249,7 +16430,7 @@
       </p:sp>
       <p:sp>
         <p:nvSpPr>
-          <p:cNvPr id="13" name="Shape 9"/>
+          <p:cNvPr id="9" name="Shape 7"/>
           <p:cNvSpPr/>
           <p:nvPr/>
         </p:nvSpPr>
@@ -18276,63 +16457,14 @@
       </p:sp>
       <p:sp>
         <p:nvSpPr>
-          <p:cNvPr id="14" name="Shape 10"/>
-          <p:cNvSpPr/>
-          <p:nvPr/>
-        </p:nvSpPr>
-        <p:spPr>
-          <a:xfrm>
-            <a:off x="777240" y="3886200"/>
-            <a:ext cx="685800" cy="685800"/>
-          </a:xfrm>
-          <a:prstGeom prst="ellipse">
-            <a:avLst/>
-          </a:prstGeom>
-          <a:solidFill>
-            <a:srgbClr val="404040"/>
-          </a:solidFill>
-          <a:ln w="12700">
-            <a:solidFill>
-              <a:srgbClr val="404040"/>
-            </a:solidFill>
-            <a:prstDash val="solid"/>
-          </a:ln>
-        </p:spPr>
-      </p:sp>
-      <p:pic>
-        <p:nvPicPr>
-          <p:cNvPr id="15" name="Image 2" descr="preencoded.png">    </p:cNvPr>
-          <p:cNvPicPr>
-            <a:picLocks noChangeAspect="1"/>
-          </p:cNvPicPr>
-          <p:nvPr/>
-        </p:nvPicPr>
-        <p:blipFill>
-          <a:blip r:embed="rId3"/>
-          <a:stretch>
-            <a:fillRect/>
-          </a:stretch>
-        </p:blipFill>
-        <p:spPr>
-          <a:xfrm>
-            <a:off x="948690" y="4057650"/>
-            <a:ext cx="342900" cy="342900"/>
-          </a:xfrm>
-          <a:prstGeom prst="rect">
-            <a:avLst/>
-          </a:prstGeom>
-        </p:spPr>
-      </p:pic>
-      <p:sp>
-        <p:nvSpPr>
-          <p:cNvPr id="16" name="Text 11"/>
+          <p:cNvPr id="10" name="Text 8"/>
           <p:cNvSpPr txBox="1"/>
           <p:nvPr/>
         </p:nvSpPr>
         <p:spPr>
           <a:xfrm>
-            <a:off x="1600200" y="3840480"/>
-            <a:ext cx="4206240" cy="777240"/>
+            <a:off x="777240" y="3840480"/>
+            <a:ext cx="5029200" cy="777240"/>
           </a:xfrm>
           <a:prstGeom prst="rect">
             <a:avLst/>
@@ -18375,7 +16507,7 @@
       </p:sp>
       <p:sp>
         <p:nvSpPr>
-          <p:cNvPr id="17" name="Text 12"/>
+          <p:cNvPr id="11" name="Text 9"/>
           <p:cNvSpPr txBox="1"/>
           <p:nvPr/>
         </p:nvSpPr>
@@ -18411,7 +16543,7 @@
       </p:sp>
       <p:sp>
         <p:nvSpPr>
-          <p:cNvPr id="18" name="Shape 13"/>
+          <p:cNvPr id="12" name="Shape 10"/>
           <p:cNvSpPr/>
           <p:nvPr/>
         </p:nvSpPr>
@@ -18438,63 +16570,14 @@
       </p:sp>
       <p:sp>
         <p:nvSpPr>
-          <p:cNvPr id="19" name="Shape 14"/>
-          <p:cNvSpPr/>
-          <p:nvPr/>
-        </p:nvSpPr>
-        <p:spPr>
-          <a:xfrm>
-            <a:off x="6400800" y="3886200"/>
-            <a:ext cx="685800" cy="685800"/>
-          </a:xfrm>
-          <a:prstGeom prst="ellipse">
-            <a:avLst/>
-          </a:prstGeom>
-          <a:solidFill>
-            <a:srgbClr val="404040"/>
-          </a:solidFill>
-          <a:ln w="12700">
-            <a:solidFill>
-              <a:srgbClr val="404040"/>
-            </a:solidFill>
-            <a:prstDash val="solid"/>
-          </a:ln>
-        </p:spPr>
-      </p:sp>
-      <p:pic>
-        <p:nvPicPr>
-          <p:cNvPr id="20" name="Image 3" descr="preencoded.png">    </p:cNvPr>
-          <p:cNvPicPr>
-            <a:picLocks noChangeAspect="1"/>
-          </p:cNvPicPr>
-          <p:nvPr/>
-        </p:nvPicPr>
-        <p:blipFill>
-          <a:blip r:embed="rId4"/>
-          <a:stretch>
-            <a:fillRect/>
-          </a:stretch>
-        </p:blipFill>
-        <p:spPr>
-          <a:xfrm>
-            <a:off x="6572250" y="4057650"/>
-            <a:ext cx="342900" cy="342900"/>
-          </a:xfrm>
-          <a:prstGeom prst="rect">
-            <a:avLst/>
-          </a:prstGeom>
-        </p:spPr>
-      </p:pic>
-      <p:sp>
-        <p:nvSpPr>
-          <p:cNvPr id="21" name="Text 15"/>
+          <p:cNvPr id="13" name="Text 11"/>
           <p:cNvSpPr txBox="1"/>
           <p:nvPr/>
         </p:nvSpPr>
         <p:spPr>
           <a:xfrm>
-            <a:off x="7223760" y="3840480"/>
-            <a:ext cx="4206240" cy="777240"/>
+            <a:off x="6400800" y="3840480"/>
+            <a:ext cx="5029200" cy="777240"/>
           </a:xfrm>
           <a:prstGeom prst="rect">
             <a:avLst/>
@@ -18537,7 +16620,7 @@
       </p:sp>
       <p:sp>
         <p:nvSpPr>
-          <p:cNvPr id="22" name="Text 16"/>
+          <p:cNvPr id="14" name="Text 12"/>
           <p:cNvSpPr txBox="1"/>
           <p:nvPr/>
         </p:nvSpPr>
@@ -18573,7 +16656,7 @@
       </p:sp>
       <p:sp>
         <p:nvSpPr>
-          <p:cNvPr id="23" name="Text 17"/>
+          <p:cNvPr id="15" name="Text 13"/>
           <p:cNvSpPr txBox="1"/>
           <p:nvPr/>
         </p:nvSpPr>
@@ -18780,8 +16863,8 @@
       </p:sp>
       <p:sp>
         <p:nvSpPr>
-          <p:cNvPr id="5" name="Shape 3"/>
-          <p:cNvSpPr/>
+          <p:cNvPr id="5" name="Text 3"/>
+          <p:cNvSpPr txBox="1"/>
           <p:nvPr/>
         </p:nvSpPr>
         <p:spPr>
@@ -18789,19 +16872,30 @@
             <a:off x="731520" y="2116836"/>
             <a:ext cx="384048" cy="384048"/>
           </a:xfrm>
-          <a:prstGeom prst="ellipse">
-            <a:avLst/>
-          </a:prstGeom>
-          <a:solidFill>
-            <a:srgbClr val="A6A6A6"/>
-          </a:solidFill>
-          <a:ln w="12700">
-            <a:solidFill>
-              <a:srgbClr val="A6A6A6"/>
-            </a:solidFill>
-            <a:prstDash val="solid"/>
-          </a:ln>
-        </p:spPr>
+          <a:prstGeom prst="rect">
+            <a:avLst/>
+          </a:prstGeom>
+          <a:noFill/>
+          <a:ln/>
+        </p:spPr>
+        <p:txBody>
+          <a:bodyPr wrap="square" lIns="0" tIns="0" rIns="0" bIns="0" rtlCol="0" anchor="ctr"/>
+          <a:lstStyle/>
+          <a:p>
+            <a:pPr algn="l" indent="0" marL="0">
+              <a:buNone/>
+            </a:pPr>
+            <a:r>
+              <a:rPr lang="en-US" sz="1500" b="1" dirty="0">
+                <a:solidFill>
+                  <a:srgbClr val="A6A6A6"/>
+                </a:solidFill>
+              </a:rPr>
+              <a:t>1.</a:t>
+            </a:r>
+            <a:endParaRPr lang="en-US" sz="1500" dirty="0"/>
+          </a:p>
+        </p:txBody>
       </p:sp>
       <p:sp>
         <p:nvSpPr>
@@ -18811,8 +16905,8 @@
         </p:nvSpPr>
         <p:spPr>
           <a:xfrm>
-            <a:off x="731520" y="2116836"/>
-            <a:ext cx="384048" cy="384048"/>
+            <a:off x="1325880" y="2039112"/>
+            <a:ext cx="8778240" cy="548640"/>
           </a:xfrm>
           <a:prstGeom prst="rect">
             <a:avLst/>
@@ -18824,18 +16918,18 @@
           <a:bodyPr wrap="square" lIns="0" tIns="0" rIns="0" bIns="0" rtlCol="0" anchor="ctr"/>
           <a:lstStyle/>
           <a:p>
-            <a:pPr algn="ctr" indent="0" marL="0">
-              <a:buNone/>
-            </a:pPr>
-            <a:r>
-              <a:rPr lang="en-US" sz="1400" b="1" dirty="0">
-                <a:solidFill>
-                  <a:srgbClr val="000000"/>
-                </a:solidFill>
-              </a:rPr>
-              <a:t>1</a:t>
-            </a:r>
-            <a:endParaRPr lang="en-US" sz="1400" dirty="0"/>
+            <a:pPr indent="0" marL="0">
+              <a:buNone/>
+            </a:pPr>
+            <a:r>
+              <a:rPr lang="en-US" sz="1600" dirty="0">
+                <a:solidFill>
+                  <a:schemeClr val="bg1"/>
+                </a:solidFill>
+              </a:rPr>
+              <a:t>Un juzgado adopta un software para programar audiencias.</a:t>
+            </a:r>
+            <a:endParaRPr lang="en-US" sz="1600" dirty="0"/>
           </a:p>
         </p:txBody>
       </p:sp>
@@ -18847,42 +16941,6 @@
         </p:nvSpPr>
         <p:spPr>
           <a:xfrm>
-            <a:off x="1325880" y="2039112"/>
-            <a:ext cx="8778240" cy="548640"/>
-          </a:xfrm>
-          <a:prstGeom prst="rect">
-            <a:avLst/>
-          </a:prstGeom>
-          <a:noFill/>
-          <a:ln/>
-        </p:spPr>
-        <p:txBody>
-          <a:bodyPr wrap="square" lIns="0" tIns="0" rIns="0" bIns="0" rtlCol="0" anchor="ctr"/>
-          <a:lstStyle/>
-          <a:p>
-            <a:pPr indent="0" marL="0">
-              <a:buNone/>
-            </a:pPr>
-            <a:r>
-              <a:rPr lang="en-US" sz="1600" dirty="0">
-                <a:solidFill>
-                  <a:schemeClr val="bg1"/>
-                </a:solidFill>
-              </a:rPr>
-              <a:t>Un juzgado adopta un software para programar audiencias.</a:t>
-            </a:r>
-            <a:endParaRPr lang="en-US" sz="1600" dirty="0"/>
-          </a:p>
-        </p:txBody>
-      </p:sp>
-      <p:sp>
-        <p:nvSpPr>
-          <p:cNvPr id="8" name="Text 6"/>
-          <p:cNvSpPr txBox="1"/>
-          <p:nvPr/>
-        </p:nvSpPr>
-        <p:spPr>
-          <a:xfrm>
             <a:off x="9692640" y="2039112"/>
             <a:ext cx="1828800" cy="548640"/>
           </a:xfrm>
@@ -18913,7 +16971,7 @@
       </p:sp>
       <p:sp>
         <p:nvSpPr>
-          <p:cNvPr id="9" name="Shape 7"/>
+          <p:cNvPr id="8" name="Shape 6"/>
           <p:cNvSpPr/>
           <p:nvPr/>
         </p:nvSpPr>
@@ -18940,8 +16998,8 @@
       </p:sp>
       <p:sp>
         <p:nvSpPr>
-          <p:cNvPr id="10" name="Shape 8"/>
-          <p:cNvSpPr/>
+          <p:cNvPr id="9" name="Text 7"/>
+          <p:cNvSpPr txBox="1"/>
           <p:nvPr/>
         </p:nvSpPr>
         <p:spPr>
@@ -18949,19 +17007,66 @@
             <a:off x="731520" y="2921508"/>
             <a:ext cx="384048" cy="384048"/>
           </a:xfrm>
-          <a:prstGeom prst="ellipse">
-            <a:avLst/>
-          </a:prstGeom>
-          <a:solidFill>
-            <a:srgbClr val="A6A6A6"/>
-          </a:solidFill>
-          <a:ln w="12700">
-            <a:solidFill>
-              <a:srgbClr val="A6A6A6"/>
-            </a:solidFill>
-            <a:prstDash val="solid"/>
-          </a:ln>
-        </p:spPr>
+          <a:prstGeom prst="rect">
+            <a:avLst/>
+          </a:prstGeom>
+          <a:noFill/>
+          <a:ln/>
+        </p:spPr>
+        <p:txBody>
+          <a:bodyPr wrap="square" lIns="0" tIns="0" rIns="0" bIns="0" rtlCol="0" anchor="ctr"/>
+          <a:lstStyle/>
+          <a:p>
+            <a:pPr algn="l" indent="0" marL="0">
+              <a:buNone/>
+            </a:pPr>
+            <a:r>
+              <a:rPr lang="en-US" sz="1500" b="1" dirty="0">
+                <a:solidFill>
+                  <a:srgbClr val="A6A6A6"/>
+                </a:solidFill>
+              </a:rPr>
+              <a:t>2.</a:t>
+            </a:r>
+            <a:endParaRPr lang="en-US" sz="1500" dirty="0"/>
+          </a:p>
+        </p:txBody>
+      </p:sp>
+      <p:sp>
+        <p:nvSpPr>
+          <p:cNvPr id="10" name="Text 8"/>
+          <p:cNvSpPr txBox="1"/>
+          <p:nvPr/>
+        </p:nvSpPr>
+        <p:spPr>
+          <a:xfrm>
+            <a:off x="1325880" y="2843784"/>
+            <a:ext cx="8778240" cy="548640"/>
+          </a:xfrm>
+          <a:prstGeom prst="rect">
+            <a:avLst/>
+          </a:prstGeom>
+          <a:noFill/>
+          <a:ln/>
+        </p:spPr>
+        <p:txBody>
+          <a:bodyPr wrap="square" lIns="0" tIns="0" rIns="0" bIns="0" rtlCol="0" anchor="ctr"/>
+          <a:lstStyle/>
+          <a:p>
+            <a:pPr indent="0" marL="0">
+              <a:buNone/>
+            </a:pPr>
+            <a:r>
+              <a:rPr lang="en-US" sz="1600" dirty="0">
+                <a:solidFill>
+                  <a:schemeClr val="bg1"/>
+                </a:solidFill>
+              </a:rPr>
+              <a:t>La SIC sanciona a una empresa por enviar publicidad sin autorización del titular del dato.</a:t>
+            </a:r>
+            <a:endParaRPr lang="en-US" sz="1600" dirty="0"/>
+          </a:p>
+        </p:txBody>
       </p:sp>
       <p:sp>
         <p:nvSpPr>
@@ -18971,78 +17076,6 @@
         </p:nvSpPr>
         <p:spPr>
           <a:xfrm>
-            <a:off x="731520" y="2921508"/>
-            <a:ext cx="384048" cy="384048"/>
-          </a:xfrm>
-          <a:prstGeom prst="rect">
-            <a:avLst/>
-          </a:prstGeom>
-          <a:noFill/>
-          <a:ln/>
-        </p:spPr>
-        <p:txBody>
-          <a:bodyPr wrap="square" lIns="0" tIns="0" rIns="0" bIns="0" rtlCol="0" anchor="ctr"/>
-          <a:lstStyle/>
-          <a:p>
-            <a:pPr algn="ctr" indent="0" marL="0">
-              <a:buNone/>
-            </a:pPr>
-            <a:r>
-              <a:rPr lang="en-US" sz="1400" b="1" dirty="0">
-                <a:solidFill>
-                  <a:srgbClr val="000000"/>
-                </a:solidFill>
-              </a:rPr>
-              <a:t>2</a:t>
-            </a:r>
-            <a:endParaRPr lang="en-US" sz="1400" dirty="0"/>
-          </a:p>
-        </p:txBody>
-      </p:sp>
-      <p:sp>
-        <p:nvSpPr>
-          <p:cNvPr id="12" name="Text 10"/>
-          <p:cNvSpPr txBox="1"/>
-          <p:nvPr/>
-        </p:nvSpPr>
-        <p:spPr>
-          <a:xfrm>
-            <a:off x="1325880" y="2843784"/>
-            <a:ext cx="8778240" cy="548640"/>
-          </a:xfrm>
-          <a:prstGeom prst="rect">
-            <a:avLst/>
-          </a:prstGeom>
-          <a:noFill/>
-          <a:ln/>
-        </p:spPr>
-        <p:txBody>
-          <a:bodyPr wrap="square" lIns="0" tIns="0" rIns="0" bIns="0" rtlCol="0" anchor="ctr"/>
-          <a:lstStyle/>
-          <a:p>
-            <a:pPr indent="0" marL="0">
-              <a:buNone/>
-            </a:pPr>
-            <a:r>
-              <a:rPr lang="en-US" sz="1600" dirty="0">
-                <a:solidFill>
-                  <a:schemeClr val="bg1"/>
-                </a:solidFill>
-              </a:rPr>
-              <a:t>La SIC sanciona a una empresa por enviar publicidad sin autorización del titular del dato.</a:t>
-            </a:r>
-            <a:endParaRPr lang="en-US" sz="1600" dirty="0"/>
-          </a:p>
-        </p:txBody>
-      </p:sp>
-      <p:sp>
-        <p:nvSpPr>
-          <p:cNvPr id="13" name="Text 11"/>
-          <p:cNvSpPr txBox="1"/>
-          <p:nvPr/>
-        </p:nvSpPr>
-        <p:spPr>
-          <a:xfrm>
             <a:off x="9692640" y="2843784"/>
             <a:ext cx="1828800" cy="548640"/>
           </a:xfrm>
@@ -19073,7 +17106,7 @@
       </p:sp>
       <p:sp>
         <p:nvSpPr>
-          <p:cNvPr id="14" name="Shape 12"/>
+          <p:cNvPr id="12" name="Shape 10"/>
           <p:cNvSpPr/>
           <p:nvPr/>
         </p:nvSpPr>
@@ -19100,8 +17133,8 @@
       </p:sp>
       <p:sp>
         <p:nvSpPr>
-          <p:cNvPr id="15" name="Shape 13"/>
-          <p:cNvSpPr/>
+          <p:cNvPr id="13" name="Text 11"/>
+          <p:cNvSpPr txBox="1"/>
           <p:nvPr/>
         </p:nvSpPr>
         <p:spPr>
@@ -19109,31 +17142,6 @@
             <a:off x="731520" y="3726180"/>
             <a:ext cx="384048" cy="384048"/>
           </a:xfrm>
-          <a:prstGeom prst="ellipse">
-            <a:avLst/>
-          </a:prstGeom>
-          <a:solidFill>
-            <a:srgbClr val="A6A6A6"/>
-          </a:solidFill>
-          <a:ln w="12700">
-            <a:solidFill>
-              <a:srgbClr val="A6A6A6"/>
-            </a:solidFill>
-            <a:prstDash val="solid"/>
-          </a:ln>
-        </p:spPr>
-      </p:sp>
-      <p:sp>
-        <p:nvSpPr>
-          <p:cNvPr id="16" name="Text 14"/>
-          <p:cNvSpPr txBox="1"/>
-          <p:nvPr/>
-        </p:nvSpPr>
-        <p:spPr>
-          <a:xfrm>
-            <a:off x="731520" y="3726180"/>
-            <a:ext cx="384048" cy="384048"/>
-          </a:xfrm>
           <a:prstGeom prst="rect">
             <a:avLst/>
           </a:prstGeom>
@@ -19144,24 +17152,24 @@
           <a:bodyPr wrap="square" lIns="0" tIns="0" rIns="0" bIns="0" rtlCol="0" anchor="ctr"/>
           <a:lstStyle/>
           <a:p>
-            <a:pPr algn="ctr" indent="0" marL="0">
-              <a:buNone/>
-            </a:pPr>
-            <a:r>
-              <a:rPr lang="en-US" sz="1400" b="1" dirty="0">
-                <a:solidFill>
-                  <a:srgbClr val="000000"/>
-                </a:solidFill>
-              </a:rPr>
-              <a:t>3</a:t>
-            </a:r>
-            <a:endParaRPr lang="en-US" sz="1400" dirty="0"/>
-          </a:p>
-        </p:txBody>
-      </p:sp>
-      <p:sp>
-        <p:nvSpPr>
-          <p:cNvPr id="17" name="Text 15"/>
+            <a:pPr algn="l" indent="0" marL="0">
+              <a:buNone/>
+            </a:pPr>
+            <a:r>
+              <a:rPr lang="en-US" sz="1500" b="1" dirty="0">
+                <a:solidFill>
+                  <a:srgbClr val="A6A6A6"/>
+                </a:solidFill>
+              </a:rPr>
+              <a:t>3.</a:t>
+            </a:r>
+            <a:endParaRPr lang="en-US" sz="1500" dirty="0"/>
+          </a:p>
+        </p:txBody>
+      </p:sp>
+      <p:sp>
+        <p:nvSpPr>
+          <p:cNvPr id="14" name="Text 12"/>
           <p:cNvSpPr txBox="1"/>
           <p:nvPr/>
         </p:nvSpPr>
@@ -19197,7 +17205,7 @@
       </p:sp>
       <p:sp>
         <p:nvSpPr>
-          <p:cNvPr id="18" name="Text 16"/>
+          <p:cNvPr id="15" name="Text 13"/>
           <p:cNvSpPr txBox="1"/>
           <p:nvPr/>
         </p:nvSpPr>
@@ -19233,7 +17241,7 @@
       </p:sp>
       <p:sp>
         <p:nvSpPr>
-          <p:cNvPr id="19" name="Shape 17"/>
+          <p:cNvPr id="16" name="Shape 14"/>
           <p:cNvSpPr/>
           <p:nvPr/>
         </p:nvSpPr>
@@ -19260,8 +17268,8 @@
       </p:sp>
       <p:sp>
         <p:nvSpPr>
-          <p:cNvPr id="20" name="Shape 18"/>
-          <p:cNvSpPr/>
+          <p:cNvPr id="17" name="Text 15"/>
+          <p:cNvSpPr txBox="1"/>
           <p:nvPr/>
         </p:nvSpPr>
         <p:spPr>
@@ -19269,31 +17277,6 @@
             <a:off x="731520" y="4530852"/>
             <a:ext cx="384048" cy="384048"/>
           </a:xfrm>
-          <a:prstGeom prst="ellipse">
-            <a:avLst/>
-          </a:prstGeom>
-          <a:solidFill>
-            <a:srgbClr val="A6A6A6"/>
-          </a:solidFill>
-          <a:ln w="12700">
-            <a:solidFill>
-              <a:srgbClr val="A6A6A6"/>
-            </a:solidFill>
-            <a:prstDash val="solid"/>
-          </a:ln>
-        </p:spPr>
-      </p:sp>
-      <p:sp>
-        <p:nvSpPr>
-          <p:cNvPr id="21" name="Text 19"/>
-          <p:cNvSpPr txBox="1"/>
-          <p:nvPr/>
-        </p:nvSpPr>
-        <p:spPr>
-          <a:xfrm>
-            <a:off x="731520" y="4530852"/>
-            <a:ext cx="384048" cy="384048"/>
-          </a:xfrm>
           <a:prstGeom prst="rect">
             <a:avLst/>
           </a:prstGeom>
@@ -19304,24 +17287,24 @@
           <a:bodyPr wrap="square" lIns="0" tIns="0" rIns="0" bIns="0" rtlCol="0" anchor="ctr"/>
           <a:lstStyle/>
           <a:p>
-            <a:pPr algn="ctr" indent="0" marL="0">
-              <a:buNone/>
-            </a:pPr>
-            <a:r>
-              <a:rPr lang="en-US" sz="1400" b="1" dirty="0">
-                <a:solidFill>
-                  <a:srgbClr val="000000"/>
-                </a:solidFill>
-              </a:rPr>
-              <a:t>4</a:t>
-            </a:r>
-            <a:endParaRPr lang="en-US" sz="1400" dirty="0"/>
-          </a:p>
-        </p:txBody>
-      </p:sp>
-      <p:sp>
-        <p:nvSpPr>
-          <p:cNvPr id="22" name="Text 20"/>
+            <a:pPr algn="l" indent="0" marL="0">
+              <a:buNone/>
+            </a:pPr>
+            <a:r>
+              <a:rPr lang="en-US" sz="1500" b="1" dirty="0">
+                <a:solidFill>
+                  <a:srgbClr val="A6A6A6"/>
+                </a:solidFill>
+              </a:rPr>
+              <a:t>4.</a:t>
+            </a:r>
+            <a:endParaRPr lang="en-US" sz="1500" dirty="0"/>
+          </a:p>
+        </p:txBody>
+      </p:sp>
+      <p:sp>
+        <p:nvSpPr>
+          <p:cNvPr id="18" name="Text 16"/>
           <p:cNvSpPr txBox="1"/>
           <p:nvPr/>
         </p:nvSpPr>
@@ -19357,7 +17340,7 @@
       </p:sp>
       <p:sp>
         <p:nvSpPr>
-          <p:cNvPr id="23" name="Text 21"/>
+          <p:cNvPr id="19" name="Text 17"/>
           <p:cNvSpPr txBox="1"/>
           <p:nvPr/>
         </p:nvSpPr>
@@ -19393,7 +17376,7 @@
       </p:sp>
       <p:sp>
         <p:nvSpPr>
-          <p:cNvPr id="24" name="Shape 22"/>
+          <p:cNvPr id="20" name="Shape 18"/>
           <p:cNvSpPr/>
           <p:nvPr/>
         </p:nvSpPr>
@@ -19420,8 +17403,8 @@
       </p:sp>
       <p:sp>
         <p:nvSpPr>
-          <p:cNvPr id="25" name="Shape 23"/>
-          <p:cNvSpPr/>
+          <p:cNvPr id="21" name="Text 19"/>
+          <p:cNvSpPr txBox="1"/>
           <p:nvPr/>
         </p:nvSpPr>
         <p:spPr>
@@ -19429,31 +17412,6 @@
             <a:off x="731520" y="5335524"/>
             <a:ext cx="384048" cy="384048"/>
           </a:xfrm>
-          <a:prstGeom prst="ellipse">
-            <a:avLst/>
-          </a:prstGeom>
-          <a:solidFill>
-            <a:srgbClr val="A6A6A6"/>
-          </a:solidFill>
-          <a:ln w="12700">
-            <a:solidFill>
-              <a:srgbClr val="A6A6A6"/>
-            </a:solidFill>
-            <a:prstDash val="solid"/>
-          </a:ln>
-        </p:spPr>
-      </p:sp>
-      <p:sp>
-        <p:nvSpPr>
-          <p:cNvPr id="26" name="Text 24"/>
-          <p:cNvSpPr txBox="1"/>
-          <p:nvPr/>
-        </p:nvSpPr>
-        <p:spPr>
-          <a:xfrm>
-            <a:off x="731520" y="5335524"/>
-            <a:ext cx="384048" cy="384048"/>
-          </a:xfrm>
           <a:prstGeom prst="rect">
             <a:avLst/>
           </a:prstGeom>
@@ -19464,24 +17422,24 @@
           <a:bodyPr wrap="square" lIns="0" tIns="0" rIns="0" bIns="0" rtlCol="0" anchor="ctr"/>
           <a:lstStyle/>
           <a:p>
-            <a:pPr algn="ctr" indent="0" marL="0">
-              <a:buNone/>
-            </a:pPr>
-            <a:r>
-              <a:rPr lang="en-US" sz="1400" b="1" dirty="0">
-                <a:solidFill>
-                  <a:srgbClr val="000000"/>
-                </a:solidFill>
-              </a:rPr>
-              <a:t>5</a:t>
-            </a:r>
-            <a:endParaRPr lang="en-US" sz="1400" dirty="0"/>
-          </a:p>
-        </p:txBody>
-      </p:sp>
-      <p:sp>
-        <p:nvSpPr>
-          <p:cNvPr id="27" name="Text 25"/>
+            <a:pPr algn="l" indent="0" marL="0">
+              <a:buNone/>
+            </a:pPr>
+            <a:r>
+              <a:rPr lang="en-US" sz="1500" b="1" dirty="0">
+                <a:solidFill>
+                  <a:srgbClr val="A6A6A6"/>
+                </a:solidFill>
+              </a:rPr>
+              <a:t>5.</a:t>
+            </a:r>
+            <a:endParaRPr lang="en-US" sz="1500" dirty="0"/>
+          </a:p>
+        </p:txBody>
+      </p:sp>
+      <p:sp>
+        <p:nvSpPr>
+          <p:cNvPr id="22" name="Text 20"/>
           <p:cNvSpPr txBox="1"/>
           <p:nvPr/>
         </p:nvSpPr>
@@ -19517,7 +17475,7 @@
       </p:sp>
       <p:sp>
         <p:nvSpPr>
-          <p:cNvPr id="28" name="Text 26"/>
+          <p:cNvPr id="23" name="Text 21"/>
           <p:cNvSpPr txBox="1"/>
           <p:nvPr/>
         </p:nvSpPr>
@@ -19684,32 +17642,7 @@
       </p:sp>
       <p:sp>
         <p:nvSpPr>
-          <p:cNvPr id="4" name="Shape 2"/>
-          <p:cNvSpPr/>
-          <p:nvPr/>
-        </p:nvSpPr>
-        <p:spPr>
-          <a:xfrm>
-            <a:off x="1645920" y="1965960"/>
-            <a:ext cx="365760" cy="365760"/>
-          </a:xfrm>
-          <a:prstGeom prst="ellipse">
-            <a:avLst/>
-          </a:prstGeom>
-          <a:solidFill>
-            <a:srgbClr val="595959"/>
-          </a:solidFill>
-          <a:ln w="25400">
-            <a:solidFill>
-              <a:srgbClr val="FFFFFF"/>
-            </a:solidFill>
-            <a:prstDash val="solid"/>
-          </a:ln>
-        </p:spPr>
-      </p:sp>
-      <p:sp>
-        <p:nvSpPr>
-          <p:cNvPr id="5" name="Text 3"/>
+          <p:cNvPr id="4" name="Text 2"/>
           <p:cNvSpPr txBox="1"/>
           <p:nvPr/>
         </p:nvSpPr>
@@ -19745,7 +17678,7 @@
       </p:sp>
       <p:sp>
         <p:nvSpPr>
-          <p:cNvPr id="6" name="Shape 4"/>
+          <p:cNvPr id="5" name="Shape 3"/>
           <p:cNvSpPr/>
           <p:nvPr/>
         </p:nvSpPr>
@@ -19772,14 +17705,50 @@
       </p:sp>
       <p:sp>
         <p:nvSpPr>
+          <p:cNvPr id="6" name="Text 4"/>
+          <p:cNvSpPr txBox="1"/>
+          <p:nvPr/>
+        </p:nvSpPr>
+        <p:spPr>
+          <a:xfrm>
+            <a:off x="731520" y="2697480"/>
+            <a:ext cx="2240280" cy="914400"/>
+          </a:xfrm>
+          <a:prstGeom prst="rect">
+            <a:avLst/>
+          </a:prstGeom>
+          <a:noFill/>
+          <a:ln/>
+        </p:spPr>
+        <p:txBody>
+          <a:bodyPr wrap="square" lIns="0" tIns="0" rIns="0" bIns="0" rtlCol="0" anchor="t"/>
+          <a:lstStyle/>
+          <a:p>
+            <a:pPr indent="0" marL="0">
+              <a:buNone/>
+            </a:pPr>
+            <a:r>
+              <a:rPr lang="en-US" sz="1500" b="1" dirty="0">
+                <a:solidFill>
+                  <a:schemeClr val="tx2"/>
+                </a:solidFill>
+              </a:rPr>
+              <a:t>Cibernética y primeras leyes de datos</a:t>
+            </a:r>
+            <a:endParaRPr lang="en-US" sz="1500" dirty="0"/>
+          </a:p>
+        </p:txBody>
+      </p:sp>
+      <p:sp>
+        <p:nvSpPr>
           <p:cNvPr id="7" name="Text 5"/>
           <p:cNvSpPr txBox="1"/>
           <p:nvPr/>
         </p:nvSpPr>
         <p:spPr>
           <a:xfrm>
-            <a:off x="731520" y="2697480"/>
-            <a:ext cx="2240280" cy="914400"/>
+            <a:off x="731520" y="3657600"/>
+            <a:ext cx="2240280" cy="2377440"/>
           </a:xfrm>
           <a:prstGeom prst="rect">
             <a:avLst/>
@@ -19795,14 +17764,14 @@
               <a:buNone/>
             </a:pPr>
             <a:r>
-              <a:rPr lang="en-US" sz="1500" b="1" dirty="0">
-                <a:solidFill>
-                  <a:schemeClr val="tx2"/>
-                </a:solidFill>
-              </a:rPr>
-              <a:t>Cibernética y primeras leyes de datos</a:t>
-            </a:r>
-            <a:endParaRPr lang="en-US" sz="1500" dirty="0"/>
+              <a:rPr lang="en-US" sz="1250" dirty="0">
+                <a:solidFill>
+                  <a:schemeClr val="tx1"/>
+                </a:solidFill>
+              </a:rPr>
+              <a:t>Wiener (1948); Losano y Frosini (1968); ley de Hesse (1970), Suecia (1973), EE. UU. (1974), Francia (1978); Convenio 108 (1981). Colombia: art. 15 C.P. (1991)</a:t>
+            </a:r>
+            <a:endParaRPr lang="en-US" sz="1250" dirty="0"/>
           </a:p>
         </p:txBody>
       </p:sp>
@@ -19814,67 +17783,6 @@
         </p:nvSpPr>
         <p:spPr>
           <a:xfrm>
-            <a:off x="731520" y="3657600"/>
-            <a:ext cx="2240280" cy="2377440"/>
-          </a:xfrm>
-          <a:prstGeom prst="rect">
-            <a:avLst/>
-          </a:prstGeom>
-          <a:noFill/>
-          <a:ln/>
-        </p:spPr>
-        <p:txBody>
-          <a:bodyPr wrap="square" lIns="0" tIns="0" rIns="0" bIns="0" rtlCol="0" anchor="t"/>
-          <a:lstStyle/>
-          <a:p>
-            <a:pPr indent="0" marL="0">
-              <a:buNone/>
-            </a:pPr>
-            <a:r>
-              <a:rPr lang="en-US" sz="1250" dirty="0">
-                <a:solidFill>
-                  <a:schemeClr val="tx1"/>
-                </a:solidFill>
-              </a:rPr>
-              <a:t>Wiener (1948); Losano y Frosini (1968); ley de Hesse (1970), Suecia (1973), EE. UU. (1974), Francia (1978); Convenio 108 (1981). Colombia: art. 15 C.P. (1991)</a:t>
-            </a:r>
-            <a:endParaRPr lang="en-US" sz="1250" dirty="0"/>
-          </a:p>
-        </p:txBody>
-      </p:sp>
-      <p:sp>
-        <p:nvSpPr>
-          <p:cNvPr id="9" name="Shape 7"/>
-          <p:cNvSpPr/>
-          <p:nvPr/>
-        </p:nvSpPr>
-        <p:spPr>
-          <a:xfrm>
-            <a:off x="4434840" y="1965960"/>
-            <a:ext cx="365760" cy="365760"/>
-          </a:xfrm>
-          <a:prstGeom prst="ellipse">
-            <a:avLst/>
-          </a:prstGeom>
-          <a:solidFill>
-            <a:srgbClr val="737373"/>
-          </a:solidFill>
-          <a:ln w="25400">
-            <a:solidFill>
-              <a:srgbClr val="FFFFFF"/>
-            </a:solidFill>
-            <a:prstDash val="solid"/>
-          </a:ln>
-        </p:spPr>
-      </p:sp>
-      <p:sp>
-        <p:nvSpPr>
-          <p:cNvPr id="10" name="Text 8"/>
-          <p:cNvSpPr txBox="1"/>
-          <p:nvPr/>
-        </p:nvSpPr>
-        <p:spPr>
-          <a:xfrm>
             <a:off x="3337560" y="1417320"/>
             <a:ext cx="2606040" cy="457200"/>
           </a:xfrm>
@@ -19905,7 +17813,7 @@
       </p:sp>
       <p:sp>
         <p:nvSpPr>
-          <p:cNvPr id="11" name="Shape 9"/>
+          <p:cNvPr id="9" name="Shape 7"/>
           <p:cNvSpPr/>
           <p:nvPr/>
         </p:nvSpPr>
@@ -19932,109 +17840,84 @@
       </p:sp>
       <p:sp>
         <p:nvSpPr>
+          <p:cNvPr id="10" name="Text 8"/>
+          <p:cNvSpPr txBox="1"/>
+          <p:nvPr/>
+        </p:nvSpPr>
+        <p:spPr>
+          <a:xfrm>
+            <a:off x="3520440" y="2697480"/>
+            <a:ext cx="2240280" cy="914400"/>
+          </a:xfrm>
+          <a:prstGeom prst="rect">
+            <a:avLst/>
+          </a:prstGeom>
+          <a:noFill/>
+          <a:ln/>
+        </p:spPr>
+        <p:txBody>
+          <a:bodyPr wrap="square" lIns="0" tIns="0" rIns="0" bIns="0" rtlCol="0" anchor="t"/>
+          <a:lstStyle/>
+          <a:p>
+            <a:pPr indent="0" marL="0">
+              <a:buNone/>
+            </a:pPr>
+            <a:r>
+              <a:rPr lang="en-US" sz="1500" b="1" dirty="0">
+                <a:solidFill>
+                  <a:schemeClr val="tx2"/>
+                </a:solidFill>
+              </a:rPr>
+              <a:t>Comercio electrónico y equivalencia funcional</a:t>
+            </a:r>
+            <a:endParaRPr lang="en-US" sz="1500" dirty="0"/>
+          </a:p>
+        </p:txBody>
+      </p:sp>
+      <p:sp>
+        <p:nvSpPr>
+          <p:cNvPr id="11" name="Text 9"/>
+          <p:cNvSpPr txBox="1"/>
+          <p:nvPr/>
+        </p:nvSpPr>
+        <p:spPr>
+          <a:xfrm>
+            <a:off x="3520440" y="3657600"/>
+            <a:ext cx="2240280" cy="2377440"/>
+          </a:xfrm>
+          <a:prstGeom prst="rect">
+            <a:avLst/>
+          </a:prstGeom>
+          <a:noFill/>
+          <a:ln/>
+        </p:spPr>
+        <p:txBody>
+          <a:bodyPr wrap="square" lIns="0" tIns="0" rIns="0" bIns="0" rtlCol="0" anchor="t"/>
+          <a:lstStyle/>
+          <a:p>
+            <a:pPr indent="0" marL="0">
+              <a:buNone/>
+            </a:pPr>
+            <a:r>
+              <a:rPr lang="en-US" sz="1250" dirty="0">
+                <a:solidFill>
+                  <a:schemeClr val="tx1"/>
+                </a:solidFill>
+              </a:rPr>
+              <a:t>Ley Modelo CNUDMI (1996); Directiva 95/46; Lessig, el código como regulación (1999). Colombia: Ley 527 de 1999</a:t>
+            </a:r>
+            <a:endParaRPr lang="en-US" sz="1250" dirty="0"/>
+          </a:p>
+        </p:txBody>
+      </p:sp>
+      <p:sp>
+        <p:nvSpPr>
           <p:cNvPr id="12" name="Text 10"/>
           <p:cNvSpPr txBox="1"/>
           <p:nvPr/>
         </p:nvSpPr>
         <p:spPr>
           <a:xfrm>
-            <a:off x="3520440" y="2697480"/>
-            <a:ext cx="2240280" cy="914400"/>
-          </a:xfrm>
-          <a:prstGeom prst="rect">
-            <a:avLst/>
-          </a:prstGeom>
-          <a:noFill/>
-          <a:ln/>
-        </p:spPr>
-        <p:txBody>
-          <a:bodyPr wrap="square" lIns="0" tIns="0" rIns="0" bIns="0" rtlCol="0" anchor="t"/>
-          <a:lstStyle/>
-          <a:p>
-            <a:pPr indent="0" marL="0">
-              <a:buNone/>
-            </a:pPr>
-            <a:r>
-              <a:rPr lang="en-US" sz="1500" b="1" dirty="0">
-                <a:solidFill>
-                  <a:schemeClr val="tx2"/>
-                </a:solidFill>
-              </a:rPr>
-              <a:t>Comercio electrónico y equivalencia funcional</a:t>
-            </a:r>
-            <a:endParaRPr lang="en-US" sz="1500" dirty="0"/>
-          </a:p>
-        </p:txBody>
-      </p:sp>
-      <p:sp>
-        <p:nvSpPr>
-          <p:cNvPr id="13" name="Text 11"/>
-          <p:cNvSpPr txBox="1"/>
-          <p:nvPr/>
-        </p:nvSpPr>
-        <p:spPr>
-          <a:xfrm>
-            <a:off x="3520440" y="3657600"/>
-            <a:ext cx="2240280" cy="2377440"/>
-          </a:xfrm>
-          <a:prstGeom prst="rect">
-            <a:avLst/>
-          </a:prstGeom>
-          <a:noFill/>
-          <a:ln/>
-        </p:spPr>
-        <p:txBody>
-          <a:bodyPr wrap="square" lIns="0" tIns="0" rIns="0" bIns="0" rtlCol="0" anchor="t"/>
-          <a:lstStyle/>
-          <a:p>
-            <a:pPr indent="0" marL="0">
-              <a:buNone/>
-            </a:pPr>
-            <a:r>
-              <a:rPr lang="en-US" sz="1250" dirty="0">
-                <a:solidFill>
-                  <a:schemeClr val="tx1"/>
-                </a:solidFill>
-              </a:rPr>
-              <a:t>Ley Modelo CNUDMI (1996); Directiva 95/46; Lessig, el código como regulación (1999). Colombia: Ley 527 de 1999</a:t>
-            </a:r>
-            <a:endParaRPr lang="en-US" sz="1250" dirty="0"/>
-          </a:p>
-        </p:txBody>
-      </p:sp>
-      <p:sp>
-        <p:nvSpPr>
-          <p:cNvPr id="14" name="Shape 12"/>
-          <p:cNvSpPr/>
-          <p:nvPr/>
-        </p:nvSpPr>
-        <p:spPr>
-          <a:xfrm>
-            <a:off x="7223760" y="1965960"/>
-            <a:ext cx="365760" cy="365760"/>
-          </a:xfrm>
-          <a:prstGeom prst="ellipse">
-            <a:avLst/>
-          </a:prstGeom>
-          <a:solidFill>
-            <a:srgbClr val="404040"/>
-          </a:solidFill>
-          <a:ln w="25400">
-            <a:solidFill>
-              <a:srgbClr val="FFFFFF"/>
-            </a:solidFill>
-            <a:prstDash val="solid"/>
-          </a:ln>
-        </p:spPr>
-      </p:sp>
-      <p:sp>
-        <p:nvSpPr>
-          <p:cNvPr id="15" name="Text 13"/>
-          <p:cNvSpPr txBox="1"/>
-          <p:nvPr/>
-        </p:nvSpPr>
-        <p:spPr>
-          <a:xfrm>
             <a:off x="6126480" y="1417320"/>
             <a:ext cx="2606040" cy="457200"/>
           </a:xfrm>
@@ -20065,7 +17948,7 @@
       </p:sp>
       <p:sp>
         <p:nvSpPr>
-          <p:cNvPr id="16" name="Shape 14"/>
+          <p:cNvPr id="13" name="Shape 11"/>
           <p:cNvSpPr/>
           <p:nvPr/>
         </p:nvSpPr>
@@ -20092,7 +17975,7 @@
       </p:sp>
       <p:sp>
         <p:nvSpPr>
-          <p:cNvPr id="17" name="Text 15"/>
+          <p:cNvPr id="14" name="Text 12"/>
           <p:cNvSpPr txBox="1"/>
           <p:nvPr/>
         </p:nvSpPr>
@@ -20128,7 +18011,7 @@
       </p:sp>
       <p:sp>
         <p:nvSpPr>
-          <p:cNvPr id="18" name="Text 16"/>
+          <p:cNvPr id="15" name="Text 13"/>
           <p:cNvSpPr txBox="1"/>
           <p:nvPr/>
         </p:nvSpPr>
@@ -20164,32 +18047,7 @@
       </p:sp>
       <p:sp>
         <p:nvSpPr>
-          <p:cNvPr id="19" name="Shape 17"/>
-          <p:cNvSpPr/>
-          <p:nvPr/>
-        </p:nvSpPr>
-        <p:spPr>
-          <a:xfrm>
-            <a:off x="10012680" y="1965960"/>
-            <a:ext cx="365760" cy="365760"/>
-          </a:xfrm>
-          <a:prstGeom prst="ellipse">
-            <a:avLst/>
-          </a:prstGeom>
-          <a:solidFill>
-            <a:srgbClr val="A6A6A6"/>
-          </a:solidFill>
-          <a:ln w="25400">
-            <a:solidFill>
-              <a:srgbClr val="FFFFFF"/>
-            </a:solidFill>
-            <a:prstDash val="solid"/>
-          </a:ln>
-        </p:spPr>
-      </p:sp>
-      <p:sp>
-        <p:nvSpPr>
-          <p:cNvPr id="20" name="Text 18"/>
+          <p:cNvPr id="16" name="Text 14"/>
           <p:cNvSpPr txBox="1"/>
           <p:nvPr/>
         </p:nvSpPr>
@@ -20225,7 +18083,7 @@
       </p:sp>
       <p:sp>
         <p:nvSpPr>
-          <p:cNvPr id="21" name="Shape 19"/>
+          <p:cNvPr id="17" name="Shape 15"/>
           <p:cNvSpPr/>
           <p:nvPr/>
         </p:nvSpPr>
@@ -20252,7 +18110,7 @@
       </p:sp>
       <p:sp>
         <p:nvSpPr>
-          <p:cNvPr id="22" name="Text 20"/>
+          <p:cNvPr id="18" name="Text 16"/>
           <p:cNvSpPr txBox="1"/>
           <p:nvPr/>
         </p:nvSpPr>
@@ -20288,7 +18146,7 @@
       </p:sp>
       <p:sp>
         <p:nvSpPr>
-          <p:cNvPr id="23" name="Text 21"/>
+          <p:cNvPr id="19" name="Text 17"/>
           <p:cNvSpPr txBox="1"/>
           <p:nvPr/>
         </p:nvSpPr>
